--- a/presentation-polka/presentation.pptx
+++ b/presentation-polka/presentation.pptx
@@ -4298,113 +4298,33 @@
         <p:nvPr/>
       </p:nvGrpSpPr>
       <p:grpSpPr/>
-      <p:sp>
-        <p:nvSpPr>
-          <p:cNvPr id="2" name="Oval 1"/>
-          <p:cNvSpPr/>
-          <p:nvPr/>
-        </p:nvSpPr>
-        <p:spPr>
-          <a:xfrm>
-            <a:off x="8778240" y="-1005840"/>
-            <a:ext cx="5120640" cy="5120640"/>
-          </a:xfrm>
-          <a:prstGeom prst="ellipse">
-            <a:avLst/>
-          </a:prstGeom>
-          <a:gradFill rotWithShape="1">
-            <a:gsLst>
-              <a:gs pos="0">
-                <a:srgbClr val="4C9AFF"/>
-              </a:gs>
-              <a:gs pos="100000">
-                <a:srgbClr val="7B61FF"/>
-              </a:gs>
-            </a:gsLst>
-            <a:lin scaled="0" ang="19800000"/>
-          </a:gradFill>
-          <a:ln>
-            <a:noFill/>
-          </a:ln>
-          <a:effectLst/>
-        </p:spPr>
-        <p:style>
-          <a:lnRef idx="1">
-            <a:schemeClr val="accent1"/>
-          </a:lnRef>
-          <a:fillRef idx="3">
-            <a:schemeClr val="accent1"/>
-          </a:fillRef>
-          <a:effectRef idx="2">
-            <a:schemeClr val="accent1"/>
-          </a:effectRef>
-          <a:fontRef idx="minor">
-            <a:schemeClr val="lt1"/>
-          </a:fontRef>
-        </p:style>
-        <p:txBody>
-          <a:bodyPr rtlCol="0" anchor="ctr"/>
-          <a:lstStyle/>
-          <a:p>
-            <a:pPr algn="ctr"/>
-          </a:p>
-        </p:txBody>
-      </p:sp>
-      <p:sp>
-        <p:nvSpPr>
-          <p:cNvPr id="3" name="Oval 2"/>
-          <p:cNvSpPr/>
-          <p:nvPr/>
-        </p:nvSpPr>
-        <p:spPr>
-          <a:xfrm>
-            <a:off x="10424160" y="4206240"/>
-            <a:ext cx="2194560" cy="2194560"/>
-          </a:xfrm>
-          <a:prstGeom prst="ellipse">
-            <a:avLst/>
-          </a:prstGeom>
-          <a:gradFill rotWithShape="1">
-            <a:gsLst>
-              <a:gs pos="0">
-                <a:srgbClr val="7B61FF"/>
-              </a:gs>
-              <a:gs pos="100000">
-                <a:srgbClr val="4C9AFF"/>
-              </a:gs>
-            </a:gsLst>
-            <a:lin scaled="0" ang="19800000"/>
-          </a:gradFill>
-          <a:ln>
-            <a:noFill/>
-          </a:ln>
-          <a:effectLst/>
-        </p:spPr>
-        <p:style>
-          <a:lnRef idx="1">
-            <a:schemeClr val="accent1"/>
-          </a:lnRef>
-          <a:fillRef idx="3">
-            <a:schemeClr val="accent1"/>
-          </a:fillRef>
-          <a:effectRef idx="2">
-            <a:schemeClr val="accent1"/>
-          </a:effectRef>
-          <a:fontRef idx="minor">
-            <a:schemeClr val="lt1"/>
-          </a:fontRef>
-        </p:style>
-        <p:txBody>
-          <a:bodyPr rtlCol="0" anchor="ctr"/>
-          <a:lstStyle/>
-          <a:p>
-            <a:pPr algn="ctr"/>
-          </a:p>
-        </p:txBody>
-      </p:sp>
-      <p:sp>
-        <p:nvSpPr>
-          <p:cNvPr id="4" name="Rounded Rectangle 3"/>
+      <p:pic>
+        <p:nvPicPr>
+          <p:cNvPr id="2" name="Picture 1" descr="cover.png"/>
+          <p:cNvPicPr>
+            <a:picLocks noChangeAspect="1"/>
+          </p:cNvPicPr>
+          <p:nvPr/>
+        </p:nvPicPr>
+        <p:blipFill>
+          <a:blip r:embed="rId2"/>
+          <a:stretch>
+            <a:fillRect/>
+          </a:stretch>
+        </p:blipFill>
+        <p:spPr>
+          <a:xfrm>
+            <a:off x="6949440" y="-548640"/>
+            <a:ext cx="6035040" cy="6035040"/>
+          </a:xfrm>
+          <a:prstGeom prst="rect">
+            <a:avLst/>
+          </a:prstGeom>
+        </p:spPr>
+      </p:pic>
+      <p:sp>
+        <p:nvSpPr>
+          <p:cNvPr id="3" name="Rounded Rectangle 2"/>
           <p:cNvSpPr/>
           <p:nvPr/>
         </p:nvSpPr>
@@ -4458,7 +4378,7 @@
       </p:sp>
       <p:sp>
         <p:nvSpPr>
-          <p:cNvPr id="5" name="TextBox 4"/>
+          <p:cNvPr id="4" name="TextBox 3"/>
           <p:cNvSpPr txBox="1"/>
           <p:nvPr/>
         </p:nvSpPr>
@@ -4496,7 +4416,7 @@
       </p:sp>
       <p:sp>
         <p:nvSpPr>
-          <p:cNvPr id="6" name="TextBox 5"/>
+          <p:cNvPr id="5" name="TextBox 4"/>
           <p:cNvSpPr txBox="1"/>
           <p:nvPr/>
         </p:nvSpPr>
@@ -4537,6 +4457,18 @@
   <p:clrMapOvr>
     <a:masterClrMapping/>
   </p:clrMapOvr>
+  <mc:AlternateContent xmlns:mc="http://schemas.openxmlformats.org/markup-compatibility/2006">
+    <mc:Choice xmlns:p14="http://schemas.microsoft.com/office/powerpoint/2010/main" Requires="p14">
+      <p:transition spd="slow" p14:dur="600">
+        <p:fade/>
+      </p:transition>
+    </mc:Choice>
+    <mc:Fallback>
+      <p:transition spd="slow">
+        <p:fade/>
+      </p:transition>
+    </mc:Fallback>
+  </mc:AlternateContent>
 </p:sld>
 </file>
 
@@ -4558,9 +4490,33 @@
         <p:nvPr/>
       </p:nvGrpSpPr>
       <p:grpSpPr/>
-      <p:sp>
-        <p:nvSpPr>
-          <p:cNvPr id="2" name="Rounded Rectangle 1"/>
+      <p:pic>
+        <p:nvPicPr>
+          <p:cNvPr id="2" name="Picture 1" descr="s10.png"/>
+          <p:cNvPicPr>
+            <a:picLocks noChangeAspect="1"/>
+          </p:cNvPicPr>
+          <p:nvPr/>
+        </p:nvPicPr>
+        <p:blipFill>
+          <a:blip r:embed="rId2"/>
+          <a:stretch>
+            <a:fillRect/>
+          </a:stretch>
+        </p:blipFill>
+        <p:spPr>
+          <a:xfrm>
+            <a:off x="9418320" y="3657600"/>
+            <a:ext cx="4023360" cy="4023360"/>
+          </a:xfrm>
+          <a:prstGeom prst="rect">
+            <a:avLst/>
+          </a:prstGeom>
+        </p:spPr>
+      </p:pic>
+      <p:sp>
+        <p:nvSpPr>
+          <p:cNvPr id="3" name="Rounded Rectangle 2"/>
           <p:cNvSpPr/>
           <p:nvPr/>
         </p:nvSpPr>
@@ -4614,7 +4570,7 @@
       </p:sp>
       <p:sp>
         <p:nvSpPr>
-          <p:cNvPr id="3" name="TextBox 2"/>
+          <p:cNvPr id="4" name="TextBox 3"/>
           <p:cNvSpPr txBox="1"/>
           <p:nvPr/>
         </p:nvSpPr>
@@ -4652,14 +4608,14 @@
       </p:sp>
       <p:sp>
         <p:nvSpPr>
-          <p:cNvPr id="4" name="Rounded Rectangle 3"/>
+          <p:cNvPr id="5" name="Rounded Rectangle 4"/>
           <p:cNvSpPr/>
           <p:nvPr/>
         </p:nvSpPr>
         <p:spPr>
           <a:xfrm>
             <a:off x="822960" y="1965960"/>
-            <a:ext cx="10515600" cy="841248"/>
+            <a:ext cx="8229600" cy="841248"/>
           </a:xfrm>
           <a:prstGeom prst="roundRect">
             <a:avLst>
@@ -4698,7 +4654,7 @@
       </p:sp>
       <p:sp>
         <p:nvSpPr>
-          <p:cNvPr id="5" name="Oval 4"/>
+          <p:cNvPr id="6" name="Oval 5"/>
           <p:cNvSpPr/>
           <p:nvPr/>
         </p:nvSpPr>
@@ -4750,7 +4706,7 @@
       </p:sp>
       <p:sp>
         <p:nvSpPr>
-          <p:cNvPr id="6" name="TextBox 5"/>
+          <p:cNvPr id="7" name="TextBox 6"/>
           <p:cNvSpPr txBox="1"/>
           <p:nvPr/>
         </p:nvSpPr>
@@ -4788,14 +4744,14 @@
       </p:sp>
       <p:sp>
         <p:nvSpPr>
-          <p:cNvPr id="7" name="TextBox 6"/>
+          <p:cNvPr id="8" name="TextBox 7"/>
           <p:cNvSpPr txBox="1"/>
           <p:nvPr/>
         </p:nvSpPr>
         <p:spPr>
           <a:xfrm>
             <a:off x="1691640" y="2185416"/>
-            <a:ext cx="9418320" cy="841248"/>
+            <a:ext cx="7132320" cy="841248"/>
           </a:xfrm>
           <a:prstGeom prst="rect">
             <a:avLst/>
@@ -4826,14 +4782,14 @@
       </p:sp>
       <p:sp>
         <p:nvSpPr>
-          <p:cNvPr id="8" name="Rounded Rectangle 7"/>
+          <p:cNvPr id="9" name="Rounded Rectangle 8"/>
           <p:cNvSpPr/>
           <p:nvPr/>
         </p:nvSpPr>
         <p:spPr>
           <a:xfrm>
             <a:off x="822960" y="3008376"/>
-            <a:ext cx="10515600" cy="841248"/>
+            <a:ext cx="8229600" cy="841248"/>
           </a:xfrm>
           <a:prstGeom prst="roundRect">
             <a:avLst>
@@ -4872,7 +4828,7 @@
       </p:sp>
       <p:sp>
         <p:nvSpPr>
-          <p:cNvPr id="9" name="Oval 8"/>
+          <p:cNvPr id="10" name="Oval 9"/>
           <p:cNvSpPr/>
           <p:nvPr/>
         </p:nvSpPr>
@@ -4924,7 +4880,7 @@
       </p:sp>
       <p:sp>
         <p:nvSpPr>
-          <p:cNvPr id="10" name="TextBox 9"/>
+          <p:cNvPr id="11" name="TextBox 10"/>
           <p:cNvSpPr txBox="1"/>
           <p:nvPr/>
         </p:nvSpPr>
@@ -4962,14 +4918,14 @@
       </p:sp>
       <p:sp>
         <p:nvSpPr>
-          <p:cNvPr id="11" name="TextBox 10"/>
+          <p:cNvPr id="12" name="TextBox 11"/>
           <p:cNvSpPr txBox="1"/>
           <p:nvPr/>
         </p:nvSpPr>
         <p:spPr>
           <a:xfrm>
             <a:off x="1691640" y="3227832"/>
-            <a:ext cx="9418320" cy="841248"/>
+            <a:ext cx="7132320" cy="841248"/>
           </a:xfrm>
           <a:prstGeom prst="rect">
             <a:avLst/>
@@ -5000,14 +4956,14 @@
       </p:sp>
       <p:sp>
         <p:nvSpPr>
-          <p:cNvPr id="12" name="Rounded Rectangle 11"/>
+          <p:cNvPr id="13" name="Rounded Rectangle 12"/>
           <p:cNvSpPr/>
           <p:nvPr/>
         </p:nvSpPr>
         <p:spPr>
           <a:xfrm>
             <a:off x="822960" y="4050792"/>
-            <a:ext cx="10515600" cy="841248"/>
+            <a:ext cx="8229600" cy="841248"/>
           </a:xfrm>
           <a:prstGeom prst="roundRect">
             <a:avLst>
@@ -5046,7 +5002,7 @@
       </p:sp>
       <p:sp>
         <p:nvSpPr>
-          <p:cNvPr id="13" name="Oval 12"/>
+          <p:cNvPr id="14" name="Oval 13"/>
           <p:cNvSpPr/>
           <p:nvPr/>
         </p:nvSpPr>
@@ -5098,7 +5054,7 @@
       </p:sp>
       <p:sp>
         <p:nvSpPr>
-          <p:cNvPr id="14" name="TextBox 13"/>
+          <p:cNvPr id="15" name="TextBox 14"/>
           <p:cNvSpPr txBox="1"/>
           <p:nvPr/>
         </p:nvSpPr>
@@ -5136,14 +5092,14 @@
       </p:sp>
       <p:sp>
         <p:nvSpPr>
-          <p:cNvPr id="15" name="TextBox 14"/>
+          <p:cNvPr id="16" name="TextBox 15"/>
           <p:cNvSpPr txBox="1"/>
           <p:nvPr/>
         </p:nvSpPr>
         <p:spPr>
           <a:xfrm>
             <a:off x="1691640" y="4270248"/>
-            <a:ext cx="9418320" cy="841248"/>
+            <a:ext cx="7132320" cy="841248"/>
           </a:xfrm>
           <a:prstGeom prst="rect">
             <a:avLst/>
@@ -5174,14 +5130,14 @@
       </p:sp>
       <p:sp>
         <p:nvSpPr>
-          <p:cNvPr id="16" name="Rounded Rectangle 15"/>
+          <p:cNvPr id="17" name="Rounded Rectangle 16"/>
           <p:cNvSpPr/>
           <p:nvPr/>
         </p:nvSpPr>
         <p:spPr>
           <a:xfrm>
             <a:off x="822960" y="5093208"/>
-            <a:ext cx="10515600" cy="841248"/>
+            <a:ext cx="8229600" cy="841248"/>
           </a:xfrm>
           <a:prstGeom prst="roundRect">
             <a:avLst>
@@ -5220,7 +5176,7 @@
       </p:sp>
       <p:sp>
         <p:nvSpPr>
-          <p:cNvPr id="17" name="Oval 16"/>
+          <p:cNvPr id="18" name="Oval 17"/>
           <p:cNvSpPr/>
           <p:nvPr/>
         </p:nvSpPr>
@@ -5272,7 +5228,7 @@
       </p:sp>
       <p:sp>
         <p:nvSpPr>
-          <p:cNvPr id="18" name="TextBox 17"/>
+          <p:cNvPr id="19" name="TextBox 18"/>
           <p:cNvSpPr txBox="1"/>
           <p:nvPr/>
         </p:nvSpPr>
@@ -5310,14 +5266,14 @@
       </p:sp>
       <p:sp>
         <p:nvSpPr>
-          <p:cNvPr id="19" name="TextBox 18"/>
+          <p:cNvPr id="20" name="TextBox 19"/>
           <p:cNvSpPr txBox="1"/>
           <p:nvPr/>
         </p:nvSpPr>
         <p:spPr>
           <a:xfrm>
             <a:off x="1691640" y="5312664"/>
-            <a:ext cx="9418320" cy="841248"/>
+            <a:ext cx="7132320" cy="841248"/>
           </a:xfrm>
           <a:prstGeom prst="rect">
             <a:avLst/>
@@ -5348,7 +5304,7 @@
       </p:sp>
       <p:sp>
         <p:nvSpPr>
-          <p:cNvPr id="20" name="TextBox 19"/>
+          <p:cNvPr id="21" name="TextBox 20"/>
           <p:cNvSpPr txBox="1"/>
           <p:nvPr/>
         </p:nvSpPr>
@@ -5386,7 +5342,7 @@
       </p:sp>
       <p:sp>
         <p:nvSpPr>
-          <p:cNvPr id="21" name="TextBox 20"/>
+          <p:cNvPr id="22" name="TextBox 21"/>
           <p:cNvSpPr txBox="1"/>
           <p:nvPr/>
         </p:nvSpPr>
@@ -5427,6 +5383,18 @@
   <p:clrMapOvr>
     <a:masterClrMapping/>
   </p:clrMapOvr>
+  <mc:AlternateContent xmlns:mc="http://schemas.openxmlformats.org/markup-compatibility/2006">
+    <mc:Choice xmlns:p14="http://schemas.microsoft.com/office/powerpoint/2010/main" Requires="p14">
+      <p:transition spd="slow" p14:dur="600">
+        <p:fade/>
+      </p:transition>
+    </mc:Choice>
+    <mc:Fallback>
+      <p:transition spd="slow">
+        <p:fade/>
+      </p:transition>
+    </mc:Fallback>
+  </mc:AlternateContent>
 </p:sld>
 </file>
 
@@ -5448,9 +5416,33 @@
         <p:nvPr/>
       </p:nvGrpSpPr>
       <p:grpSpPr/>
-      <p:sp>
-        <p:nvSpPr>
-          <p:cNvPr id="2" name="Rounded Rectangle 1"/>
+      <p:pic>
+        <p:nvPicPr>
+          <p:cNvPr id="2" name="Picture 1" descr="s11.png"/>
+          <p:cNvPicPr>
+            <a:picLocks noChangeAspect="1"/>
+          </p:cNvPicPr>
+          <p:nvPr/>
+        </p:nvPicPr>
+        <p:blipFill>
+          <a:blip r:embed="rId2"/>
+          <a:stretch>
+            <a:fillRect/>
+          </a:stretch>
+        </p:blipFill>
+        <p:spPr>
+          <a:xfrm>
+            <a:off x="9418320" y="3657600"/>
+            <a:ext cx="4023360" cy="4023360"/>
+          </a:xfrm>
+          <a:prstGeom prst="rect">
+            <a:avLst/>
+          </a:prstGeom>
+        </p:spPr>
+      </p:pic>
+      <p:sp>
+        <p:nvSpPr>
+          <p:cNvPr id="3" name="Rounded Rectangle 2"/>
           <p:cNvSpPr/>
           <p:nvPr/>
         </p:nvSpPr>
@@ -5504,7 +5496,7 @@
       </p:sp>
       <p:sp>
         <p:nvSpPr>
-          <p:cNvPr id="3" name="TextBox 2"/>
+          <p:cNvPr id="4" name="TextBox 3"/>
           <p:cNvSpPr txBox="1"/>
           <p:nvPr/>
         </p:nvSpPr>
@@ -5542,14 +5534,14 @@
       </p:sp>
       <p:sp>
         <p:nvSpPr>
-          <p:cNvPr id="4" name="Rounded Rectangle 3"/>
+          <p:cNvPr id="5" name="Rounded Rectangle 4"/>
           <p:cNvSpPr/>
           <p:nvPr/>
         </p:nvSpPr>
         <p:spPr>
           <a:xfrm>
             <a:off x="822960" y="1965960"/>
-            <a:ext cx="10515600" cy="841248"/>
+            <a:ext cx="8229600" cy="841248"/>
           </a:xfrm>
           <a:prstGeom prst="roundRect">
             <a:avLst>
@@ -5588,7 +5580,7 @@
       </p:sp>
       <p:sp>
         <p:nvSpPr>
-          <p:cNvPr id="5" name="Oval 4"/>
+          <p:cNvPr id="6" name="Oval 5"/>
           <p:cNvSpPr/>
           <p:nvPr/>
         </p:nvSpPr>
@@ -5640,7 +5632,7 @@
       </p:sp>
       <p:sp>
         <p:nvSpPr>
-          <p:cNvPr id="6" name="TextBox 5"/>
+          <p:cNvPr id="7" name="TextBox 6"/>
           <p:cNvSpPr txBox="1"/>
           <p:nvPr/>
         </p:nvSpPr>
@@ -5678,14 +5670,14 @@
       </p:sp>
       <p:sp>
         <p:nvSpPr>
-          <p:cNvPr id="7" name="TextBox 6"/>
+          <p:cNvPr id="8" name="TextBox 7"/>
           <p:cNvSpPr txBox="1"/>
           <p:nvPr/>
         </p:nvSpPr>
         <p:spPr>
           <a:xfrm>
             <a:off x="1691640" y="2185416"/>
-            <a:ext cx="9418320" cy="841248"/>
+            <a:ext cx="7132320" cy="841248"/>
           </a:xfrm>
           <a:prstGeom prst="rect">
             <a:avLst/>
@@ -5716,14 +5708,14 @@
       </p:sp>
       <p:sp>
         <p:nvSpPr>
-          <p:cNvPr id="8" name="Rounded Rectangle 7"/>
+          <p:cNvPr id="9" name="Rounded Rectangle 8"/>
           <p:cNvSpPr/>
           <p:nvPr/>
         </p:nvSpPr>
         <p:spPr>
           <a:xfrm>
             <a:off x="822960" y="3008376"/>
-            <a:ext cx="10515600" cy="841248"/>
+            <a:ext cx="8229600" cy="841248"/>
           </a:xfrm>
           <a:prstGeom prst="roundRect">
             <a:avLst>
@@ -5762,7 +5754,7 @@
       </p:sp>
       <p:sp>
         <p:nvSpPr>
-          <p:cNvPr id="9" name="Oval 8"/>
+          <p:cNvPr id="10" name="Oval 9"/>
           <p:cNvSpPr/>
           <p:nvPr/>
         </p:nvSpPr>
@@ -5814,7 +5806,7 @@
       </p:sp>
       <p:sp>
         <p:nvSpPr>
-          <p:cNvPr id="10" name="TextBox 9"/>
+          <p:cNvPr id="11" name="TextBox 10"/>
           <p:cNvSpPr txBox="1"/>
           <p:nvPr/>
         </p:nvSpPr>
@@ -5852,14 +5844,14 @@
       </p:sp>
       <p:sp>
         <p:nvSpPr>
-          <p:cNvPr id="11" name="TextBox 10"/>
+          <p:cNvPr id="12" name="TextBox 11"/>
           <p:cNvSpPr txBox="1"/>
           <p:nvPr/>
         </p:nvSpPr>
         <p:spPr>
           <a:xfrm>
             <a:off x="1691640" y="3227832"/>
-            <a:ext cx="9418320" cy="841248"/>
+            <a:ext cx="7132320" cy="841248"/>
           </a:xfrm>
           <a:prstGeom prst="rect">
             <a:avLst/>
@@ -5890,14 +5882,14 @@
       </p:sp>
       <p:sp>
         <p:nvSpPr>
-          <p:cNvPr id="12" name="Rounded Rectangle 11"/>
+          <p:cNvPr id="13" name="Rounded Rectangle 12"/>
           <p:cNvSpPr/>
           <p:nvPr/>
         </p:nvSpPr>
         <p:spPr>
           <a:xfrm>
             <a:off x="822960" y="4050792"/>
-            <a:ext cx="10515600" cy="841248"/>
+            <a:ext cx="8229600" cy="841248"/>
           </a:xfrm>
           <a:prstGeom prst="roundRect">
             <a:avLst>
@@ -5936,7 +5928,7 @@
       </p:sp>
       <p:sp>
         <p:nvSpPr>
-          <p:cNvPr id="13" name="Oval 12"/>
+          <p:cNvPr id="14" name="Oval 13"/>
           <p:cNvSpPr/>
           <p:nvPr/>
         </p:nvSpPr>
@@ -5988,7 +5980,7 @@
       </p:sp>
       <p:sp>
         <p:nvSpPr>
-          <p:cNvPr id="14" name="TextBox 13"/>
+          <p:cNvPr id="15" name="TextBox 14"/>
           <p:cNvSpPr txBox="1"/>
           <p:nvPr/>
         </p:nvSpPr>
@@ -6026,14 +6018,14 @@
       </p:sp>
       <p:sp>
         <p:nvSpPr>
-          <p:cNvPr id="15" name="TextBox 14"/>
+          <p:cNvPr id="16" name="TextBox 15"/>
           <p:cNvSpPr txBox="1"/>
           <p:nvPr/>
         </p:nvSpPr>
         <p:spPr>
           <a:xfrm>
             <a:off x="1691640" y="4270248"/>
-            <a:ext cx="9418320" cy="841248"/>
+            <a:ext cx="7132320" cy="841248"/>
           </a:xfrm>
           <a:prstGeom prst="rect">
             <a:avLst/>
@@ -6064,14 +6056,14 @@
       </p:sp>
       <p:sp>
         <p:nvSpPr>
-          <p:cNvPr id="16" name="Rounded Rectangle 15"/>
+          <p:cNvPr id="17" name="Rounded Rectangle 16"/>
           <p:cNvSpPr/>
           <p:nvPr/>
         </p:nvSpPr>
         <p:spPr>
           <a:xfrm>
             <a:off x="822960" y="5093208"/>
-            <a:ext cx="10515600" cy="841248"/>
+            <a:ext cx="8229600" cy="841248"/>
           </a:xfrm>
           <a:prstGeom prst="roundRect">
             <a:avLst>
@@ -6110,7 +6102,7 @@
       </p:sp>
       <p:sp>
         <p:nvSpPr>
-          <p:cNvPr id="17" name="Oval 16"/>
+          <p:cNvPr id="18" name="Oval 17"/>
           <p:cNvSpPr/>
           <p:nvPr/>
         </p:nvSpPr>
@@ -6162,7 +6154,7 @@
       </p:sp>
       <p:sp>
         <p:nvSpPr>
-          <p:cNvPr id="18" name="TextBox 17"/>
+          <p:cNvPr id="19" name="TextBox 18"/>
           <p:cNvSpPr txBox="1"/>
           <p:nvPr/>
         </p:nvSpPr>
@@ -6200,14 +6192,14 @@
       </p:sp>
       <p:sp>
         <p:nvSpPr>
-          <p:cNvPr id="19" name="TextBox 18"/>
+          <p:cNvPr id="20" name="TextBox 19"/>
           <p:cNvSpPr txBox="1"/>
           <p:nvPr/>
         </p:nvSpPr>
         <p:spPr>
           <a:xfrm>
             <a:off x="1691640" y="5312664"/>
-            <a:ext cx="9418320" cy="841248"/>
+            <a:ext cx="7132320" cy="841248"/>
           </a:xfrm>
           <a:prstGeom prst="rect">
             <a:avLst/>
@@ -6238,7 +6230,7 @@
       </p:sp>
       <p:sp>
         <p:nvSpPr>
-          <p:cNvPr id="20" name="TextBox 19"/>
+          <p:cNvPr id="21" name="TextBox 20"/>
           <p:cNvSpPr txBox="1"/>
           <p:nvPr/>
         </p:nvSpPr>
@@ -6276,7 +6268,7 @@
       </p:sp>
       <p:sp>
         <p:nvSpPr>
-          <p:cNvPr id="21" name="TextBox 20"/>
+          <p:cNvPr id="22" name="TextBox 21"/>
           <p:cNvSpPr txBox="1"/>
           <p:nvPr/>
         </p:nvSpPr>
@@ -6317,6 +6309,18 @@
   <p:clrMapOvr>
     <a:masterClrMapping/>
   </p:clrMapOvr>
+  <mc:AlternateContent xmlns:mc="http://schemas.openxmlformats.org/markup-compatibility/2006">
+    <mc:Choice xmlns:p14="http://schemas.microsoft.com/office/powerpoint/2010/main" Requires="p14">
+      <p:transition spd="slow" p14:dur="600">
+        <p:fade/>
+      </p:transition>
+    </mc:Choice>
+    <mc:Fallback>
+      <p:transition spd="slow">
+        <p:fade/>
+      </p:transition>
+    </mc:Fallback>
+  </mc:AlternateContent>
 </p:sld>
 </file>
 
@@ -6338,9 +6342,33 @@
         <p:nvPr/>
       </p:nvGrpSpPr>
       <p:grpSpPr/>
-      <p:sp>
-        <p:nvSpPr>
-          <p:cNvPr id="2" name="Rounded Rectangle 1"/>
+      <p:pic>
+        <p:nvPicPr>
+          <p:cNvPr id="2" name="Picture 1" descr="s11.png"/>
+          <p:cNvPicPr>
+            <a:picLocks noChangeAspect="1"/>
+          </p:cNvPicPr>
+          <p:nvPr/>
+        </p:nvPicPr>
+        <p:blipFill>
+          <a:blip r:embed="rId2"/>
+          <a:stretch>
+            <a:fillRect/>
+          </a:stretch>
+        </p:blipFill>
+        <p:spPr>
+          <a:xfrm>
+            <a:off x="9418320" y="3657600"/>
+            <a:ext cx="4023360" cy="4023360"/>
+          </a:xfrm>
+          <a:prstGeom prst="rect">
+            <a:avLst/>
+          </a:prstGeom>
+        </p:spPr>
+      </p:pic>
+      <p:sp>
+        <p:nvSpPr>
+          <p:cNvPr id="3" name="Rounded Rectangle 2"/>
           <p:cNvSpPr/>
           <p:nvPr/>
         </p:nvSpPr>
@@ -6394,7 +6422,7 @@
       </p:sp>
       <p:sp>
         <p:nvSpPr>
-          <p:cNvPr id="3" name="TextBox 2"/>
+          <p:cNvPr id="4" name="TextBox 3"/>
           <p:cNvSpPr txBox="1"/>
           <p:nvPr/>
         </p:nvSpPr>
@@ -6432,14 +6460,14 @@
       </p:sp>
       <p:sp>
         <p:nvSpPr>
-          <p:cNvPr id="4" name="Rounded Rectangle 3"/>
+          <p:cNvPr id="5" name="Rounded Rectangle 4"/>
           <p:cNvSpPr/>
           <p:nvPr/>
         </p:nvSpPr>
         <p:spPr>
           <a:xfrm>
             <a:off x="822960" y="1965960"/>
-            <a:ext cx="10515600" cy="841248"/>
+            <a:ext cx="8229600" cy="841248"/>
           </a:xfrm>
           <a:prstGeom prst="roundRect">
             <a:avLst>
@@ -6478,7 +6506,7 @@
       </p:sp>
       <p:sp>
         <p:nvSpPr>
-          <p:cNvPr id="5" name="Oval 4"/>
+          <p:cNvPr id="6" name="Oval 5"/>
           <p:cNvSpPr/>
           <p:nvPr/>
         </p:nvSpPr>
@@ -6530,7 +6558,7 @@
       </p:sp>
       <p:sp>
         <p:nvSpPr>
-          <p:cNvPr id="6" name="TextBox 5"/>
+          <p:cNvPr id="7" name="TextBox 6"/>
           <p:cNvSpPr txBox="1"/>
           <p:nvPr/>
         </p:nvSpPr>
@@ -6568,14 +6596,14 @@
       </p:sp>
       <p:sp>
         <p:nvSpPr>
-          <p:cNvPr id="7" name="TextBox 6"/>
+          <p:cNvPr id="8" name="TextBox 7"/>
           <p:cNvSpPr txBox="1"/>
           <p:nvPr/>
         </p:nvSpPr>
         <p:spPr>
           <a:xfrm>
             <a:off x="1691640" y="2185416"/>
-            <a:ext cx="9418320" cy="841248"/>
+            <a:ext cx="7132320" cy="841248"/>
           </a:xfrm>
           <a:prstGeom prst="rect">
             <a:avLst/>
@@ -6606,14 +6634,14 @@
       </p:sp>
       <p:sp>
         <p:nvSpPr>
-          <p:cNvPr id="8" name="Rounded Rectangle 7"/>
+          <p:cNvPr id="9" name="Rounded Rectangle 8"/>
           <p:cNvSpPr/>
           <p:nvPr/>
         </p:nvSpPr>
         <p:spPr>
           <a:xfrm>
             <a:off x="822960" y="3008376"/>
-            <a:ext cx="10515600" cy="841248"/>
+            <a:ext cx="8229600" cy="841248"/>
           </a:xfrm>
           <a:prstGeom prst="roundRect">
             <a:avLst>
@@ -6652,7 +6680,7 @@
       </p:sp>
       <p:sp>
         <p:nvSpPr>
-          <p:cNvPr id="9" name="Oval 8"/>
+          <p:cNvPr id="10" name="Oval 9"/>
           <p:cNvSpPr/>
           <p:nvPr/>
         </p:nvSpPr>
@@ -6704,7 +6732,7 @@
       </p:sp>
       <p:sp>
         <p:nvSpPr>
-          <p:cNvPr id="10" name="TextBox 9"/>
+          <p:cNvPr id="11" name="TextBox 10"/>
           <p:cNvSpPr txBox="1"/>
           <p:nvPr/>
         </p:nvSpPr>
@@ -6742,14 +6770,14 @@
       </p:sp>
       <p:sp>
         <p:nvSpPr>
-          <p:cNvPr id="11" name="TextBox 10"/>
+          <p:cNvPr id="12" name="TextBox 11"/>
           <p:cNvSpPr txBox="1"/>
           <p:nvPr/>
         </p:nvSpPr>
         <p:spPr>
           <a:xfrm>
             <a:off x="1691640" y="3227832"/>
-            <a:ext cx="9418320" cy="841248"/>
+            <a:ext cx="7132320" cy="841248"/>
           </a:xfrm>
           <a:prstGeom prst="rect">
             <a:avLst/>
@@ -6780,14 +6808,14 @@
       </p:sp>
       <p:sp>
         <p:nvSpPr>
-          <p:cNvPr id="12" name="Rounded Rectangle 11"/>
+          <p:cNvPr id="13" name="Rounded Rectangle 12"/>
           <p:cNvSpPr/>
           <p:nvPr/>
         </p:nvSpPr>
         <p:spPr>
           <a:xfrm>
             <a:off x="822960" y="4050792"/>
-            <a:ext cx="10515600" cy="841248"/>
+            <a:ext cx="8229600" cy="841248"/>
           </a:xfrm>
           <a:prstGeom prst="roundRect">
             <a:avLst>
@@ -6826,7 +6854,7 @@
       </p:sp>
       <p:sp>
         <p:nvSpPr>
-          <p:cNvPr id="13" name="Oval 12"/>
+          <p:cNvPr id="14" name="Oval 13"/>
           <p:cNvSpPr/>
           <p:nvPr/>
         </p:nvSpPr>
@@ -6878,7 +6906,7 @@
       </p:sp>
       <p:sp>
         <p:nvSpPr>
-          <p:cNvPr id="14" name="TextBox 13"/>
+          <p:cNvPr id="15" name="TextBox 14"/>
           <p:cNvSpPr txBox="1"/>
           <p:nvPr/>
         </p:nvSpPr>
@@ -6916,14 +6944,14 @@
       </p:sp>
       <p:sp>
         <p:nvSpPr>
-          <p:cNvPr id="15" name="TextBox 14"/>
+          <p:cNvPr id="16" name="TextBox 15"/>
           <p:cNvSpPr txBox="1"/>
           <p:nvPr/>
         </p:nvSpPr>
         <p:spPr>
           <a:xfrm>
             <a:off x="1691640" y="4270248"/>
-            <a:ext cx="9418320" cy="841248"/>
+            <a:ext cx="7132320" cy="841248"/>
           </a:xfrm>
           <a:prstGeom prst="rect">
             <a:avLst/>
@@ -6954,14 +6982,14 @@
       </p:sp>
       <p:sp>
         <p:nvSpPr>
-          <p:cNvPr id="16" name="Rounded Rectangle 15"/>
+          <p:cNvPr id="17" name="Rounded Rectangle 16"/>
           <p:cNvSpPr/>
           <p:nvPr/>
         </p:nvSpPr>
         <p:spPr>
           <a:xfrm>
             <a:off x="822960" y="5093208"/>
-            <a:ext cx="10515600" cy="841248"/>
+            <a:ext cx="8229600" cy="841248"/>
           </a:xfrm>
           <a:prstGeom prst="roundRect">
             <a:avLst>
@@ -7000,7 +7028,7 @@
       </p:sp>
       <p:sp>
         <p:nvSpPr>
-          <p:cNvPr id="17" name="Oval 16"/>
+          <p:cNvPr id="18" name="Oval 17"/>
           <p:cNvSpPr/>
           <p:nvPr/>
         </p:nvSpPr>
@@ -7052,7 +7080,7 @@
       </p:sp>
       <p:sp>
         <p:nvSpPr>
-          <p:cNvPr id="18" name="TextBox 17"/>
+          <p:cNvPr id="19" name="TextBox 18"/>
           <p:cNvSpPr txBox="1"/>
           <p:nvPr/>
         </p:nvSpPr>
@@ -7090,14 +7118,14 @@
       </p:sp>
       <p:sp>
         <p:nvSpPr>
-          <p:cNvPr id="19" name="TextBox 18"/>
+          <p:cNvPr id="20" name="TextBox 19"/>
           <p:cNvSpPr txBox="1"/>
           <p:nvPr/>
         </p:nvSpPr>
         <p:spPr>
           <a:xfrm>
             <a:off x="1691640" y="5312664"/>
-            <a:ext cx="9418320" cy="841248"/>
+            <a:ext cx="7132320" cy="841248"/>
           </a:xfrm>
           <a:prstGeom prst="rect">
             <a:avLst/>
@@ -7128,7 +7156,7 @@
       </p:sp>
       <p:sp>
         <p:nvSpPr>
-          <p:cNvPr id="20" name="TextBox 19"/>
+          <p:cNvPr id="21" name="TextBox 20"/>
           <p:cNvSpPr txBox="1"/>
           <p:nvPr/>
         </p:nvSpPr>
@@ -7166,7 +7194,7 @@
       </p:sp>
       <p:sp>
         <p:nvSpPr>
-          <p:cNvPr id="21" name="TextBox 20"/>
+          <p:cNvPr id="22" name="TextBox 21"/>
           <p:cNvSpPr txBox="1"/>
           <p:nvPr/>
         </p:nvSpPr>
@@ -7207,6 +7235,18 @@
   <p:clrMapOvr>
     <a:masterClrMapping/>
   </p:clrMapOvr>
+  <mc:AlternateContent xmlns:mc="http://schemas.openxmlformats.org/markup-compatibility/2006">
+    <mc:Choice xmlns:p14="http://schemas.microsoft.com/office/powerpoint/2010/main" Requires="p14">
+      <p:transition spd="slow" p14:dur="600">
+        <p:fade/>
+      </p:transition>
+    </mc:Choice>
+    <mc:Fallback>
+      <p:transition spd="slow">
+        <p:fade/>
+      </p:transition>
+    </mc:Fallback>
+  </mc:AlternateContent>
 </p:sld>
 </file>
 
@@ -7228,9 +7268,33 @@
         <p:nvPr/>
       </p:nvGrpSpPr>
       <p:grpSpPr/>
-      <p:sp>
-        <p:nvSpPr>
-          <p:cNvPr id="2" name="Rounded Rectangle 1"/>
+      <p:pic>
+        <p:nvPicPr>
+          <p:cNvPr id="2" name="Picture 1" descr="cover.png"/>
+          <p:cNvPicPr>
+            <a:picLocks noChangeAspect="1"/>
+          </p:cNvPicPr>
+          <p:nvPr/>
+        </p:nvPicPr>
+        <p:blipFill>
+          <a:blip r:embed="rId2"/>
+          <a:stretch>
+            <a:fillRect/>
+          </a:stretch>
+        </p:blipFill>
+        <p:spPr>
+          <a:xfrm>
+            <a:off x="9418320" y="3657600"/>
+            <a:ext cx="4023360" cy="4023360"/>
+          </a:xfrm>
+          <a:prstGeom prst="rect">
+            <a:avLst/>
+          </a:prstGeom>
+        </p:spPr>
+      </p:pic>
+      <p:sp>
+        <p:nvSpPr>
+          <p:cNvPr id="3" name="Rounded Rectangle 2"/>
           <p:cNvSpPr/>
           <p:nvPr/>
         </p:nvSpPr>
@@ -7284,7 +7348,7 @@
       </p:sp>
       <p:sp>
         <p:nvSpPr>
-          <p:cNvPr id="3" name="TextBox 2"/>
+          <p:cNvPr id="4" name="TextBox 3"/>
           <p:cNvSpPr txBox="1"/>
           <p:nvPr/>
         </p:nvSpPr>
@@ -7322,14 +7386,14 @@
       </p:sp>
       <p:sp>
         <p:nvSpPr>
-          <p:cNvPr id="4" name="Rounded Rectangle 3"/>
+          <p:cNvPr id="5" name="Rounded Rectangle 4"/>
           <p:cNvSpPr/>
           <p:nvPr/>
         </p:nvSpPr>
         <p:spPr>
           <a:xfrm>
             <a:off x="822960" y="1965960"/>
-            <a:ext cx="10515600" cy="841248"/>
+            <a:ext cx="8229600" cy="841248"/>
           </a:xfrm>
           <a:prstGeom prst="roundRect">
             <a:avLst>
@@ -7368,7 +7432,7 @@
       </p:sp>
       <p:sp>
         <p:nvSpPr>
-          <p:cNvPr id="5" name="Oval 4"/>
+          <p:cNvPr id="6" name="Oval 5"/>
           <p:cNvSpPr/>
           <p:nvPr/>
         </p:nvSpPr>
@@ -7420,7 +7484,7 @@
       </p:sp>
       <p:sp>
         <p:nvSpPr>
-          <p:cNvPr id="6" name="TextBox 5"/>
+          <p:cNvPr id="7" name="TextBox 6"/>
           <p:cNvSpPr txBox="1"/>
           <p:nvPr/>
         </p:nvSpPr>
@@ -7458,14 +7522,14 @@
       </p:sp>
       <p:sp>
         <p:nvSpPr>
-          <p:cNvPr id="7" name="TextBox 6"/>
+          <p:cNvPr id="8" name="TextBox 7"/>
           <p:cNvSpPr txBox="1"/>
           <p:nvPr/>
         </p:nvSpPr>
         <p:spPr>
           <a:xfrm>
             <a:off x="1691640" y="2185416"/>
-            <a:ext cx="9418320" cy="841248"/>
+            <a:ext cx="7132320" cy="841248"/>
           </a:xfrm>
           <a:prstGeom prst="rect">
             <a:avLst/>
@@ -7496,14 +7560,14 @@
       </p:sp>
       <p:sp>
         <p:nvSpPr>
-          <p:cNvPr id="8" name="Rounded Rectangle 7"/>
+          <p:cNvPr id="9" name="Rounded Rectangle 8"/>
           <p:cNvSpPr/>
           <p:nvPr/>
         </p:nvSpPr>
         <p:spPr>
           <a:xfrm>
             <a:off x="822960" y="3008376"/>
-            <a:ext cx="10515600" cy="841248"/>
+            <a:ext cx="8229600" cy="841248"/>
           </a:xfrm>
           <a:prstGeom prst="roundRect">
             <a:avLst>
@@ -7542,7 +7606,7 @@
       </p:sp>
       <p:sp>
         <p:nvSpPr>
-          <p:cNvPr id="9" name="Oval 8"/>
+          <p:cNvPr id="10" name="Oval 9"/>
           <p:cNvSpPr/>
           <p:nvPr/>
         </p:nvSpPr>
@@ -7594,7 +7658,7 @@
       </p:sp>
       <p:sp>
         <p:nvSpPr>
-          <p:cNvPr id="10" name="TextBox 9"/>
+          <p:cNvPr id="11" name="TextBox 10"/>
           <p:cNvSpPr txBox="1"/>
           <p:nvPr/>
         </p:nvSpPr>
@@ -7632,14 +7696,14 @@
       </p:sp>
       <p:sp>
         <p:nvSpPr>
-          <p:cNvPr id="11" name="TextBox 10"/>
+          <p:cNvPr id="12" name="TextBox 11"/>
           <p:cNvSpPr txBox="1"/>
           <p:nvPr/>
         </p:nvSpPr>
         <p:spPr>
           <a:xfrm>
             <a:off x="1691640" y="3227832"/>
-            <a:ext cx="9418320" cy="841248"/>
+            <a:ext cx="7132320" cy="841248"/>
           </a:xfrm>
           <a:prstGeom prst="rect">
             <a:avLst/>
@@ -7670,14 +7734,14 @@
       </p:sp>
       <p:sp>
         <p:nvSpPr>
-          <p:cNvPr id="12" name="Rounded Rectangle 11"/>
+          <p:cNvPr id="13" name="Rounded Rectangle 12"/>
           <p:cNvSpPr/>
           <p:nvPr/>
         </p:nvSpPr>
         <p:spPr>
           <a:xfrm>
             <a:off x="822960" y="4050792"/>
-            <a:ext cx="10515600" cy="841248"/>
+            <a:ext cx="8229600" cy="841248"/>
           </a:xfrm>
           <a:prstGeom prst="roundRect">
             <a:avLst>
@@ -7716,7 +7780,7 @@
       </p:sp>
       <p:sp>
         <p:nvSpPr>
-          <p:cNvPr id="13" name="Oval 12"/>
+          <p:cNvPr id="14" name="Oval 13"/>
           <p:cNvSpPr/>
           <p:nvPr/>
         </p:nvSpPr>
@@ -7768,7 +7832,7 @@
       </p:sp>
       <p:sp>
         <p:nvSpPr>
-          <p:cNvPr id="14" name="TextBox 13"/>
+          <p:cNvPr id="15" name="TextBox 14"/>
           <p:cNvSpPr txBox="1"/>
           <p:nvPr/>
         </p:nvSpPr>
@@ -7806,14 +7870,14 @@
       </p:sp>
       <p:sp>
         <p:nvSpPr>
-          <p:cNvPr id="15" name="TextBox 14"/>
+          <p:cNvPr id="16" name="TextBox 15"/>
           <p:cNvSpPr txBox="1"/>
           <p:nvPr/>
         </p:nvSpPr>
         <p:spPr>
           <a:xfrm>
             <a:off x="1691640" y="4270248"/>
-            <a:ext cx="9418320" cy="841248"/>
+            <a:ext cx="7132320" cy="841248"/>
           </a:xfrm>
           <a:prstGeom prst="rect">
             <a:avLst/>
@@ -7844,14 +7908,14 @@
       </p:sp>
       <p:sp>
         <p:nvSpPr>
-          <p:cNvPr id="16" name="Rounded Rectangle 15"/>
+          <p:cNvPr id="17" name="Rounded Rectangle 16"/>
           <p:cNvSpPr/>
           <p:nvPr/>
         </p:nvSpPr>
         <p:spPr>
           <a:xfrm>
             <a:off x="822960" y="5093208"/>
-            <a:ext cx="10515600" cy="841248"/>
+            <a:ext cx="8229600" cy="841248"/>
           </a:xfrm>
           <a:prstGeom prst="roundRect">
             <a:avLst>
@@ -7890,7 +7954,7 @@
       </p:sp>
       <p:sp>
         <p:nvSpPr>
-          <p:cNvPr id="17" name="Oval 16"/>
+          <p:cNvPr id="18" name="Oval 17"/>
           <p:cNvSpPr/>
           <p:nvPr/>
         </p:nvSpPr>
@@ -7942,7 +8006,7 @@
       </p:sp>
       <p:sp>
         <p:nvSpPr>
-          <p:cNvPr id="18" name="TextBox 17"/>
+          <p:cNvPr id="19" name="TextBox 18"/>
           <p:cNvSpPr txBox="1"/>
           <p:nvPr/>
         </p:nvSpPr>
@@ -7980,14 +8044,14 @@
       </p:sp>
       <p:sp>
         <p:nvSpPr>
-          <p:cNvPr id="19" name="TextBox 18"/>
+          <p:cNvPr id="20" name="TextBox 19"/>
           <p:cNvSpPr txBox="1"/>
           <p:nvPr/>
         </p:nvSpPr>
         <p:spPr>
           <a:xfrm>
             <a:off x="1691640" y="5312664"/>
-            <a:ext cx="9418320" cy="841248"/>
+            <a:ext cx="7132320" cy="841248"/>
           </a:xfrm>
           <a:prstGeom prst="rect">
             <a:avLst/>
@@ -8018,7 +8082,7 @@
       </p:sp>
       <p:sp>
         <p:nvSpPr>
-          <p:cNvPr id="20" name="TextBox 19"/>
+          <p:cNvPr id="21" name="TextBox 20"/>
           <p:cNvSpPr txBox="1"/>
           <p:nvPr/>
         </p:nvSpPr>
@@ -8056,7 +8120,7 @@
       </p:sp>
       <p:sp>
         <p:nvSpPr>
-          <p:cNvPr id="21" name="TextBox 20"/>
+          <p:cNvPr id="22" name="TextBox 21"/>
           <p:cNvSpPr txBox="1"/>
           <p:nvPr/>
         </p:nvSpPr>
@@ -8097,6 +8161,18 @@
   <p:clrMapOvr>
     <a:masterClrMapping/>
   </p:clrMapOvr>
+  <mc:AlternateContent xmlns:mc="http://schemas.openxmlformats.org/markup-compatibility/2006">
+    <mc:Choice xmlns:p14="http://schemas.microsoft.com/office/powerpoint/2010/main" Requires="p14">
+      <p:transition spd="slow" p14:dur="600">
+        <p:fade/>
+      </p:transition>
+    </mc:Choice>
+    <mc:Fallback>
+      <p:transition spd="slow">
+        <p:fade/>
+      </p:transition>
+    </mc:Fallback>
+  </mc:AlternateContent>
 </p:sld>
 </file>
 
@@ -8118,9 +8194,33 @@
         <p:nvPr/>
       </p:nvGrpSpPr>
       <p:grpSpPr/>
-      <p:sp>
-        <p:nvSpPr>
-          <p:cNvPr id="2" name="Rounded Rectangle 1"/>
+      <p:pic>
+        <p:nvPicPr>
+          <p:cNvPr id="2" name="Picture 1" descr="s2.png"/>
+          <p:cNvPicPr>
+            <a:picLocks noChangeAspect="1"/>
+          </p:cNvPicPr>
+          <p:nvPr/>
+        </p:nvPicPr>
+        <p:blipFill>
+          <a:blip r:embed="rId2"/>
+          <a:stretch>
+            <a:fillRect/>
+          </a:stretch>
+        </p:blipFill>
+        <p:spPr>
+          <a:xfrm>
+            <a:off x="9418320" y="3657600"/>
+            <a:ext cx="4023360" cy="4023360"/>
+          </a:xfrm>
+          <a:prstGeom prst="rect">
+            <a:avLst/>
+          </a:prstGeom>
+        </p:spPr>
+      </p:pic>
+      <p:sp>
+        <p:nvSpPr>
+          <p:cNvPr id="3" name="Rounded Rectangle 2"/>
           <p:cNvSpPr/>
           <p:nvPr/>
         </p:nvSpPr>
@@ -8174,7 +8274,7 @@
       </p:sp>
       <p:sp>
         <p:nvSpPr>
-          <p:cNvPr id="3" name="TextBox 2"/>
+          <p:cNvPr id="4" name="TextBox 3"/>
           <p:cNvSpPr txBox="1"/>
           <p:nvPr/>
         </p:nvSpPr>
@@ -8212,14 +8312,14 @@
       </p:sp>
       <p:sp>
         <p:nvSpPr>
-          <p:cNvPr id="4" name="Rounded Rectangle 3"/>
+          <p:cNvPr id="5" name="Rounded Rectangle 4"/>
           <p:cNvSpPr/>
           <p:nvPr/>
         </p:nvSpPr>
         <p:spPr>
           <a:xfrm>
             <a:off x="822960" y="1965960"/>
-            <a:ext cx="10515600" cy="841248"/>
+            <a:ext cx="8229600" cy="841248"/>
           </a:xfrm>
           <a:prstGeom prst="roundRect">
             <a:avLst>
@@ -8258,7 +8358,7 @@
       </p:sp>
       <p:sp>
         <p:nvSpPr>
-          <p:cNvPr id="5" name="Oval 4"/>
+          <p:cNvPr id="6" name="Oval 5"/>
           <p:cNvSpPr/>
           <p:nvPr/>
         </p:nvSpPr>
@@ -8310,7 +8410,7 @@
       </p:sp>
       <p:sp>
         <p:nvSpPr>
-          <p:cNvPr id="6" name="TextBox 5"/>
+          <p:cNvPr id="7" name="TextBox 6"/>
           <p:cNvSpPr txBox="1"/>
           <p:nvPr/>
         </p:nvSpPr>
@@ -8348,14 +8448,14 @@
       </p:sp>
       <p:sp>
         <p:nvSpPr>
-          <p:cNvPr id="7" name="TextBox 6"/>
+          <p:cNvPr id="8" name="TextBox 7"/>
           <p:cNvSpPr txBox="1"/>
           <p:nvPr/>
         </p:nvSpPr>
         <p:spPr>
           <a:xfrm>
             <a:off x="1691640" y="2185416"/>
-            <a:ext cx="9418320" cy="841248"/>
+            <a:ext cx="7132320" cy="841248"/>
           </a:xfrm>
           <a:prstGeom prst="rect">
             <a:avLst/>
@@ -8386,14 +8486,14 @@
       </p:sp>
       <p:sp>
         <p:nvSpPr>
-          <p:cNvPr id="8" name="Rounded Rectangle 7"/>
+          <p:cNvPr id="9" name="Rounded Rectangle 8"/>
           <p:cNvSpPr/>
           <p:nvPr/>
         </p:nvSpPr>
         <p:spPr>
           <a:xfrm>
             <a:off x="822960" y="3008376"/>
-            <a:ext cx="10515600" cy="841248"/>
+            <a:ext cx="8229600" cy="841248"/>
           </a:xfrm>
           <a:prstGeom prst="roundRect">
             <a:avLst>
@@ -8432,7 +8532,7 @@
       </p:sp>
       <p:sp>
         <p:nvSpPr>
-          <p:cNvPr id="9" name="Oval 8"/>
+          <p:cNvPr id="10" name="Oval 9"/>
           <p:cNvSpPr/>
           <p:nvPr/>
         </p:nvSpPr>
@@ -8484,7 +8584,7 @@
       </p:sp>
       <p:sp>
         <p:nvSpPr>
-          <p:cNvPr id="10" name="TextBox 9"/>
+          <p:cNvPr id="11" name="TextBox 10"/>
           <p:cNvSpPr txBox="1"/>
           <p:nvPr/>
         </p:nvSpPr>
@@ -8522,14 +8622,14 @@
       </p:sp>
       <p:sp>
         <p:nvSpPr>
-          <p:cNvPr id="11" name="TextBox 10"/>
+          <p:cNvPr id="12" name="TextBox 11"/>
           <p:cNvSpPr txBox="1"/>
           <p:nvPr/>
         </p:nvSpPr>
         <p:spPr>
           <a:xfrm>
             <a:off x="1691640" y="3227832"/>
-            <a:ext cx="9418320" cy="841248"/>
+            <a:ext cx="7132320" cy="841248"/>
           </a:xfrm>
           <a:prstGeom prst="rect">
             <a:avLst/>
@@ -8560,14 +8660,14 @@
       </p:sp>
       <p:sp>
         <p:nvSpPr>
-          <p:cNvPr id="12" name="Rounded Rectangle 11"/>
+          <p:cNvPr id="13" name="Rounded Rectangle 12"/>
           <p:cNvSpPr/>
           <p:nvPr/>
         </p:nvSpPr>
         <p:spPr>
           <a:xfrm>
             <a:off x="822960" y="4050792"/>
-            <a:ext cx="10515600" cy="841248"/>
+            <a:ext cx="8229600" cy="841248"/>
           </a:xfrm>
           <a:prstGeom prst="roundRect">
             <a:avLst>
@@ -8606,7 +8706,7 @@
       </p:sp>
       <p:sp>
         <p:nvSpPr>
-          <p:cNvPr id="13" name="Oval 12"/>
+          <p:cNvPr id="14" name="Oval 13"/>
           <p:cNvSpPr/>
           <p:nvPr/>
         </p:nvSpPr>
@@ -8658,7 +8758,7 @@
       </p:sp>
       <p:sp>
         <p:nvSpPr>
-          <p:cNvPr id="14" name="TextBox 13"/>
+          <p:cNvPr id="15" name="TextBox 14"/>
           <p:cNvSpPr txBox="1"/>
           <p:nvPr/>
         </p:nvSpPr>
@@ -8696,14 +8796,14 @@
       </p:sp>
       <p:sp>
         <p:nvSpPr>
-          <p:cNvPr id="15" name="TextBox 14"/>
+          <p:cNvPr id="16" name="TextBox 15"/>
           <p:cNvSpPr txBox="1"/>
           <p:nvPr/>
         </p:nvSpPr>
         <p:spPr>
           <a:xfrm>
             <a:off x="1691640" y="4270248"/>
-            <a:ext cx="9418320" cy="841248"/>
+            <a:ext cx="7132320" cy="841248"/>
           </a:xfrm>
           <a:prstGeom prst="rect">
             <a:avLst/>
@@ -8734,14 +8834,14 @@
       </p:sp>
       <p:sp>
         <p:nvSpPr>
-          <p:cNvPr id="16" name="Rounded Rectangle 15"/>
+          <p:cNvPr id="17" name="Rounded Rectangle 16"/>
           <p:cNvSpPr/>
           <p:nvPr/>
         </p:nvSpPr>
         <p:spPr>
           <a:xfrm>
             <a:off x="822960" y="5093208"/>
-            <a:ext cx="10515600" cy="841248"/>
+            <a:ext cx="8229600" cy="841248"/>
           </a:xfrm>
           <a:prstGeom prst="roundRect">
             <a:avLst>
@@ -8780,7 +8880,7 @@
       </p:sp>
       <p:sp>
         <p:nvSpPr>
-          <p:cNvPr id="17" name="Oval 16"/>
+          <p:cNvPr id="18" name="Oval 17"/>
           <p:cNvSpPr/>
           <p:nvPr/>
         </p:nvSpPr>
@@ -8832,7 +8932,7 @@
       </p:sp>
       <p:sp>
         <p:nvSpPr>
-          <p:cNvPr id="18" name="TextBox 17"/>
+          <p:cNvPr id="19" name="TextBox 18"/>
           <p:cNvSpPr txBox="1"/>
           <p:nvPr/>
         </p:nvSpPr>
@@ -8870,14 +8970,14 @@
       </p:sp>
       <p:sp>
         <p:nvSpPr>
-          <p:cNvPr id="19" name="TextBox 18"/>
+          <p:cNvPr id="20" name="TextBox 19"/>
           <p:cNvSpPr txBox="1"/>
           <p:nvPr/>
         </p:nvSpPr>
         <p:spPr>
           <a:xfrm>
             <a:off x="1691640" y="5312664"/>
-            <a:ext cx="9418320" cy="841248"/>
+            <a:ext cx="7132320" cy="841248"/>
           </a:xfrm>
           <a:prstGeom prst="rect">
             <a:avLst/>
@@ -8908,7 +9008,7 @@
       </p:sp>
       <p:sp>
         <p:nvSpPr>
-          <p:cNvPr id="20" name="TextBox 19"/>
+          <p:cNvPr id="21" name="TextBox 20"/>
           <p:cNvSpPr txBox="1"/>
           <p:nvPr/>
         </p:nvSpPr>
@@ -8946,7 +9046,7 @@
       </p:sp>
       <p:sp>
         <p:nvSpPr>
-          <p:cNvPr id="21" name="TextBox 20"/>
+          <p:cNvPr id="22" name="TextBox 21"/>
           <p:cNvSpPr txBox="1"/>
           <p:nvPr/>
         </p:nvSpPr>
@@ -8987,6 +9087,18 @@
   <p:clrMapOvr>
     <a:masterClrMapping/>
   </p:clrMapOvr>
+  <mc:AlternateContent xmlns:mc="http://schemas.openxmlformats.org/markup-compatibility/2006">
+    <mc:Choice xmlns:p14="http://schemas.microsoft.com/office/powerpoint/2010/main" Requires="p14">
+      <p:transition spd="slow" p14:dur="600">
+        <p:fade/>
+      </p:transition>
+    </mc:Choice>
+    <mc:Fallback>
+      <p:transition spd="slow">
+        <p:fade/>
+      </p:transition>
+    </mc:Fallback>
+  </mc:AlternateContent>
 </p:sld>
 </file>
 
@@ -9008,9 +9120,33 @@
         <p:nvPr/>
       </p:nvGrpSpPr>
       <p:grpSpPr/>
-      <p:sp>
-        <p:nvSpPr>
-          <p:cNvPr id="2" name="Rounded Rectangle 1"/>
+      <p:pic>
+        <p:nvPicPr>
+          <p:cNvPr id="2" name="Picture 1" descr="s2.png"/>
+          <p:cNvPicPr>
+            <a:picLocks noChangeAspect="1"/>
+          </p:cNvPicPr>
+          <p:nvPr/>
+        </p:nvPicPr>
+        <p:blipFill>
+          <a:blip r:embed="rId2"/>
+          <a:stretch>
+            <a:fillRect/>
+          </a:stretch>
+        </p:blipFill>
+        <p:spPr>
+          <a:xfrm>
+            <a:off x="9418320" y="3657600"/>
+            <a:ext cx="4023360" cy="4023360"/>
+          </a:xfrm>
+          <a:prstGeom prst="rect">
+            <a:avLst/>
+          </a:prstGeom>
+        </p:spPr>
+      </p:pic>
+      <p:sp>
+        <p:nvSpPr>
+          <p:cNvPr id="3" name="Rounded Rectangle 2"/>
           <p:cNvSpPr/>
           <p:nvPr/>
         </p:nvSpPr>
@@ -9064,7 +9200,7 @@
       </p:sp>
       <p:sp>
         <p:nvSpPr>
-          <p:cNvPr id="3" name="TextBox 2"/>
+          <p:cNvPr id="4" name="TextBox 3"/>
           <p:cNvSpPr txBox="1"/>
           <p:nvPr/>
         </p:nvSpPr>
@@ -9102,14 +9238,14 @@
       </p:sp>
       <p:sp>
         <p:nvSpPr>
-          <p:cNvPr id="4" name="Rounded Rectangle 3"/>
+          <p:cNvPr id="5" name="Rounded Rectangle 4"/>
           <p:cNvSpPr/>
           <p:nvPr/>
         </p:nvSpPr>
         <p:spPr>
           <a:xfrm>
             <a:off x="822960" y="1965960"/>
-            <a:ext cx="10515600" cy="841248"/>
+            <a:ext cx="8229600" cy="841248"/>
           </a:xfrm>
           <a:prstGeom prst="roundRect">
             <a:avLst>
@@ -9148,7 +9284,7 @@
       </p:sp>
       <p:sp>
         <p:nvSpPr>
-          <p:cNvPr id="5" name="Oval 4"/>
+          <p:cNvPr id="6" name="Oval 5"/>
           <p:cNvSpPr/>
           <p:nvPr/>
         </p:nvSpPr>
@@ -9200,7 +9336,7 @@
       </p:sp>
       <p:sp>
         <p:nvSpPr>
-          <p:cNvPr id="6" name="TextBox 5"/>
+          <p:cNvPr id="7" name="TextBox 6"/>
           <p:cNvSpPr txBox="1"/>
           <p:nvPr/>
         </p:nvSpPr>
@@ -9238,14 +9374,14 @@
       </p:sp>
       <p:sp>
         <p:nvSpPr>
-          <p:cNvPr id="7" name="TextBox 6"/>
+          <p:cNvPr id="8" name="TextBox 7"/>
           <p:cNvSpPr txBox="1"/>
           <p:nvPr/>
         </p:nvSpPr>
         <p:spPr>
           <a:xfrm>
             <a:off x="1691640" y="2185416"/>
-            <a:ext cx="9418320" cy="841248"/>
+            <a:ext cx="7132320" cy="841248"/>
           </a:xfrm>
           <a:prstGeom prst="rect">
             <a:avLst/>
@@ -9276,14 +9412,14 @@
       </p:sp>
       <p:sp>
         <p:nvSpPr>
-          <p:cNvPr id="8" name="Rounded Rectangle 7"/>
+          <p:cNvPr id="9" name="Rounded Rectangle 8"/>
           <p:cNvSpPr/>
           <p:nvPr/>
         </p:nvSpPr>
         <p:spPr>
           <a:xfrm>
             <a:off x="822960" y="3008376"/>
-            <a:ext cx="10515600" cy="841248"/>
+            <a:ext cx="8229600" cy="841248"/>
           </a:xfrm>
           <a:prstGeom prst="roundRect">
             <a:avLst>
@@ -9322,7 +9458,7 @@
       </p:sp>
       <p:sp>
         <p:nvSpPr>
-          <p:cNvPr id="9" name="Oval 8"/>
+          <p:cNvPr id="10" name="Oval 9"/>
           <p:cNvSpPr/>
           <p:nvPr/>
         </p:nvSpPr>
@@ -9374,7 +9510,7 @@
       </p:sp>
       <p:sp>
         <p:nvSpPr>
-          <p:cNvPr id="10" name="TextBox 9"/>
+          <p:cNvPr id="11" name="TextBox 10"/>
           <p:cNvSpPr txBox="1"/>
           <p:nvPr/>
         </p:nvSpPr>
@@ -9412,14 +9548,14 @@
       </p:sp>
       <p:sp>
         <p:nvSpPr>
-          <p:cNvPr id="11" name="TextBox 10"/>
+          <p:cNvPr id="12" name="TextBox 11"/>
           <p:cNvSpPr txBox="1"/>
           <p:nvPr/>
         </p:nvSpPr>
         <p:spPr>
           <a:xfrm>
             <a:off x="1691640" y="3227832"/>
-            <a:ext cx="9418320" cy="841248"/>
+            <a:ext cx="7132320" cy="841248"/>
           </a:xfrm>
           <a:prstGeom prst="rect">
             <a:avLst/>
@@ -9450,14 +9586,14 @@
       </p:sp>
       <p:sp>
         <p:nvSpPr>
-          <p:cNvPr id="12" name="Rounded Rectangle 11"/>
+          <p:cNvPr id="13" name="Rounded Rectangle 12"/>
           <p:cNvSpPr/>
           <p:nvPr/>
         </p:nvSpPr>
         <p:spPr>
           <a:xfrm>
             <a:off x="822960" y="4050792"/>
-            <a:ext cx="10515600" cy="841248"/>
+            <a:ext cx="8229600" cy="841248"/>
           </a:xfrm>
           <a:prstGeom prst="roundRect">
             <a:avLst>
@@ -9496,7 +9632,7 @@
       </p:sp>
       <p:sp>
         <p:nvSpPr>
-          <p:cNvPr id="13" name="Oval 12"/>
+          <p:cNvPr id="14" name="Oval 13"/>
           <p:cNvSpPr/>
           <p:nvPr/>
         </p:nvSpPr>
@@ -9548,7 +9684,7 @@
       </p:sp>
       <p:sp>
         <p:nvSpPr>
-          <p:cNvPr id="14" name="TextBox 13"/>
+          <p:cNvPr id="15" name="TextBox 14"/>
           <p:cNvSpPr txBox="1"/>
           <p:nvPr/>
         </p:nvSpPr>
@@ -9586,14 +9722,14 @@
       </p:sp>
       <p:sp>
         <p:nvSpPr>
-          <p:cNvPr id="15" name="TextBox 14"/>
+          <p:cNvPr id="16" name="TextBox 15"/>
           <p:cNvSpPr txBox="1"/>
           <p:nvPr/>
         </p:nvSpPr>
         <p:spPr>
           <a:xfrm>
             <a:off x="1691640" y="4270248"/>
-            <a:ext cx="9418320" cy="841248"/>
+            <a:ext cx="7132320" cy="841248"/>
           </a:xfrm>
           <a:prstGeom prst="rect">
             <a:avLst/>
@@ -9624,14 +9760,14 @@
       </p:sp>
       <p:sp>
         <p:nvSpPr>
-          <p:cNvPr id="16" name="Rounded Rectangle 15"/>
+          <p:cNvPr id="17" name="Rounded Rectangle 16"/>
           <p:cNvSpPr/>
           <p:nvPr/>
         </p:nvSpPr>
         <p:spPr>
           <a:xfrm>
             <a:off x="822960" y="5093208"/>
-            <a:ext cx="10515600" cy="841248"/>
+            <a:ext cx="8229600" cy="841248"/>
           </a:xfrm>
           <a:prstGeom prst="roundRect">
             <a:avLst>
@@ -9670,7 +9806,7 @@
       </p:sp>
       <p:sp>
         <p:nvSpPr>
-          <p:cNvPr id="17" name="Oval 16"/>
+          <p:cNvPr id="18" name="Oval 17"/>
           <p:cNvSpPr/>
           <p:nvPr/>
         </p:nvSpPr>
@@ -9722,7 +9858,7 @@
       </p:sp>
       <p:sp>
         <p:nvSpPr>
-          <p:cNvPr id="18" name="TextBox 17"/>
+          <p:cNvPr id="19" name="TextBox 18"/>
           <p:cNvSpPr txBox="1"/>
           <p:nvPr/>
         </p:nvSpPr>
@@ -9760,14 +9896,14 @@
       </p:sp>
       <p:sp>
         <p:nvSpPr>
-          <p:cNvPr id="19" name="TextBox 18"/>
+          <p:cNvPr id="20" name="TextBox 19"/>
           <p:cNvSpPr txBox="1"/>
           <p:nvPr/>
         </p:nvSpPr>
         <p:spPr>
           <a:xfrm>
             <a:off x="1691640" y="5312664"/>
-            <a:ext cx="9418320" cy="841248"/>
+            <a:ext cx="7132320" cy="841248"/>
           </a:xfrm>
           <a:prstGeom prst="rect">
             <a:avLst/>
@@ -9798,7 +9934,7 @@
       </p:sp>
       <p:sp>
         <p:nvSpPr>
-          <p:cNvPr id="20" name="TextBox 19"/>
+          <p:cNvPr id="21" name="TextBox 20"/>
           <p:cNvSpPr txBox="1"/>
           <p:nvPr/>
         </p:nvSpPr>
@@ -9836,7 +9972,7 @@
       </p:sp>
       <p:sp>
         <p:nvSpPr>
-          <p:cNvPr id="21" name="TextBox 20"/>
+          <p:cNvPr id="22" name="TextBox 21"/>
           <p:cNvSpPr txBox="1"/>
           <p:nvPr/>
         </p:nvSpPr>
@@ -9877,6 +10013,18 @@
   <p:clrMapOvr>
     <a:masterClrMapping/>
   </p:clrMapOvr>
+  <mc:AlternateContent xmlns:mc="http://schemas.openxmlformats.org/markup-compatibility/2006">
+    <mc:Choice xmlns:p14="http://schemas.microsoft.com/office/powerpoint/2010/main" Requires="p14">
+      <p:transition spd="slow" p14:dur="600">
+        <p:fade/>
+      </p:transition>
+    </mc:Choice>
+    <mc:Fallback>
+      <p:transition spd="slow">
+        <p:fade/>
+      </p:transition>
+    </mc:Fallback>
+  </mc:AlternateContent>
 </p:sld>
 </file>
 
@@ -9898,9 +10046,33 @@
         <p:nvPr/>
       </p:nvGrpSpPr>
       <p:grpSpPr/>
-      <p:sp>
-        <p:nvSpPr>
-          <p:cNvPr id="2" name="Rounded Rectangle 1"/>
+      <p:pic>
+        <p:nvPicPr>
+          <p:cNvPr id="2" name="Picture 1" descr="cover.png"/>
+          <p:cNvPicPr>
+            <a:picLocks noChangeAspect="1"/>
+          </p:cNvPicPr>
+          <p:nvPr/>
+        </p:nvPicPr>
+        <p:blipFill>
+          <a:blip r:embed="rId2"/>
+          <a:stretch>
+            <a:fillRect/>
+          </a:stretch>
+        </p:blipFill>
+        <p:spPr>
+          <a:xfrm>
+            <a:off x="9418320" y="3657600"/>
+            <a:ext cx="4023360" cy="4023360"/>
+          </a:xfrm>
+          <a:prstGeom prst="rect">
+            <a:avLst/>
+          </a:prstGeom>
+        </p:spPr>
+      </p:pic>
+      <p:sp>
+        <p:nvSpPr>
+          <p:cNvPr id="3" name="Rounded Rectangle 2"/>
           <p:cNvSpPr/>
           <p:nvPr/>
         </p:nvSpPr>
@@ -9954,7 +10126,7 @@
       </p:sp>
       <p:sp>
         <p:nvSpPr>
-          <p:cNvPr id="3" name="TextBox 2"/>
+          <p:cNvPr id="4" name="TextBox 3"/>
           <p:cNvSpPr txBox="1"/>
           <p:nvPr/>
         </p:nvSpPr>
@@ -9992,14 +10164,14 @@
       </p:sp>
       <p:sp>
         <p:nvSpPr>
-          <p:cNvPr id="4" name="Rounded Rectangle 3"/>
+          <p:cNvPr id="5" name="Rounded Rectangle 4"/>
           <p:cNvSpPr/>
           <p:nvPr/>
         </p:nvSpPr>
         <p:spPr>
           <a:xfrm>
             <a:off x="822960" y="1965960"/>
-            <a:ext cx="10515600" cy="841248"/>
+            <a:ext cx="8229600" cy="841248"/>
           </a:xfrm>
           <a:prstGeom prst="roundRect">
             <a:avLst>
@@ -10038,7 +10210,7 @@
       </p:sp>
       <p:sp>
         <p:nvSpPr>
-          <p:cNvPr id="5" name="Oval 4"/>
+          <p:cNvPr id="6" name="Oval 5"/>
           <p:cNvSpPr/>
           <p:nvPr/>
         </p:nvSpPr>
@@ -10090,7 +10262,7 @@
       </p:sp>
       <p:sp>
         <p:nvSpPr>
-          <p:cNvPr id="6" name="TextBox 5"/>
+          <p:cNvPr id="7" name="TextBox 6"/>
           <p:cNvSpPr txBox="1"/>
           <p:nvPr/>
         </p:nvSpPr>
@@ -10128,14 +10300,14 @@
       </p:sp>
       <p:sp>
         <p:nvSpPr>
-          <p:cNvPr id="7" name="TextBox 6"/>
+          <p:cNvPr id="8" name="TextBox 7"/>
           <p:cNvSpPr txBox="1"/>
           <p:nvPr/>
         </p:nvSpPr>
         <p:spPr>
           <a:xfrm>
             <a:off x="1691640" y="2185416"/>
-            <a:ext cx="9418320" cy="841248"/>
+            <a:ext cx="7132320" cy="841248"/>
           </a:xfrm>
           <a:prstGeom prst="rect">
             <a:avLst/>
@@ -10166,14 +10338,14 @@
       </p:sp>
       <p:sp>
         <p:nvSpPr>
-          <p:cNvPr id="8" name="Rounded Rectangle 7"/>
+          <p:cNvPr id="9" name="Rounded Rectangle 8"/>
           <p:cNvSpPr/>
           <p:nvPr/>
         </p:nvSpPr>
         <p:spPr>
           <a:xfrm>
             <a:off x="822960" y="3008376"/>
-            <a:ext cx="10515600" cy="841248"/>
+            <a:ext cx="8229600" cy="841248"/>
           </a:xfrm>
           <a:prstGeom prst="roundRect">
             <a:avLst>
@@ -10212,7 +10384,7 @@
       </p:sp>
       <p:sp>
         <p:nvSpPr>
-          <p:cNvPr id="9" name="Oval 8"/>
+          <p:cNvPr id="10" name="Oval 9"/>
           <p:cNvSpPr/>
           <p:nvPr/>
         </p:nvSpPr>
@@ -10264,7 +10436,7 @@
       </p:sp>
       <p:sp>
         <p:nvSpPr>
-          <p:cNvPr id="10" name="TextBox 9"/>
+          <p:cNvPr id="11" name="TextBox 10"/>
           <p:cNvSpPr txBox="1"/>
           <p:nvPr/>
         </p:nvSpPr>
@@ -10302,14 +10474,14 @@
       </p:sp>
       <p:sp>
         <p:nvSpPr>
-          <p:cNvPr id="11" name="TextBox 10"/>
+          <p:cNvPr id="12" name="TextBox 11"/>
           <p:cNvSpPr txBox="1"/>
           <p:nvPr/>
         </p:nvSpPr>
         <p:spPr>
           <a:xfrm>
             <a:off x="1691640" y="3227832"/>
-            <a:ext cx="9418320" cy="841248"/>
+            <a:ext cx="7132320" cy="841248"/>
           </a:xfrm>
           <a:prstGeom prst="rect">
             <a:avLst/>
@@ -10340,14 +10512,14 @@
       </p:sp>
       <p:sp>
         <p:nvSpPr>
-          <p:cNvPr id="12" name="Rounded Rectangle 11"/>
+          <p:cNvPr id="13" name="Rounded Rectangle 12"/>
           <p:cNvSpPr/>
           <p:nvPr/>
         </p:nvSpPr>
         <p:spPr>
           <a:xfrm>
             <a:off x="822960" y="4050792"/>
-            <a:ext cx="10515600" cy="841248"/>
+            <a:ext cx="8229600" cy="841248"/>
           </a:xfrm>
           <a:prstGeom prst="roundRect">
             <a:avLst>
@@ -10386,7 +10558,7 @@
       </p:sp>
       <p:sp>
         <p:nvSpPr>
-          <p:cNvPr id="13" name="Oval 12"/>
+          <p:cNvPr id="14" name="Oval 13"/>
           <p:cNvSpPr/>
           <p:nvPr/>
         </p:nvSpPr>
@@ -10438,7 +10610,7 @@
       </p:sp>
       <p:sp>
         <p:nvSpPr>
-          <p:cNvPr id="14" name="TextBox 13"/>
+          <p:cNvPr id="15" name="TextBox 14"/>
           <p:cNvSpPr txBox="1"/>
           <p:nvPr/>
         </p:nvSpPr>
@@ -10476,14 +10648,14 @@
       </p:sp>
       <p:sp>
         <p:nvSpPr>
-          <p:cNvPr id="15" name="TextBox 14"/>
+          <p:cNvPr id="16" name="TextBox 15"/>
           <p:cNvSpPr txBox="1"/>
           <p:nvPr/>
         </p:nvSpPr>
         <p:spPr>
           <a:xfrm>
             <a:off x="1691640" y="4270248"/>
-            <a:ext cx="9418320" cy="841248"/>
+            <a:ext cx="7132320" cy="841248"/>
           </a:xfrm>
           <a:prstGeom prst="rect">
             <a:avLst/>
@@ -10514,14 +10686,14 @@
       </p:sp>
       <p:sp>
         <p:nvSpPr>
-          <p:cNvPr id="16" name="Rounded Rectangle 15"/>
+          <p:cNvPr id="17" name="Rounded Rectangle 16"/>
           <p:cNvSpPr/>
           <p:nvPr/>
         </p:nvSpPr>
         <p:spPr>
           <a:xfrm>
             <a:off x="822960" y="5093208"/>
-            <a:ext cx="10515600" cy="841248"/>
+            <a:ext cx="8229600" cy="841248"/>
           </a:xfrm>
           <a:prstGeom prst="roundRect">
             <a:avLst>
@@ -10560,7 +10732,7 @@
       </p:sp>
       <p:sp>
         <p:nvSpPr>
-          <p:cNvPr id="17" name="Oval 16"/>
+          <p:cNvPr id="18" name="Oval 17"/>
           <p:cNvSpPr/>
           <p:nvPr/>
         </p:nvSpPr>
@@ -10612,7 +10784,7 @@
       </p:sp>
       <p:sp>
         <p:nvSpPr>
-          <p:cNvPr id="18" name="TextBox 17"/>
+          <p:cNvPr id="19" name="TextBox 18"/>
           <p:cNvSpPr txBox="1"/>
           <p:nvPr/>
         </p:nvSpPr>
@@ -10650,14 +10822,14 @@
       </p:sp>
       <p:sp>
         <p:nvSpPr>
-          <p:cNvPr id="19" name="TextBox 18"/>
+          <p:cNvPr id="20" name="TextBox 19"/>
           <p:cNvSpPr txBox="1"/>
           <p:nvPr/>
         </p:nvSpPr>
         <p:spPr>
           <a:xfrm>
             <a:off x="1691640" y="5312664"/>
-            <a:ext cx="9418320" cy="841248"/>
+            <a:ext cx="7132320" cy="841248"/>
           </a:xfrm>
           <a:prstGeom prst="rect">
             <a:avLst/>
@@ -10688,7 +10860,7 @@
       </p:sp>
       <p:sp>
         <p:nvSpPr>
-          <p:cNvPr id="20" name="TextBox 19"/>
+          <p:cNvPr id="21" name="TextBox 20"/>
           <p:cNvSpPr txBox="1"/>
           <p:nvPr/>
         </p:nvSpPr>
@@ -10726,7 +10898,7 @@
       </p:sp>
       <p:sp>
         <p:nvSpPr>
-          <p:cNvPr id="21" name="TextBox 20"/>
+          <p:cNvPr id="22" name="TextBox 21"/>
           <p:cNvSpPr txBox="1"/>
           <p:nvPr/>
         </p:nvSpPr>
@@ -10767,6 +10939,18 @@
   <p:clrMapOvr>
     <a:masterClrMapping/>
   </p:clrMapOvr>
+  <mc:AlternateContent xmlns:mc="http://schemas.openxmlformats.org/markup-compatibility/2006">
+    <mc:Choice xmlns:p14="http://schemas.microsoft.com/office/powerpoint/2010/main" Requires="p14">
+      <p:transition spd="slow" p14:dur="600">
+        <p:fade/>
+      </p:transition>
+    </mc:Choice>
+    <mc:Fallback>
+      <p:transition spd="slow">
+        <p:fade/>
+      </p:transition>
+    </mc:Fallback>
+  </mc:AlternateContent>
 </p:sld>
 </file>
 
@@ -10788,9 +10972,33 @@
         <p:nvPr/>
       </p:nvGrpSpPr>
       <p:grpSpPr/>
-      <p:sp>
-        <p:nvSpPr>
-          <p:cNvPr id="2" name="Rounded Rectangle 1"/>
+      <p:pic>
+        <p:nvPicPr>
+          <p:cNvPr id="2" name="Picture 1" descr="s5.png"/>
+          <p:cNvPicPr>
+            <a:picLocks noChangeAspect="1"/>
+          </p:cNvPicPr>
+          <p:nvPr/>
+        </p:nvPicPr>
+        <p:blipFill>
+          <a:blip r:embed="rId2"/>
+          <a:stretch>
+            <a:fillRect/>
+          </a:stretch>
+        </p:blipFill>
+        <p:spPr>
+          <a:xfrm>
+            <a:off x="9418320" y="3657600"/>
+            <a:ext cx="4023360" cy="4023360"/>
+          </a:xfrm>
+          <a:prstGeom prst="rect">
+            <a:avLst/>
+          </a:prstGeom>
+        </p:spPr>
+      </p:pic>
+      <p:sp>
+        <p:nvSpPr>
+          <p:cNvPr id="3" name="Rounded Rectangle 2"/>
           <p:cNvSpPr/>
           <p:nvPr/>
         </p:nvSpPr>
@@ -10844,7 +11052,7 @@
       </p:sp>
       <p:sp>
         <p:nvSpPr>
-          <p:cNvPr id="3" name="TextBox 2"/>
+          <p:cNvPr id="4" name="TextBox 3"/>
           <p:cNvSpPr txBox="1"/>
           <p:nvPr/>
         </p:nvSpPr>
@@ -10882,14 +11090,14 @@
       </p:sp>
       <p:sp>
         <p:nvSpPr>
-          <p:cNvPr id="4" name="Rounded Rectangle 3"/>
+          <p:cNvPr id="5" name="Rounded Rectangle 4"/>
           <p:cNvSpPr/>
           <p:nvPr/>
         </p:nvSpPr>
         <p:spPr>
           <a:xfrm>
             <a:off x="822960" y="1965960"/>
-            <a:ext cx="10515600" cy="841248"/>
+            <a:ext cx="8229600" cy="841248"/>
           </a:xfrm>
           <a:prstGeom prst="roundRect">
             <a:avLst>
@@ -10928,7 +11136,7 @@
       </p:sp>
       <p:sp>
         <p:nvSpPr>
-          <p:cNvPr id="5" name="Oval 4"/>
+          <p:cNvPr id="6" name="Oval 5"/>
           <p:cNvSpPr/>
           <p:nvPr/>
         </p:nvSpPr>
@@ -10980,7 +11188,7 @@
       </p:sp>
       <p:sp>
         <p:nvSpPr>
-          <p:cNvPr id="6" name="TextBox 5"/>
+          <p:cNvPr id="7" name="TextBox 6"/>
           <p:cNvSpPr txBox="1"/>
           <p:nvPr/>
         </p:nvSpPr>
@@ -11018,14 +11226,14 @@
       </p:sp>
       <p:sp>
         <p:nvSpPr>
-          <p:cNvPr id="7" name="TextBox 6"/>
+          <p:cNvPr id="8" name="TextBox 7"/>
           <p:cNvSpPr txBox="1"/>
           <p:nvPr/>
         </p:nvSpPr>
         <p:spPr>
           <a:xfrm>
             <a:off x="1691640" y="2185416"/>
-            <a:ext cx="9418320" cy="841248"/>
+            <a:ext cx="7132320" cy="841248"/>
           </a:xfrm>
           <a:prstGeom prst="rect">
             <a:avLst/>
@@ -11056,14 +11264,14 @@
       </p:sp>
       <p:sp>
         <p:nvSpPr>
-          <p:cNvPr id="8" name="Rounded Rectangle 7"/>
+          <p:cNvPr id="9" name="Rounded Rectangle 8"/>
           <p:cNvSpPr/>
           <p:nvPr/>
         </p:nvSpPr>
         <p:spPr>
           <a:xfrm>
             <a:off x="822960" y="3008376"/>
-            <a:ext cx="10515600" cy="841248"/>
+            <a:ext cx="8229600" cy="841248"/>
           </a:xfrm>
           <a:prstGeom prst="roundRect">
             <a:avLst>
@@ -11102,7 +11310,7 @@
       </p:sp>
       <p:sp>
         <p:nvSpPr>
-          <p:cNvPr id="9" name="Oval 8"/>
+          <p:cNvPr id="10" name="Oval 9"/>
           <p:cNvSpPr/>
           <p:nvPr/>
         </p:nvSpPr>
@@ -11154,7 +11362,7 @@
       </p:sp>
       <p:sp>
         <p:nvSpPr>
-          <p:cNvPr id="10" name="TextBox 9"/>
+          <p:cNvPr id="11" name="TextBox 10"/>
           <p:cNvSpPr txBox="1"/>
           <p:nvPr/>
         </p:nvSpPr>
@@ -11192,14 +11400,14 @@
       </p:sp>
       <p:sp>
         <p:nvSpPr>
-          <p:cNvPr id="11" name="TextBox 10"/>
+          <p:cNvPr id="12" name="TextBox 11"/>
           <p:cNvSpPr txBox="1"/>
           <p:nvPr/>
         </p:nvSpPr>
         <p:spPr>
           <a:xfrm>
             <a:off x="1691640" y="3227832"/>
-            <a:ext cx="9418320" cy="841248"/>
+            <a:ext cx="7132320" cy="841248"/>
           </a:xfrm>
           <a:prstGeom prst="rect">
             <a:avLst/>
@@ -11230,14 +11438,14 @@
       </p:sp>
       <p:sp>
         <p:nvSpPr>
-          <p:cNvPr id="12" name="Rounded Rectangle 11"/>
+          <p:cNvPr id="13" name="Rounded Rectangle 12"/>
           <p:cNvSpPr/>
           <p:nvPr/>
         </p:nvSpPr>
         <p:spPr>
           <a:xfrm>
             <a:off x="822960" y="4050792"/>
-            <a:ext cx="10515600" cy="841248"/>
+            <a:ext cx="8229600" cy="841248"/>
           </a:xfrm>
           <a:prstGeom prst="roundRect">
             <a:avLst>
@@ -11276,7 +11484,7 @@
       </p:sp>
       <p:sp>
         <p:nvSpPr>
-          <p:cNvPr id="13" name="Oval 12"/>
+          <p:cNvPr id="14" name="Oval 13"/>
           <p:cNvSpPr/>
           <p:nvPr/>
         </p:nvSpPr>
@@ -11328,7 +11536,7 @@
       </p:sp>
       <p:sp>
         <p:nvSpPr>
-          <p:cNvPr id="14" name="TextBox 13"/>
+          <p:cNvPr id="15" name="TextBox 14"/>
           <p:cNvSpPr txBox="1"/>
           <p:nvPr/>
         </p:nvSpPr>
@@ -11366,14 +11574,14 @@
       </p:sp>
       <p:sp>
         <p:nvSpPr>
-          <p:cNvPr id="15" name="TextBox 14"/>
+          <p:cNvPr id="16" name="TextBox 15"/>
           <p:cNvSpPr txBox="1"/>
           <p:nvPr/>
         </p:nvSpPr>
         <p:spPr>
           <a:xfrm>
             <a:off x="1691640" y="4270248"/>
-            <a:ext cx="9418320" cy="841248"/>
+            <a:ext cx="7132320" cy="841248"/>
           </a:xfrm>
           <a:prstGeom prst="rect">
             <a:avLst/>
@@ -11404,14 +11612,14 @@
       </p:sp>
       <p:sp>
         <p:nvSpPr>
-          <p:cNvPr id="16" name="Rounded Rectangle 15"/>
+          <p:cNvPr id="17" name="Rounded Rectangle 16"/>
           <p:cNvSpPr/>
           <p:nvPr/>
         </p:nvSpPr>
         <p:spPr>
           <a:xfrm>
             <a:off x="822960" y="5093208"/>
-            <a:ext cx="10515600" cy="841248"/>
+            <a:ext cx="8229600" cy="841248"/>
           </a:xfrm>
           <a:prstGeom prst="roundRect">
             <a:avLst>
@@ -11450,7 +11658,7 @@
       </p:sp>
       <p:sp>
         <p:nvSpPr>
-          <p:cNvPr id="17" name="Oval 16"/>
+          <p:cNvPr id="18" name="Oval 17"/>
           <p:cNvSpPr/>
           <p:nvPr/>
         </p:nvSpPr>
@@ -11502,7 +11710,7 @@
       </p:sp>
       <p:sp>
         <p:nvSpPr>
-          <p:cNvPr id="18" name="TextBox 17"/>
+          <p:cNvPr id="19" name="TextBox 18"/>
           <p:cNvSpPr txBox="1"/>
           <p:nvPr/>
         </p:nvSpPr>
@@ -11540,14 +11748,14 @@
       </p:sp>
       <p:sp>
         <p:nvSpPr>
-          <p:cNvPr id="19" name="TextBox 18"/>
+          <p:cNvPr id="20" name="TextBox 19"/>
           <p:cNvSpPr txBox="1"/>
           <p:nvPr/>
         </p:nvSpPr>
         <p:spPr>
           <a:xfrm>
             <a:off x="1691640" y="5312664"/>
-            <a:ext cx="9418320" cy="841248"/>
+            <a:ext cx="7132320" cy="841248"/>
           </a:xfrm>
           <a:prstGeom prst="rect">
             <a:avLst/>
@@ -11578,7 +11786,7 @@
       </p:sp>
       <p:sp>
         <p:nvSpPr>
-          <p:cNvPr id="20" name="TextBox 19"/>
+          <p:cNvPr id="21" name="TextBox 20"/>
           <p:cNvSpPr txBox="1"/>
           <p:nvPr/>
         </p:nvSpPr>
@@ -11616,7 +11824,7 @@
       </p:sp>
       <p:sp>
         <p:nvSpPr>
-          <p:cNvPr id="21" name="TextBox 20"/>
+          <p:cNvPr id="22" name="TextBox 21"/>
           <p:cNvSpPr txBox="1"/>
           <p:nvPr/>
         </p:nvSpPr>
@@ -11657,6 +11865,18 @@
   <p:clrMapOvr>
     <a:masterClrMapping/>
   </p:clrMapOvr>
+  <mc:AlternateContent xmlns:mc="http://schemas.openxmlformats.org/markup-compatibility/2006">
+    <mc:Choice xmlns:p14="http://schemas.microsoft.com/office/powerpoint/2010/main" Requires="p14">
+      <p:transition spd="slow" p14:dur="600">
+        <p:fade/>
+      </p:transition>
+    </mc:Choice>
+    <mc:Fallback>
+      <p:transition spd="slow">
+        <p:fade/>
+      </p:transition>
+    </mc:Fallback>
+  </mc:AlternateContent>
 </p:sld>
 </file>
 
@@ -12263,6 +12483,18 @@
   <p:clrMapOvr>
     <a:masterClrMapping/>
   </p:clrMapOvr>
+  <mc:AlternateContent xmlns:mc="http://schemas.openxmlformats.org/markup-compatibility/2006">
+    <mc:Choice xmlns:p14="http://schemas.microsoft.com/office/powerpoint/2010/main" Requires="p14">
+      <p:transition spd="slow" p14:dur="600">
+        <p:fade/>
+      </p:transition>
+    </mc:Choice>
+    <mc:Fallback>
+      <p:transition spd="slow">
+        <p:fade/>
+      </p:transition>
+    </mc:Fallback>
+  </mc:AlternateContent>
 </p:sld>
 </file>
 
@@ -12945,6 +13177,18 @@
   <p:clrMapOvr>
     <a:masterClrMapping/>
   </p:clrMapOvr>
+  <mc:AlternateContent xmlns:mc="http://schemas.openxmlformats.org/markup-compatibility/2006">
+    <mc:Choice xmlns:p14="http://schemas.microsoft.com/office/powerpoint/2010/main" Requires="p14">
+      <p:transition spd="slow" p14:dur="600">
+        <p:fade/>
+      </p:transition>
+    </mc:Choice>
+    <mc:Fallback>
+      <p:transition spd="slow">
+        <p:fade/>
+      </p:transition>
+    </mc:Fallback>
+  </mc:AlternateContent>
 </p:sld>
 </file>
 
@@ -13627,6 +13871,18 @@
   <p:clrMapOvr>
     <a:masterClrMapping/>
   </p:clrMapOvr>
+  <mc:AlternateContent xmlns:mc="http://schemas.openxmlformats.org/markup-compatibility/2006">
+    <mc:Choice xmlns:p14="http://schemas.microsoft.com/office/powerpoint/2010/main" Requires="p14">
+      <p:transition spd="slow" p14:dur="600">
+        <p:fade/>
+      </p:transition>
+    </mc:Choice>
+    <mc:Fallback>
+      <p:transition spd="slow">
+        <p:fade/>
+      </p:transition>
+    </mc:Fallback>
+  </mc:AlternateContent>
 </p:sld>
 </file>
 
@@ -13648,9 +13904,33 @@
         <p:nvPr/>
       </p:nvGrpSpPr>
       <p:grpSpPr/>
-      <p:sp>
-        <p:nvSpPr>
-          <p:cNvPr id="2" name="Rounded Rectangle 1"/>
+      <p:pic>
+        <p:nvPicPr>
+          <p:cNvPr id="2" name="Picture 1" descr="s2.png"/>
+          <p:cNvPicPr>
+            <a:picLocks noChangeAspect="1"/>
+          </p:cNvPicPr>
+          <p:nvPr/>
+        </p:nvPicPr>
+        <p:blipFill>
+          <a:blip r:embed="rId2"/>
+          <a:stretch>
+            <a:fillRect/>
+          </a:stretch>
+        </p:blipFill>
+        <p:spPr>
+          <a:xfrm>
+            <a:off x="9418320" y="3657600"/>
+            <a:ext cx="4023360" cy="4023360"/>
+          </a:xfrm>
+          <a:prstGeom prst="rect">
+            <a:avLst/>
+          </a:prstGeom>
+        </p:spPr>
+      </p:pic>
+      <p:sp>
+        <p:nvSpPr>
+          <p:cNvPr id="3" name="Rounded Rectangle 2"/>
           <p:cNvSpPr/>
           <p:nvPr/>
         </p:nvSpPr>
@@ -13704,7 +13984,7 @@
       </p:sp>
       <p:sp>
         <p:nvSpPr>
-          <p:cNvPr id="3" name="TextBox 2"/>
+          <p:cNvPr id="4" name="TextBox 3"/>
           <p:cNvSpPr txBox="1"/>
           <p:nvPr/>
         </p:nvSpPr>
@@ -13742,14 +14022,14 @@
       </p:sp>
       <p:sp>
         <p:nvSpPr>
-          <p:cNvPr id="4" name="Rounded Rectangle 3"/>
+          <p:cNvPr id="5" name="Rounded Rectangle 4"/>
           <p:cNvSpPr/>
           <p:nvPr/>
         </p:nvSpPr>
         <p:spPr>
           <a:xfrm>
             <a:off x="822960" y="1965960"/>
-            <a:ext cx="10515600" cy="841248"/>
+            <a:ext cx="8229600" cy="841248"/>
           </a:xfrm>
           <a:prstGeom prst="roundRect">
             <a:avLst>
@@ -13788,7 +14068,7 @@
       </p:sp>
       <p:sp>
         <p:nvSpPr>
-          <p:cNvPr id="5" name="Oval 4"/>
+          <p:cNvPr id="6" name="Oval 5"/>
           <p:cNvSpPr/>
           <p:nvPr/>
         </p:nvSpPr>
@@ -13840,7 +14120,7 @@
       </p:sp>
       <p:sp>
         <p:nvSpPr>
-          <p:cNvPr id="6" name="TextBox 5"/>
+          <p:cNvPr id="7" name="TextBox 6"/>
           <p:cNvSpPr txBox="1"/>
           <p:nvPr/>
         </p:nvSpPr>
@@ -13878,14 +14158,14 @@
       </p:sp>
       <p:sp>
         <p:nvSpPr>
-          <p:cNvPr id="7" name="TextBox 6"/>
+          <p:cNvPr id="8" name="TextBox 7"/>
           <p:cNvSpPr txBox="1"/>
           <p:nvPr/>
         </p:nvSpPr>
         <p:spPr>
           <a:xfrm>
             <a:off x="1691640" y="2185416"/>
-            <a:ext cx="9418320" cy="841248"/>
+            <a:ext cx="7132320" cy="841248"/>
           </a:xfrm>
           <a:prstGeom prst="rect">
             <a:avLst/>
@@ -13916,14 +14196,14 @@
       </p:sp>
       <p:sp>
         <p:nvSpPr>
-          <p:cNvPr id="8" name="Rounded Rectangle 7"/>
+          <p:cNvPr id="9" name="Rounded Rectangle 8"/>
           <p:cNvSpPr/>
           <p:nvPr/>
         </p:nvSpPr>
         <p:spPr>
           <a:xfrm>
             <a:off x="822960" y="3008376"/>
-            <a:ext cx="10515600" cy="841248"/>
+            <a:ext cx="8229600" cy="841248"/>
           </a:xfrm>
           <a:prstGeom prst="roundRect">
             <a:avLst>
@@ -13962,7 +14242,7 @@
       </p:sp>
       <p:sp>
         <p:nvSpPr>
-          <p:cNvPr id="9" name="Oval 8"/>
+          <p:cNvPr id="10" name="Oval 9"/>
           <p:cNvSpPr/>
           <p:nvPr/>
         </p:nvSpPr>
@@ -14014,7 +14294,7 @@
       </p:sp>
       <p:sp>
         <p:nvSpPr>
-          <p:cNvPr id="10" name="TextBox 9"/>
+          <p:cNvPr id="11" name="TextBox 10"/>
           <p:cNvSpPr txBox="1"/>
           <p:nvPr/>
         </p:nvSpPr>
@@ -14052,14 +14332,14 @@
       </p:sp>
       <p:sp>
         <p:nvSpPr>
-          <p:cNvPr id="11" name="TextBox 10"/>
+          <p:cNvPr id="12" name="TextBox 11"/>
           <p:cNvSpPr txBox="1"/>
           <p:nvPr/>
         </p:nvSpPr>
         <p:spPr>
           <a:xfrm>
             <a:off x="1691640" y="3227832"/>
-            <a:ext cx="9418320" cy="841248"/>
+            <a:ext cx="7132320" cy="841248"/>
           </a:xfrm>
           <a:prstGeom prst="rect">
             <a:avLst/>
@@ -14090,14 +14370,14 @@
       </p:sp>
       <p:sp>
         <p:nvSpPr>
-          <p:cNvPr id="12" name="Rounded Rectangle 11"/>
+          <p:cNvPr id="13" name="Rounded Rectangle 12"/>
           <p:cNvSpPr/>
           <p:nvPr/>
         </p:nvSpPr>
         <p:spPr>
           <a:xfrm>
             <a:off x="822960" y="4050792"/>
-            <a:ext cx="10515600" cy="841248"/>
+            <a:ext cx="8229600" cy="841248"/>
           </a:xfrm>
           <a:prstGeom prst="roundRect">
             <a:avLst>
@@ -14136,7 +14416,7 @@
       </p:sp>
       <p:sp>
         <p:nvSpPr>
-          <p:cNvPr id="13" name="Oval 12"/>
+          <p:cNvPr id="14" name="Oval 13"/>
           <p:cNvSpPr/>
           <p:nvPr/>
         </p:nvSpPr>
@@ -14188,7 +14468,7 @@
       </p:sp>
       <p:sp>
         <p:nvSpPr>
-          <p:cNvPr id="14" name="TextBox 13"/>
+          <p:cNvPr id="15" name="TextBox 14"/>
           <p:cNvSpPr txBox="1"/>
           <p:nvPr/>
         </p:nvSpPr>
@@ -14226,14 +14506,14 @@
       </p:sp>
       <p:sp>
         <p:nvSpPr>
-          <p:cNvPr id="15" name="TextBox 14"/>
+          <p:cNvPr id="16" name="TextBox 15"/>
           <p:cNvSpPr txBox="1"/>
           <p:nvPr/>
         </p:nvSpPr>
         <p:spPr>
           <a:xfrm>
             <a:off x="1691640" y="4270248"/>
-            <a:ext cx="9418320" cy="841248"/>
+            <a:ext cx="7132320" cy="841248"/>
           </a:xfrm>
           <a:prstGeom prst="rect">
             <a:avLst/>
@@ -14264,14 +14544,14 @@
       </p:sp>
       <p:sp>
         <p:nvSpPr>
-          <p:cNvPr id="16" name="Rounded Rectangle 15"/>
+          <p:cNvPr id="17" name="Rounded Rectangle 16"/>
           <p:cNvSpPr/>
           <p:nvPr/>
         </p:nvSpPr>
         <p:spPr>
           <a:xfrm>
             <a:off x="822960" y="5093208"/>
-            <a:ext cx="10515600" cy="841248"/>
+            <a:ext cx="8229600" cy="841248"/>
           </a:xfrm>
           <a:prstGeom prst="roundRect">
             <a:avLst>
@@ -14310,7 +14590,7 @@
       </p:sp>
       <p:sp>
         <p:nvSpPr>
-          <p:cNvPr id="17" name="Oval 16"/>
+          <p:cNvPr id="18" name="Oval 17"/>
           <p:cNvSpPr/>
           <p:nvPr/>
         </p:nvSpPr>
@@ -14362,7 +14642,7 @@
       </p:sp>
       <p:sp>
         <p:nvSpPr>
-          <p:cNvPr id="18" name="TextBox 17"/>
+          <p:cNvPr id="19" name="TextBox 18"/>
           <p:cNvSpPr txBox="1"/>
           <p:nvPr/>
         </p:nvSpPr>
@@ -14400,14 +14680,14 @@
       </p:sp>
       <p:sp>
         <p:nvSpPr>
-          <p:cNvPr id="19" name="TextBox 18"/>
+          <p:cNvPr id="20" name="TextBox 19"/>
           <p:cNvSpPr txBox="1"/>
           <p:nvPr/>
         </p:nvSpPr>
         <p:spPr>
           <a:xfrm>
             <a:off x="1691640" y="5312664"/>
-            <a:ext cx="9418320" cy="841248"/>
+            <a:ext cx="7132320" cy="841248"/>
           </a:xfrm>
           <a:prstGeom prst="rect">
             <a:avLst/>
@@ -14438,7 +14718,7 @@
       </p:sp>
       <p:sp>
         <p:nvSpPr>
-          <p:cNvPr id="20" name="TextBox 19"/>
+          <p:cNvPr id="21" name="TextBox 20"/>
           <p:cNvSpPr txBox="1"/>
           <p:nvPr/>
         </p:nvSpPr>
@@ -14476,7 +14756,7 @@
       </p:sp>
       <p:sp>
         <p:nvSpPr>
-          <p:cNvPr id="21" name="TextBox 20"/>
+          <p:cNvPr id="22" name="TextBox 21"/>
           <p:cNvSpPr txBox="1"/>
           <p:nvPr/>
         </p:nvSpPr>
@@ -14517,6 +14797,18 @@
   <p:clrMapOvr>
     <a:masterClrMapping/>
   </p:clrMapOvr>
+  <mc:AlternateContent xmlns:mc="http://schemas.openxmlformats.org/markup-compatibility/2006">
+    <mc:Choice xmlns:p14="http://schemas.microsoft.com/office/powerpoint/2010/main" Requires="p14">
+      <p:transition spd="slow" p14:dur="600">
+        <p:fade/>
+      </p:transition>
+    </mc:Choice>
+    <mc:Fallback>
+      <p:transition spd="slow">
+        <p:fade/>
+      </p:transition>
+    </mc:Fallback>
+  </mc:AlternateContent>
 </p:sld>
 </file>
 

--- a/presentation-polka/presentation.pptx
+++ b/presentation-polka/presentation.pptx
@@ -4314,8 +4314,8 @@
         </p:blipFill>
         <p:spPr>
           <a:xfrm>
-            <a:off x="6949440" y="-548640"/>
-            <a:ext cx="6035040" cy="6035040"/>
+            <a:off x="0" y="0"/>
+            <a:ext cx="12191695" cy="6858000"/>
           </a:xfrm>
           <a:prstGeom prst="rect">
             <a:avLst/>
@@ -4492,22 +4492,24 @@
       <p:grpSpPr/>
       <p:pic>
         <p:nvPicPr>
-          <p:cNvPr id="2" name="Picture 1" descr="s10.png"/>
+          <p:cNvPr id="2" name="Picture 1" descr="grid.png"/>
           <p:cNvPicPr>
             <a:picLocks noChangeAspect="1"/>
           </p:cNvPicPr>
           <p:nvPr/>
         </p:nvPicPr>
         <p:blipFill>
-          <a:blip r:embed="rId2"/>
+          <a:blip r:embed="rId2">
+            <a:alphaModFix amt="42000"/>
+          </a:blip>
           <a:stretch>
             <a:fillRect/>
           </a:stretch>
         </p:blipFill>
         <p:spPr>
           <a:xfrm>
-            <a:off x="9418320" y="3657600"/>
-            <a:ext cx="4023360" cy="4023360"/>
+            <a:off x="0" y="0"/>
+            <a:ext cx="12191695" cy="6858000"/>
           </a:xfrm>
           <a:prstGeom prst="rect">
             <a:avLst/>
@@ -4615,7 +4617,7 @@
         <p:spPr>
           <a:xfrm>
             <a:off x="822960" y="1965960"/>
-            <a:ext cx="8229600" cy="841248"/>
+            <a:ext cx="10515600" cy="841248"/>
           </a:xfrm>
           <a:prstGeom prst="roundRect">
             <a:avLst>
@@ -4751,7 +4753,7 @@
         <p:spPr>
           <a:xfrm>
             <a:off x="1691640" y="2185416"/>
-            <a:ext cx="7132320" cy="841248"/>
+            <a:ext cx="9326880" cy="841248"/>
           </a:xfrm>
           <a:prstGeom prst="rect">
             <a:avLst/>
@@ -4789,7 +4791,7 @@
         <p:spPr>
           <a:xfrm>
             <a:off x="822960" y="3008376"/>
-            <a:ext cx="8229600" cy="841248"/>
+            <a:ext cx="10515600" cy="841248"/>
           </a:xfrm>
           <a:prstGeom prst="roundRect">
             <a:avLst>
@@ -4925,7 +4927,7 @@
         <p:spPr>
           <a:xfrm>
             <a:off x="1691640" y="3227832"/>
-            <a:ext cx="7132320" cy="841248"/>
+            <a:ext cx="9326880" cy="841248"/>
           </a:xfrm>
           <a:prstGeom prst="rect">
             <a:avLst/>
@@ -4963,7 +4965,7 @@
         <p:spPr>
           <a:xfrm>
             <a:off x="822960" y="4050792"/>
-            <a:ext cx="8229600" cy="841248"/>
+            <a:ext cx="10515600" cy="841248"/>
           </a:xfrm>
           <a:prstGeom prst="roundRect">
             <a:avLst>
@@ -5099,7 +5101,7 @@
         <p:spPr>
           <a:xfrm>
             <a:off x="1691640" y="4270248"/>
-            <a:ext cx="7132320" cy="841248"/>
+            <a:ext cx="9326880" cy="841248"/>
           </a:xfrm>
           <a:prstGeom prst="rect">
             <a:avLst/>
@@ -5137,7 +5139,7 @@
         <p:spPr>
           <a:xfrm>
             <a:off x="822960" y="5093208"/>
-            <a:ext cx="8229600" cy="841248"/>
+            <a:ext cx="10515600" cy="841248"/>
           </a:xfrm>
           <a:prstGeom prst="roundRect">
             <a:avLst>
@@ -5273,7 +5275,7 @@
         <p:spPr>
           <a:xfrm>
             <a:off x="1691640" y="5312664"/>
-            <a:ext cx="7132320" cy="841248"/>
+            <a:ext cx="9326880" cy="841248"/>
           </a:xfrm>
           <a:prstGeom prst="rect">
             <a:avLst/>
@@ -5418,22 +5420,24 @@
       <p:grpSpPr/>
       <p:pic>
         <p:nvPicPr>
-          <p:cNvPr id="2" name="Picture 1" descr="s11.png"/>
+          <p:cNvPr id="2" name="Picture 1" descr="mesh.png"/>
           <p:cNvPicPr>
             <a:picLocks noChangeAspect="1"/>
           </p:cNvPicPr>
           <p:nvPr/>
         </p:nvPicPr>
         <p:blipFill>
-          <a:blip r:embed="rId2"/>
+          <a:blip r:embed="rId2">
+            <a:alphaModFix amt="42000"/>
+          </a:blip>
           <a:stretch>
             <a:fillRect/>
           </a:stretch>
         </p:blipFill>
         <p:spPr>
           <a:xfrm>
-            <a:off x="9418320" y="3657600"/>
-            <a:ext cx="4023360" cy="4023360"/>
+            <a:off x="0" y="0"/>
+            <a:ext cx="12191695" cy="6858000"/>
           </a:xfrm>
           <a:prstGeom prst="rect">
             <a:avLst/>
@@ -5541,7 +5545,7 @@
         <p:spPr>
           <a:xfrm>
             <a:off x="822960" y="1965960"/>
-            <a:ext cx="8229600" cy="841248"/>
+            <a:ext cx="10515600" cy="841248"/>
           </a:xfrm>
           <a:prstGeom prst="roundRect">
             <a:avLst>
@@ -5677,7 +5681,7 @@
         <p:spPr>
           <a:xfrm>
             <a:off x="1691640" y="2185416"/>
-            <a:ext cx="7132320" cy="841248"/>
+            <a:ext cx="9326880" cy="841248"/>
           </a:xfrm>
           <a:prstGeom prst="rect">
             <a:avLst/>
@@ -5715,7 +5719,7 @@
         <p:spPr>
           <a:xfrm>
             <a:off x="822960" y="3008376"/>
-            <a:ext cx="8229600" cy="841248"/>
+            <a:ext cx="10515600" cy="841248"/>
           </a:xfrm>
           <a:prstGeom prst="roundRect">
             <a:avLst>
@@ -5851,7 +5855,7 @@
         <p:spPr>
           <a:xfrm>
             <a:off x="1691640" y="3227832"/>
-            <a:ext cx="7132320" cy="841248"/>
+            <a:ext cx="9326880" cy="841248"/>
           </a:xfrm>
           <a:prstGeom prst="rect">
             <a:avLst/>
@@ -5889,7 +5893,7 @@
         <p:spPr>
           <a:xfrm>
             <a:off x="822960" y="4050792"/>
-            <a:ext cx="8229600" cy="841248"/>
+            <a:ext cx="10515600" cy="841248"/>
           </a:xfrm>
           <a:prstGeom prst="roundRect">
             <a:avLst>
@@ -6025,7 +6029,7 @@
         <p:spPr>
           <a:xfrm>
             <a:off x="1691640" y="4270248"/>
-            <a:ext cx="7132320" cy="841248"/>
+            <a:ext cx="9326880" cy="841248"/>
           </a:xfrm>
           <a:prstGeom prst="rect">
             <a:avLst/>
@@ -6063,7 +6067,7 @@
         <p:spPr>
           <a:xfrm>
             <a:off x="822960" y="5093208"/>
-            <a:ext cx="8229600" cy="841248"/>
+            <a:ext cx="10515600" cy="841248"/>
           </a:xfrm>
           <a:prstGeom prst="roundRect">
             <a:avLst>
@@ -6199,7 +6203,7 @@
         <p:spPr>
           <a:xfrm>
             <a:off x="1691640" y="5312664"/>
-            <a:ext cx="7132320" cy="841248"/>
+            <a:ext cx="9326880" cy="841248"/>
           </a:xfrm>
           <a:prstGeom prst="rect">
             <a:avLst/>
@@ -6344,22 +6348,24 @@
       <p:grpSpPr/>
       <p:pic>
         <p:nvPicPr>
-          <p:cNvPr id="2" name="Picture 1" descr="s11.png"/>
+          <p:cNvPr id="2" name="Picture 1" descr="waves.png"/>
           <p:cNvPicPr>
             <a:picLocks noChangeAspect="1"/>
           </p:cNvPicPr>
           <p:nvPr/>
         </p:nvPicPr>
         <p:blipFill>
-          <a:blip r:embed="rId2"/>
+          <a:blip r:embed="rId2">
+            <a:alphaModFix amt="42000"/>
+          </a:blip>
           <a:stretch>
             <a:fillRect/>
           </a:stretch>
         </p:blipFill>
         <p:spPr>
           <a:xfrm>
-            <a:off x="9418320" y="3657600"/>
-            <a:ext cx="4023360" cy="4023360"/>
+            <a:off x="0" y="0"/>
+            <a:ext cx="12191695" cy="6858000"/>
           </a:xfrm>
           <a:prstGeom prst="rect">
             <a:avLst/>
@@ -6467,7 +6473,7 @@
         <p:spPr>
           <a:xfrm>
             <a:off x="822960" y="1965960"/>
-            <a:ext cx="8229600" cy="841248"/>
+            <a:ext cx="10515600" cy="841248"/>
           </a:xfrm>
           <a:prstGeom prst="roundRect">
             <a:avLst>
@@ -6603,7 +6609,7 @@
         <p:spPr>
           <a:xfrm>
             <a:off x="1691640" y="2185416"/>
-            <a:ext cx="7132320" cy="841248"/>
+            <a:ext cx="9326880" cy="841248"/>
           </a:xfrm>
           <a:prstGeom prst="rect">
             <a:avLst/>
@@ -6641,7 +6647,7 @@
         <p:spPr>
           <a:xfrm>
             <a:off x="822960" y="3008376"/>
-            <a:ext cx="8229600" cy="841248"/>
+            <a:ext cx="10515600" cy="841248"/>
           </a:xfrm>
           <a:prstGeom prst="roundRect">
             <a:avLst>
@@ -6777,7 +6783,7 @@
         <p:spPr>
           <a:xfrm>
             <a:off x="1691640" y="3227832"/>
-            <a:ext cx="7132320" cy="841248"/>
+            <a:ext cx="9326880" cy="841248"/>
           </a:xfrm>
           <a:prstGeom prst="rect">
             <a:avLst/>
@@ -6815,7 +6821,7 @@
         <p:spPr>
           <a:xfrm>
             <a:off x="822960" y="4050792"/>
-            <a:ext cx="8229600" cy="841248"/>
+            <a:ext cx="10515600" cy="841248"/>
           </a:xfrm>
           <a:prstGeom prst="roundRect">
             <a:avLst>
@@ -6951,7 +6957,7 @@
         <p:spPr>
           <a:xfrm>
             <a:off x="1691640" y="4270248"/>
-            <a:ext cx="7132320" cy="841248"/>
+            <a:ext cx="9326880" cy="841248"/>
           </a:xfrm>
           <a:prstGeom prst="rect">
             <a:avLst/>
@@ -6989,7 +6995,7 @@
         <p:spPr>
           <a:xfrm>
             <a:off x="822960" y="5093208"/>
-            <a:ext cx="8229600" cy="841248"/>
+            <a:ext cx="10515600" cy="841248"/>
           </a:xfrm>
           <a:prstGeom prst="roundRect">
             <a:avLst>
@@ -7125,7 +7131,7 @@
         <p:spPr>
           <a:xfrm>
             <a:off x="1691640" y="5312664"/>
-            <a:ext cx="7132320" cy="841248"/>
+            <a:ext cx="9326880" cy="841248"/>
           </a:xfrm>
           <a:prstGeom prst="rect">
             <a:avLst/>
@@ -7270,22 +7276,24 @@
       <p:grpSpPr/>
       <p:pic>
         <p:nvPicPr>
-          <p:cNvPr id="2" name="Picture 1" descr="cover.png"/>
+          <p:cNvPr id="2" name="Picture 1" descr="rings.png"/>
           <p:cNvPicPr>
             <a:picLocks noChangeAspect="1"/>
           </p:cNvPicPr>
           <p:nvPr/>
         </p:nvPicPr>
         <p:blipFill>
-          <a:blip r:embed="rId2"/>
+          <a:blip r:embed="rId2">
+            <a:alphaModFix amt="42000"/>
+          </a:blip>
           <a:stretch>
             <a:fillRect/>
           </a:stretch>
         </p:blipFill>
         <p:spPr>
           <a:xfrm>
-            <a:off x="9418320" y="3657600"/>
-            <a:ext cx="4023360" cy="4023360"/>
+            <a:off x="0" y="0"/>
+            <a:ext cx="12191695" cy="6858000"/>
           </a:xfrm>
           <a:prstGeom prst="rect">
             <a:avLst/>
@@ -7393,7 +7401,7 @@
         <p:spPr>
           <a:xfrm>
             <a:off x="822960" y="1965960"/>
-            <a:ext cx="8229600" cy="841248"/>
+            <a:ext cx="10515600" cy="841248"/>
           </a:xfrm>
           <a:prstGeom prst="roundRect">
             <a:avLst>
@@ -7529,7 +7537,7 @@
         <p:spPr>
           <a:xfrm>
             <a:off x="1691640" y="2185416"/>
-            <a:ext cx="7132320" cy="841248"/>
+            <a:ext cx="9326880" cy="841248"/>
           </a:xfrm>
           <a:prstGeom prst="rect">
             <a:avLst/>
@@ -7567,7 +7575,7 @@
         <p:spPr>
           <a:xfrm>
             <a:off x="822960" y="3008376"/>
-            <a:ext cx="8229600" cy="841248"/>
+            <a:ext cx="10515600" cy="841248"/>
           </a:xfrm>
           <a:prstGeom prst="roundRect">
             <a:avLst>
@@ -7703,7 +7711,7 @@
         <p:spPr>
           <a:xfrm>
             <a:off x="1691640" y="3227832"/>
-            <a:ext cx="7132320" cy="841248"/>
+            <a:ext cx="9326880" cy="841248"/>
           </a:xfrm>
           <a:prstGeom prst="rect">
             <a:avLst/>
@@ -7741,7 +7749,7 @@
         <p:spPr>
           <a:xfrm>
             <a:off x="822960" y="4050792"/>
-            <a:ext cx="8229600" cy="841248"/>
+            <a:ext cx="10515600" cy="841248"/>
           </a:xfrm>
           <a:prstGeom prst="roundRect">
             <a:avLst>
@@ -7877,7 +7885,7 @@
         <p:spPr>
           <a:xfrm>
             <a:off x="1691640" y="4270248"/>
-            <a:ext cx="7132320" cy="841248"/>
+            <a:ext cx="9326880" cy="841248"/>
           </a:xfrm>
           <a:prstGeom prst="rect">
             <a:avLst/>
@@ -7915,7 +7923,7 @@
         <p:spPr>
           <a:xfrm>
             <a:off x="822960" y="5093208"/>
-            <a:ext cx="8229600" cy="841248"/>
+            <a:ext cx="10515600" cy="841248"/>
           </a:xfrm>
           <a:prstGeom prst="roundRect">
             <a:avLst>
@@ -8051,7 +8059,7 @@
         <p:spPr>
           <a:xfrm>
             <a:off x="1691640" y="5312664"/>
-            <a:ext cx="7132320" cy="841248"/>
+            <a:ext cx="9326880" cy="841248"/>
           </a:xfrm>
           <a:prstGeom prst="rect">
             <a:avLst/>
@@ -8196,22 +8204,24 @@
       <p:grpSpPr/>
       <p:pic>
         <p:nvPicPr>
-          <p:cNvPr id="2" name="Picture 1" descr="s2.png"/>
+          <p:cNvPr id="2" name="Picture 1" descr="rings.png"/>
           <p:cNvPicPr>
             <a:picLocks noChangeAspect="1"/>
           </p:cNvPicPr>
           <p:nvPr/>
         </p:nvPicPr>
         <p:blipFill>
-          <a:blip r:embed="rId2"/>
+          <a:blip r:embed="rId2">
+            <a:alphaModFix amt="42000"/>
+          </a:blip>
           <a:stretch>
             <a:fillRect/>
           </a:stretch>
         </p:blipFill>
         <p:spPr>
           <a:xfrm>
-            <a:off x="9418320" y="3657600"/>
-            <a:ext cx="4023360" cy="4023360"/>
+            <a:off x="0" y="0"/>
+            <a:ext cx="12191695" cy="6858000"/>
           </a:xfrm>
           <a:prstGeom prst="rect">
             <a:avLst/>
@@ -8319,7 +8329,7 @@
         <p:spPr>
           <a:xfrm>
             <a:off x="822960" y="1965960"/>
-            <a:ext cx="8229600" cy="841248"/>
+            <a:ext cx="10515600" cy="841248"/>
           </a:xfrm>
           <a:prstGeom prst="roundRect">
             <a:avLst>
@@ -8455,7 +8465,7 @@
         <p:spPr>
           <a:xfrm>
             <a:off x="1691640" y="2185416"/>
-            <a:ext cx="7132320" cy="841248"/>
+            <a:ext cx="9326880" cy="841248"/>
           </a:xfrm>
           <a:prstGeom prst="rect">
             <a:avLst/>
@@ -8493,7 +8503,7 @@
         <p:spPr>
           <a:xfrm>
             <a:off x="822960" y="3008376"/>
-            <a:ext cx="8229600" cy="841248"/>
+            <a:ext cx="10515600" cy="841248"/>
           </a:xfrm>
           <a:prstGeom prst="roundRect">
             <a:avLst>
@@ -8629,7 +8639,7 @@
         <p:spPr>
           <a:xfrm>
             <a:off x="1691640" y="3227832"/>
-            <a:ext cx="7132320" cy="841248"/>
+            <a:ext cx="9326880" cy="841248"/>
           </a:xfrm>
           <a:prstGeom prst="rect">
             <a:avLst/>
@@ -8667,7 +8677,7 @@
         <p:spPr>
           <a:xfrm>
             <a:off x="822960" y="4050792"/>
-            <a:ext cx="8229600" cy="841248"/>
+            <a:ext cx="10515600" cy="841248"/>
           </a:xfrm>
           <a:prstGeom prst="roundRect">
             <a:avLst>
@@ -8803,7 +8813,7 @@
         <p:spPr>
           <a:xfrm>
             <a:off x="1691640" y="4270248"/>
-            <a:ext cx="7132320" cy="841248"/>
+            <a:ext cx="9326880" cy="841248"/>
           </a:xfrm>
           <a:prstGeom prst="rect">
             <a:avLst/>
@@ -8841,7 +8851,7 @@
         <p:spPr>
           <a:xfrm>
             <a:off x="822960" y="5093208"/>
-            <a:ext cx="8229600" cy="841248"/>
+            <a:ext cx="10515600" cy="841248"/>
           </a:xfrm>
           <a:prstGeom prst="roundRect">
             <a:avLst>
@@ -8977,7 +8987,7 @@
         <p:spPr>
           <a:xfrm>
             <a:off x="1691640" y="5312664"/>
-            <a:ext cx="7132320" cy="841248"/>
+            <a:ext cx="9326880" cy="841248"/>
           </a:xfrm>
           <a:prstGeom prst="rect">
             <a:avLst/>
@@ -9122,22 +9132,24 @@
       <p:grpSpPr/>
       <p:pic>
         <p:nvPicPr>
-          <p:cNvPr id="2" name="Picture 1" descr="s2.png"/>
+          <p:cNvPr id="2" name="Picture 1" descr="waves.png"/>
           <p:cNvPicPr>
             <a:picLocks noChangeAspect="1"/>
           </p:cNvPicPr>
           <p:nvPr/>
         </p:nvPicPr>
         <p:blipFill>
-          <a:blip r:embed="rId2"/>
+          <a:blip r:embed="rId2">
+            <a:alphaModFix amt="42000"/>
+          </a:blip>
           <a:stretch>
             <a:fillRect/>
           </a:stretch>
         </p:blipFill>
         <p:spPr>
           <a:xfrm>
-            <a:off x="9418320" y="3657600"/>
-            <a:ext cx="4023360" cy="4023360"/>
+            <a:off x="0" y="0"/>
+            <a:ext cx="12191695" cy="6858000"/>
           </a:xfrm>
           <a:prstGeom prst="rect">
             <a:avLst/>
@@ -9245,7 +9257,7 @@
         <p:spPr>
           <a:xfrm>
             <a:off x="822960" y="1965960"/>
-            <a:ext cx="8229600" cy="841248"/>
+            <a:ext cx="10515600" cy="841248"/>
           </a:xfrm>
           <a:prstGeom prst="roundRect">
             <a:avLst>
@@ -9381,7 +9393,7 @@
         <p:spPr>
           <a:xfrm>
             <a:off x="1691640" y="2185416"/>
-            <a:ext cx="7132320" cy="841248"/>
+            <a:ext cx="9326880" cy="841248"/>
           </a:xfrm>
           <a:prstGeom prst="rect">
             <a:avLst/>
@@ -9419,7 +9431,7 @@
         <p:spPr>
           <a:xfrm>
             <a:off x="822960" y="3008376"/>
-            <a:ext cx="8229600" cy="841248"/>
+            <a:ext cx="10515600" cy="841248"/>
           </a:xfrm>
           <a:prstGeom prst="roundRect">
             <a:avLst>
@@ -9555,7 +9567,7 @@
         <p:spPr>
           <a:xfrm>
             <a:off x="1691640" y="3227832"/>
-            <a:ext cx="7132320" cy="841248"/>
+            <a:ext cx="9326880" cy="841248"/>
           </a:xfrm>
           <a:prstGeom prst="rect">
             <a:avLst/>
@@ -9593,7 +9605,7 @@
         <p:spPr>
           <a:xfrm>
             <a:off x="822960" y="4050792"/>
-            <a:ext cx="8229600" cy="841248"/>
+            <a:ext cx="10515600" cy="841248"/>
           </a:xfrm>
           <a:prstGeom prst="roundRect">
             <a:avLst>
@@ -9729,7 +9741,7 @@
         <p:spPr>
           <a:xfrm>
             <a:off x="1691640" y="4270248"/>
-            <a:ext cx="7132320" cy="841248"/>
+            <a:ext cx="9326880" cy="841248"/>
           </a:xfrm>
           <a:prstGeom prst="rect">
             <a:avLst/>
@@ -9767,7 +9779,7 @@
         <p:spPr>
           <a:xfrm>
             <a:off x="822960" y="5093208"/>
-            <a:ext cx="8229600" cy="841248"/>
+            <a:ext cx="10515600" cy="841248"/>
           </a:xfrm>
           <a:prstGeom prst="roundRect">
             <a:avLst>
@@ -9903,7 +9915,7 @@
         <p:spPr>
           <a:xfrm>
             <a:off x="1691640" y="5312664"/>
-            <a:ext cx="7132320" cy="841248"/>
+            <a:ext cx="9326880" cy="841248"/>
           </a:xfrm>
           <a:prstGeom prst="rect">
             <a:avLst/>
@@ -10048,22 +10060,24 @@
       <p:grpSpPr/>
       <p:pic>
         <p:nvPicPr>
-          <p:cNvPr id="2" name="Picture 1" descr="cover.png"/>
+          <p:cNvPr id="2" name="Picture 1" descr="waves.png"/>
           <p:cNvPicPr>
             <a:picLocks noChangeAspect="1"/>
           </p:cNvPicPr>
           <p:nvPr/>
         </p:nvPicPr>
         <p:blipFill>
-          <a:blip r:embed="rId2"/>
+          <a:blip r:embed="rId2">
+            <a:alphaModFix amt="42000"/>
+          </a:blip>
           <a:stretch>
             <a:fillRect/>
           </a:stretch>
         </p:blipFill>
         <p:spPr>
           <a:xfrm>
-            <a:off x="9418320" y="3657600"/>
-            <a:ext cx="4023360" cy="4023360"/>
+            <a:off x="0" y="0"/>
+            <a:ext cx="12191695" cy="6858000"/>
           </a:xfrm>
           <a:prstGeom prst="rect">
             <a:avLst/>
@@ -10171,7 +10185,7 @@
         <p:spPr>
           <a:xfrm>
             <a:off x="822960" y="1965960"/>
-            <a:ext cx="8229600" cy="841248"/>
+            <a:ext cx="10515600" cy="841248"/>
           </a:xfrm>
           <a:prstGeom prst="roundRect">
             <a:avLst>
@@ -10307,7 +10321,7 @@
         <p:spPr>
           <a:xfrm>
             <a:off x="1691640" y="2185416"/>
-            <a:ext cx="7132320" cy="841248"/>
+            <a:ext cx="9326880" cy="841248"/>
           </a:xfrm>
           <a:prstGeom prst="rect">
             <a:avLst/>
@@ -10345,7 +10359,7 @@
         <p:spPr>
           <a:xfrm>
             <a:off x="822960" y="3008376"/>
-            <a:ext cx="8229600" cy="841248"/>
+            <a:ext cx="10515600" cy="841248"/>
           </a:xfrm>
           <a:prstGeom prst="roundRect">
             <a:avLst>
@@ -10481,7 +10495,7 @@
         <p:spPr>
           <a:xfrm>
             <a:off x="1691640" y="3227832"/>
-            <a:ext cx="7132320" cy="841248"/>
+            <a:ext cx="9326880" cy="841248"/>
           </a:xfrm>
           <a:prstGeom prst="rect">
             <a:avLst/>
@@ -10519,7 +10533,7 @@
         <p:spPr>
           <a:xfrm>
             <a:off x="822960" y="4050792"/>
-            <a:ext cx="8229600" cy="841248"/>
+            <a:ext cx="10515600" cy="841248"/>
           </a:xfrm>
           <a:prstGeom prst="roundRect">
             <a:avLst>
@@ -10655,7 +10669,7 @@
         <p:spPr>
           <a:xfrm>
             <a:off x="1691640" y="4270248"/>
-            <a:ext cx="7132320" cy="841248"/>
+            <a:ext cx="9326880" cy="841248"/>
           </a:xfrm>
           <a:prstGeom prst="rect">
             <a:avLst/>
@@ -10693,7 +10707,7 @@
         <p:spPr>
           <a:xfrm>
             <a:off x="822960" y="5093208"/>
-            <a:ext cx="8229600" cy="841248"/>
+            <a:ext cx="10515600" cy="841248"/>
           </a:xfrm>
           <a:prstGeom prst="roundRect">
             <a:avLst>
@@ -10829,7 +10843,7 @@
         <p:spPr>
           <a:xfrm>
             <a:off x="1691640" y="5312664"/>
-            <a:ext cx="7132320" cy="841248"/>
+            <a:ext cx="9326880" cy="841248"/>
           </a:xfrm>
           <a:prstGeom prst="rect">
             <a:avLst/>
@@ -10974,22 +10988,24 @@
       <p:grpSpPr/>
       <p:pic>
         <p:nvPicPr>
-          <p:cNvPr id="2" name="Picture 1" descr="s5.png"/>
+          <p:cNvPr id="2" name="Picture 1" descr="grid.png"/>
           <p:cNvPicPr>
             <a:picLocks noChangeAspect="1"/>
           </p:cNvPicPr>
           <p:nvPr/>
         </p:nvPicPr>
         <p:blipFill>
-          <a:blip r:embed="rId2"/>
+          <a:blip r:embed="rId2">
+            <a:alphaModFix amt="42000"/>
+          </a:blip>
           <a:stretch>
             <a:fillRect/>
           </a:stretch>
         </p:blipFill>
         <p:spPr>
           <a:xfrm>
-            <a:off x="9418320" y="3657600"/>
-            <a:ext cx="4023360" cy="4023360"/>
+            <a:off x="0" y="0"/>
+            <a:ext cx="12191695" cy="6858000"/>
           </a:xfrm>
           <a:prstGeom prst="rect">
             <a:avLst/>
@@ -11097,7 +11113,7 @@
         <p:spPr>
           <a:xfrm>
             <a:off x="822960" y="1965960"/>
-            <a:ext cx="8229600" cy="841248"/>
+            <a:ext cx="10515600" cy="841248"/>
           </a:xfrm>
           <a:prstGeom prst="roundRect">
             <a:avLst>
@@ -11233,7 +11249,7 @@
         <p:spPr>
           <a:xfrm>
             <a:off x="1691640" y="2185416"/>
-            <a:ext cx="7132320" cy="841248"/>
+            <a:ext cx="9326880" cy="841248"/>
           </a:xfrm>
           <a:prstGeom prst="rect">
             <a:avLst/>
@@ -11271,7 +11287,7 @@
         <p:spPr>
           <a:xfrm>
             <a:off x="822960" y="3008376"/>
-            <a:ext cx="8229600" cy="841248"/>
+            <a:ext cx="10515600" cy="841248"/>
           </a:xfrm>
           <a:prstGeom prst="roundRect">
             <a:avLst>
@@ -11407,7 +11423,7 @@
         <p:spPr>
           <a:xfrm>
             <a:off x="1691640" y="3227832"/>
-            <a:ext cx="7132320" cy="841248"/>
+            <a:ext cx="9326880" cy="841248"/>
           </a:xfrm>
           <a:prstGeom prst="rect">
             <a:avLst/>
@@ -11445,7 +11461,7 @@
         <p:spPr>
           <a:xfrm>
             <a:off x="822960" y="4050792"/>
-            <a:ext cx="8229600" cy="841248"/>
+            <a:ext cx="10515600" cy="841248"/>
           </a:xfrm>
           <a:prstGeom prst="roundRect">
             <a:avLst>
@@ -11581,7 +11597,7 @@
         <p:spPr>
           <a:xfrm>
             <a:off x="1691640" y="4270248"/>
-            <a:ext cx="7132320" cy="841248"/>
+            <a:ext cx="9326880" cy="841248"/>
           </a:xfrm>
           <a:prstGeom prst="rect">
             <a:avLst/>
@@ -11619,7 +11635,7 @@
         <p:spPr>
           <a:xfrm>
             <a:off x="822960" y="5093208"/>
-            <a:ext cx="8229600" cy="841248"/>
+            <a:ext cx="10515600" cy="841248"/>
           </a:xfrm>
           <a:prstGeom prst="roundRect">
             <a:avLst>
@@ -11755,7 +11771,7 @@
         <p:spPr>
           <a:xfrm>
             <a:off x="1691640" y="5312664"/>
-            <a:ext cx="7132320" cy="841248"/>
+            <a:ext cx="9326880" cy="841248"/>
           </a:xfrm>
           <a:prstGeom prst="rect">
             <a:avLst/>
@@ -11898,9 +11914,35 @@
         <p:nvPr/>
       </p:nvGrpSpPr>
       <p:grpSpPr/>
-      <p:sp>
-        <p:nvSpPr>
-          <p:cNvPr id="2" name="Rounded Rectangle 1"/>
+      <p:pic>
+        <p:nvPicPr>
+          <p:cNvPr id="2" name="Picture 1" descr="aurora.png"/>
+          <p:cNvPicPr>
+            <a:picLocks noChangeAspect="1"/>
+          </p:cNvPicPr>
+          <p:nvPr/>
+        </p:nvPicPr>
+        <p:blipFill>
+          <a:blip r:embed="rId2">
+            <a:alphaModFix amt="42000"/>
+          </a:blip>
+          <a:stretch>
+            <a:fillRect/>
+          </a:stretch>
+        </p:blipFill>
+        <p:spPr>
+          <a:xfrm>
+            <a:off x="0" y="0"/>
+            <a:ext cx="12191695" cy="6858000"/>
+          </a:xfrm>
+          <a:prstGeom prst="rect">
+            <a:avLst/>
+          </a:prstGeom>
+        </p:spPr>
+      </p:pic>
+      <p:sp>
+        <p:nvSpPr>
+          <p:cNvPr id="3" name="Rounded Rectangle 2"/>
           <p:cNvSpPr/>
           <p:nvPr/>
         </p:nvSpPr>
@@ -11954,7 +11996,7 @@
       </p:sp>
       <p:sp>
         <p:nvSpPr>
-          <p:cNvPr id="3" name="TextBox 2"/>
+          <p:cNvPr id="4" name="TextBox 3"/>
           <p:cNvSpPr txBox="1"/>
           <p:nvPr/>
         </p:nvSpPr>
@@ -11992,7 +12034,7 @@
       </p:sp>
       <p:sp>
         <p:nvSpPr>
-          <p:cNvPr id="4" name="Rounded Rectangle 3"/>
+          <p:cNvPr id="5" name="Rounded Rectangle 4"/>
           <p:cNvSpPr/>
           <p:nvPr/>
         </p:nvSpPr>
@@ -12038,7 +12080,7 @@
       </p:sp>
       <p:sp>
         <p:nvSpPr>
-          <p:cNvPr id="5" name="TextBox 4"/>
+          <p:cNvPr id="6" name="TextBox 5"/>
           <p:cNvSpPr txBox="1"/>
           <p:nvPr/>
         </p:nvSpPr>
@@ -12076,7 +12118,7 @@
       </p:sp>
       <p:sp>
         <p:nvSpPr>
-          <p:cNvPr id="6" name="Rounded Rectangle 5"/>
+          <p:cNvPr id="7" name="Rounded Rectangle 6"/>
           <p:cNvSpPr/>
           <p:nvPr/>
         </p:nvSpPr>
@@ -12122,7 +12164,7 @@
       </p:sp>
       <p:sp>
         <p:nvSpPr>
-          <p:cNvPr id="7" name="TextBox 6"/>
+          <p:cNvPr id="8" name="TextBox 7"/>
           <p:cNvSpPr txBox="1"/>
           <p:nvPr/>
         </p:nvSpPr>
@@ -12160,7 +12202,7 @@
       </p:sp>
       <p:sp>
         <p:nvSpPr>
-          <p:cNvPr id="8" name="TextBox 7"/>
+          <p:cNvPr id="9" name="TextBox 8"/>
           <p:cNvSpPr txBox="1"/>
           <p:nvPr/>
         </p:nvSpPr>
@@ -12198,7 +12240,7 @@
       </p:sp>
       <p:sp>
         <p:nvSpPr>
-          <p:cNvPr id="9" name="Rounded Rectangle 8"/>
+          <p:cNvPr id="10" name="Rounded Rectangle 9"/>
           <p:cNvSpPr/>
           <p:nvPr/>
         </p:nvSpPr>
@@ -12244,7 +12286,7 @@
       </p:sp>
       <p:sp>
         <p:nvSpPr>
-          <p:cNvPr id="10" name="TextBox 9"/>
+          <p:cNvPr id="11" name="TextBox 10"/>
           <p:cNvSpPr txBox="1"/>
           <p:nvPr/>
         </p:nvSpPr>
@@ -12282,7 +12324,7 @@
       </p:sp>
       <p:sp>
         <p:nvSpPr>
-          <p:cNvPr id="11" name="Rounded Rectangle 10"/>
+          <p:cNvPr id="12" name="Rounded Rectangle 11"/>
           <p:cNvSpPr/>
           <p:nvPr/>
         </p:nvSpPr>
@@ -12328,7 +12370,7 @@
       </p:sp>
       <p:sp>
         <p:nvSpPr>
-          <p:cNvPr id="12" name="TextBox 11"/>
+          <p:cNvPr id="13" name="TextBox 12"/>
           <p:cNvSpPr txBox="1"/>
           <p:nvPr/>
         </p:nvSpPr>
@@ -12366,7 +12408,7 @@
       </p:sp>
       <p:sp>
         <p:nvSpPr>
-          <p:cNvPr id="13" name="TextBox 12"/>
+          <p:cNvPr id="14" name="TextBox 13"/>
           <p:cNvSpPr txBox="1"/>
           <p:nvPr/>
         </p:nvSpPr>
@@ -12404,7 +12446,7 @@
       </p:sp>
       <p:sp>
         <p:nvSpPr>
-          <p:cNvPr id="14" name="TextBox 13"/>
+          <p:cNvPr id="15" name="TextBox 14"/>
           <p:cNvSpPr txBox="1"/>
           <p:nvPr/>
         </p:nvSpPr>
@@ -12442,7 +12484,7 @@
       </p:sp>
       <p:sp>
         <p:nvSpPr>
-          <p:cNvPr id="15" name="TextBox 14"/>
+          <p:cNvPr id="16" name="TextBox 15"/>
           <p:cNvSpPr txBox="1"/>
           <p:nvPr/>
         </p:nvSpPr>
@@ -12516,9 +12558,35 @@
         <p:nvPr/>
       </p:nvGrpSpPr>
       <p:grpSpPr/>
-      <p:sp>
-        <p:nvSpPr>
-          <p:cNvPr id="2" name="Rounded Rectangle 1"/>
+      <p:pic>
+        <p:nvPicPr>
+          <p:cNvPr id="2" name="Picture 1" descr="waves.png"/>
+          <p:cNvPicPr>
+            <a:picLocks noChangeAspect="1"/>
+          </p:cNvPicPr>
+          <p:nvPr/>
+        </p:nvPicPr>
+        <p:blipFill>
+          <a:blip r:embed="rId2">
+            <a:alphaModFix amt="42000"/>
+          </a:blip>
+          <a:stretch>
+            <a:fillRect/>
+          </a:stretch>
+        </p:blipFill>
+        <p:spPr>
+          <a:xfrm>
+            <a:off x="0" y="0"/>
+            <a:ext cx="12191695" cy="6858000"/>
+          </a:xfrm>
+          <a:prstGeom prst="rect">
+            <a:avLst/>
+          </a:prstGeom>
+        </p:spPr>
+      </p:pic>
+      <p:sp>
+        <p:nvSpPr>
+          <p:cNvPr id="3" name="Rounded Rectangle 2"/>
           <p:cNvSpPr/>
           <p:nvPr/>
         </p:nvSpPr>
@@ -12572,7 +12640,7 @@
       </p:sp>
       <p:sp>
         <p:nvSpPr>
-          <p:cNvPr id="3" name="TextBox 2"/>
+          <p:cNvPr id="4" name="TextBox 3"/>
           <p:cNvSpPr txBox="1"/>
           <p:nvPr/>
         </p:nvSpPr>
@@ -12610,7 +12678,7 @@
       </p:sp>
       <p:sp>
         <p:nvSpPr>
-          <p:cNvPr id="4" name="Rounded Rectangle 3"/>
+          <p:cNvPr id="5" name="Rounded Rectangle 4"/>
           <p:cNvSpPr/>
           <p:nvPr/>
         </p:nvSpPr>
@@ -12656,7 +12724,7 @@
       </p:sp>
       <p:sp>
         <p:nvSpPr>
-          <p:cNvPr id="5" name="TextBox 4"/>
+          <p:cNvPr id="6" name="TextBox 5"/>
           <p:cNvSpPr txBox="1"/>
           <p:nvPr/>
         </p:nvSpPr>
@@ -12694,7 +12762,7 @@
       </p:sp>
       <p:sp>
         <p:nvSpPr>
-          <p:cNvPr id="6" name="TextBox 5"/>
+          <p:cNvPr id="7" name="TextBox 6"/>
           <p:cNvSpPr txBox="1"/>
           <p:nvPr/>
         </p:nvSpPr>
@@ -12732,7 +12800,7 @@
       </p:sp>
       <p:sp>
         <p:nvSpPr>
-          <p:cNvPr id="7" name="Rounded Rectangle 6"/>
+          <p:cNvPr id="8" name="Rounded Rectangle 7"/>
           <p:cNvSpPr/>
           <p:nvPr/>
         </p:nvSpPr>
@@ -12778,7 +12846,7 @@
       </p:sp>
       <p:sp>
         <p:nvSpPr>
-          <p:cNvPr id="8" name="TextBox 7"/>
+          <p:cNvPr id="9" name="TextBox 8"/>
           <p:cNvSpPr txBox="1"/>
           <p:nvPr/>
         </p:nvSpPr>
@@ -12816,7 +12884,7 @@
       </p:sp>
       <p:sp>
         <p:nvSpPr>
-          <p:cNvPr id="9" name="TextBox 8"/>
+          <p:cNvPr id="10" name="TextBox 9"/>
           <p:cNvSpPr txBox="1"/>
           <p:nvPr/>
         </p:nvSpPr>
@@ -12854,7 +12922,7 @@
       </p:sp>
       <p:sp>
         <p:nvSpPr>
-          <p:cNvPr id="10" name="Rounded Rectangle 9"/>
+          <p:cNvPr id="11" name="Rounded Rectangle 10"/>
           <p:cNvSpPr/>
           <p:nvPr/>
         </p:nvSpPr>
@@ -12900,7 +12968,7 @@
       </p:sp>
       <p:sp>
         <p:nvSpPr>
-          <p:cNvPr id="11" name="TextBox 10"/>
+          <p:cNvPr id="12" name="TextBox 11"/>
           <p:cNvSpPr txBox="1"/>
           <p:nvPr/>
         </p:nvSpPr>
@@ -12938,7 +13006,7 @@
       </p:sp>
       <p:sp>
         <p:nvSpPr>
-          <p:cNvPr id="12" name="TextBox 11"/>
+          <p:cNvPr id="13" name="TextBox 12"/>
           <p:cNvSpPr txBox="1"/>
           <p:nvPr/>
         </p:nvSpPr>
@@ -12976,7 +13044,7 @@
       </p:sp>
       <p:sp>
         <p:nvSpPr>
-          <p:cNvPr id="13" name="Rounded Rectangle 12"/>
+          <p:cNvPr id="14" name="Rounded Rectangle 13"/>
           <p:cNvSpPr/>
           <p:nvPr/>
         </p:nvSpPr>
@@ -13022,7 +13090,7 @@
       </p:sp>
       <p:sp>
         <p:nvSpPr>
-          <p:cNvPr id="14" name="TextBox 13"/>
+          <p:cNvPr id="15" name="TextBox 14"/>
           <p:cNvSpPr txBox="1"/>
           <p:nvPr/>
         </p:nvSpPr>
@@ -13060,7 +13128,7 @@
       </p:sp>
       <p:sp>
         <p:nvSpPr>
-          <p:cNvPr id="15" name="TextBox 14"/>
+          <p:cNvPr id="16" name="TextBox 15"/>
           <p:cNvSpPr txBox="1"/>
           <p:nvPr/>
         </p:nvSpPr>
@@ -13098,7 +13166,7 @@
       </p:sp>
       <p:sp>
         <p:nvSpPr>
-          <p:cNvPr id="16" name="TextBox 15"/>
+          <p:cNvPr id="17" name="TextBox 16"/>
           <p:cNvSpPr txBox="1"/>
           <p:nvPr/>
         </p:nvSpPr>
@@ -13136,7 +13204,7 @@
       </p:sp>
       <p:sp>
         <p:nvSpPr>
-          <p:cNvPr id="17" name="TextBox 16"/>
+          <p:cNvPr id="18" name="TextBox 17"/>
           <p:cNvSpPr txBox="1"/>
           <p:nvPr/>
         </p:nvSpPr>
@@ -13210,9 +13278,35 @@
         <p:nvPr/>
       </p:nvGrpSpPr>
       <p:grpSpPr/>
-      <p:sp>
-        <p:nvSpPr>
-          <p:cNvPr id="2" name="Rounded Rectangle 1"/>
+      <p:pic>
+        <p:nvPicPr>
+          <p:cNvPr id="2" name="Picture 1" descr="grid.png"/>
+          <p:cNvPicPr>
+            <a:picLocks noChangeAspect="1"/>
+          </p:cNvPicPr>
+          <p:nvPr/>
+        </p:nvPicPr>
+        <p:blipFill>
+          <a:blip r:embed="rId2">
+            <a:alphaModFix amt="42000"/>
+          </a:blip>
+          <a:stretch>
+            <a:fillRect/>
+          </a:stretch>
+        </p:blipFill>
+        <p:spPr>
+          <a:xfrm>
+            <a:off x="0" y="0"/>
+            <a:ext cx="12191695" cy="6858000"/>
+          </a:xfrm>
+          <a:prstGeom prst="rect">
+            <a:avLst/>
+          </a:prstGeom>
+        </p:spPr>
+      </p:pic>
+      <p:sp>
+        <p:nvSpPr>
+          <p:cNvPr id="3" name="Rounded Rectangle 2"/>
           <p:cNvSpPr/>
           <p:nvPr/>
         </p:nvSpPr>
@@ -13266,7 +13360,7 @@
       </p:sp>
       <p:sp>
         <p:nvSpPr>
-          <p:cNvPr id="3" name="TextBox 2"/>
+          <p:cNvPr id="4" name="TextBox 3"/>
           <p:cNvSpPr txBox="1"/>
           <p:nvPr/>
         </p:nvSpPr>
@@ -13304,7 +13398,7 @@
       </p:sp>
       <p:sp>
         <p:nvSpPr>
-          <p:cNvPr id="4" name="Rounded Rectangle 3"/>
+          <p:cNvPr id="5" name="Rounded Rectangle 4"/>
           <p:cNvSpPr/>
           <p:nvPr/>
         </p:nvSpPr>
@@ -13350,7 +13444,7 @@
       </p:sp>
       <p:sp>
         <p:nvSpPr>
-          <p:cNvPr id="5" name="TextBox 4"/>
+          <p:cNvPr id="6" name="TextBox 5"/>
           <p:cNvSpPr txBox="1"/>
           <p:nvPr/>
         </p:nvSpPr>
@@ -13388,7 +13482,7 @@
       </p:sp>
       <p:sp>
         <p:nvSpPr>
-          <p:cNvPr id="6" name="TextBox 5"/>
+          <p:cNvPr id="7" name="TextBox 6"/>
           <p:cNvSpPr txBox="1"/>
           <p:nvPr/>
         </p:nvSpPr>
@@ -13426,7 +13520,7 @@
       </p:sp>
       <p:sp>
         <p:nvSpPr>
-          <p:cNvPr id="7" name="Rounded Rectangle 6"/>
+          <p:cNvPr id="8" name="Rounded Rectangle 7"/>
           <p:cNvSpPr/>
           <p:nvPr/>
         </p:nvSpPr>
@@ -13472,7 +13566,7 @@
       </p:sp>
       <p:sp>
         <p:nvSpPr>
-          <p:cNvPr id="8" name="TextBox 7"/>
+          <p:cNvPr id="9" name="TextBox 8"/>
           <p:cNvSpPr txBox="1"/>
           <p:nvPr/>
         </p:nvSpPr>
@@ -13510,7 +13604,7 @@
       </p:sp>
       <p:sp>
         <p:nvSpPr>
-          <p:cNvPr id="9" name="TextBox 8"/>
+          <p:cNvPr id="10" name="TextBox 9"/>
           <p:cNvSpPr txBox="1"/>
           <p:nvPr/>
         </p:nvSpPr>
@@ -13548,7 +13642,7 @@
       </p:sp>
       <p:sp>
         <p:nvSpPr>
-          <p:cNvPr id="10" name="Rounded Rectangle 9"/>
+          <p:cNvPr id="11" name="Rounded Rectangle 10"/>
           <p:cNvSpPr/>
           <p:nvPr/>
         </p:nvSpPr>
@@ -13594,7 +13688,7 @@
       </p:sp>
       <p:sp>
         <p:nvSpPr>
-          <p:cNvPr id="11" name="TextBox 10"/>
+          <p:cNvPr id="12" name="TextBox 11"/>
           <p:cNvSpPr txBox="1"/>
           <p:nvPr/>
         </p:nvSpPr>
@@ -13632,7 +13726,7 @@
       </p:sp>
       <p:sp>
         <p:nvSpPr>
-          <p:cNvPr id="12" name="TextBox 11"/>
+          <p:cNvPr id="13" name="TextBox 12"/>
           <p:cNvSpPr txBox="1"/>
           <p:nvPr/>
         </p:nvSpPr>
@@ -13670,7 +13764,7 @@
       </p:sp>
       <p:sp>
         <p:nvSpPr>
-          <p:cNvPr id="13" name="Rounded Rectangle 12"/>
+          <p:cNvPr id="14" name="Rounded Rectangle 13"/>
           <p:cNvSpPr/>
           <p:nvPr/>
         </p:nvSpPr>
@@ -13716,7 +13810,7 @@
       </p:sp>
       <p:sp>
         <p:nvSpPr>
-          <p:cNvPr id="14" name="TextBox 13"/>
+          <p:cNvPr id="15" name="TextBox 14"/>
           <p:cNvSpPr txBox="1"/>
           <p:nvPr/>
         </p:nvSpPr>
@@ -13754,7 +13848,7 @@
       </p:sp>
       <p:sp>
         <p:nvSpPr>
-          <p:cNvPr id="15" name="TextBox 14"/>
+          <p:cNvPr id="16" name="TextBox 15"/>
           <p:cNvSpPr txBox="1"/>
           <p:nvPr/>
         </p:nvSpPr>
@@ -13792,7 +13886,7 @@
       </p:sp>
       <p:sp>
         <p:nvSpPr>
-          <p:cNvPr id="16" name="TextBox 15"/>
+          <p:cNvPr id="17" name="TextBox 16"/>
           <p:cNvSpPr txBox="1"/>
           <p:nvPr/>
         </p:nvSpPr>
@@ -13830,7 +13924,7 @@
       </p:sp>
       <p:sp>
         <p:nvSpPr>
-          <p:cNvPr id="17" name="TextBox 16"/>
+          <p:cNvPr id="18" name="TextBox 17"/>
           <p:cNvSpPr txBox="1"/>
           <p:nvPr/>
         </p:nvSpPr>
@@ -13906,22 +14000,24 @@
       <p:grpSpPr/>
       <p:pic>
         <p:nvPicPr>
-          <p:cNvPr id="2" name="Picture 1" descr="s2.png"/>
+          <p:cNvPr id="2" name="Picture 1" descr="aurora.png"/>
           <p:cNvPicPr>
             <a:picLocks noChangeAspect="1"/>
           </p:cNvPicPr>
           <p:nvPr/>
         </p:nvPicPr>
         <p:blipFill>
-          <a:blip r:embed="rId2"/>
+          <a:blip r:embed="rId2">
+            <a:alphaModFix amt="42000"/>
+          </a:blip>
           <a:stretch>
             <a:fillRect/>
           </a:stretch>
         </p:blipFill>
         <p:spPr>
           <a:xfrm>
-            <a:off x="9418320" y="3657600"/>
-            <a:ext cx="4023360" cy="4023360"/>
+            <a:off x="0" y="0"/>
+            <a:ext cx="12191695" cy="6858000"/>
           </a:xfrm>
           <a:prstGeom prst="rect">
             <a:avLst/>
@@ -14029,7 +14125,7 @@
         <p:spPr>
           <a:xfrm>
             <a:off x="822960" y="1965960"/>
-            <a:ext cx="8229600" cy="841248"/>
+            <a:ext cx="10515600" cy="841248"/>
           </a:xfrm>
           <a:prstGeom prst="roundRect">
             <a:avLst>
@@ -14165,7 +14261,7 @@
         <p:spPr>
           <a:xfrm>
             <a:off x="1691640" y="2185416"/>
-            <a:ext cx="7132320" cy="841248"/>
+            <a:ext cx="9326880" cy="841248"/>
           </a:xfrm>
           <a:prstGeom prst="rect">
             <a:avLst/>
@@ -14203,7 +14299,7 @@
         <p:spPr>
           <a:xfrm>
             <a:off x="822960" y="3008376"/>
-            <a:ext cx="8229600" cy="841248"/>
+            <a:ext cx="10515600" cy="841248"/>
           </a:xfrm>
           <a:prstGeom prst="roundRect">
             <a:avLst>
@@ -14339,7 +14435,7 @@
         <p:spPr>
           <a:xfrm>
             <a:off x="1691640" y="3227832"/>
-            <a:ext cx="7132320" cy="841248"/>
+            <a:ext cx="9326880" cy="841248"/>
           </a:xfrm>
           <a:prstGeom prst="rect">
             <a:avLst/>
@@ -14377,7 +14473,7 @@
         <p:spPr>
           <a:xfrm>
             <a:off x="822960" y="4050792"/>
-            <a:ext cx="8229600" cy="841248"/>
+            <a:ext cx="10515600" cy="841248"/>
           </a:xfrm>
           <a:prstGeom prst="roundRect">
             <a:avLst>
@@ -14513,7 +14609,7 @@
         <p:spPr>
           <a:xfrm>
             <a:off x="1691640" y="4270248"/>
-            <a:ext cx="7132320" cy="841248"/>
+            <a:ext cx="9326880" cy="841248"/>
           </a:xfrm>
           <a:prstGeom prst="rect">
             <a:avLst/>
@@ -14551,7 +14647,7 @@
         <p:spPr>
           <a:xfrm>
             <a:off x="822960" y="5093208"/>
-            <a:ext cx="8229600" cy="841248"/>
+            <a:ext cx="10515600" cy="841248"/>
           </a:xfrm>
           <a:prstGeom prst="roundRect">
             <a:avLst>
@@ -14687,7 +14783,7 @@
         <p:spPr>
           <a:xfrm>
             <a:off x="1691640" y="5312664"/>
-            <a:ext cx="7132320" cy="841248"/>
+            <a:ext cx="9326880" cy="841248"/>
           </a:xfrm>
           <a:prstGeom prst="rect">
             <a:avLst/>

--- a/presentation-polka/presentation.pptx
+++ b/presentation-polka/presentation.pptx
@@ -4352,7 +4352,13 @@
           <a:ln>
             <a:noFill/>
           </a:ln>
-          <a:effectLst/>
+          <a:effectLst>
+            <a:glow rad="177800">
+              <a:srgbClr val="4C9AFF">
+                <a:alpha val="55000"/>
+              </a:srgbClr>
+            </a:glow>
+          </a:effectLst>
         </p:spPr>
         <p:style>
           <a:lnRef idx="1">
@@ -4546,7 +4552,13 @@
           <a:ln>
             <a:noFill/>
           </a:ln>
-          <a:effectLst/>
+          <a:effectLst>
+            <a:glow rad="127000">
+              <a:srgbClr val="4C9AFF">
+                <a:alpha val="55000"/>
+              </a:srgbClr>
+            </a:glow>
+          </a:effectLst>
         </p:spPr>
         <p:style>
           <a:lnRef idx="1">
@@ -4624,13 +4636,27 @@
               <a:gd name="adj" fmla="val 6000"/>
             </a:avLst>
           </a:prstGeom>
-          <a:solidFill>
-            <a:srgbClr val="1E2430"/>
-          </a:solidFill>
+          <a:gradFill rotWithShape="1">
+            <a:gsLst>
+              <a:gs pos="0">
+                <a:srgbClr val="1E2430"/>
+              </a:gs>
+              <a:gs pos="100000">
+                <a:srgbClr val="2C3442"/>
+              </a:gs>
+            </a:gsLst>
+            <a:lin scaled="0" ang="18900000"/>
+          </a:gradFill>
           <a:ln>
             <a:noFill/>
           </a:ln>
-          <a:effectLst/>
+          <a:effectLst>
+            <a:outerShdw blurRad="228600" dist="76200" dir="5400000" rotWithShape="0">
+              <a:srgbClr val="000000">
+                <a:alpha val="42000"/>
+              </a:srgbClr>
+            </a:outerShdw>
+          </a:effectLst>
         </p:spPr>
         <p:style>
           <a:lnRef idx="1">
@@ -4656,7 +4682,61 @@
       </p:sp>
       <p:sp>
         <p:nvSpPr>
-          <p:cNvPr id="6" name="Oval 5"/>
+          <p:cNvPr id="6" name="Rounded Rectangle 5"/>
+          <p:cNvSpPr/>
+          <p:nvPr/>
+        </p:nvSpPr>
+        <p:spPr>
+          <a:xfrm>
+            <a:off x="877824" y="2148840"/>
+            <a:ext cx="50800" cy="475488"/>
+          </a:xfrm>
+          <a:prstGeom prst="roundRect">
+            <a:avLst>
+              <a:gd name="adj" fmla="val 50000"/>
+            </a:avLst>
+          </a:prstGeom>
+          <a:gradFill rotWithShape="1">
+            <a:gsLst>
+              <a:gs pos="0">
+                <a:srgbClr val="4C9AFF"/>
+              </a:gs>
+              <a:gs pos="100000">
+                <a:srgbClr val="7B61FF"/>
+              </a:gs>
+            </a:gsLst>
+            <a:lin scaled="0" ang="18900000"/>
+          </a:gradFill>
+          <a:ln>
+            <a:noFill/>
+          </a:ln>
+          <a:effectLst/>
+        </p:spPr>
+        <p:style>
+          <a:lnRef idx="1">
+            <a:schemeClr val="accent1"/>
+          </a:lnRef>
+          <a:fillRef idx="3">
+            <a:schemeClr val="accent1"/>
+          </a:fillRef>
+          <a:effectRef idx="2">
+            <a:schemeClr val="accent1"/>
+          </a:effectRef>
+          <a:fontRef idx="minor">
+            <a:schemeClr val="lt1"/>
+          </a:fontRef>
+        </p:style>
+        <p:txBody>
+          <a:bodyPr rtlCol="0" anchor="ctr"/>
+          <a:lstStyle/>
+          <a:p>
+            <a:pPr algn="ctr"/>
+          </a:p>
+        </p:txBody>
+      </p:sp>
+      <p:sp>
+        <p:nvSpPr>
+          <p:cNvPr id="7" name="Oval 6"/>
           <p:cNvSpPr/>
           <p:nvPr/>
         </p:nvSpPr>
@@ -4682,7 +4762,13 @@
           <a:ln>
             <a:noFill/>
           </a:ln>
-          <a:effectLst/>
+          <a:effectLst>
+            <a:glow rad="88900">
+              <a:srgbClr val="4C9AFF">
+                <a:alpha val="38000"/>
+              </a:srgbClr>
+            </a:glow>
+          </a:effectLst>
         </p:spPr>
         <p:style>
           <a:lnRef idx="1">
@@ -4708,14 +4794,14 @@
       </p:sp>
       <p:sp>
         <p:nvSpPr>
-          <p:cNvPr id="7" name="TextBox 6"/>
+          <p:cNvPr id="8" name="TextBox 7"/>
           <p:cNvSpPr txBox="1"/>
           <p:nvPr/>
         </p:nvSpPr>
         <p:spPr>
           <a:xfrm>
-            <a:off x="1051560" y="2240280"/>
-            <a:ext cx="402336" cy="365760"/>
+            <a:off x="1051560" y="2203704"/>
+            <a:ext cx="402336" cy="402336"/>
           </a:xfrm>
           <a:prstGeom prst="rect">
             <a:avLst/>
@@ -4723,14 +4809,14 @@
           <a:noFill/>
         </p:spPr>
         <p:txBody>
-          <a:bodyPr wrap="square">
+          <a:bodyPr wrap="square" lIns="0" rIns="0" tIns="0" bIns="0" anchor="ctr">
             <a:spAutoFit/>
           </a:bodyPr>
           <a:lstStyle/>
           <a:p>
-            <a:pPr>
+            <a:pPr algn="ctr">
               <a:lnSpc>
-                <a:spcPct val="120000"/>
+                <a:spcPct val="100000"/>
               </a:lnSpc>
             </a:pPr>
             <a:r>
@@ -4746,7 +4832,7 @@
       </p:sp>
       <p:sp>
         <p:nvSpPr>
-          <p:cNvPr id="8" name="TextBox 7"/>
+          <p:cNvPr id="9" name="TextBox 8"/>
           <p:cNvSpPr txBox="1"/>
           <p:nvPr/>
         </p:nvSpPr>
@@ -4784,7 +4870,7 @@
       </p:sp>
       <p:sp>
         <p:nvSpPr>
-          <p:cNvPr id="9" name="Rounded Rectangle 8"/>
+          <p:cNvPr id="10" name="Rounded Rectangle 9"/>
           <p:cNvSpPr/>
           <p:nvPr/>
         </p:nvSpPr>
@@ -4798,13 +4884,27 @@
               <a:gd name="adj" fmla="val 6000"/>
             </a:avLst>
           </a:prstGeom>
-          <a:solidFill>
-            <a:srgbClr val="1E2430"/>
-          </a:solidFill>
+          <a:gradFill rotWithShape="1">
+            <a:gsLst>
+              <a:gs pos="0">
+                <a:srgbClr val="1E2430"/>
+              </a:gs>
+              <a:gs pos="100000">
+                <a:srgbClr val="2C3442"/>
+              </a:gs>
+            </a:gsLst>
+            <a:lin scaled="0" ang="18900000"/>
+          </a:gradFill>
           <a:ln>
             <a:noFill/>
           </a:ln>
-          <a:effectLst/>
+          <a:effectLst>
+            <a:outerShdw blurRad="228600" dist="76200" dir="5400000" rotWithShape="0">
+              <a:srgbClr val="000000">
+                <a:alpha val="42000"/>
+              </a:srgbClr>
+            </a:outerShdw>
+          </a:effectLst>
         </p:spPr>
         <p:style>
           <a:lnRef idx="1">
@@ -4830,7 +4930,61 @@
       </p:sp>
       <p:sp>
         <p:nvSpPr>
-          <p:cNvPr id="10" name="Oval 9"/>
+          <p:cNvPr id="11" name="Rounded Rectangle 10"/>
+          <p:cNvSpPr/>
+          <p:nvPr/>
+        </p:nvSpPr>
+        <p:spPr>
+          <a:xfrm>
+            <a:off x="877824" y="3191256"/>
+            <a:ext cx="50800" cy="475488"/>
+          </a:xfrm>
+          <a:prstGeom prst="roundRect">
+            <a:avLst>
+              <a:gd name="adj" fmla="val 50000"/>
+            </a:avLst>
+          </a:prstGeom>
+          <a:gradFill rotWithShape="1">
+            <a:gsLst>
+              <a:gs pos="0">
+                <a:srgbClr val="4C9AFF"/>
+              </a:gs>
+              <a:gs pos="100000">
+                <a:srgbClr val="7B61FF"/>
+              </a:gs>
+            </a:gsLst>
+            <a:lin scaled="0" ang="18900000"/>
+          </a:gradFill>
+          <a:ln>
+            <a:noFill/>
+          </a:ln>
+          <a:effectLst/>
+        </p:spPr>
+        <p:style>
+          <a:lnRef idx="1">
+            <a:schemeClr val="accent1"/>
+          </a:lnRef>
+          <a:fillRef idx="3">
+            <a:schemeClr val="accent1"/>
+          </a:fillRef>
+          <a:effectRef idx="2">
+            <a:schemeClr val="accent1"/>
+          </a:effectRef>
+          <a:fontRef idx="minor">
+            <a:schemeClr val="lt1"/>
+          </a:fontRef>
+        </p:style>
+        <p:txBody>
+          <a:bodyPr rtlCol="0" anchor="ctr"/>
+          <a:lstStyle/>
+          <a:p>
+            <a:pPr algn="ctr"/>
+          </a:p>
+        </p:txBody>
+      </p:sp>
+      <p:sp>
+        <p:nvSpPr>
+          <p:cNvPr id="12" name="Oval 11"/>
           <p:cNvSpPr/>
           <p:nvPr/>
         </p:nvSpPr>
@@ -4856,7 +5010,13 @@
           <a:ln>
             <a:noFill/>
           </a:ln>
-          <a:effectLst/>
+          <a:effectLst>
+            <a:glow rad="88900">
+              <a:srgbClr val="4C9AFF">
+                <a:alpha val="38000"/>
+              </a:srgbClr>
+            </a:glow>
+          </a:effectLst>
         </p:spPr>
         <p:style>
           <a:lnRef idx="1">
@@ -4882,14 +5042,14 @@
       </p:sp>
       <p:sp>
         <p:nvSpPr>
-          <p:cNvPr id="11" name="TextBox 10"/>
+          <p:cNvPr id="13" name="TextBox 12"/>
           <p:cNvSpPr txBox="1"/>
           <p:nvPr/>
         </p:nvSpPr>
         <p:spPr>
           <a:xfrm>
-            <a:off x="1051560" y="3282696"/>
-            <a:ext cx="402336" cy="365760"/>
+            <a:off x="1051560" y="3246120"/>
+            <a:ext cx="402336" cy="402336"/>
           </a:xfrm>
           <a:prstGeom prst="rect">
             <a:avLst/>
@@ -4897,14 +5057,14 @@
           <a:noFill/>
         </p:spPr>
         <p:txBody>
-          <a:bodyPr wrap="square">
+          <a:bodyPr wrap="square" lIns="0" rIns="0" tIns="0" bIns="0" anchor="ctr">
             <a:spAutoFit/>
           </a:bodyPr>
           <a:lstStyle/>
           <a:p>
-            <a:pPr>
+            <a:pPr algn="ctr">
               <a:lnSpc>
-                <a:spcPct val="120000"/>
+                <a:spcPct val="100000"/>
               </a:lnSpc>
             </a:pPr>
             <a:r>
@@ -4920,7 +5080,7 @@
       </p:sp>
       <p:sp>
         <p:nvSpPr>
-          <p:cNvPr id="12" name="TextBox 11"/>
+          <p:cNvPr id="14" name="TextBox 13"/>
           <p:cNvSpPr txBox="1"/>
           <p:nvPr/>
         </p:nvSpPr>
@@ -4958,7 +5118,7 @@
       </p:sp>
       <p:sp>
         <p:nvSpPr>
-          <p:cNvPr id="13" name="Rounded Rectangle 12"/>
+          <p:cNvPr id="15" name="Rounded Rectangle 14"/>
           <p:cNvSpPr/>
           <p:nvPr/>
         </p:nvSpPr>
@@ -4972,13 +5132,27 @@
               <a:gd name="adj" fmla="val 6000"/>
             </a:avLst>
           </a:prstGeom>
-          <a:solidFill>
-            <a:srgbClr val="1E2430"/>
-          </a:solidFill>
+          <a:gradFill rotWithShape="1">
+            <a:gsLst>
+              <a:gs pos="0">
+                <a:srgbClr val="1E2430"/>
+              </a:gs>
+              <a:gs pos="100000">
+                <a:srgbClr val="2C3442"/>
+              </a:gs>
+            </a:gsLst>
+            <a:lin scaled="0" ang="18900000"/>
+          </a:gradFill>
           <a:ln>
             <a:noFill/>
           </a:ln>
-          <a:effectLst/>
+          <a:effectLst>
+            <a:outerShdw blurRad="228600" dist="76200" dir="5400000" rotWithShape="0">
+              <a:srgbClr val="000000">
+                <a:alpha val="42000"/>
+              </a:srgbClr>
+            </a:outerShdw>
+          </a:effectLst>
         </p:spPr>
         <p:style>
           <a:lnRef idx="1">
@@ -5004,7 +5178,61 @@
       </p:sp>
       <p:sp>
         <p:nvSpPr>
-          <p:cNvPr id="14" name="Oval 13"/>
+          <p:cNvPr id="16" name="Rounded Rectangle 15"/>
+          <p:cNvSpPr/>
+          <p:nvPr/>
+        </p:nvSpPr>
+        <p:spPr>
+          <a:xfrm>
+            <a:off x="877824" y="4233672"/>
+            <a:ext cx="50800" cy="475488"/>
+          </a:xfrm>
+          <a:prstGeom prst="roundRect">
+            <a:avLst>
+              <a:gd name="adj" fmla="val 50000"/>
+            </a:avLst>
+          </a:prstGeom>
+          <a:gradFill rotWithShape="1">
+            <a:gsLst>
+              <a:gs pos="0">
+                <a:srgbClr val="4C9AFF"/>
+              </a:gs>
+              <a:gs pos="100000">
+                <a:srgbClr val="7B61FF"/>
+              </a:gs>
+            </a:gsLst>
+            <a:lin scaled="0" ang="18900000"/>
+          </a:gradFill>
+          <a:ln>
+            <a:noFill/>
+          </a:ln>
+          <a:effectLst/>
+        </p:spPr>
+        <p:style>
+          <a:lnRef idx="1">
+            <a:schemeClr val="accent1"/>
+          </a:lnRef>
+          <a:fillRef idx="3">
+            <a:schemeClr val="accent1"/>
+          </a:fillRef>
+          <a:effectRef idx="2">
+            <a:schemeClr val="accent1"/>
+          </a:effectRef>
+          <a:fontRef idx="minor">
+            <a:schemeClr val="lt1"/>
+          </a:fontRef>
+        </p:style>
+        <p:txBody>
+          <a:bodyPr rtlCol="0" anchor="ctr"/>
+          <a:lstStyle/>
+          <a:p>
+            <a:pPr algn="ctr"/>
+          </a:p>
+        </p:txBody>
+      </p:sp>
+      <p:sp>
+        <p:nvSpPr>
+          <p:cNvPr id="17" name="Oval 16"/>
           <p:cNvSpPr/>
           <p:nvPr/>
         </p:nvSpPr>
@@ -5030,7 +5258,13 @@
           <a:ln>
             <a:noFill/>
           </a:ln>
-          <a:effectLst/>
+          <a:effectLst>
+            <a:glow rad="88900">
+              <a:srgbClr val="4C9AFF">
+                <a:alpha val="38000"/>
+              </a:srgbClr>
+            </a:glow>
+          </a:effectLst>
         </p:spPr>
         <p:style>
           <a:lnRef idx="1">
@@ -5056,14 +5290,14 @@
       </p:sp>
       <p:sp>
         <p:nvSpPr>
-          <p:cNvPr id="15" name="TextBox 14"/>
+          <p:cNvPr id="18" name="TextBox 17"/>
           <p:cNvSpPr txBox="1"/>
           <p:nvPr/>
         </p:nvSpPr>
         <p:spPr>
           <a:xfrm>
-            <a:off x="1051560" y="4325112"/>
-            <a:ext cx="402336" cy="365760"/>
+            <a:off x="1051560" y="4288536"/>
+            <a:ext cx="402336" cy="402336"/>
           </a:xfrm>
           <a:prstGeom prst="rect">
             <a:avLst/>
@@ -5071,14 +5305,14 @@
           <a:noFill/>
         </p:spPr>
         <p:txBody>
-          <a:bodyPr wrap="square">
+          <a:bodyPr wrap="square" lIns="0" rIns="0" tIns="0" bIns="0" anchor="ctr">
             <a:spAutoFit/>
           </a:bodyPr>
           <a:lstStyle/>
           <a:p>
-            <a:pPr>
+            <a:pPr algn="ctr">
               <a:lnSpc>
-                <a:spcPct val="120000"/>
+                <a:spcPct val="100000"/>
               </a:lnSpc>
             </a:pPr>
             <a:r>
@@ -5094,7 +5328,7 @@
       </p:sp>
       <p:sp>
         <p:nvSpPr>
-          <p:cNvPr id="16" name="TextBox 15"/>
+          <p:cNvPr id="19" name="TextBox 18"/>
           <p:cNvSpPr txBox="1"/>
           <p:nvPr/>
         </p:nvSpPr>
@@ -5132,7 +5366,7 @@
       </p:sp>
       <p:sp>
         <p:nvSpPr>
-          <p:cNvPr id="17" name="Rounded Rectangle 16"/>
+          <p:cNvPr id="20" name="Rounded Rectangle 19"/>
           <p:cNvSpPr/>
           <p:nvPr/>
         </p:nvSpPr>
@@ -5146,13 +5380,27 @@
               <a:gd name="adj" fmla="val 6000"/>
             </a:avLst>
           </a:prstGeom>
-          <a:solidFill>
-            <a:srgbClr val="1E2430"/>
-          </a:solidFill>
+          <a:gradFill rotWithShape="1">
+            <a:gsLst>
+              <a:gs pos="0">
+                <a:srgbClr val="1E2430"/>
+              </a:gs>
+              <a:gs pos="100000">
+                <a:srgbClr val="2C3442"/>
+              </a:gs>
+            </a:gsLst>
+            <a:lin scaled="0" ang="18900000"/>
+          </a:gradFill>
           <a:ln>
             <a:noFill/>
           </a:ln>
-          <a:effectLst/>
+          <a:effectLst>
+            <a:outerShdw blurRad="228600" dist="76200" dir="5400000" rotWithShape="0">
+              <a:srgbClr val="000000">
+                <a:alpha val="42000"/>
+              </a:srgbClr>
+            </a:outerShdw>
+          </a:effectLst>
         </p:spPr>
         <p:style>
           <a:lnRef idx="1">
@@ -5178,7 +5426,61 @@
       </p:sp>
       <p:sp>
         <p:nvSpPr>
-          <p:cNvPr id="18" name="Oval 17"/>
+          <p:cNvPr id="21" name="Rounded Rectangle 20"/>
+          <p:cNvSpPr/>
+          <p:nvPr/>
+        </p:nvSpPr>
+        <p:spPr>
+          <a:xfrm>
+            <a:off x="877824" y="5276088"/>
+            <a:ext cx="50800" cy="475488"/>
+          </a:xfrm>
+          <a:prstGeom prst="roundRect">
+            <a:avLst>
+              <a:gd name="adj" fmla="val 50000"/>
+            </a:avLst>
+          </a:prstGeom>
+          <a:gradFill rotWithShape="1">
+            <a:gsLst>
+              <a:gs pos="0">
+                <a:srgbClr val="4C9AFF"/>
+              </a:gs>
+              <a:gs pos="100000">
+                <a:srgbClr val="7B61FF"/>
+              </a:gs>
+            </a:gsLst>
+            <a:lin scaled="0" ang="18900000"/>
+          </a:gradFill>
+          <a:ln>
+            <a:noFill/>
+          </a:ln>
+          <a:effectLst/>
+        </p:spPr>
+        <p:style>
+          <a:lnRef idx="1">
+            <a:schemeClr val="accent1"/>
+          </a:lnRef>
+          <a:fillRef idx="3">
+            <a:schemeClr val="accent1"/>
+          </a:fillRef>
+          <a:effectRef idx="2">
+            <a:schemeClr val="accent1"/>
+          </a:effectRef>
+          <a:fontRef idx="minor">
+            <a:schemeClr val="lt1"/>
+          </a:fontRef>
+        </p:style>
+        <p:txBody>
+          <a:bodyPr rtlCol="0" anchor="ctr"/>
+          <a:lstStyle/>
+          <a:p>
+            <a:pPr algn="ctr"/>
+          </a:p>
+        </p:txBody>
+      </p:sp>
+      <p:sp>
+        <p:nvSpPr>
+          <p:cNvPr id="22" name="Oval 21"/>
           <p:cNvSpPr/>
           <p:nvPr/>
         </p:nvSpPr>
@@ -5204,7 +5506,13 @@
           <a:ln>
             <a:noFill/>
           </a:ln>
-          <a:effectLst/>
+          <a:effectLst>
+            <a:glow rad="88900">
+              <a:srgbClr val="4C9AFF">
+                <a:alpha val="38000"/>
+              </a:srgbClr>
+            </a:glow>
+          </a:effectLst>
         </p:spPr>
         <p:style>
           <a:lnRef idx="1">
@@ -5230,14 +5538,14 @@
       </p:sp>
       <p:sp>
         <p:nvSpPr>
-          <p:cNvPr id="19" name="TextBox 18"/>
+          <p:cNvPr id="23" name="TextBox 22"/>
           <p:cNvSpPr txBox="1"/>
           <p:nvPr/>
         </p:nvSpPr>
         <p:spPr>
           <a:xfrm>
-            <a:off x="1051560" y="5367528"/>
-            <a:ext cx="402336" cy="365760"/>
+            <a:off x="1051560" y="5330952"/>
+            <a:ext cx="402336" cy="402336"/>
           </a:xfrm>
           <a:prstGeom prst="rect">
             <a:avLst/>
@@ -5245,14 +5553,14 @@
           <a:noFill/>
         </p:spPr>
         <p:txBody>
-          <a:bodyPr wrap="square">
+          <a:bodyPr wrap="square" lIns="0" rIns="0" tIns="0" bIns="0" anchor="ctr">
             <a:spAutoFit/>
           </a:bodyPr>
           <a:lstStyle/>
           <a:p>
-            <a:pPr>
+            <a:pPr algn="ctr">
               <a:lnSpc>
-                <a:spcPct val="120000"/>
+                <a:spcPct val="100000"/>
               </a:lnSpc>
             </a:pPr>
             <a:r>
@@ -5268,7 +5576,7 @@
       </p:sp>
       <p:sp>
         <p:nvSpPr>
-          <p:cNvPr id="20" name="TextBox 19"/>
+          <p:cNvPr id="24" name="TextBox 23"/>
           <p:cNvSpPr txBox="1"/>
           <p:nvPr/>
         </p:nvSpPr>
@@ -5306,7 +5614,7 @@
       </p:sp>
       <p:sp>
         <p:nvSpPr>
-          <p:cNvPr id="21" name="TextBox 20"/>
+          <p:cNvPr id="25" name="TextBox 24"/>
           <p:cNvSpPr txBox="1"/>
           <p:nvPr/>
         </p:nvSpPr>
@@ -5344,7 +5652,7 @@
       </p:sp>
       <p:sp>
         <p:nvSpPr>
-          <p:cNvPr id="22" name="TextBox 21"/>
+          <p:cNvPr id="26" name="TextBox 25"/>
           <p:cNvSpPr txBox="1"/>
           <p:nvPr/>
         </p:nvSpPr>
@@ -5397,6 +5705,270 @@
       </p:transition>
     </mc:Fallback>
   </mc:AlternateContent>
+  <p:timing>
+    <p:tnLst>
+      <p:par>
+        <p:cTn id="1" dur="indefinite" restart="never" nodeType="tmRoot">
+          <p:childTnLst>
+            <p:seq concurrent="1" nextAc="seek">
+              <p:cTn id="2" dur="indefinite" nodeType="mainSeq">
+                <p:childTnLst>
+                  <p:par>
+                    <p:cTn id="3" fill="hold">
+                      <p:stCondLst>
+                        <p:cond delay="indefinite"/>
+                      </p:stCondLst>
+                      <p:childTnLst>
+                        <p:par>
+                          <p:cTn id="4" fill="hold">
+                            <p:stCondLst>
+                              <p:cond delay="0"/>
+                            </p:stCondLst>
+                            <p:childTnLst>
+                              <p:par>
+                                <p:cTn id="10" fill="hold">
+                                  <p:stCondLst>
+                                    <p:cond delay="0"/>
+                                  </p:stCondLst>
+                                  <p:childTnLst>
+                                    <p:set>
+                                      <p:cBhvr>
+                                        <p:cTn id="11" dur="1" fill="hold"/>
+                                        <p:tgtEl>
+                                          <p:spTgt spid="5"/>
+                                        </p:tgtEl>
+                                        <p:attrNameLst>
+                                          <p:attrName>style.visibility</p:attrName>
+                                        </p:attrNameLst>
+                                      </p:cBhvr>
+                                      <p:to>
+                                        <p:strVal val="visible"/>
+                                      </p:to>
+                                    </p:set>
+                                    <p:animEffect transition="in" filter="fade">
+                                      <p:cBhvr>
+                                        <p:cTn id="12" dur="420"/>
+                                        <p:tgtEl>
+                                          <p:spTgt spid="5"/>
+                                        </p:tgtEl>
+                                      </p:cBhvr>
+                                    </p:animEffect>
+                                    <p:anim calcmode="lin" valueType="num">
+                                      <p:cBhvr additive="base">
+                                        <p:cTn id="13" dur="420" fill="hold"/>
+                                        <p:tgtEl>
+                                          <p:spTgt spid="5"/>
+                                        </p:tgtEl>
+                                        <p:attrNameLst>
+                                          <p:attrName>ppt_y</p:attrName>
+                                        </p:attrNameLst>
+                                      </p:cBhvr>
+                                      <p:tavLst>
+                                        <p:tav tm="0">
+                                          <p:val>
+                                            <p:strVal val="#ppt_y+0.035"/>
+                                          </p:val>
+                                        </p:tav>
+                                        <p:tav tm="100000">
+                                          <p:val>
+                                            <p:strVal val="#ppt_y"/>
+                                          </p:val>
+                                        </p:tav>
+                                      </p:tavLst>
+                                    </p:anim>
+                                  </p:childTnLst>
+                                </p:cTn>
+                              </p:par>
+                              <p:par>
+                                <p:cTn id="20" fill="hold">
+                                  <p:stCondLst>
+                                    <p:cond delay="260"/>
+                                  </p:stCondLst>
+                                  <p:childTnLst>
+                                    <p:set>
+                                      <p:cBhvr>
+                                        <p:cTn id="21" dur="1" fill="hold"/>
+                                        <p:tgtEl>
+                                          <p:spTgt spid="10"/>
+                                        </p:tgtEl>
+                                        <p:attrNameLst>
+                                          <p:attrName>style.visibility</p:attrName>
+                                        </p:attrNameLst>
+                                      </p:cBhvr>
+                                      <p:to>
+                                        <p:strVal val="visible"/>
+                                      </p:to>
+                                    </p:set>
+                                    <p:animEffect transition="in" filter="fade">
+                                      <p:cBhvr>
+                                        <p:cTn id="22" dur="420"/>
+                                        <p:tgtEl>
+                                          <p:spTgt spid="10"/>
+                                        </p:tgtEl>
+                                      </p:cBhvr>
+                                    </p:animEffect>
+                                    <p:anim calcmode="lin" valueType="num">
+                                      <p:cBhvr additive="base">
+                                        <p:cTn id="23" dur="420" fill="hold"/>
+                                        <p:tgtEl>
+                                          <p:spTgt spid="10"/>
+                                        </p:tgtEl>
+                                        <p:attrNameLst>
+                                          <p:attrName>ppt_y</p:attrName>
+                                        </p:attrNameLst>
+                                      </p:cBhvr>
+                                      <p:tavLst>
+                                        <p:tav tm="0">
+                                          <p:val>
+                                            <p:strVal val="#ppt_y+0.035"/>
+                                          </p:val>
+                                        </p:tav>
+                                        <p:tav tm="100000">
+                                          <p:val>
+                                            <p:strVal val="#ppt_y"/>
+                                          </p:val>
+                                        </p:tav>
+                                      </p:tavLst>
+                                    </p:anim>
+                                  </p:childTnLst>
+                                </p:cTn>
+                              </p:par>
+                              <p:par>
+                                <p:cTn id="30" fill="hold">
+                                  <p:stCondLst>
+                                    <p:cond delay="520"/>
+                                  </p:stCondLst>
+                                  <p:childTnLst>
+                                    <p:set>
+                                      <p:cBhvr>
+                                        <p:cTn id="31" dur="1" fill="hold"/>
+                                        <p:tgtEl>
+                                          <p:spTgt spid="15"/>
+                                        </p:tgtEl>
+                                        <p:attrNameLst>
+                                          <p:attrName>style.visibility</p:attrName>
+                                        </p:attrNameLst>
+                                      </p:cBhvr>
+                                      <p:to>
+                                        <p:strVal val="visible"/>
+                                      </p:to>
+                                    </p:set>
+                                    <p:animEffect transition="in" filter="fade">
+                                      <p:cBhvr>
+                                        <p:cTn id="32" dur="420"/>
+                                        <p:tgtEl>
+                                          <p:spTgt spid="15"/>
+                                        </p:tgtEl>
+                                      </p:cBhvr>
+                                    </p:animEffect>
+                                    <p:anim calcmode="lin" valueType="num">
+                                      <p:cBhvr additive="base">
+                                        <p:cTn id="33" dur="420" fill="hold"/>
+                                        <p:tgtEl>
+                                          <p:spTgt spid="15"/>
+                                        </p:tgtEl>
+                                        <p:attrNameLst>
+                                          <p:attrName>ppt_y</p:attrName>
+                                        </p:attrNameLst>
+                                      </p:cBhvr>
+                                      <p:tavLst>
+                                        <p:tav tm="0">
+                                          <p:val>
+                                            <p:strVal val="#ppt_y+0.035"/>
+                                          </p:val>
+                                        </p:tav>
+                                        <p:tav tm="100000">
+                                          <p:val>
+                                            <p:strVal val="#ppt_y"/>
+                                          </p:val>
+                                        </p:tav>
+                                      </p:tavLst>
+                                    </p:anim>
+                                  </p:childTnLst>
+                                </p:cTn>
+                              </p:par>
+                              <p:par>
+                                <p:cTn id="40" fill="hold">
+                                  <p:stCondLst>
+                                    <p:cond delay="780"/>
+                                  </p:stCondLst>
+                                  <p:childTnLst>
+                                    <p:set>
+                                      <p:cBhvr>
+                                        <p:cTn id="41" dur="1" fill="hold"/>
+                                        <p:tgtEl>
+                                          <p:spTgt spid="20"/>
+                                        </p:tgtEl>
+                                        <p:attrNameLst>
+                                          <p:attrName>style.visibility</p:attrName>
+                                        </p:attrNameLst>
+                                      </p:cBhvr>
+                                      <p:to>
+                                        <p:strVal val="visible"/>
+                                      </p:to>
+                                    </p:set>
+                                    <p:animEffect transition="in" filter="fade">
+                                      <p:cBhvr>
+                                        <p:cTn id="42" dur="420"/>
+                                        <p:tgtEl>
+                                          <p:spTgt spid="20"/>
+                                        </p:tgtEl>
+                                      </p:cBhvr>
+                                    </p:animEffect>
+                                    <p:anim calcmode="lin" valueType="num">
+                                      <p:cBhvr additive="base">
+                                        <p:cTn id="43" dur="420" fill="hold"/>
+                                        <p:tgtEl>
+                                          <p:spTgt spid="20"/>
+                                        </p:tgtEl>
+                                        <p:attrNameLst>
+                                          <p:attrName>ppt_y</p:attrName>
+                                        </p:attrNameLst>
+                                      </p:cBhvr>
+                                      <p:tavLst>
+                                        <p:tav tm="0">
+                                          <p:val>
+                                            <p:strVal val="#ppt_y+0.035"/>
+                                          </p:val>
+                                        </p:tav>
+                                        <p:tav tm="100000">
+                                          <p:val>
+                                            <p:strVal val="#ppt_y"/>
+                                          </p:val>
+                                        </p:tav>
+                                      </p:tavLst>
+                                    </p:anim>
+                                  </p:childTnLst>
+                                </p:cTn>
+                              </p:par>
+                            </p:childTnLst>
+                          </p:cTn>
+                        </p:par>
+                      </p:childTnLst>
+                    </p:cTn>
+                  </p:par>
+                </p:childTnLst>
+              </p:cTn>
+              <p:prevCondLst>
+                <p:cond evt="onPrev" delay="0">
+                  <p:tgtEl>
+                    <p:sldTgt/>
+                  </p:tgtEl>
+                </p:cond>
+              </p:prevCondLst>
+              <p:nextCondLst>
+                <p:cond evt="onNext" delay="0">
+                  <p:tgtEl>
+                    <p:sldTgt/>
+                  </p:tgtEl>
+                </p:cond>
+              </p:nextCondLst>
+            </p:seq>
+          </p:childTnLst>
+        </p:cTn>
+      </p:par>
+    </p:tnLst>
+  </p:timing>
 </p:sld>
 </file>
 
@@ -5474,7 +6046,13 @@
           <a:ln>
             <a:noFill/>
           </a:ln>
-          <a:effectLst/>
+          <a:effectLst>
+            <a:glow rad="127000">
+              <a:srgbClr val="4C9AFF">
+                <a:alpha val="55000"/>
+              </a:srgbClr>
+            </a:glow>
+          </a:effectLst>
         </p:spPr>
         <p:style>
           <a:lnRef idx="1">
@@ -5552,13 +6130,27 @@
               <a:gd name="adj" fmla="val 6000"/>
             </a:avLst>
           </a:prstGeom>
-          <a:solidFill>
-            <a:srgbClr val="1E2430"/>
-          </a:solidFill>
+          <a:gradFill rotWithShape="1">
+            <a:gsLst>
+              <a:gs pos="0">
+                <a:srgbClr val="1E2430"/>
+              </a:gs>
+              <a:gs pos="100000">
+                <a:srgbClr val="2C3442"/>
+              </a:gs>
+            </a:gsLst>
+            <a:lin scaled="0" ang="18900000"/>
+          </a:gradFill>
           <a:ln>
             <a:noFill/>
           </a:ln>
-          <a:effectLst/>
+          <a:effectLst>
+            <a:outerShdw blurRad="228600" dist="76200" dir="5400000" rotWithShape="0">
+              <a:srgbClr val="000000">
+                <a:alpha val="42000"/>
+              </a:srgbClr>
+            </a:outerShdw>
+          </a:effectLst>
         </p:spPr>
         <p:style>
           <a:lnRef idx="1">
@@ -5584,7 +6176,61 @@
       </p:sp>
       <p:sp>
         <p:nvSpPr>
-          <p:cNvPr id="6" name="Oval 5"/>
+          <p:cNvPr id="6" name="Rounded Rectangle 5"/>
+          <p:cNvSpPr/>
+          <p:nvPr/>
+        </p:nvSpPr>
+        <p:spPr>
+          <a:xfrm>
+            <a:off x="877824" y="2148840"/>
+            <a:ext cx="50800" cy="475488"/>
+          </a:xfrm>
+          <a:prstGeom prst="roundRect">
+            <a:avLst>
+              <a:gd name="adj" fmla="val 50000"/>
+            </a:avLst>
+          </a:prstGeom>
+          <a:gradFill rotWithShape="1">
+            <a:gsLst>
+              <a:gs pos="0">
+                <a:srgbClr val="4C9AFF"/>
+              </a:gs>
+              <a:gs pos="100000">
+                <a:srgbClr val="7B61FF"/>
+              </a:gs>
+            </a:gsLst>
+            <a:lin scaled="0" ang="18900000"/>
+          </a:gradFill>
+          <a:ln>
+            <a:noFill/>
+          </a:ln>
+          <a:effectLst/>
+        </p:spPr>
+        <p:style>
+          <a:lnRef idx="1">
+            <a:schemeClr val="accent1"/>
+          </a:lnRef>
+          <a:fillRef idx="3">
+            <a:schemeClr val="accent1"/>
+          </a:fillRef>
+          <a:effectRef idx="2">
+            <a:schemeClr val="accent1"/>
+          </a:effectRef>
+          <a:fontRef idx="minor">
+            <a:schemeClr val="lt1"/>
+          </a:fontRef>
+        </p:style>
+        <p:txBody>
+          <a:bodyPr rtlCol="0" anchor="ctr"/>
+          <a:lstStyle/>
+          <a:p>
+            <a:pPr algn="ctr"/>
+          </a:p>
+        </p:txBody>
+      </p:sp>
+      <p:sp>
+        <p:nvSpPr>
+          <p:cNvPr id="7" name="Oval 6"/>
           <p:cNvSpPr/>
           <p:nvPr/>
         </p:nvSpPr>
@@ -5610,7 +6256,13 @@
           <a:ln>
             <a:noFill/>
           </a:ln>
-          <a:effectLst/>
+          <a:effectLst>
+            <a:glow rad="88900">
+              <a:srgbClr val="4C9AFF">
+                <a:alpha val="38000"/>
+              </a:srgbClr>
+            </a:glow>
+          </a:effectLst>
         </p:spPr>
         <p:style>
           <a:lnRef idx="1">
@@ -5636,14 +6288,14 @@
       </p:sp>
       <p:sp>
         <p:nvSpPr>
-          <p:cNvPr id="7" name="TextBox 6"/>
+          <p:cNvPr id="8" name="TextBox 7"/>
           <p:cNvSpPr txBox="1"/>
           <p:nvPr/>
         </p:nvSpPr>
         <p:spPr>
           <a:xfrm>
-            <a:off x="1051560" y="2240280"/>
-            <a:ext cx="402336" cy="365760"/>
+            <a:off x="1051560" y="2203704"/>
+            <a:ext cx="402336" cy="402336"/>
           </a:xfrm>
           <a:prstGeom prst="rect">
             <a:avLst/>
@@ -5651,14 +6303,14 @@
           <a:noFill/>
         </p:spPr>
         <p:txBody>
-          <a:bodyPr wrap="square">
+          <a:bodyPr wrap="square" lIns="0" rIns="0" tIns="0" bIns="0" anchor="ctr">
             <a:spAutoFit/>
           </a:bodyPr>
           <a:lstStyle/>
           <a:p>
-            <a:pPr>
+            <a:pPr algn="ctr">
               <a:lnSpc>
-                <a:spcPct val="120000"/>
+                <a:spcPct val="100000"/>
               </a:lnSpc>
             </a:pPr>
             <a:r>
@@ -5674,7 +6326,7 @@
       </p:sp>
       <p:sp>
         <p:nvSpPr>
-          <p:cNvPr id="8" name="TextBox 7"/>
+          <p:cNvPr id="9" name="TextBox 8"/>
           <p:cNvSpPr txBox="1"/>
           <p:nvPr/>
         </p:nvSpPr>
@@ -5712,7 +6364,7 @@
       </p:sp>
       <p:sp>
         <p:nvSpPr>
-          <p:cNvPr id="9" name="Rounded Rectangle 8"/>
+          <p:cNvPr id="10" name="Rounded Rectangle 9"/>
           <p:cNvSpPr/>
           <p:nvPr/>
         </p:nvSpPr>
@@ -5726,13 +6378,27 @@
               <a:gd name="adj" fmla="val 6000"/>
             </a:avLst>
           </a:prstGeom>
-          <a:solidFill>
-            <a:srgbClr val="1E2430"/>
-          </a:solidFill>
+          <a:gradFill rotWithShape="1">
+            <a:gsLst>
+              <a:gs pos="0">
+                <a:srgbClr val="1E2430"/>
+              </a:gs>
+              <a:gs pos="100000">
+                <a:srgbClr val="2C3442"/>
+              </a:gs>
+            </a:gsLst>
+            <a:lin scaled="0" ang="18900000"/>
+          </a:gradFill>
           <a:ln>
             <a:noFill/>
           </a:ln>
-          <a:effectLst/>
+          <a:effectLst>
+            <a:outerShdw blurRad="228600" dist="76200" dir="5400000" rotWithShape="0">
+              <a:srgbClr val="000000">
+                <a:alpha val="42000"/>
+              </a:srgbClr>
+            </a:outerShdw>
+          </a:effectLst>
         </p:spPr>
         <p:style>
           <a:lnRef idx="1">
@@ -5758,7 +6424,61 @@
       </p:sp>
       <p:sp>
         <p:nvSpPr>
-          <p:cNvPr id="10" name="Oval 9"/>
+          <p:cNvPr id="11" name="Rounded Rectangle 10"/>
+          <p:cNvSpPr/>
+          <p:nvPr/>
+        </p:nvSpPr>
+        <p:spPr>
+          <a:xfrm>
+            <a:off x="877824" y="3191256"/>
+            <a:ext cx="50800" cy="475488"/>
+          </a:xfrm>
+          <a:prstGeom prst="roundRect">
+            <a:avLst>
+              <a:gd name="adj" fmla="val 50000"/>
+            </a:avLst>
+          </a:prstGeom>
+          <a:gradFill rotWithShape="1">
+            <a:gsLst>
+              <a:gs pos="0">
+                <a:srgbClr val="4C9AFF"/>
+              </a:gs>
+              <a:gs pos="100000">
+                <a:srgbClr val="7B61FF"/>
+              </a:gs>
+            </a:gsLst>
+            <a:lin scaled="0" ang="18900000"/>
+          </a:gradFill>
+          <a:ln>
+            <a:noFill/>
+          </a:ln>
+          <a:effectLst/>
+        </p:spPr>
+        <p:style>
+          <a:lnRef idx="1">
+            <a:schemeClr val="accent1"/>
+          </a:lnRef>
+          <a:fillRef idx="3">
+            <a:schemeClr val="accent1"/>
+          </a:fillRef>
+          <a:effectRef idx="2">
+            <a:schemeClr val="accent1"/>
+          </a:effectRef>
+          <a:fontRef idx="minor">
+            <a:schemeClr val="lt1"/>
+          </a:fontRef>
+        </p:style>
+        <p:txBody>
+          <a:bodyPr rtlCol="0" anchor="ctr"/>
+          <a:lstStyle/>
+          <a:p>
+            <a:pPr algn="ctr"/>
+          </a:p>
+        </p:txBody>
+      </p:sp>
+      <p:sp>
+        <p:nvSpPr>
+          <p:cNvPr id="12" name="Oval 11"/>
           <p:cNvSpPr/>
           <p:nvPr/>
         </p:nvSpPr>
@@ -5784,7 +6504,13 @@
           <a:ln>
             <a:noFill/>
           </a:ln>
-          <a:effectLst/>
+          <a:effectLst>
+            <a:glow rad="88900">
+              <a:srgbClr val="4C9AFF">
+                <a:alpha val="38000"/>
+              </a:srgbClr>
+            </a:glow>
+          </a:effectLst>
         </p:spPr>
         <p:style>
           <a:lnRef idx="1">
@@ -5810,14 +6536,14 @@
       </p:sp>
       <p:sp>
         <p:nvSpPr>
-          <p:cNvPr id="11" name="TextBox 10"/>
+          <p:cNvPr id="13" name="TextBox 12"/>
           <p:cNvSpPr txBox="1"/>
           <p:nvPr/>
         </p:nvSpPr>
         <p:spPr>
           <a:xfrm>
-            <a:off x="1051560" y="3282696"/>
-            <a:ext cx="402336" cy="365760"/>
+            <a:off x="1051560" y="3246120"/>
+            <a:ext cx="402336" cy="402336"/>
           </a:xfrm>
           <a:prstGeom prst="rect">
             <a:avLst/>
@@ -5825,14 +6551,14 @@
           <a:noFill/>
         </p:spPr>
         <p:txBody>
-          <a:bodyPr wrap="square">
+          <a:bodyPr wrap="square" lIns="0" rIns="0" tIns="0" bIns="0" anchor="ctr">
             <a:spAutoFit/>
           </a:bodyPr>
           <a:lstStyle/>
           <a:p>
-            <a:pPr>
+            <a:pPr algn="ctr">
               <a:lnSpc>
-                <a:spcPct val="120000"/>
+                <a:spcPct val="100000"/>
               </a:lnSpc>
             </a:pPr>
             <a:r>
@@ -5848,7 +6574,7 @@
       </p:sp>
       <p:sp>
         <p:nvSpPr>
-          <p:cNvPr id="12" name="TextBox 11"/>
+          <p:cNvPr id="14" name="TextBox 13"/>
           <p:cNvSpPr txBox="1"/>
           <p:nvPr/>
         </p:nvSpPr>
@@ -5886,7 +6612,7 @@
       </p:sp>
       <p:sp>
         <p:nvSpPr>
-          <p:cNvPr id="13" name="Rounded Rectangle 12"/>
+          <p:cNvPr id="15" name="Rounded Rectangle 14"/>
           <p:cNvSpPr/>
           <p:nvPr/>
         </p:nvSpPr>
@@ -5900,13 +6626,27 @@
               <a:gd name="adj" fmla="val 6000"/>
             </a:avLst>
           </a:prstGeom>
-          <a:solidFill>
-            <a:srgbClr val="1E2430"/>
-          </a:solidFill>
+          <a:gradFill rotWithShape="1">
+            <a:gsLst>
+              <a:gs pos="0">
+                <a:srgbClr val="1E2430"/>
+              </a:gs>
+              <a:gs pos="100000">
+                <a:srgbClr val="2C3442"/>
+              </a:gs>
+            </a:gsLst>
+            <a:lin scaled="0" ang="18900000"/>
+          </a:gradFill>
           <a:ln>
             <a:noFill/>
           </a:ln>
-          <a:effectLst/>
+          <a:effectLst>
+            <a:outerShdw blurRad="228600" dist="76200" dir="5400000" rotWithShape="0">
+              <a:srgbClr val="000000">
+                <a:alpha val="42000"/>
+              </a:srgbClr>
+            </a:outerShdw>
+          </a:effectLst>
         </p:spPr>
         <p:style>
           <a:lnRef idx="1">
@@ -5932,7 +6672,61 @@
       </p:sp>
       <p:sp>
         <p:nvSpPr>
-          <p:cNvPr id="14" name="Oval 13"/>
+          <p:cNvPr id="16" name="Rounded Rectangle 15"/>
+          <p:cNvSpPr/>
+          <p:nvPr/>
+        </p:nvSpPr>
+        <p:spPr>
+          <a:xfrm>
+            <a:off x="877824" y="4233672"/>
+            <a:ext cx="50800" cy="475488"/>
+          </a:xfrm>
+          <a:prstGeom prst="roundRect">
+            <a:avLst>
+              <a:gd name="adj" fmla="val 50000"/>
+            </a:avLst>
+          </a:prstGeom>
+          <a:gradFill rotWithShape="1">
+            <a:gsLst>
+              <a:gs pos="0">
+                <a:srgbClr val="4C9AFF"/>
+              </a:gs>
+              <a:gs pos="100000">
+                <a:srgbClr val="7B61FF"/>
+              </a:gs>
+            </a:gsLst>
+            <a:lin scaled="0" ang="18900000"/>
+          </a:gradFill>
+          <a:ln>
+            <a:noFill/>
+          </a:ln>
+          <a:effectLst/>
+        </p:spPr>
+        <p:style>
+          <a:lnRef idx="1">
+            <a:schemeClr val="accent1"/>
+          </a:lnRef>
+          <a:fillRef idx="3">
+            <a:schemeClr val="accent1"/>
+          </a:fillRef>
+          <a:effectRef idx="2">
+            <a:schemeClr val="accent1"/>
+          </a:effectRef>
+          <a:fontRef idx="minor">
+            <a:schemeClr val="lt1"/>
+          </a:fontRef>
+        </p:style>
+        <p:txBody>
+          <a:bodyPr rtlCol="0" anchor="ctr"/>
+          <a:lstStyle/>
+          <a:p>
+            <a:pPr algn="ctr"/>
+          </a:p>
+        </p:txBody>
+      </p:sp>
+      <p:sp>
+        <p:nvSpPr>
+          <p:cNvPr id="17" name="Oval 16"/>
           <p:cNvSpPr/>
           <p:nvPr/>
         </p:nvSpPr>
@@ -5958,7 +6752,13 @@
           <a:ln>
             <a:noFill/>
           </a:ln>
-          <a:effectLst/>
+          <a:effectLst>
+            <a:glow rad="88900">
+              <a:srgbClr val="4C9AFF">
+                <a:alpha val="38000"/>
+              </a:srgbClr>
+            </a:glow>
+          </a:effectLst>
         </p:spPr>
         <p:style>
           <a:lnRef idx="1">
@@ -5984,14 +6784,14 @@
       </p:sp>
       <p:sp>
         <p:nvSpPr>
-          <p:cNvPr id="15" name="TextBox 14"/>
+          <p:cNvPr id="18" name="TextBox 17"/>
           <p:cNvSpPr txBox="1"/>
           <p:nvPr/>
         </p:nvSpPr>
         <p:spPr>
           <a:xfrm>
-            <a:off x="1051560" y="4325112"/>
-            <a:ext cx="402336" cy="365760"/>
+            <a:off x="1051560" y="4288536"/>
+            <a:ext cx="402336" cy="402336"/>
           </a:xfrm>
           <a:prstGeom prst="rect">
             <a:avLst/>
@@ -5999,14 +6799,14 @@
           <a:noFill/>
         </p:spPr>
         <p:txBody>
-          <a:bodyPr wrap="square">
+          <a:bodyPr wrap="square" lIns="0" rIns="0" tIns="0" bIns="0" anchor="ctr">
             <a:spAutoFit/>
           </a:bodyPr>
           <a:lstStyle/>
           <a:p>
-            <a:pPr>
+            <a:pPr algn="ctr">
               <a:lnSpc>
-                <a:spcPct val="120000"/>
+                <a:spcPct val="100000"/>
               </a:lnSpc>
             </a:pPr>
             <a:r>
@@ -6022,7 +6822,7 @@
       </p:sp>
       <p:sp>
         <p:nvSpPr>
-          <p:cNvPr id="16" name="TextBox 15"/>
+          <p:cNvPr id="19" name="TextBox 18"/>
           <p:cNvSpPr txBox="1"/>
           <p:nvPr/>
         </p:nvSpPr>
@@ -6060,7 +6860,7 @@
       </p:sp>
       <p:sp>
         <p:nvSpPr>
-          <p:cNvPr id="17" name="Rounded Rectangle 16"/>
+          <p:cNvPr id="20" name="Rounded Rectangle 19"/>
           <p:cNvSpPr/>
           <p:nvPr/>
         </p:nvSpPr>
@@ -6074,13 +6874,27 @@
               <a:gd name="adj" fmla="val 6000"/>
             </a:avLst>
           </a:prstGeom>
-          <a:solidFill>
-            <a:srgbClr val="1E2430"/>
-          </a:solidFill>
+          <a:gradFill rotWithShape="1">
+            <a:gsLst>
+              <a:gs pos="0">
+                <a:srgbClr val="1E2430"/>
+              </a:gs>
+              <a:gs pos="100000">
+                <a:srgbClr val="2C3442"/>
+              </a:gs>
+            </a:gsLst>
+            <a:lin scaled="0" ang="18900000"/>
+          </a:gradFill>
           <a:ln>
             <a:noFill/>
           </a:ln>
-          <a:effectLst/>
+          <a:effectLst>
+            <a:outerShdw blurRad="228600" dist="76200" dir="5400000" rotWithShape="0">
+              <a:srgbClr val="000000">
+                <a:alpha val="42000"/>
+              </a:srgbClr>
+            </a:outerShdw>
+          </a:effectLst>
         </p:spPr>
         <p:style>
           <a:lnRef idx="1">
@@ -6106,7 +6920,61 @@
       </p:sp>
       <p:sp>
         <p:nvSpPr>
-          <p:cNvPr id="18" name="Oval 17"/>
+          <p:cNvPr id="21" name="Rounded Rectangle 20"/>
+          <p:cNvSpPr/>
+          <p:nvPr/>
+        </p:nvSpPr>
+        <p:spPr>
+          <a:xfrm>
+            <a:off x="877824" y="5276088"/>
+            <a:ext cx="50800" cy="475488"/>
+          </a:xfrm>
+          <a:prstGeom prst="roundRect">
+            <a:avLst>
+              <a:gd name="adj" fmla="val 50000"/>
+            </a:avLst>
+          </a:prstGeom>
+          <a:gradFill rotWithShape="1">
+            <a:gsLst>
+              <a:gs pos="0">
+                <a:srgbClr val="4C9AFF"/>
+              </a:gs>
+              <a:gs pos="100000">
+                <a:srgbClr val="7B61FF"/>
+              </a:gs>
+            </a:gsLst>
+            <a:lin scaled="0" ang="18900000"/>
+          </a:gradFill>
+          <a:ln>
+            <a:noFill/>
+          </a:ln>
+          <a:effectLst/>
+        </p:spPr>
+        <p:style>
+          <a:lnRef idx="1">
+            <a:schemeClr val="accent1"/>
+          </a:lnRef>
+          <a:fillRef idx="3">
+            <a:schemeClr val="accent1"/>
+          </a:fillRef>
+          <a:effectRef idx="2">
+            <a:schemeClr val="accent1"/>
+          </a:effectRef>
+          <a:fontRef idx="minor">
+            <a:schemeClr val="lt1"/>
+          </a:fontRef>
+        </p:style>
+        <p:txBody>
+          <a:bodyPr rtlCol="0" anchor="ctr"/>
+          <a:lstStyle/>
+          <a:p>
+            <a:pPr algn="ctr"/>
+          </a:p>
+        </p:txBody>
+      </p:sp>
+      <p:sp>
+        <p:nvSpPr>
+          <p:cNvPr id="22" name="Oval 21"/>
           <p:cNvSpPr/>
           <p:nvPr/>
         </p:nvSpPr>
@@ -6132,7 +7000,13 @@
           <a:ln>
             <a:noFill/>
           </a:ln>
-          <a:effectLst/>
+          <a:effectLst>
+            <a:glow rad="88900">
+              <a:srgbClr val="4C9AFF">
+                <a:alpha val="38000"/>
+              </a:srgbClr>
+            </a:glow>
+          </a:effectLst>
         </p:spPr>
         <p:style>
           <a:lnRef idx="1">
@@ -6158,14 +7032,14 @@
       </p:sp>
       <p:sp>
         <p:nvSpPr>
-          <p:cNvPr id="19" name="TextBox 18"/>
+          <p:cNvPr id="23" name="TextBox 22"/>
           <p:cNvSpPr txBox="1"/>
           <p:nvPr/>
         </p:nvSpPr>
         <p:spPr>
           <a:xfrm>
-            <a:off x="1051560" y="5367528"/>
-            <a:ext cx="402336" cy="365760"/>
+            <a:off x="1051560" y="5330952"/>
+            <a:ext cx="402336" cy="402336"/>
           </a:xfrm>
           <a:prstGeom prst="rect">
             <a:avLst/>
@@ -6173,14 +7047,14 @@
           <a:noFill/>
         </p:spPr>
         <p:txBody>
-          <a:bodyPr wrap="square">
+          <a:bodyPr wrap="square" lIns="0" rIns="0" tIns="0" bIns="0" anchor="ctr">
             <a:spAutoFit/>
           </a:bodyPr>
           <a:lstStyle/>
           <a:p>
-            <a:pPr>
+            <a:pPr algn="ctr">
               <a:lnSpc>
-                <a:spcPct val="120000"/>
+                <a:spcPct val="100000"/>
               </a:lnSpc>
             </a:pPr>
             <a:r>
@@ -6196,7 +7070,7 @@
       </p:sp>
       <p:sp>
         <p:nvSpPr>
-          <p:cNvPr id="20" name="TextBox 19"/>
+          <p:cNvPr id="24" name="TextBox 23"/>
           <p:cNvSpPr txBox="1"/>
           <p:nvPr/>
         </p:nvSpPr>
@@ -6234,7 +7108,7 @@
       </p:sp>
       <p:sp>
         <p:nvSpPr>
-          <p:cNvPr id="21" name="TextBox 20"/>
+          <p:cNvPr id="25" name="TextBox 24"/>
           <p:cNvSpPr txBox="1"/>
           <p:nvPr/>
         </p:nvSpPr>
@@ -6272,7 +7146,7 @@
       </p:sp>
       <p:sp>
         <p:nvSpPr>
-          <p:cNvPr id="22" name="TextBox 21"/>
+          <p:cNvPr id="26" name="TextBox 25"/>
           <p:cNvSpPr txBox="1"/>
           <p:nvPr/>
         </p:nvSpPr>
@@ -6325,6 +7199,270 @@
       </p:transition>
     </mc:Fallback>
   </mc:AlternateContent>
+  <p:timing>
+    <p:tnLst>
+      <p:par>
+        <p:cTn id="1" dur="indefinite" restart="never" nodeType="tmRoot">
+          <p:childTnLst>
+            <p:seq concurrent="1" nextAc="seek">
+              <p:cTn id="2" dur="indefinite" nodeType="mainSeq">
+                <p:childTnLst>
+                  <p:par>
+                    <p:cTn id="3" fill="hold">
+                      <p:stCondLst>
+                        <p:cond delay="indefinite"/>
+                      </p:stCondLst>
+                      <p:childTnLst>
+                        <p:par>
+                          <p:cTn id="4" fill="hold">
+                            <p:stCondLst>
+                              <p:cond delay="0"/>
+                            </p:stCondLst>
+                            <p:childTnLst>
+                              <p:par>
+                                <p:cTn id="10" fill="hold">
+                                  <p:stCondLst>
+                                    <p:cond delay="0"/>
+                                  </p:stCondLst>
+                                  <p:childTnLst>
+                                    <p:set>
+                                      <p:cBhvr>
+                                        <p:cTn id="11" dur="1" fill="hold"/>
+                                        <p:tgtEl>
+                                          <p:spTgt spid="5"/>
+                                        </p:tgtEl>
+                                        <p:attrNameLst>
+                                          <p:attrName>style.visibility</p:attrName>
+                                        </p:attrNameLst>
+                                      </p:cBhvr>
+                                      <p:to>
+                                        <p:strVal val="visible"/>
+                                      </p:to>
+                                    </p:set>
+                                    <p:animEffect transition="in" filter="fade">
+                                      <p:cBhvr>
+                                        <p:cTn id="12" dur="420"/>
+                                        <p:tgtEl>
+                                          <p:spTgt spid="5"/>
+                                        </p:tgtEl>
+                                      </p:cBhvr>
+                                    </p:animEffect>
+                                    <p:anim calcmode="lin" valueType="num">
+                                      <p:cBhvr additive="base">
+                                        <p:cTn id="13" dur="420" fill="hold"/>
+                                        <p:tgtEl>
+                                          <p:spTgt spid="5"/>
+                                        </p:tgtEl>
+                                        <p:attrNameLst>
+                                          <p:attrName>ppt_y</p:attrName>
+                                        </p:attrNameLst>
+                                      </p:cBhvr>
+                                      <p:tavLst>
+                                        <p:tav tm="0">
+                                          <p:val>
+                                            <p:strVal val="#ppt_y+0.035"/>
+                                          </p:val>
+                                        </p:tav>
+                                        <p:tav tm="100000">
+                                          <p:val>
+                                            <p:strVal val="#ppt_y"/>
+                                          </p:val>
+                                        </p:tav>
+                                      </p:tavLst>
+                                    </p:anim>
+                                  </p:childTnLst>
+                                </p:cTn>
+                              </p:par>
+                              <p:par>
+                                <p:cTn id="20" fill="hold">
+                                  <p:stCondLst>
+                                    <p:cond delay="260"/>
+                                  </p:stCondLst>
+                                  <p:childTnLst>
+                                    <p:set>
+                                      <p:cBhvr>
+                                        <p:cTn id="21" dur="1" fill="hold"/>
+                                        <p:tgtEl>
+                                          <p:spTgt spid="10"/>
+                                        </p:tgtEl>
+                                        <p:attrNameLst>
+                                          <p:attrName>style.visibility</p:attrName>
+                                        </p:attrNameLst>
+                                      </p:cBhvr>
+                                      <p:to>
+                                        <p:strVal val="visible"/>
+                                      </p:to>
+                                    </p:set>
+                                    <p:animEffect transition="in" filter="fade">
+                                      <p:cBhvr>
+                                        <p:cTn id="22" dur="420"/>
+                                        <p:tgtEl>
+                                          <p:spTgt spid="10"/>
+                                        </p:tgtEl>
+                                      </p:cBhvr>
+                                    </p:animEffect>
+                                    <p:anim calcmode="lin" valueType="num">
+                                      <p:cBhvr additive="base">
+                                        <p:cTn id="23" dur="420" fill="hold"/>
+                                        <p:tgtEl>
+                                          <p:spTgt spid="10"/>
+                                        </p:tgtEl>
+                                        <p:attrNameLst>
+                                          <p:attrName>ppt_y</p:attrName>
+                                        </p:attrNameLst>
+                                      </p:cBhvr>
+                                      <p:tavLst>
+                                        <p:tav tm="0">
+                                          <p:val>
+                                            <p:strVal val="#ppt_y+0.035"/>
+                                          </p:val>
+                                        </p:tav>
+                                        <p:tav tm="100000">
+                                          <p:val>
+                                            <p:strVal val="#ppt_y"/>
+                                          </p:val>
+                                        </p:tav>
+                                      </p:tavLst>
+                                    </p:anim>
+                                  </p:childTnLst>
+                                </p:cTn>
+                              </p:par>
+                              <p:par>
+                                <p:cTn id="30" fill="hold">
+                                  <p:stCondLst>
+                                    <p:cond delay="520"/>
+                                  </p:stCondLst>
+                                  <p:childTnLst>
+                                    <p:set>
+                                      <p:cBhvr>
+                                        <p:cTn id="31" dur="1" fill="hold"/>
+                                        <p:tgtEl>
+                                          <p:spTgt spid="15"/>
+                                        </p:tgtEl>
+                                        <p:attrNameLst>
+                                          <p:attrName>style.visibility</p:attrName>
+                                        </p:attrNameLst>
+                                      </p:cBhvr>
+                                      <p:to>
+                                        <p:strVal val="visible"/>
+                                      </p:to>
+                                    </p:set>
+                                    <p:animEffect transition="in" filter="fade">
+                                      <p:cBhvr>
+                                        <p:cTn id="32" dur="420"/>
+                                        <p:tgtEl>
+                                          <p:spTgt spid="15"/>
+                                        </p:tgtEl>
+                                      </p:cBhvr>
+                                    </p:animEffect>
+                                    <p:anim calcmode="lin" valueType="num">
+                                      <p:cBhvr additive="base">
+                                        <p:cTn id="33" dur="420" fill="hold"/>
+                                        <p:tgtEl>
+                                          <p:spTgt spid="15"/>
+                                        </p:tgtEl>
+                                        <p:attrNameLst>
+                                          <p:attrName>ppt_y</p:attrName>
+                                        </p:attrNameLst>
+                                      </p:cBhvr>
+                                      <p:tavLst>
+                                        <p:tav tm="0">
+                                          <p:val>
+                                            <p:strVal val="#ppt_y+0.035"/>
+                                          </p:val>
+                                        </p:tav>
+                                        <p:tav tm="100000">
+                                          <p:val>
+                                            <p:strVal val="#ppt_y"/>
+                                          </p:val>
+                                        </p:tav>
+                                      </p:tavLst>
+                                    </p:anim>
+                                  </p:childTnLst>
+                                </p:cTn>
+                              </p:par>
+                              <p:par>
+                                <p:cTn id="40" fill="hold">
+                                  <p:stCondLst>
+                                    <p:cond delay="780"/>
+                                  </p:stCondLst>
+                                  <p:childTnLst>
+                                    <p:set>
+                                      <p:cBhvr>
+                                        <p:cTn id="41" dur="1" fill="hold"/>
+                                        <p:tgtEl>
+                                          <p:spTgt spid="20"/>
+                                        </p:tgtEl>
+                                        <p:attrNameLst>
+                                          <p:attrName>style.visibility</p:attrName>
+                                        </p:attrNameLst>
+                                      </p:cBhvr>
+                                      <p:to>
+                                        <p:strVal val="visible"/>
+                                      </p:to>
+                                    </p:set>
+                                    <p:animEffect transition="in" filter="fade">
+                                      <p:cBhvr>
+                                        <p:cTn id="42" dur="420"/>
+                                        <p:tgtEl>
+                                          <p:spTgt spid="20"/>
+                                        </p:tgtEl>
+                                      </p:cBhvr>
+                                    </p:animEffect>
+                                    <p:anim calcmode="lin" valueType="num">
+                                      <p:cBhvr additive="base">
+                                        <p:cTn id="43" dur="420" fill="hold"/>
+                                        <p:tgtEl>
+                                          <p:spTgt spid="20"/>
+                                        </p:tgtEl>
+                                        <p:attrNameLst>
+                                          <p:attrName>ppt_y</p:attrName>
+                                        </p:attrNameLst>
+                                      </p:cBhvr>
+                                      <p:tavLst>
+                                        <p:tav tm="0">
+                                          <p:val>
+                                            <p:strVal val="#ppt_y+0.035"/>
+                                          </p:val>
+                                        </p:tav>
+                                        <p:tav tm="100000">
+                                          <p:val>
+                                            <p:strVal val="#ppt_y"/>
+                                          </p:val>
+                                        </p:tav>
+                                      </p:tavLst>
+                                    </p:anim>
+                                  </p:childTnLst>
+                                </p:cTn>
+                              </p:par>
+                            </p:childTnLst>
+                          </p:cTn>
+                        </p:par>
+                      </p:childTnLst>
+                    </p:cTn>
+                  </p:par>
+                </p:childTnLst>
+              </p:cTn>
+              <p:prevCondLst>
+                <p:cond evt="onPrev" delay="0">
+                  <p:tgtEl>
+                    <p:sldTgt/>
+                  </p:tgtEl>
+                </p:cond>
+              </p:prevCondLst>
+              <p:nextCondLst>
+                <p:cond evt="onNext" delay="0">
+                  <p:tgtEl>
+                    <p:sldTgt/>
+                  </p:tgtEl>
+                </p:cond>
+              </p:nextCondLst>
+            </p:seq>
+          </p:childTnLst>
+        </p:cTn>
+      </p:par>
+    </p:tnLst>
+  </p:timing>
 </p:sld>
 </file>
 
@@ -6402,7 +7540,13 @@
           <a:ln>
             <a:noFill/>
           </a:ln>
-          <a:effectLst/>
+          <a:effectLst>
+            <a:glow rad="127000">
+              <a:srgbClr val="4C9AFF">
+                <a:alpha val="55000"/>
+              </a:srgbClr>
+            </a:glow>
+          </a:effectLst>
         </p:spPr>
         <p:style>
           <a:lnRef idx="1">
@@ -6480,13 +7624,27 @@
               <a:gd name="adj" fmla="val 6000"/>
             </a:avLst>
           </a:prstGeom>
-          <a:solidFill>
-            <a:srgbClr val="1E2430"/>
-          </a:solidFill>
+          <a:gradFill rotWithShape="1">
+            <a:gsLst>
+              <a:gs pos="0">
+                <a:srgbClr val="1E2430"/>
+              </a:gs>
+              <a:gs pos="100000">
+                <a:srgbClr val="2C3442"/>
+              </a:gs>
+            </a:gsLst>
+            <a:lin scaled="0" ang="18900000"/>
+          </a:gradFill>
           <a:ln>
             <a:noFill/>
           </a:ln>
-          <a:effectLst/>
+          <a:effectLst>
+            <a:outerShdw blurRad="228600" dist="76200" dir="5400000" rotWithShape="0">
+              <a:srgbClr val="000000">
+                <a:alpha val="42000"/>
+              </a:srgbClr>
+            </a:outerShdw>
+          </a:effectLst>
         </p:spPr>
         <p:style>
           <a:lnRef idx="1">
@@ -6512,7 +7670,61 @@
       </p:sp>
       <p:sp>
         <p:nvSpPr>
-          <p:cNvPr id="6" name="Oval 5"/>
+          <p:cNvPr id="6" name="Rounded Rectangle 5"/>
+          <p:cNvSpPr/>
+          <p:nvPr/>
+        </p:nvSpPr>
+        <p:spPr>
+          <a:xfrm>
+            <a:off x="877824" y="2148840"/>
+            <a:ext cx="50800" cy="475488"/>
+          </a:xfrm>
+          <a:prstGeom prst="roundRect">
+            <a:avLst>
+              <a:gd name="adj" fmla="val 50000"/>
+            </a:avLst>
+          </a:prstGeom>
+          <a:gradFill rotWithShape="1">
+            <a:gsLst>
+              <a:gs pos="0">
+                <a:srgbClr val="4C9AFF"/>
+              </a:gs>
+              <a:gs pos="100000">
+                <a:srgbClr val="7B61FF"/>
+              </a:gs>
+            </a:gsLst>
+            <a:lin scaled="0" ang="18900000"/>
+          </a:gradFill>
+          <a:ln>
+            <a:noFill/>
+          </a:ln>
+          <a:effectLst/>
+        </p:spPr>
+        <p:style>
+          <a:lnRef idx="1">
+            <a:schemeClr val="accent1"/>
+          </a:lnRef>
+          <a:fillRef idx="3">
+            <a:schemeClr val="accent1"/>
+          </a:fillRef>
+          <a:effectRef idx="2">
+            <a:schemeClr val="accent1"/>
+          </a:effectRef>
+          <a:fontRef idx="minor">
+            <a:schemeClr val="lt1"/>
+          </a:fontRef>
+        </p:style>
+        <p:txBody>
+          <a:bodyPr rtlCol="0" anchor="ctr"/>
+          <a:lstStyle/>
+          <a:p>
+            <a:pPr algn="ctr"/>
+          </a:p>
+        </p:txBody>
+      </p:sp>
+      <p:sp>
+        <p:nvSpPr>
+          <p:cNvPr id="7" name="Oval 6"/>
           <p:cNvSpPr/>
           <p:nvPr/>
         </p:nvSpPr>
@@ -6538,7 +7750,13 @@
           <a:ln>
             <a:noFill/>
           </a:ln>
-          <a:effectLst/>
+          <a:effectLst>
+            <a:glow rad="88900">
+              <a:srgbClr val="4C9AFF">
+                <a:alpha val="38000"/>
+              </a:srgbClr>
+            </a:glow>
+          </a:effectLst>
         </p:spPr>
         <p:style>
           <a:lnRef idx="1">
@@ -6564,14 +7782,14 @@
       </p:sp>
       <p:sp>
         <p:nvSpPr>
-          <p:cNvPr id="7" name="TextBox 6"/>
+          <p:cNvPr id="8" name="TextBox 7"/>
           <p:cNvSpPr txBox="1"/>
           <p:nvPr/>
         </p:nvSpPr>
         <p:spPr>
           <a:xfrm>
-            <a:off x="1051560" y="2240280"/>
-            <a:ext cx="402336" cy="365760"/>
+            <a:off x="1051560" y="2203704"/>
+            <a:ext cx="402336" cy="402336"/>
           </a:xfrm>
           <a:prstGeom prst="rect">
             <a:avLst/>
@@ -6579,14 +7797,14 @@
           <a:noFill/>
         </p:spPr>
         <p:txBody>
-          <a:bodyPr wrap="square">
+          <a:bodyPr wrap="square" lIns="0" rIns="0" tIns="0" bIns="0" anchor="ctr">
             <a:spAutoFit/>
           </a:bodyPr>
           <a:lstStyle/>
           <a:p>
-            <a:pPr>
+            <a:pPr algn="ctr">
               <a:lnSpc>
-                <a:spcPct val="120000"/>
+                <a:spcPct val="100000"/>
               </a:lnSpc>
             </a:pPr>
             <a:r>
@@ -6602,7 +7820,7 @@
       </p:sp>
       <p:sp>
         <p:nvSpPr>
-          <p:cNvPr id="8" name="TextBox 7"/>
+          <p:cNvPr id="9" name="TextBox 8"/>
           <p:cNvSpPr txBox="1"/>
           <p:nvPr/>
         </p:nvSpPr>
@@ -6640,7 +7858,7 @@
       </p:sp>
       <p:sp>
         <p:nvSpPr>
-          <p:cNvPr id="9" name="Rounded Rectangle 8"/>
+          <p:cNvPr id="10" name="Rounded Rectangle 9"/>
           <p:cNvSpPr/>
           <p:nvPr/>
         </p:nvSpPr>
@@ -6654,13 +7872,27 @@
               <a:gd name="adj" fmla="val 6000"/>
             </a:avLst>
           </a:prstGeom>
-          <a:solidFill>
-            <a:srgbClr val="1E2430"/>
-          </a:solidFill>
+          <a:gradFill rotWithShape="1">
+            <a:gsLst>
+              <a:gs pos="0">
+                <a:srgbClr val="1E2430"/>
+              </a:gs>
+              <a:gs pos="100000">
+                <a:srgbClr val="2C3442"/>
+              </a:gs>
+            </a:gsLst>
+            <a:lin scaled="0" ang="18900000"/>
+          </a:gradFill>
           <a:ln>
             <a:noFill/>
           </a:ln>
-          <a:effectLst/>
+          <a:effectLst>
+            <a:outerShdw blurRad="228600" dist="76200" dir="5400000" rotWithShape="0">
+              <a:srgbClr val="000000">
+                <a:alpha val="42000"/>
+              </a:srgbClr>
+            </a:outerShdw>
+          </a:effectLst>
         </p:spPr>
         <p:style>
           <a:lnRef idx="1">
@@ -6686,7 +7918,61 @@
       </p:sp>
       <p:sp>
         <p:nvSpPr>
-          <p:cNvPr id="10" name="Oval 9"/>
+          <p:cNvPr id="11" name="Rounded Rectangle 10"/>
+          <p:cNvSpPr/>
+          <p:nvPr/>
+        </p:nvSpPr>
+        <p:spPr>
+          <a:xfrm>
+            <a:off x="877824" y="3191256"/>
+            <a:ext cx="50800" cy="475488"/>
+          </a:xfrm>
+          <a:prstGeom prst="roundRect">
+            <a:avLst>
+              <a:gd name="adj" fmla="val 50000"/>
+            </a:avLst>
+          </a:prstGeom>
+          <a:gradFill rotWithShape="1">
+            <a:gsLst>
+              <a:gs pos="0">
+                <a:srgbClr val="4C9AFF"/>
+              </a:gs>
+              <a:gs pos="100000">
+                <a:srgbClr val="7B61FF"/>
+              </a:gs>
+            </a:gsLst>
+            <a:lin scaled="0" ang="18900000"/>
+          </a:gradFill>
+          <a:ln>
+            <a:noFill/>
+          </a:ln>
+          <a:effectLst/>
+        </p:spPr>
+        <p:style>
+          <a:lnRef idx="1">
+            <a:schemeClr val="accent1"/>
+          </a:lnRef>
+          <a:fillRef idx="3">
+            <a:schemeClr val="accent1"/>
+          </a:fillRef>
+          <a:effectRef idx="2">
+            <a:schemeClr val="accent1"/>
+          </a:effectRef>
+          <a:fontRef idx="minor">
+            <a:schemeClr val="lt1"/>
+          </a:fontRef>
+        </p:style>
+        <p:txBody>
+          <a:bodyPr rtlCol="0" anchor="ctr"/>
+          <a:lstStyle/>
+          <a:p>
+            <a:pPr algn="ctr"/>
+          </a:p>
+        </p:txBody>
+      </p:sp>
+      <p:sp>
+        <p:nvSpPr>
+          <p:cNvPr id="12" name="Oval 11"/>
           <p:cNvSpPr/>
           <p:nvPr/>
         </p:nvSpPr>
@@ -6712,7 +7998,13 @@
           <a:ln>
             <a:noFill/>
           </a:ln>
-          <a:effectLst/>
+          <a:effectLst>
+            <a:glow rad="88900">
+              <a:srgbClr val="4C9AFF">
+                <a:alpha val="38000"/>
+              </a:srgbClr>
+            </a:glow>
+          </a:effectLst>
         </p:spPr>
         <p:style>
           <a:lnRef idx="1">
@@ -6738,14 +8030,14 @@
       </p:sp>
       <p:sp>
         <p:nvSpPr>
-          <p:cNvPr id="11" name="TextBox 10"/>
+          <p:cNvPr id="13" name="TextBox 12"/>
           <p:cNvSpPr txBox="1"/>
           <p:nvPr/>
         </p:nvSpPr>
         <p:spPr>
           <a:xfrm>
-            <a:off x="1051560" y="3282696"/>
-            <a:ext cx="402336" cy="365760"/>
+            <a:off x="1051560" y="3246120"/>
+            <a:ext cx="402336" cy="402336"/>
           </a:xfrm>
           <a:prstGeom prst="rect">
             <a:avLst/>
@@ -6753,14 +8045,14 @@
           <a:noFill/>
         </p:spPr>
         <p:txBody>
-          <a:bodyPr wrap="square">
+          <a:bodyPr wrap="square" lIns="0" rIns="0" tIns="0" bIns="0" anchor="ctr">
             <a:spAutoFit/>
           </a:bodyPr>
           <a:lstStyle/>
           <a:p>
-            <a:pPr>
+            <a:pPr algn="ctr">
               <a:lnSpc>
-                <a:spcPct val="120000"/>
+                <a:spcPct val="100000"/>
               </a:lnSpc>
             </a:pPr>
             <a:r>
@@ -6776,7 +8068,7 @@
       </p:sp>
       <p:sp>
         <p:nvSpPr>
-          <p:cNvPr id="12" name="TextBox 11"/>
+          <p:cNvPr id="14" name="TextBox 13"/>
           <p:cNvSpPr txBox="1"/>
           <p:nvPr/>
         </p:nvSpPr>
@@ -6814,7 +8106,7 @@
       </p:sp>
       <p:sp>
         <p:nvSpPr>
-          <p:cNvPr id="13" name="Rounded Rectangle 12"/>
+          <p:cNvPr id="15" name="Rounded Rectangle 14"/>
           <p:cNvSpPr/>
           <p:nvPr/>
         </p:nvSpPr>
@@ -6828,13 +8120,27 @@
               <a:gd name="adj" fmla="val 6000"/>
             </a:avLst>
           </a:prstGeom>
-          <a:solidFill>
-            <a:srgbClr val="1E2430"/>
-          </a:solidFill>
+          <a:gradFill rotWithShape="1">
+            <a:gsLst>
+              <a:gs pos="0">
+                <a:srgbClr val="1E2430"/>
+              </a:gs>
+              <a:gs pos="100000">
+                <a:srgbClr val="2C3442"/>
+              </a:gs>
+            </a:gsLst>
+            <a:lin scaled="0" ang="18900000"/>
+          </a:gradFill>
           <a:ln>
             <a:noFill/>
           </a:ln>
-          <a:effectLst/>
+          <a:effectLst>
+            <a:outerShdw blurRad="228600" dist="76200" dir="5400000" rotWithShape="0">
+              <a:srgbClr val="000000">
+                <a:alpha val="42000"/>
+              </a:srgbClr>
+            </a:outerShdw>
+          </a:effectLst>
         </p:spPr>
         <p:style>
           <a:lnRef idx="1">
@@ -6860,7 +8166,61 @@
       </p:sp>
       <p:sp>
         <p:nvSpPr>
-          <p:cNvPr id="14" name="Oval 13"/>
+          <p:cNvPr id="16" name="Rounded Rectangle 15"/>
+          <p:cNvSpPr/>
+          <p:nvPr/>
+        </p:nvSpPr>
+        <p:spPr>
+          <a:xfrm>
+            <a:off x="877824" y="4233672"/>
+            <a:ext cx="50800" cy="475488"/>
+          </a:xfrm>
+          <a:prstGeom prst="roundRect">
+            <a:avLst>
+              <a:gd name="adj" fmla="val 50000"/>
+            </a:avLst>
+          </a:prstGeom>
+          <a:gradFill rotWithShape="1">
+            <a:gsLst>
+              <a:gs pos="0">
+                <a:srgbClr val="4C9AFF"/>
+              </a:gs>
+              <a:gs pos="100000">
+                <a:srgbClr val="7B61FF"/>
+              </a:gs>
+            </a:gsLst>
+            <a:lin scaled="0" ang="18900000"/>
+          </a:gradFill>
+          <a:ln>
+            <a:noFill/>
+          </a:ln>
+          <a:effectLst/>
+        </p:spPr>
+        <p:style>
+          <a:lnRef idx="1">
+            <a:schemeClr val="accent1"/>
+          </a:lnRef>
+          <a:fillRef idx="3">
+            <a:schemeClr val="accent1"/>
+          </a:fillRef>
+          <a:effectRef idx="2">
+            <a:schemeClr val="accent1"/>
+          </a:effectRef>
+          <a:fontRef idx="minor">
+            <a:schemeClr val="lt1"/>
+          </a:fontRef>
+        </p:style>
+        <p:txBody>
+          <a:bodyPr rtlCol="0" anchor="ctr"/>
+          <a:lstStyle/>
+          <a:p>
+            <a:pPr algn="ctr"/>
+          </a:p>
+        </p:txBody>
+      </p:sp>
+      <p:sp>
+        <p:nvSpPr>
+          <p:cNvPr id="17" name="Oval 16"/>
           <p:cNvSpPr/>
           <p:nvPr/>
         </p:nvSpPr>
@@ -6886,7 +8246,13 @@
           <a:ln>
             <a:noFill/>
           </a:ln>
-          <a:effectLst/>
+          <a:effectLst>
+            <a:glow rad="88900">
+              <a:srgbClr val="4C9AFF">
+                <a:alpha val="38000"/>
+              </a:srgbClr>
+            </a:glow>
+          </a:effectLst>
         </p:spPr>
         <p:style>
           <a:lnRef idx="1">
@@ -6912,14 +8278,14 @@
       </p:sp>
       <p:sp>
         <p:nvSpPr>
-          <p:cNvPr id="15" name="TextBox 14"/>
+          <p:cNvPr id="18" name="TextBox 17"/>
           <p:cNvSpPr txBox="1"/>
           <p:nvPr/>
         </p:nvSpPr>
         <p:spPr>
           <a:xfrm>
-            <a:off x="1051560" y="4325112"/>
-            <a:ext cx="402336" cy="365760"/>
+            <a:off x="1051560" y="4288536"/>
+            <a:ext cx="402336" cy="402336"/>
           </a:xfrm>
           <a:prstGeom prst="rect">
             <a:avLst/>
@@ -6927,14 +8293,14 @@
           <a:noFill/>
         </p:spPr>
         <p:txBody>
-          <a:bodyPr wrap="square">
+          <a:bodyPr wrap="square" lIns="0" rIns="0" tIns="0" bIns="0" anchor="ctr">
             <a:spAutoFit/>
           </a:bodyPr>
           <a:lstStyle/>
           <a:p>
-            <a:pPr>
+            <a:pPr algn="ctr">
               <a:lnSpc>
-                <a:spcPct val="120000"/>
+                <a:spcPct val="100000"/>
               </a:lnSpc>
             </a:pPr>
             <a:r>
@@ -6950,7 +8316,7 @@
       </p:sp>
       <p:sp>
         <p:nvSpPr>
-          <p:cNvPr id="16" name="TextBox 15"/>
+          <p:cNvPr id="19" name="TextBox 18"/>
           <p:cNvSpPr txBox="1"/>
           <p:nvPr/>
         </p:nvSpPr>
@@ -6988,7 +8354,7 @@
       </p:sp>
       <p:sp>
         <p:nvSpPr>
-          <p:cNvPr id="17" name="Rounded Rectangle 16"/>
+          <p:cNvPr id="20" name="Rounded Rectangle 19"/>
           <p:cNvSpPr/>
           <p:nvPr/>
         </p:nvSpPr>
@@ -7002,13 +8368,27 @@
               <a:gd name="adj" fmla="val 6000"/>
             </a:avLst>
           </a:prstGeom>
-          <a:solidFill>
-            <a:srgbClr val="1E2430"/>
-          </a:solidFill>
+          <a:gradFill rotWithShape="1">
+            <a:gsLst>
+              <a:gs pos="0">
+                <a:srgbClr val="1E2430"/>
+              </a:gs>
+              <a:gs pos="100000">
+                <a:srgbClr val="2C3442"/>
+              </a:gs>
+            </a:gsLst>
+            <a:lin scaled="0" ang="18900000"/>
+          </a:gradFill>
           <a:ln>
             <a:noFill/>
           </a:ln>
-          <a:effectLst/>
+          <a:effectLst>
+            <a:outerShdw blurRad="228600" dist="76200" dir="5400000" rotWithShape="0">
+              <a:srgbClr val="000000">
+                <a:alpha val="42000"/>
+              </a:srgbClr>
+            </a:outerShdw>
+          </a:effectLst>
         </p:spPr>
         <p:style>
           <a:lnRef idx="1">
@@ -7034,7 +8414,61 @@
       </p:sp>
       <p:sp>
         <p:nvSpPr>
-          <p:cNvPr id="18" name="Oval 17"/>
+          <p:cNvPr id="21" name="Rounded Rectangle 20"/>
+          <p:cNvSpPr/>
+          <p:nvPr/>
+        </p:nvSpPr>
+        <p:spPr>
+          <a:xfrm>
+            <a:off x="877824" y="5276088"/>
+            <a:ext cx="50800" cy="475488"/>
+          </a:xfrm>
+          <a:prstGeom prst="roundRect">
+            <a:avLst>
+              <a:gd name="adj" fmla="val 50000"/>
+            </a:avLst>
+          </a:prstGeom>
+          <a:gradFill rotWithShape="1">
+            <a:gsLst>
+              <a:gs pos="0">
+                <a:srgbClr val="4C9AFF"/>
+              </a:gs>
+              <a:gs pos="100000">
+                <a:srgbClr val="7B61FF"/>
+              </a:gs>
+            </a:gsLst>
+            <a:lin scaled="0" ang="18900000"/>
+          </a:gradFill>
+          <a:ln>
+            <a:noFill/>
+          </a:ln>
+          <a:effectLst/>
+        </p:spPr>
+        <p:style>
+          <a:lnRef idx="1">
+            <a:schemeClr val="accent1"/>
+          </a:lnRef>
+          <a:fillRef idx="3">
+            <a:schemeClr val="accent1"/>
+          </a:fillRef>
+          <a:effectRef idx="2">
+            <a:schemeClr val="accent1"/>
+          </a:effectRef>
+          <a:fontRef idx="minor">
+            <a:schemeClr val="lt1"/>
+          </a:fontRef>
+        </p:style>
+        <p:txBody>
+          <a:bodyPr rtlCol="0" anchor="ctr"/>
+          <a:lstStyle/>
+          <a:p>
+            <a:pPr algn="ctr"/>
+          </a:p>
+        </p:txBody>
+      </p:sp>
+      <p:sp>
+        <p:nvSpPr>
+          <p:cNvPr id="22" name="Oval 21"/>
           <p:cNvSpPr/>
           <p:nvPr/>
         </p:nvSpPr>
@@ -7060,7 +8494,13 @@
           <a:ln>
             <a:noFill/>
           </a:ln>
-          <a:effectLst/>
+          <a:effectLst>
+            <a:glow rad="88900">
+              <a:srgbClr val="4C9AFF">
+                <a:alpha val="38000"/>
+              </a:srgbClr>
+            </a:glow>
+          </a:effectLst>
         </p:spPr>
         <p:style>
           <a:lnRef idx="1">
@@ -7086,14 +8526,14 @@
       </p:sp>
       <p:sp>
         <p:nvSpPr>
-          <p:cNvPr id="19" name="TextBox 18"/>
+          <p:cNvPr id="23" name="TextBox 22"/>
           <p:cNvSpPr txBox="1"/>
           <p:nvPr/>
         </p:nvSpPr>
         <p:spPr>
           <a:xfrm>
-            <a:off x="1051560" y="5367528"/>
-            <a:ext cx="402336" cy="365760"/>
+            <a:off x="1051560" y="5330952"/>
+            <a:ext cx="402336" cy="402336"/>
           </a:xfrm>
           <a:prstGeom prst="rect">
             <a:avLst/>
@@ -7101,14 +8541,14 @@
           <a:noFill/>
         </p:spPr>
         <p:txBody>
-          <a:bodyPr wrap="square">
+          <a:bodyPr wrap="square" lIns="0" rIns="0" tIns="0" bIns="0" anchor="ctr">
             <a:spAutoFit/>
           </a:bodyPr>
           <a:lstStyle/>
           <a:p>
-            <a:pPr>
+            <a:pPr algn="ctr">
               <a:lnSpc>
-                <a:spcPct val="120000"/>
+                <a:spcPct val="100000"/>
               </a:lnSpc>
             </a:pPr>
             <a:r>
@@ -7124,7 +8564,7 @@
       </p:sp>
       <p:sp>
         <p:nvSpPr>
-          <p:cNvPr id="20" name="TextBox 19"/>
+          <p:cNvPr id="24" name="TextBox 23"/>
           <p:cNvSpPr txBox="1"/>
           <p:nvPr/>
         </p:nvSpPr>
@@ -7162,7 +8602,7 @@
       </p:sp>
       <p:sp>
         <p:nvSpPr>
-          <p:cNvPr id="21" name="TextBox 20"/>
+          <p:cNvPr id="25" name="TextBox 24"/>
           <p:cNvSpPr txBox="1"/>
           <p:nvPr/>
         </p:nvSpPr>
@@ -7200,7 +8640,7 @@
       </p:sp>
       <p:sp>
         <p:nvSpPr>
-          <p:cNvPr id="22" name="TextBox 21"/>
+          <p:cNvPr id="26" name="TextBox 25"/>
           <p:cNvSpPr txBox="1"/>
           <p:nvPr/>
         </p:nvSpPr>
@@ -7253,6 +8693,270 @@
       </p:transition>
     </mc:Fallback>
   </mc:AlternateContent>
+  <p:timing>
+    <p:tnLst>
+      <p:par>
+        <p:cTn id="1" dur="indefinite" restart="never" nodeType="tmRoot">
+          <p:childTnLst>
+            <p:seq concurrent="1" nextAc="seek">
+              <p:cTn id="2" dur="indefinite" nodeType="mainSeq">
+                <p:childTnLst>
+                  <p:par>
+                    <p:cTn id="3" fill="hold">
+                      <p:stCondLst>
+                        <p:cond delay="indefinite"/>
+                      </p:stCondLst>
+                      <p:childTnLst>
+                        <p:par>
+                          <p:cTn id="4" fill="hold">
+                            <p:stCondLst>
+                              <p:cond delay="0"/>
+                            </p:stCondLst>
+                            <p:childTnLst>
+                              <p:par>
+                                <p:cTn id="10" fill="hold">
+                                  <p:stCondLst>
+                                    <p:cond delay="0"/>
+                                  </p:stCondLst>
+                                  <p:childTnLst>
+                                    <p:set>
+                                      <p:cBhvr>
+                                        <p:cTn id="11" dur="1" fill="hold"/>
+                                        <p:tgtEl>
+                                          <p:spTgt spid="5"/>
+                                        </p:tgtEl>
+                                        <p:attrNameLst>
+                                          <p:attrName>style.visibility</p:attrName>
+                                        </p:attrNameLst>
+                                      </p:cBhvr>
+                                      <p:to>
+                                        <p:strVal val="visible"/>
+                                      </p:to>
+                                    </p:set>
+                                    <p:animEffect transition="in" filter="fade">
+                                      <p:cBhvr>
+                                        <p:cTn id="12" dur="420"/>
+                                        <p:tgtEl>
+                                          <p:spTgt spid="5"/>
+                                        </p:tgtEl>
+                                      </p:cBhvr>
+                                    </p:animEffect>
+                                    <p:anim calcmode="lin" valueType="num">
+                                      <p:cBhvr additive="base">
+                                        <p:cTn id="13" dur="420" fill="hold"/>
+                                        <p:tgtEl>
+                                          <p:spTgt spid="5"/>
+                                        </p:tgtEl>
+                                        <p:attrNameLst>
+                                          <p:attrName>ppt_y</p:attrName>
+                                        </p:attrNameLst>
+                                      </p:cBhvr>
+                                      <p:tavLst>
+                                        <p:tav tm="0">
+                                          <p:val>
+                                            <p:strVal val="#ppt_y+0.035"/>
+                                          </p:val>
+                                        </p:tav>
+                                        <p:tav tm="100000">
+                                          <p:val>
+                                            <p:strVal val="#ppt_y"/>
+                                          </p:val>
+                                        </p:tav>
+                                      </p:tavLst>
+                                    </p:anim>
+                                  </p:childTnLst>
+                                </p:cTn>
+                              </p:par>
+                              <p:par>
+                                <p:cTn id="20" fill="hold">
+                                  <p:stCondLst>
+                                    <p:cond delay="260"/>
+                                  </p:stCondLst>
+                                  <p:childTnLst>
+                                    <p:set>
+                                      <p:cBhvr>
+                                        <p:cTn id="21" dur="1" fill="hold"/>
+                                        <p:tgtEl>
+                                          <p:spTgt spid="10"/>
+                                        </p:tgtEl>
+                                        <p:attrNameLst>
+                                          <p:attrName>style.visibility</p:attrName>
+                                        </p:attrNameLst>
+                                      </p:cBhvr>
+                                      <p:to>
+                                        <p:strVal val="visible"/>
+                                      </p:to>
+                                    </p:set>
+                                    <p:animEffect transition="in" filter="fade">
+                                      <p:cBhvr>
+                                        <p:cTn id="22" dur="420"/>
+                                        <p:tgtEl>
+                                          <p:spTgt spid="10"/>
+                                        </p:tgtEl>
+                                      </p:cBhvr>
+                                    </p:animEffect>
+                                    <p:anim calcmode="lin" valueType="num">
+                                      <p:cBhvr additive="base">
+                                        <p:cTn id="23" dur="420" fill="hold"/>
+                                        <p:tgtEl>
+                                          <p:spTgt spid="10"/>
+                                        </p:tgtEl>
+                                        <p:attrNameLst>
+                                          <p:attrName>ppt_y</p:attrName>
+                                        </p:attrNameLst>
+                                      </p:cBhvr>
+                                      <p:tavLst>
+                                        <p:tav tm="0">
+                                          <p:val>
+                                            <p:strVal val="#ppt_y+0.035"/>
+                                          </p:val>
+                                        </p:tav>
+                                        <p:tav tm="100000">
+                                          <p:val>
+                                            <p:strVal val="#ppt_y"/>
+                                          </p:val>
+                                        </p:tav>
+                                      </p:tavLst>
+                                    </p:anim>
+                                  </p:childTnLst>
+                                </p:cTn>
+                              </p:par>
+                              <p:par>
+                                <p:cTn id="30" fill="hold">
+                                  <p:stCondLst>
+                                    <p:cond delay="520"/>
+                                  </p:stCondLst>
+                                  <p:childTnLst>
+                                    <p:set>
+                                      <p:cBhvr>
+                                        <p:cTn id="31" dur="1" fill="hold"/>
+                                        <p:tgtEl>
+                                          <p:spTgt spid="15"/>
+                                        </p:tgtEl>
+                                        <p:attrNameLst>
+                                          <p:attrName>style.visibility</p:attrName>
+                                        </p:attrNameLst>
+                                      </p:cBhvr>
+                                      <p:to>
+                                        <p:strVal val="visible"/>
+                                      </p:to>
+                                    </p:set>
+                                    <p:animEffect transition="in" filter="fade">
+                                      <p:cBhvr>
+                                        <p:cTn id="32" dur="420"/>
+                                        <p:tgtEl>
+                                          <p:spTgt spid="15"/>
+                                        </p:tgtEl>
+                                      </p:cBhvr>
+                                    </p:animEffect>
+                                    <p:anim calcmode="lin" valueType="num">
+                                      <p:cBhvr additive="base">
+                                        <p:cTn id="33" dur="420" fill="hold"/>
+                                        <p:tgtEl>
+                                          <p:spTgt spid="15"/>
+                                        </p:tgtEl>
+                                        <p:attrNameLst>
+                                          <p:attrName>ppt_y</p:attrName>
+                                        </p:attrNameLst>
+                                      </p:cBhvr>
+                                      <p:tavLst>
+                                        <p:tav tm="0">
+                                          <p:val>
+                                            <p:strVal val="#ppt_y+0.035"/>
+                                          </p:val>
+                                        </p:tav>
+                                        <p:tav tm="100000">
+                                          <p:val>
+                                            <p:strVal val="#ppt_y"/>
+                                          </p:val>
+                                        </p:tav>
+                                      </p:tavLst>
+                                    </p:anim>
+                                  </p:childTnLst>
+                                </p:cTn>
+                              </p:par>
+                              <p:par>
+                                <p:cTn id="40" fill="hold">
+                                  <p:stCondLst>
+                                    <p:cond delay="780"/>
+                                  </p:stCondLst>
+                                  <p:childTnLst>
+                                    <p:set>
+                                      <p:cBhvr>
+                                        <p:cTn id="41" dur="1" fill="hold"/>
+                                        <p:tgtEl>
+                                          <p:spTgt spid="20"/>
+                                        </p:tgtEl>
+                                        <p:attrNameLst>
+                                          <p:attrName>style.visibility</p:attrName>
+                                        </p:attrNameLst>
+                                      </p:cBhvr>
+                                      <p:to>
+                                        <p:strVal val="visible"/>
+                                      </p:to>
+                                    </p:set>
+                                    <p:animEffect transition="in" filter="fade">
+                                      <p:cBhvr>
+                                        <p:cTn id="42" dur="420"/>
+                                        <p:tgtEl>
+                                          <p:spTgt spid="20"/>
+                                        </p:tgtEl>
+                                      </p:cBhvr>
+                                    </p:animEffect>
+                                    <p:anim calcmode="lin" valueType="num">
+                                      <p:cBhvr additive="base">
+                                        <p:cTn id="43" dur="420" fill="hold"/>
+                                        <p:tgtEl>
+                                          <p:spTgt spid="20"/>
+                                        </p:tgtEl>
+                                        <p:attrNameLst>
+                                          <p:attrName>ppt_y</p:attrName>
+                                        </p:attrNameLst>
+                                      </p:cBhvr>
+                                      <p:tavLst>
+                                        <p:tav tm="0">
+                                          <p:val>
+                                            <p:strVal val="#ppt_y+0.035"/>
+                                          </p:val>
+                                        </p:tav>
+                                        <p:tav tm="100000">
+                                          <p:val>
+                                            <p:strVal val="#ppt_y"/>
+                                          </p:val>
+                                        </p:tav>
+                                      </p:tavLst>
+                                    </p:anim>
+                                  </p:childTnLst>
+                                </p:cTn>
+                              </p:par>
+                            </p:childTnLst>
+                          </p:cTn>
+                        </p:par>
+                      </p:childTnLst>
+                    </p:cTn>
+                  </p:par>
+                </p:childTnLst>
+              </p:cTn>
+              <p:prevCondLst>
+                <p:cond evt="onPrev" delay="0">
+                  <p:tgtEl>
+                    <p:sldTgt/>
+                  </p:tgtEl>
+                </p:cond>
+              </p:prevCondLst>
+              <p:nextCondLst>
+                <p:cond evt="onNext" delay="0">
+                  <p:tgtEl>
+                    <p:sldTgt/>
+                  </p:tgtEl>
+                </p:cond>
+              </p:nextCondLst>
+            </p:seq>
+          </p:childTnLst>
+        </p:cTn>
+      </p:par>
+    </p:tnLst>
+  </p:timing>
 </p:sld>
 </file>
 
@@ -7330,7 +9034,13 @@
           <a:ln>
             <a:noFill/>
           </a:ln>
-          <a:effectLst/>
+          <a:effectLst>
+            <a:glow rad="127000">
+              <a:srgbClr val="4C9AFF">
+                <a:alpha val="55000"/>
+              </a:srgbClr>
+            </a:glow>
+          </a:effectLst>
         </p:spPr>
         <p:style>
           <a:lnRef idx="1">
@@ -7408,13 +9118,27 @@
               <a:gd name="adj" fmla="val 6000"/>
             </a:avLst>
           </a:prstGeom>
-          <a:solidFill>
-            <a:srgbClr val="1E2430"/>
-          </a:solidFill>
+          <a:gradFill rotWithShape="1">
+            <a:gsLst>
+              <a:gs pos="0">
+                <a:srgbClr val="1E2430"/>
+              </a:gs>
+              <a:gs pos="100000">
+                <a:srgbClr val="2C3442"/>
+              </a:gs>
+            </a:gsLst>
+            <a:lin scaled="0" ang="18900000"/>
+          </a:gradFill>
           <a:ln>
             <a:noFill/>
           </a:ln>
-          <a:effectLst/>
+          <a:effectLst>
+            <a:outerShdw blurRad="228600" dist="76200" dir="5400000" rotWithShape="0">
+              <a:srgbClr val="000000">
+                <a:alpha val="42000"/>
+              </a:srgbClr>
+            </a:outerShdw>
+          </a:effectLst>
         </p:spPr>
         <p:style>
           <a:lnRef idx="1">
@@ -7440,7 +9164,61 @@
       </p:sp>
       <p:sp>
         <p:nvSpPr>
-          <p:cNvPr id="6" name="Oval 5"/>
+          <p:cNvPr id="6" name="Rounded Rectangle 5"/>
+          <p:cNvSpPr/>
+          <p:nvPr/>
+        </p:nvSpPr>
+        <p:spPr>
+          <a:xfrm>
+            <a:off x="877824" y="2148840"/>
+            <a:ext cx="50800" cy="475488"/>
+          </a:xfrm>
+          <a:prstGeom prst="roundRect">
+            <a:avLst>
+              <a:gd name="adj" fmla="val 50000"/>
+            </a:avLst>
+          </a:prstGeom>
+          <a:gradFill rotWithShape="1">
+            <a:gsLst>
+              <a:gs pos="0">
+                <a:srgbClr val="4C9AFF"/>
+              </a:gs>
+              <a:gs pos="100000">
+                <a:srgbClr val="7B61FF"/>
+              </a:gs>
+            </a:gsLst>
+            <a:lin scaled="0" ang="18900000"/>
+          </a:gradFill>
+          <a:ln>
+            <a:noFill/>
+          </a:ln>
+          <a:effectLst/>
+        </p:spPr>
+        <p:style>
+          <a:lnRef idx="1">
+            <a:schemeClr val="accent1"/>
+          </a:lnRef>
+          <a:fillRef idx="3">
+            <a:schemeClr val="accent1"/>
+          </a:fillRef>
+          <a:effectRef idx="2">
+            <a:schemeClr val="accent1"/>
+          </a:effectRef>
+          <a:fontRef idx="minor">
+            <a:schemeClr val="lt1"/>
+          </a:fontRef>
+        </p:style>
+        <p:txBody>
+          <a:bodyPr rtlCol="0" anchor="ctr"/>
+          <a:lstStyle/>
+          <a:p>
+            <a:pPr algn="ctr"/>
+          </a:p>
+        </p:txBody>
+      </p:sp>
+      <p:sp>
+        <p:nvSpPr>
+          <p:cNvPr id="7" name="Oval 6"/>
           <p:cNvSpPr/>
           <p:nvPr/>
         </p:nvSpPr>
@@ -7466,7 +9244,13 @@
           <a:ln>
             <a:noFill/>
           </a:ln>
-          <a:effectLst/>
+          <a:effectLst>
+            <a:glow rad="88900">
+              <a:srgbClr val="4C9AFF">
+                <a:alpha val="38000"/>
+              </a:srgbClr>
+            </a:glow>
+          </a:effectLst>
         </p:spPr>
         <p:style>
           <a:lnRef idx="1">
@@ -7492,14 +9276,14 @@
       </p:sp>
       <p:sp>
         <p:nvSpPr>
-          <p:cNvPr id="7" name="TextBox 6"/>
+          <p:cNvPr id="8" name="TextBox 7"/>
           <p:cNvSpPr txBox="1"/>
           <p:nvPr/>
         </p:nvSpPr>
         <p:spPr>
           <a:xfrm>
-            <a:off x="1051560" y="2240280"/>
-            <a:ext cx="402336" cy="365760"/>
+            <a:off x="1051560" y="2203704"/>
+            <a:ext cx="402336" cy="402336"/>
           </a:xfrm>
           <a:prstGeom prst="rect">
             <a:avLst/>
@@ -7507,14 +9291,14 @@
           <a:noFill/>
         </p:spPr>
         <p:txBody>
-          <a:bodyPr wrap="square">
+          <a:bodyPr wrap="square" lIns="0" rIns="0" tIns="0" bIns="0" anchor="ctr">
             <a:spAutoFit/>
           </a:bodyPr>
           <a:lstStyle/>
           <a:p>
-            <a:pPr>
+            <a:pPr algn="ctr">
               <a:lnSpc>
-                <a:spcPct val="120000"/>
+                <a:spcPct val="100000"/>
               </a:lnSpc>
             </a:pPr>
             <a:r>
@@ -7530,7 +9314,7 @@
       </p:sp>
       <p:sp>
         <p:nvSpPr>
-          <p:cNvPr id="8" name="TextBox 7"/>
+          <p:cNvPr id="9" name="TextBox 8"/>
           <p:cNvSpPr txBox="1"/>
           <p:nvPr/>
         </p:nvSpPr>
@@ -7568,7 +9352,7 @@
       </p:sp>
       <p:sp>
         <p:nvSpPr>
-          <p:cNvPr id="9" name="Rounded Rectangle 8"/>
+          <p:cNvPr id="10" name="Rounded Rectangle 9"/>
           <p:cNvSpPr/>
           <p:nvPr/>
         </p:nvSpPr>
@@ -7582,13 +9366,27 @@
               <a:gd name="adj" fmla="val 6000"/>
             </a:avLst>
           </a:prstGeom>
-          <a:solidFill>
-            <a:srgbClr val="1E2430"/>
-          </a:solidFill>
+          <a:gradFill rotWithShape="1">
+            <a:gsLst>
+              <a:gs pos="0">
+                <a:srgbClr val="1E2430"/>
+              </a:gs>
+              <a:gs pos="100000">
+                <a:srgbClr val="2C3442"/>
+              </a:gs>
+            </a:gsLst>
+            <a:lin scaled="0" ang="18900000"/>
+          </a:gradFill>
           <a:ln>
             <a:noFill/>
           </a:ln>
-          <a:effectLst/>
+          <a:effectLst>
+            <a:outerShdw blurRad="228600" dist="76200" dir="5400000" rotWithShape="0">
+              <a:srgbClr val="000000">
+                <a:alpha val="42000"/>
+              </a:srgbClr>
+            </a:outerShdw>
+          </a:effectLst>
         </p:spPr>
         <p:style>
           <a:lnRef idx="1">
@@ -7614,7 +9412,61 @@
       </p:sp>
       <p:sp>
         <p:nvSpPr>
-          <p:cNvPr id="10" name="Oval 9"/>
+          <p:cNvPr id="11" name="Rounded Rectangle 10"/>
+          <p:cNvSpPr/>
+          <p:nvPr/>
+        </p:nvSpPr>
+        <p:spPr>
+          <a:xfrm>
+            <a:off x="877824" y="3191256"/>
+            <a:ext cx="50800" cy="475488"/>
+          </a:xfrm>
+          <a:prstGeom prst="roundRect">
+            <a:avLst>
+              <a:gd name="adj" fmla="val 50000"/>
+            </a:avLst>
+          </a:prstGeom>
+          <a:gradFill rotWithShape="1">
+            <a:gsLst>
+              <a:gs pos="0">
+                <a:srgbClr val="4C9AFF"/>
+              </a:gs>
+              <a:gs pos="100000">
+                <a:srgbClr val="7B61FF"/>
+              </a:gs>
+            </a:gsLst>
+            <a:lin scaled="0" ang="18900000"/>
+          </a:gradFill>
+          <a:ln>
+            <a:noFill/>
+          </a:ln>
+          <a:effectLst/>
+        </p:spPr>
+        <p:style>
+          <a:lnRef idx="1">
+            <a:schemeClr val="accent1"/>
+          </a:lnRef>
+          <a:fillRef idx="3">
+            <a:schemeClr val="accent1"/>
+          </a:fillRef>
+          <a:effectRef idx="2">
+            <a:schemeClr val="accent1"/>
+          </a:effectRef>
+          <a:fontRef idx="minor">
+            <a:schemeClr val="lt1"/>
+          </a:fontRef>
+        </p:style>
+        <p:txBody>
+          <a:bodyPr rtlCol="0" anchor="ctr"/>
+          <a:lstStyle/>
+          <a:p>
+            <a:pPr algn="ctr"/>
+          </a:p>
+        </p:txBody>
+      </p:sp>
+      <p:sp>
+        <p:nvSpPr>
+          <p:cNvPr id="12" name="Oval 11"/>
           <p:cNvSpPr/>
           <p:nvPr/>
         </p:nvSpPr>
@@ -7640,7 +9492,13 @@
           <a:ln>
             <a:noFill/>
           </a:ln>
-          <a:effectLst/>
+          <a:effectLst>
+            <a:glow rad="88900">
+              <a:srgbClr val="4C9AFF">
+                <a:alpha val="38000"/>
+              </a:srgbClr>
+            </a:glow>
+          </a:effectLst>
         </p:spPr>
         <p:style>
           <a:lnRef idx="1">
@@ -7666,14 +9524,14 @@
       </p:sp>
       <p:sp>
         <p:nvSpPr>
-          <p:cNvPr id="11" name="TextBox 10"/>
+          <p:cNvPr id="13" name="TextBox 12"/>
           <p:cNvSpPr txBox="1"/>
           <p:nvPr/>
         </p:nvSpPr>
         <p:spPr>
           <a:xfrm>
-            <a:off x="1051560" y="3282696"/>
-            <a:ext cx="402336" cy="365760"/>
+            <a:off x="1051560" y="3246120"/>
+            <a:ext cx="402336" cy="402336"/>
           </a:xfrm>
           <a:prstGeom prst="rect">
             <a:avLst/>
@@ -7681,14 +9539,14 @@
           <a:noFill/>
         </p:spPr>
         <p:txBody>
-          <a:bodyPr wrap="square">
+          <a:bodyPr wrap="square" lIns="0" rIns="0" tIns="0" bIns="0" anchor="ctr">
             <a:spAutoFit/>
           </a:bodyPr>
           <a:lstStyle/>
           <a:p>
-            <a:pPr>
+            <a:pPr algn="ctr">
               <a:lnSpc>
-                <a:spcPct val="120000"/>
+                <a:spcPct val="100000"/>
               </a:lnSpc>
             </a:pPr>
             <a:r>
@@ -7704,7 +9562,7 @@
       </p:sp>
       <p:sp>
         <p:nvSpPr>
-          <p:cNvPr id="12" name="TextBox 11"/>
+          <p:cNvPr id="14" name="TextBox 13"/>
           <p:cNvSpPr txBox="1"/>
           <p:nvPr/>
         </p:nvSpPr>
@@ -7742,7 +9600,7 @@
       </p:sp>
       <p:sp>
         <p:nvSpPr>
-          <p:cNvPr id="13" name="Rounded Rectangle 12"/>
+          <p:cNvPr id="15" name="Rounded Rectangle 14"/>
           <p:cNvSpPr/>
           <p:nvPr/>
         </p:nvSpPr>
@@ -7756,13 +9614,27 @@
               <a:gd name="adj" fmla="val 6000"/>
             </a:avLst>
           </a:prstGeom>
-          <a:solidFill>
-            <a:srgbClr val="1E2430"/>
-          </a:solidFill>
+          <a:gradFill rotWithShape="1">
+            <a:gsLst>
+              <a:gs pos="0">
+                <a:srgbClr val="1E2430"/>
+              </a:gs>
+              <a:gs pos="100000">
+                <a:srgbClr val="2C3442"/>
+              </a:gs>
+            </a:gsLst>
+            <a:lin scaled="0" ang="18900000"/>
+          </a:gradFill>
           <a:ln>
             <a:noFill/>
           </a:ln>
-          <a:effectLst/>
+          <a:effectLst>
+            <a:outerShdw blurRad="228600" dist="76200" dir="5400000" rotWithShape="0">
+              <a:srgbClr val="000000">
+                <a:alpha val="42000"/>
+              </a:srgbClr>
+            </a:outerShdw>
+          </a:effectLst>
         </p:spPr>
         <p:style>
           <a:lnRef idx="1">
@@ -7788,7 +9660,61 @@
       </p:sp>
       <p:sp>
         <p:nvSpPr>
-          <p:cNvPr id="14" name="Oval 13"/>
+          <p:cNvPr id="16" name="Rounded Rectangle 15"/>
+          <p:cNvSpPr/>
+          <p:nvPr/>
+        </p:nvSpPr>
+        <p:spPr>
+          <a:xfrm>
+            <a:off x="877824" y="4233672"/>
+            <a:ext cx="50800" cy="475488"/>
+          </a:xfrm>
+          <a:prstGeom prst="roundRect">
+            <a:avLst>
+              <a:gd name="adj" fmla="val 50000"/>
+            </a:avLst>
+          </a:prstGeom>
+          <a:gradFill rotWithShape="1">
+            <a:gsLst>
+              <a:gs pos="0">
+                <a:srgbClr val="4C9AFF"/>
+              </a:gs>
+              <a:gs pos="100000">
+                <a:srgbClr val="7B61FF"/>
+              </a:gs>
+            </a:gsLst>
+            <a:lin scaled="0" ang="18900000"/>
+          </a:gradFill>
+          <a:ln>
+            <a:noFill/>
+          </a:ln>
+          <a:effectLst/>
+        </p:spPr>
+        <p:style>
+          <a:lnRef idx="1">
+            <a:schemeClr val="accent1"/>
+          </a:lnRef>
+          <a:fillRef idx="3">
+            <a:schemeClr val="accent1"/>
+          </a:fillRef>
+          <a:effectRef idx="2">
+            <a:schemeClr val="accent1"/>
+          </a:effectRef>
+          <a:fontRef idx="minor">
+            <a:schemeClr val="lt1"/>
+          </a:fontRef>
+        </p:style>
+        <p:txBody>
+          <a:bodyPr rtlCol="0" anchor="ctr"/>
+          <a:lstStyle/>
+          <a:p>
+            <a:pPr algn="ctr"/>
+          </a:p>
+        </p:txBody>
+      </p:sp>
+      <p:sp>
+        <p:nvSpPr>
+          <p:cNvPr id="17" name="Oval 16"/>
           <p:cNvSpPr/>
           <p:nvPr/>
         </p:nvSpPr>
@@ -7814,7 +9740,13 @@
           <a:ln>
             <a:noFill/>
           </a:ln>
-          <a:effectLst/>
+          <a:effectLst>
+            <a:glow rad="88900">
+              <a:srgbClr val="4C9AFF">
+                <a:alpha val="38000"/>
+              </a:srgbClr>
+            </a:glow>
+          </a:effectLst>
         </p:spPr>
         <p:style>
           <a:lnRef idx="1">
@@ -7840,14 +9772,14 @@
       </p:sp>
       <p:sp>
         <p:nvSpPr>
-          <p:cNvPr id="15" name="TextBox 14"/>
+          <p:cNvPr id="18" name="TextBox 17"/>
           <p:cNvSpPr txBox="1"/>
           <p:nvPr/>
         </p:nvSpPr>
         <p:spPr>
           <a:xfrm>
-            <a:off x="1051560" y="4325112"/>
-            <a:ext cx="402336" cy="365760"/>
+            <a:off x="1051560" y="4288536"/>
+            <a:ext cx="402336" cy="402336"/>
           </a:xfrm>
           <a:prstGeom prst="rect">
             <a:avLst/>
@@ -7855,14 +9787,14 @@
           <a:noFill/>
         </p:spPr>
         <p:txBody>
-          <a:bodyPr wrap="square">
+          <a:bodyPr wrap="square" lIns="0" rIns="0" tIns="0" bIns="0" anchor="ctr">
             <a:spAutoFit/>
           </a:bodyPr>
           <a:lstStyle/>
           <a:p>
-            <a:pPr>
+            <a:pPr algn="ctr">
               <a:lnSpc>
-                <a:spcPct val="120000"/>
+                <a:spcPct val="100000"/>
               </a:lnSpc>
             </a:pPr>
             <a:r>
@@ -7878,7 +9810,7 @@
       </p:sp>
       <p:sp>
         <p:nvSpPr>
-          <p:cNvPr id="16" name="TextBox 15"/>
+          <p:cNvPr id="19" name="TextBox 18"/>
           <p:cNvSpPr txBox="1"/>
           <p:nvPr/>
         </p:nvSpPr>
@@ -7916,7 +9848,7 @@
       </p:sp>
       <p:sp>
         <p:nvSpPr>
-          <p:cNvPr id="17" name="Rounded Rectangle 16"/>
+          <p:cNvPr id="20" name="Rounded Rectangle 19"/>
           <p:cNvSpPr/>
           <p:nvPr/>
         </p:nvSpPr>
@@ -7930,13 +9862,27 @@
               <a:gd name="adj" fmla="val 6000"/>
             </a:avLst>
           </a:prstGeom>
-          <a:solidFill>
-            <a:srgbClr val="1E2430"/>
-          </a:solidFill>
+          <a:gradFill rotWithShape="1">
+            <a:gsLst>
+              <a:gs pos="0">
+                <a:srgbClr val="1E2430"/>
+              </a:gs>
+              <a:gs pos="100000">
+                <a:srgbClr val="2C3442"/>
+              </a:gs>
+            </a:gsLst>
+            <a:lin scaled="0" ang="18900000"/>
+          </a:gradFill>
           <a:ln>
             <a:noFill/>
           </a:ln>
-          <a:effectLst/>
+          <a:effectLst>
+            <a:outerShdw blurRad="228600" dist="76200" dir="5400000" rotWithShape="0">
+              <a:srgbClr val="000000">
+                <a:alpha val="42000"/>
+              </a:srgbClr>
+            </a:outerShdw>
+          </a:effectLst>
         </p:spPr>
         <p:style>
           <a:lnRef idx="1">
@@ -7962,7 +9908,61 @@
       </p:sp>
       <p:sp>
         <p:nvSpPr>
-          <p:cNvPr id="18" name="Oval 17"/>
+          <p:cNvPr id="21" name="Rounded Rectangle 20"/>
+          <p:cNvSpPr/>
+          <p:nvPr/>
+        </p:nvSpPr>
+        <p:spPr>
+          <a:xfrm>
+            <a:off x="877824" y="5276088"/>
+            <a:ext cx="50800" cy="475488"/>
+          </a:xfrm>
+          <a:prstGeom prst="roundRect">
+            <a:avLst>
+              <a:gd name="adj" fmla="val 50000"/>
+            </a:avLst>
+          </a:prstGeom>
+          <a:gradFill rotWithShape="1">
+            <a:gsLst>
+              <a:gs pos="0">
+                <a:srgbClr val="4C9AFF"/>
+              </a:gs>
+              <a:gs pos="100000">
+                <a:srgbClr val="7B61FF"/>
+              </a:gs>
+            </a:gsLst>
+            <a:lin scaled="0" ang="18900000"/>
+          </a:gradFill>
+          <a:ln>
+            <a:noFill/>
+          </a:ln>
+          <a:effectLst/>
+        </p:spPr>
+        <p:style>
+          <a:lnRef idx="1">
+            <a:schemeClr val="accent1"/>
+          </a:lnRef>
+          <a:fillRef idx="3">
+            <a:schemeClr val="accent1"/>
+          </a:fillRef>
+          <a:effectRef idx="2">
+            <a:schemeClr val="accent1"/>
+          </a:effectRef>
+          <a:fontRef idx="minor">
+            <a:schemeClr val="lt1"/>
+          </a:fontRef>
+        </p:style>
+        <p:txBody>
+          <a:bodyPr rtlCol="0" anchor="ctr"/>
+          <a:lstStyle/>
+          <a:p>
+            <a:pPr algn="ctr"/>
+          </a:p>
+        </p:txBody>
+      </p:sp>
+      <p:sp>
+        <p:nvSpPr>
+          <p:cNvPr id="22" name="Oval 21"/>
           <p:cNvSpPr/>
           <p:nvPr/>
         </p:nvSpPr>
@@ -7988,7 +9988,13 @@
           <a:ln>
             <a:noFill/>
           </a:ln>
-          <a:effectLst/>
+          <a:effectLst>
+            <a:glow rad="88900">
+              <a:srgbClr val="4C9AFF">
+                <a:alpha val="38000"/>
+              </a:srgbClr>
+            </a:glow>
+          </a:effectLst>
         </p:spPr>
         <p:style>
           <a:lnRef idx="1">
@@ -8014,14 +10020,14 @@
       </p:sp>
       <p:sp>
         <p:nvSpPr>
-          <p:cNvPr id="19" name="TextBox 18"/>
+          <p:cNvPr id="23" name="TextBox 22"/>
           <p:cNvSpPr txBox="1"/>
           <p:nvPr/>
         </p:nvSpPr>
         <p:spPr>
           <a:xfrm>
-            <a:off x="1051560" y="5367528"/>
-            <a:ext cx="402336" cy="365760"/>
+            <a:off x="1051560" y="5330952"/>
+            <a:ext cx="402336" cy="402336"/>
           </a:xfrm>
           <a:prstGeom prst="rect">
             <a:avLst/>
@@ -8029,14 +10035,14 @@
           <a:noFill/>
         </p:spPr>
         <p:txBody>
-          <a:bodyPr wrap="square">
+          <a:bodyPr wrap="square" lIns="0" rIns="0" tIns="0" bIns="0" anchor="ctr">
             <a:spAutoFit/>
           </a:bodyPr>
           <a:lstStyle/>
           <a:p>
-            <a:pPr>
+            <a:pPr algn="ctr">
               <a:lnSpc>
-                <a:spcPct val="120000"/>
+                <a:spcPct val="100000"/>
               </a:lnSpc>
             </a:pPr>
             <a:r>
@@ -8052,7 +10058,7 @@
       </p:sp>
       <p:sp>
         <p:nvSpPr>
-          <p:cNvPr id="20" name="TextBox 19"/>
+          <p:cNvPr id="24" name="TextBox 23"/>
           <p:cNvSpPr txBox="1"/>
           <p:nvPr/>
         </p:nvSpPr>
@@ -8090,7 +10096,7 @@
       </p:sp>
       <p:sp>
         <p:nvSpPr>
-          <p:cNvPr id="21" name="TextBox 20"/>
+          <p:cNvPr id="25" name="TextBox 24"/>
           <p:cNvSpPr txBox="1"/>
           <p:nvPr/>
         </p:nvSpPr>
@@ -8128,7 +10134,7 @@
       </p:sp>
       <p:sp>
         <p:nvSpPr>
-          <p:cNvPr id="22" name="TextBox 21"/>
+          <p:cNvPr id="26" name="TextBox 25"/>
           <p:cNvSpPr txBox="1"/>
           <p:nvPr/>
         </p:nvSpPr>
@@ -8181,6 +10187,270 @@
       </p:transition>
     </mc:Fallback>
   </mc:AlternateContent>
+  <p:timing>
+    <p:tnLst>
+      <p:par>
+        <p:cTn id="1" dur="indefinite" restart="never" nodeType="tmRoot">
+          <p:childTnLst>
+            <p:seq concurrent="1" nextAc="seek">
+              <p:cTn id="2" dur="indefinite" nodeType="mainSeq">
+                <p:childTnLst>
+                  <p:par>
+                    <p:cTn id="3" fill="hold">
+                      <p:stCondLst>
+                        <p:cond delay="indefinite"/>
+                      </p:stCondLst>
+                      <p:childTnLst>
+                        <p:par>
+                          <p:cTn id="4" fill="hold">
+                            <p:stCondLst>
+                              <p:cond delay="0"/>
+                            </p:stCondLst>
+                            <p:childTnLst>
+                              <p:par>
+                                <p:cTn id="10" fill="hold">
+                                  <p:stCondLst>
+                                    <p:cond delay="0"/>
+                                  </p:stCondLst>
+                                  <p:childTnLst>
+                                    <p:set>
+                                      <p:cBhvr>
+                                        <p:cTn id="11" dur="1" fill="hold"/>
+                                        <p:tgtEl>
+                                          <p:spTgt spid="5"/>
+                                        </p:tgtEl>
+                                        <p:attrNameLst>
+                                          <p:attrName>style.visibility</p:attrName>
+                                        </p:attrNameLst>
+                                      </p:cBhvr>
+                                      <p:to>
+                                        <p:strVal val="visible"/>
+                                      </p:to>
+                                    </p:set>
+                                    <p:animEffect transition="in" filter="fade">
+                                      <p:cBhvr>
+                                        <p:cTn id="12" dur="420"/>
+                                        <p:tgtEl>
+                                          <p:spTgt spid="5"/>
+                                        </p:tgtEl>
+                                      </p:cBhvr>
+                                    </p:animEffect>
+                                    <p:anim calcmode="lin" valueType="num">
+                                      <p:cBhvr additive="base">
+                                        <p:cTn id="13" dur="420" fill="hold"/>
+                                        <p:tgtEl>
+                                          <p:spTgt spid="5"/>
+                                        </p:tgtEl>
+                                        <p:attrNameLst>
+                                          <p:attrName>ppt_y</p:attrName>
+                                        </p:attrNameLst>
+                                      </p:cBhvr>
+                                      <p:tavLst>
+                                        <p:tav tm="0">
+                                          <p:val>
+                                            <p:strVal val="#ppt_y+0.035"/>
+                                          </p:val>
+                                        </p:tav>
+                                        <p:tav tm="100000">
+                                          <p:val>
+                                            <p:strVal val="#ppt_y"/>
+                                          </p:val>
+                                        </p:tav>
+                                      </p:tavLst>
+                                    </p:anim>
+                                  </p:childTnLst>
+                                </p:cTn>
+                              </p:par>
+                              <p:par>
+                                <p:cTn id="20" fill="hold">
+                                  <p:stCondLst>
+                                    <p:cond delay="260"/>
+                                  </p:stCondLst>
+                                  <p:childTnLst>
+                                    <p:set>
+                                      <p:cBhvr>
+                                        <p:cTn id="21" dur="1" fill="hold"/>
+                                        <p:tgtEl>
+                                          <p:spTgt spid="10"/>
+                                        </p:tgtEl>
+                                        <p:attrNameLst>
+                                          <p:attrName>style.visibility</p:attrName>
+                                        </p:attrNameLst>
+                                      </p:cBhvr>
+                                      <p:to>
+                                        <p:strVal val="visible"/>
+                                      </p:to>
+                                    </p:set>
+                                    <p:animEffect transition="in" filter="fade">
+                                      <p:cBhvr>
+                                        <p:cTn id="22" dur="420"/>
+                                        <p:tgtEl>
+                                          <p:spTgt spid="10"/>
+                                        </p:tgtEl>
+                                      </p:cBhvr>
+                                    </p:animEffect>
+                                    <p:anim calcmode="lin" valueType="num">
+                                      <p:cBhvr additive="base">
+                                        <p:cTn id="23" dur="420" fill="hold"/>
+                                        <p:tgtEl>
+                                          <p:spTgt spid="10"/>
+                                        </p:tgtEl>
+                                        <p:attrNameLst>
+                                          <p:attrName>ppt_y</p:attrName>
+                                        </p:attrNameLst>
+                                      </p:cBhvr>
+                                      <p:tavLst>
+                                        <p:tav tm="0">
+                                          <p:val>
+                                            <p:strVal val="#ppt_y+0.035"/>
+                                          </p:val>
+                                        </p:tav>
+                                        <p:tav tm="100000">
+                                          <p:val>
+                                            <p:strVal val="#ppt_y"/>
+                                          </p:val>
+                                        </p:tav>
+                                      </p:tavLst>
+                                    </p:anim>
+                                  </p:childTnLst>
+                                </p:cTn>
+                              </p:par>
+                              <p:par>
+                                <p:cTn id="30" fill="hold">
+                                  <p:stCondLst>
+                                    <p:cond delay="520"/>
+                                  </p:stCondLst>
+                                  <p:childTnLst>
+                                    <p:set>
+                                      <p:cBhvr>
+                                        <p:cTn id="31" dur="1" fill="hold"/>
+                                        <p:tgtEl>
+                                          <p:spTgt spid="15"/>
+                                        </p:tgtEl>
+                                        <p:attrNameLst>
+                                          <p:attrName>style.visibility</p:attrName>
+                                        </p:attrNameLst>
+                                      </p:cBhvr>
+                                      <p:to>
+                                        <p:strVal val="visible"/>
+                                      </p:to>
+                                    </p:set>
+                                    <p:animEffect transition="in" filter="fade">
+                                      <p:cBhvr>
+                                        <p:cTn id="32" dur="420"/>
+                                        <p:tgtEl>
+                                          <p:spTgt spid="15"/>
+                                        </p:tgtEl>
+                                      </p:cBhvr>
+                                    </p:animEffect>
+                                    <p:anim calcmode="lin" valueType="num">
+                                      <p:cBhvr additive="base">
+                                        <p:cTn id="33" dur="420" fill="hold"/>
+                                        <p:tgtEl>
+                                          <p:spTgt spid="15"/>
+                                        </p:tgtEl>
+                                        <p:attrNameLst>
+                                          <p:attrName>ppt_y</p:attrName>
+                                        </p:attrNameLst>
+                                      </p:cBhvr>
+                                      <p:tavLst>
+                                        <p:tav tm="0">
+                                          <p:val>
+                                            <p:strVal val="#ppt_y+0.035"/>
+                                          </p:val>
+                                        </p:tav>
+                                        <p:tav tm="100000">
+                                          <p:val>
+                                            <p:strVal val="#ppt_y"/>
+                                          </p:val>
+                                        </p:tav>
+                                      </p:tavLst>
+                                    </p:anim>
+                                  </p:childTnLst>
+                                </p:cTn>
+                              </p:par>
+                              <p:par>
+                                <p:cTn id="40" fill="hold">
+                                  <p:stCondLst>
+                                    <p:cond delay="780"/>
+                                  </p:stCondLst>
+                                  <p:childTnLst>
+                                    <p:set>
+                                      <p:cBhvr>
+                                        <p:cTn id="41" dur="1" fill="hold"/>
+                                        <p:tgtEl>
+                                          <p:spTgt spid="20"/>
+                                        </p:tgtEl>
+                                        <p:attrNameLst>
+                                          <p:attrName>style.visibility</p:attrName>
+                                        </p:attrNameLst>
+                                      </p:cBhvr>
+                                      <p:to>
+                                        <p:strVal val="visible"/>
+                                      </p:to>
+                                    </p:set>
+                                    <p:animEffect transition="in" filter="fade">
+                                      <p:cBhvr>
+                                        <p:cTn id="42" dur="420"/>
+                                        <p:tgtEl>
+                                          <p:spTgt spid="20"/>
+                                        </p:tgtEl>
+                                      </p:cBhvr>
+                                    </p:animEffect>
+                                    <p:anim calcmode="lin" valueType="num">
+                                      <p:cBhvr additive="base">
+                                        <p:cTn id="43" dur="420" fill="hold"/>
+                                        <p:tgtEl>
+                                          <p:spTgt spid="20"/>
+                                        </p:tgtEl>
+                                        <p:attrNameLst>
+                                          <p:attrName>ppt_y</p:attrName>
+                                        </p:attrNameLst>
+                                      </p:cBhvr>
+                                      <p:tavLst>
+                                        <p:tav tm="0">
+                                          <p:val>
+                                            <p:strVal val="#ppt_y+0.035"/>
+                                          </p:val>
+                                        </p:tav>
+                                        <p:tav tm="100000">
+                                          <p:val>
+                                            <p:strVal val="#ppt_y"/>
+                                          </p:val>
+                                        </p:tav>
+                                      </p:tavLst>
+                                    </p:anim>
+                                  </p:childTnLst>
+                                </p:cTn>
+                              </p:par>
+                            </p:childTnLst>
+                          </p:cTn>
+                        </p:par>
+                      </p:childTnLst>
+                    </p:cTn>
+                  </p:par>
+                </p:childTnLst>
+              </p:cTn>
+              <p:prevCondLst>
+                <p:cond evt="onPrev" delay="0">
+                  <p:tgtEl>
+                    <p:sldTgt/>
+                  </p:tgtEl>
+                </p:cond>
+              </p:prevCondLst>
+              <p:nextCondLst>
+                <p:cond evt="onNext" delay="0">
+                  <p:tgtEl>
+                    <p:sldTgt/>
+                  </p:tgtEl>
+                </p:cond>
+              </p:nextCondLst>
+            </p:seq>
+          </p:childTnLst>
+        </p:cTn>
+      </p:par>
+    </p:tnLst>
+  </p:timing>
 </p:sld>
 </file>
 
@@ -8258,7 +10528,13 @@
           <a:ln>
             <a:noFill/>
           </a:ln>
-          <a:effectLst/>
+          <a:effectLst>
+            <a:glow rad="127000">
+              <a:srgbClr val="4C9AFF">
+                <a:alpha val="55000"/>
+              </a:srgbClr>
+            </a:glow>
+          </a:effectLst>
         </p:spPr>
         <p:style>
           <a:lnRef idx="1">
@@ -8336,13 +10612,27 @@
               <a:gd name="adj" fmla="val 6000"/>
             </a:avLst>
           </a:prstGeom>
-          <a:solidFill>
-            <a:srgbClr val="1E2430"/>
-          </a:solidFill>
+          <a:gradFill rotWithShape="1">
+            <a:gsLst>
+              <a:gs pos="0">
+                <a:srgbClr val="1E2430"/>
+              </a:gs>
+              <a:gs pos="100000">
+                <a:srgbClr val="2C3442"/>
+              </a:gs>
+            </a:gsLst>
+            <a:lin scaled="0" ang="18900000"/>
+          </a:gradFill>
           <a:ln>
             <a:noFill/>
           </a:ln>
-          <a:effectLst/>
+          <a:effectLst>
+            <a:outerShdw blurRad="228600" dist="76200" dir="5400000" rotWithShape="0">
+              <a:srgbClr val="000000">
+                <a:alpha val="42000"/>
+              </a:srgbClr>
+            </a:outerShdw>
+          </a:effectLst>
         </p:spPr>
         <p:style>
           <a:lnRef idx="1">
@@ -8368,7 +10658,61 @@
       </p:sp>
       <p:sp>
         <p:nvSpPr>
-          <p:cNvPr id="6" name="Oval 5"/>
+          <p:cNvPr id="6" name="Rounded Rectangle 5"/>
+          <p:cNvSpPr/>
+          <p:nvPr/>
+        </p:nvSpPr>
+        <p:spPr>
+          <a:xfrm>
+            <a:off x="877824" y="2148840"/>
+            <a:ext cx="50800" cy="475488"/>
+          </a:xfrm>
+          <a:prstGeom prst="roundRect">
+            <a:avLst>
+              <a:gd name="adj" fmla="val 50000"/>
+            </a:avLst>
+          </a:prstGeom>
+          <a:gradFill rotWithShape="1">
+            <a:gsLst>
+              <a:gs pos="0">
+                <a:srgbClr val="4C9AFF"/>
+              </a:gs>
+              <a:gs pos="100000">
+                <a:srgbClr val="7B61FF"/>
+              </a:gs>
+            </a:gsLst>
+            <a:lin scaled="0" ang="18900000"/>
+          </a:gradFill>
+          <a:ln>
+            <a:noFill/>
+          </a:ln>
+          <a:effectLst/>
+        </p:spPr>
+        <p:style>
+          <a:lnRef idx="1">
+            <a:schemeClr val="accent1"/>
+          </a:lnRef>
+          <a:fillRef idx="3">
+            <a:schemeClr val="accent1"/>
+          </a:fillRef>
+          <a:effectRef idx="2">
+            <a:schemeClr val="accent1"/>
+          </a:effectRef>
+          <a:fontRef idx="minor">
+            <a:schemeClr val="lt1"/>
+          </a:fontRef>
+        </p:style>
+        <p:txBody>
+          <a:bodyPr rtlCol="0" anchor="ctr"/>
+          <a:lstStyle/>
+          <a:p>
+            <a:pPr algn="ctr"/>
+          </a:p>
+        </p:txBody>
+      </p:sp>
+      <p:sp>
+        <p:nvSpPr>
+          <p:cNvPr id="7" name="Oval 6"/>
           <p:cNvSpPr/>
           <p:nvPr/>
         </p:nvSpPr>
@@ -8394,7 +10738,13 @@
           <a:ln>
             <a:noFill/>
           </a:ln>
-          <a:effectLst/>
+          <a:effectLst>
+            <a:glow rad="88900">
+              <a:srgbClr val="4C9AFF">
+                <a:alpha val="38000"/>
+              </a:srgbClr>
+            </a:glow>
+          </a:effectLst>
         </p:spPr>
         <p:style>
           <a:lnRef idx="1">
@@ -8420,14 +10770,14 @@
       </p:sp>
       <p:sp>
         <p:nvSpPr>
-          <p:cNvPr id="7" name="TextBox 6"/>
+          <p:cNvPr id="8" name="TextBox 7"/>
           <p:cNvSpPr txBox="1"/>
           <p:nvPr/>
         </p:nvSpPr>
         <p:spPr>
           <a:xfrm>
-            <a:off x="1051560" y="2240280"/>
-            <a:ext cx="402336" cy="365760"/>
+            <a:off x="1051560" y="2203704"/>
+            <a:ext cx="402336" cy="402336"/>
           </a:xfrm>
           <a:prstGeom prst="rect">
             <a:avLst/>
@@ -8435,14 +10785,14 @@
           <a:noFill/>
         </p:spPr>
         <p:txBody>
-          <a:bodyPr wrap="square">
+          <a:bodyPr wrap="square" lIns="0" rIns="0" tIns="0" bIns="0" anchor="ctr">
             <a:spAutoFit/>
           </a:bodyPr>
           <a:lstStyle/>
           <a:p>
-            <a:pPr>
+            <a:pPr algn="ctr">
               <a:lnSpc>
-                <a:spcPct val="120000"/>
+                <a:spcPct val="100000"/>
               </a:lnSpc>
             </a:pPr>
             <a:r>
@@ -8458,7 +10808,7 @@
       </p:sp>
       <p:sp>
         <p:nvSpPr>
-          <p:cNvPr id="8" name="TextBox 7"/>
+          <p:cNvPr id="9" name="TextBox 8"/>
           <p:cNvSpPr txBox="1"/>
           <p:nvPr/>
         </p:nvSpPr>
@@ -8496,7 +10846,7 @@
       </p:sp>
       <p:sp>
         <p:nvSpPr>
-          <p:cNvPr id="9" name="Rounded Rectangle 8"/>
+          <p:cNvPr id="10" name="Rounded Rectangle 9"/>
           <p:cNvSpPr/>
           <p:nvPr/>
         </p:nvSpPr>
@@ -8510,13 +10860,27 @@
               <a:gd name="adj" fmla="val 6000"/>
             </a:avLst>
           </a:prstGeom>
-          <a:solidFill>
-            <a:srgbClr val="1E2430"/>
-          </a:solidFill>
+          <a:gradFill rotWithShape="1">
+            <a:gsLst>
+              <a:gs pos="0">
+                <a:srgbClr val="1E2430"/>
+              </a:gs>
+              <a:gs pos="100000">
+                <a:srgbClr val="2C3442"/>
+              </a:gs>
+            </a:gsLst>
+            <a:lin scaled="0" ang="18900000"/>
+          </a:gradFill>
           <a:ln>
             <a:noFill/>
           </a:ln>
-          <a:effectLst/>
+          <a:effectLst>
+            <a:outerShdw blurRad="228600" dist="76200" dir="5400000" rotWithShape="0">
+              <a:srgbClr val="000000">
+                <a:alpha val="42000"/>
+              </a:srgbClr>
+            </a:outerShdw>
+          </a:effectLst>
         </p:spPr>
         <p:style>
           <a:lnRef idx="1">
@@ -8542,7 +10906,61 @@
       </p:sp>
       <p:sp>
         <p:nvSpPr>
-          <p:cNvPr id="10" name="Oval 9"/>
+          <p:cNvPr id="11" name="Rounded Rectangle 10"/>
+          <p:cNvSpPr/>
+          <p:nvPr/>
+        </p:nvSpPr>
+        <p:spPr>
+          <a:xfrm>
+            <a:off x="877824" y="3191256"/>
+            <a:ext cx="50800" cy="475488"/>
+          </a:xfrm>
+          <a:prstGeom prst="roundRect">
+            <a:avLst>
+              <a:gd name="adj" fmla="val 50000"/>
+            </a:avLst>
+          </a:prstGeom>
+          <a:gradFill rotWithShape="1">
+            <a:gsLst>
+              <a:gs pos="0">
+                <a:srgbClr val="4C9AFF"/>
+              </a:gs>
+              <a:gs pos="100000">
+                <a:srgbClr val="7B61FF"/>
+              </a:gs>
+            </a:gsLst>
+            <a:lin scaled="0" ang="18900000"/>
+          </a:gradFill>
+          <a:ln>
+            <a:noFill/>
+          </a:ln>
+          <a:effectLst/>
+        </p:spPr>
+        <p:style>
+          <a:lnRef idx="1">
+            <a:schemeClr val="accent1"/>
+          </a:lnRef>
+          <a:fillRef idx="3">
+            <a:schemeClr val="accent1"/>
+          </a:fillRef>
+          <a:effectRef idx="2">
+            <a:schemeClr val="accent1"/>
+          </a:effectRef>
+          <a:fontRef idx="minor">
+            <a:schemeClr val="lt1"/>
+          </a:fontRef>
+        </p:style>
+        <p:txBody>
+          <a:bodyPr rtlCol="0" anchor="ctr"/>
+          <a:lstStyle/>
+          <a:p>
+            <a:pPr algn="ctr"/>
+          </a:p>
+        </p:txBody>
+      </p:sp>
+      <p:sp>
+        <p:nvSpPr>
+          <p:cNvPr id="12" name="Oval 11"/>
           <p:cNvSpPr/>
           <p:nvPr/>
         </p:nvSpPr>
@@ -8568,7 +10986,13 @@
           <a:ln>
             <a:noFill/>
           </a:ln>
-          <a:effectLst/>
+          <a:effectLst>
+            <a:glow rad="88900">
+              <a:srgbClr val="4C9AFF">
+                <a:alpha val="38000"/>
+              </a:srgbClr>
+            </a:glow>
+          </a:effectLst>
         </p:spPr>
         <p:style>
           <a:lnRef idx="1">
@@ -8594,14 +11018,14 @@
       </p:sp>
       <p:sp>
         <p:nvSpPr>
-          <p:cNvPr id="11" name="TextBox 10"/>
+          <p:cNvPr id="13" name="TextBox 12"/>
           <p:cNvSpPr txBox="1"/>
           <p:nvPr/>
         </p:nvSpPr>
         <p:spPr>
           <a:xfrm>
-            <a:off x="1051560" y="3282696"/>
-            <a:ext cx="402336" cy="365760"/>
+            <a:off x="1051560" y="3246120"/>
+            <a:ext cx="402336" cy="402336"/>
           </a:xfrm>
           <a:prstGeom prst="rect">
             <a:avLst/>
@@ -8609,14 +11033,14 @@
           <a:noFill/>
         </p:spPr>
         <p:txBody>
-          <a:bodyPr wrap="square">
+          <a:bodyPr wrap="square" lIns="0" rIns="0" tIns="0" bIns="0" anchor="ctr">
             <a:spAutoFit/>
           </a:bodyPr>
           <a:lstStyle/>
           <a:p>
-            <a:pPr>
+            <a:pPr algn="ctr">
               <a:lnSpc>
-                <a:spcPct val="120000"/>
+                <a:spcPct val="100000"/>
               </a:lnSpc>
             </a:pPr>
             <a:r>
@@ -8632,7 +11056,7 @@
       </p:sp>
       <p:sp>
         <p:nvSpPr>
-          <p:cNvPr id="12" name="TextBox 11"/>
+          <p:cNvPr id="14" name="TextBox 13"/>
           <p:cNvSpPr txBox="1"/>
           <p:nvPr/>
         </p:nvSpPr>
@@ -8670,7 +11094,7 @@
       </p:sp>
       <p:sp>
         <p:nvSpPr>
-          <p:cNvPr id="13" name="Rounded Rectangle 12"/>
+          <p:cNvPr id="15" name="Rounded Rectangle 14"/>
           <p:cNvSpPr/>
           <p:nvPr/>
         </p:nvSpPr>
@@ -8684,13 +11108,27 @@
               <a:gd name="adj" fmla="val 6000"/>
             </a:avLst>
           </a:prstGeom>
-          <a:solidFill>
-            <a:srgbClr val="1E2430"/>
-          </a:solidFill>
+          <a:gradFill rotWithShape="1">
+            <a:gsLst>
+              <a:gs pos="0">
+                <a:srgbClr val="1E2430"/>
+              </a:gs>
+              <a:gs pos="100000">
+                <a:srgbClr val="2C3442"/>
+              </a:gs>
+            </a:gsLst>
+            <a:lin scaled="0" ang="18900000"/>
+          </a:gradFill>
           <a:ln>
             <a:noFill/>
           </a:ln>
-          <a:effectLst/>
+          <a:effectLst>
+            <a:outerShdw blurRad="228600" dist="76200" dir="5400000" rotWithShape="0">
+              <a:srgbClr val="000000">
+                <a:alpha val="42000"/>
+              </a:srgbClr>
+            </a:outerShdw>
+          </a:effectLst>
         </p:spPr>
         <p:style>
           <a:lnRef idx="1">
@@ -8716,7 +11154,61 @@
       </p:sp>
       <p:sp>
         <p:nvSpPr>
-          <p:cNvPr id="14" name="Oval 13"/>
+          <p:cNvPr id="16" name="Rounded Rectangle 15"/>
+          <p:cNvSpPr/>
+          <p:nvPr/>
+        </p:nvSpPr>
+        <p:spPr>
+          <a:xfrm>
+            <a:off x="877824" y="4233672"/>
+            <a:ext cx="50800" cy="475488"/>
+          </a:xfrm>
+          <a:prstGeom prst="roundRect">
+            <a:avLst>
+              <a:gd name="adj" fmla="val 50000"/>
+            </a:avLst>
+          </a:prstGeom>
+          <a:gradFill rotWithShape="1">
+            <a:gsLst>
+              <a:gs pos="0">
+                <a:srgbClr val="4C9AFF"/>
+              </a:gs>
+              <a:gs pos="100000">
+                <a:srgbClr val="7B61FF"/>
+              </a:gs>
+            </a:gsLst>
+            <a:lin scaled="0" ang="18900000"/>
+          </a:gradFill>
+          <a:ln>
+            <a:noFill/>
+          </a:ln>
+          <a:effectLst/>
+        </p:spPr>
+        <p:style>
+          <a:lnRef idx="1">
+            <a:schemeClr val="accent1"/>
+          </a:lnRef>
+          <a:fillRef idx="3">
+            <a:schemeClr val="accent1"/>
+          </a:fillRef>
+          <a:effectRef idx="2">
+            <a:schemeClr val="accent1"/>
+          </a:effectRef>
+          <a:fontRef idx="minor">
+            <a:schemeClr val="lt1"/>
+          </a:fontRef>
+        </p:style>
+        <p:txBody>
+          <a:bodyPr rtlCol="0" anchor="ctr"/>
+          <a:lstStyle/>
+          <a:p>
+            <a:pPr algn="ctr"/>
+          </a:p>
+        </p:txBody>
+      </p:sp>
+      <p:sp>
+        <p:nvSpPr>
+          <p:cNvPr id="17" name="Oval 16"/>
           <p:cNvSpPr/>
           <p:nvPr/>
         </p:nvSpPr>
@@ -8742,7 +11234,13 @@
           <a:ln>
             <a:noFill/>
           </a:ln>
-          <a:effectLst/>
+          <a:effectLst>
+            <a:glow rad="88900">
+              <a:srgbClr val="4C9AFF">
+                <a:alpha val="38000"/>
+              </a:srgbClr>
+            </a:glow>
+          </a:effectLst>
         </p:spPr>
         <p:style>
           <a:lnRef idx="1">
@@ -8768,14 +11266,14 @@
       </p:sp>
       <p:sp>
         <p:nvSpPr>
-          <p:cNvPr id="15" name="TextBox 14"/>
+          <p:cNvPr id="18" name="TextBox 17"/>
           <p:cNvSpPr txBox="1"/>
           <p:nvPr/>
         </p:nvSpPr>
         <p:spPr>
           <a:xfrm>
-            <a:off x="1051560" y="4325112"/>
-            <a:ext cx="402336" cy="365760"/>
+            <a:off x="1051560" y="4288536"/>
+            <a:ext cx="402336" cy="402336"/>
           </a:xfrm>
           <a:prstGeom prst="rect">
             <a:avLst/>
@@ -8783,14 +11281,14 @@
           <a:noFill/>
         </p:spPr>
         <p:txBody>
-          <a:bodyPr wrap="square">
+          <a:bodyPr wrap="square" lIns="0" rIns="0" tIns="0" bIns="0" anchor="ctr">
             <a:spAutoFit/>
           </a:bodyPr>
           <a:lstStyle/>
           <a:p>
-            <a:pPr>
+            <a:pPr algn="ctr">
               <a:lnSpc>
-                <a:spcPct val="120000"/>
+                <a:spcPct val="100000"/>
               </a:lnSpc>
             </a:pPr>
             <a:r>
@@ -8806,7 +11304,7 @@
       </p:sp>
       <p:sp>
         <p:nvSpPr>
-          <p:cNvPr id="16" name="TextBox 15"/>
+          <p:cNvPr id="19" name="TextBox 18"/>
           <p:cNvSpPr txBox="1"/>
           <p:nvPr/>
         </p:nvSpPr>
@@ -8844,7 +11342,7 @@
       </p:sp>
       <p:sp>
         <p:nvSpPr>
-          <p:cNvPr id="17" name="Rounded Rectangle 16"/>
+          <p:cNvPr id="20" name="Rounded Rectangle 19"/>
           <p:cNvSpPr/>
           <p:nvPr/>
         </p:nvSpPr>
@@ -8858,13 +11356,27 @@
               <a:gd name="adj" fmla="val 6000"/>
             </a:avLst>
           </a:prstGeom>
-          <a:solidFill>
-            <a:srgbClr val="1E2430"/>
-          </a:solidFill>
+          <a:gradFill rotWithShape="1">
+            <a:gsLst>
+              <a:gs pos="0">
+                <a:srgbClr val="1E2430"/>
+              </a:gs>
+              <a:gs pos="100000">
+                <a:srgbClr val="2C3442"/>
+              </a:gs>
+            </a:gsLst>
+            <a:lin scaled="0" ang="18900000"/>
+          </a:gradFill>
           <a:ln>
             <a:noFill/>
           </a:ln>
-          <a:effectLst/>
+          <a:effectLst>
+            <a:outerShdw blurRad="228600" dist="76200" dir="5400000" rotWithShape="0">
+              <a:srgbClr val="000000">
+                <a:alpha val="42000"/>
+              </a:srgbClr>
+            </a:outerShdw>
+          </a:effectLst>
         </p:spPr>
         <p:style>
           <a:lnRef idx="1">
@@ -8890,7 +11402,61 @@
       </p:sp>
       <p:sp>
         <p:nvSpPr>
-          <p:cNvPr id="18" name="Oval 17"/>
+          <p:cNvPr id="21" name="Rounded Rectangle 20"/>
+          <p:cNvSpPr/>
+          <p:nvPr/>
+        </p:nvSpPr>
+        <p:spPr>
+          <a:xfrm>
+            <a:off x="877824" y="5276088"/>
+            <a:ext cx="50800" cy="475488"/>
+          </a:xfrm>
+          <a:prstGeom prst="roundRect">
+            <a:avLst>
+              <a:gd name="adj" fmla="val 50000"/>
+            </a:avLst>
+          </a:prstGeom>
+          <a:gradFill rotWithShape="1">
+            <a:gsLst>
+              <a:gs pos="0">
+                <a:srgbClr val="4C9AFF"/>
+              </a:gs>
+              <a:gs pos="100000">
+                <a:srgbClr val="7B61FF"/>
+              </a:gs>
+            </a:gsLst>
+            <a:lin scaled="0" ang="18900000"/>
+          </a:gradFill>
+          <a:ln>
+            <a:noFill/>
+          </a:ln>
+          <a:effectLst/>
+        </p:spPr>
+        <p:style>
+          <a:lnRef idx="1">
+            <a:schemeClr val="accent1"/>
+          </a:lnRef>
+          <a:fillRef idx="3">
+            <a:schemeClr val="accent1"/>
+          </a:fillRef>
+          <a:effectRef idx="2">
+            <a:schemeClr val="accent1"/>
+          </a:effectRef>
+          <a:fontRef idx="minor">
+            <a:schemeClr val="lt1"/>
+          </a:fontRef>
+        </p:style>
+        <p:txBody>
+          <a:bodyPr rtlCol="0" anchor="ctr"/>
+          <a:lstStyle/>
+          <a:p>
+            <a:pPr algn="ctr"/>
+          </a:p>
+        </p:txBody>
+      </p:sp>
+      <p:sp>
+        <p:nvSpPr>
+          <p:cNvPr id="22" name="Oval 21"/>
           <p:cNvSpPr/>
           <p:nvPr/>
         </p:nvSpPr>
@@ -8916,7 +11482,13 @@
           <a:ln>
             <a:noFill/>
           </a:ln>
-          <a:effectLst/>
+          <a:effectLst>
+            <a:glow rad="88900">
+              <a:srgbClr val="4C9AFF">
+                <a:alpha val="38000"/>
+              </a:srgbClr>
+            </a:glow>
+          </a:effectLst>
         </p:spPr>
         <p:style>
           <a:lnRef idx="1">
@@ -8942,14 +11514,14 @@
       </p:sp>
       <p:sp>
         <p:nvSpPr>
-          <p:cNvPr id="19" name="TextBox 18"/>
+          <p:cNvPr id="23" name="TextBox 22"/>
           <p:cNvSpPr txBox="1"/>
           <p:nvPr/>
         </p:nvSpPr>
         <p:spPr>
           <a:xfrm>
-            <a:off x="1051560" y="5367528"/>
-            <a:ext cx="402336" cy="365760"/>
+            <a:off x="1051560" y="5330952"/>
+            <a:ext cx="402336" cy="402336"/>
           </a:xfrm>
           <a:prstGeom prst="rect">
             <a:avLst/>
@@ -8957,14 +11529,14 @@
           <a:noFill/>
         </p:spPr>
         <p:txBody>
-          <a:bodyPr wrap="square">
+          <a:bodyPr wrap="square" lIns="0" rIns="0" tIns="0" bIns="0" anchor="ctr">
             <a:spAutoFit/>
           </a:bodyPr>
           <a:lstStyle/>
           <a:p>
-            <a:pPr>
+            <a:pPr algn="ctr">
               <a:lnSpc>
-                <a:spcPct val="120000"/>
+                <a:spcPct val="100000"/>
               </a:lnSpc>
             </a:pPr>
             <a:r>
@@ -8980,7 +11552,7 @@
       </p:sp>
       <p:sp>
         <p:nvSpPr>
-          <p:cNvPr id="20" name="TextBox 19"/>
+          <p:cNvPr id="24" name="TextBox 23"/>
           <p:cNvSpPr txBox="1"/>
           <p:nvPr/>
         </p:nvSpPr>
@@ -9018,7 +11590,7 @@
       </p:sp>
       <p:sp>
         <p:nvSpPr>
-          <p:cNvPr id="21" name="TextBox 20"/>
+          <p:cNvPr id="25" name="TextBox 24"/>
           <p:cNvSpPr txBox="1"/>
           <p:nvPr/>
         </p:nvSpPr>
@@ -9056,7 +11628,7 @@
       </p:sp>
       <p:sp>
         <p:nvSpPr>
-          <p:cNvPr id="22" name="TextBox 21"/>
+          <p:cNvPr id="26" name="TextBox 25"/>
           <p:cNvSpPr txBox="1"/>
           <p:nvPr/>
         </p:nvSpPr>
@@ -9109,6 +11681,270 @@
       </p:transition>
     </mc:Fallback>
   </mc:AlternateContent>
+  <p:timing>
+    <p:tnLst>
+      <p:par>
+        <p:cTn id="1" dur="indefinite" restart="never" nodeType="tmRoot">
+          <p:childTnLst>
+            <p:seq concurrent="1" nextAc="seek">
+              <p:cTn id="2" dur="indefinite" nodeType="mainSeq">
+                <p:childTnLst>
+                  <p:par>
+                    <p:cTn id="3" fill="hold">
+                      <p:stCondLst>
+                        <p:cond delay="indefinite"/>
+                      </p:stCondLst>
+                      <p:childTnLst>
+                        <p:par>
+                          <p:cTn id="4" fill="hold">
+                            <p:stCondLst>
+                              <p:cond delay="0"/>
+                            </p:stCondLst>
+                            <p:childTnLst>
+                              <p:par>
+                                <p:cTn id="10" fill="hold">
+                                  <p:stCondLst>
+                                    <p:cond delay="0"/>
+                                  </p:stCondLst>
+                                  <p:childTnLst>
+                                    <p:set>
+                                      <p:cBhvr>
+                                        <p:cTn id="11" dur="1" fill="hold"/>
+                                        <p:tgtEl>
+                                          <p:spTgt spid="5"/>
+                                        </p:tgtEl>
+                                        <p:attrNameLst>
+                                          <p:attrName>style.visibility</p:attrName>
+                                        </p:attrNameLst>
+                                      </p:cBhvr>
+                                      <p:to>
+                                        <p:strVal val="visible"/>
+                                      </p:to>
+                                    </p:set>
+                                    <p:animEffect transition="in" filter="fade">
+                                      <p:cBhvr>
+                                        <p:cTn id="12" dur="420"/>
+                                        <p:tgtEl>
+                                          <p:spTgt spid="5"/>
+                                        </p:tgtEl>
+                                      </p:cBhvr>
+                                    </p:animEffect>
+                                    <p:anim calcmode="lin" valueType="num">
+                                      <p:cBhvr additive="base">
+                                        <p:cTn id="13" dur="420" fill="hold"/>
+                                        <p:tgtEl>
+                                          <p:spTgt spid="5"/>
+                                        </p:tgtEl>
+                                        <p:attrNameLst>
+                                          <p:attrName>ppt_y</p:attrName>
+                                        </p:attrNameLst>
+                                      </p:cBhvr>
+                                      <p:tavLst>
+                                        <p:tav tm="0">
+                                          <p:val>
+                                            <p:strVal val="#ppt_y+0.035"/>
+                                          </p:val>
+                                        </p:tav>
+                                        <p:tav tm="100000">
+                                          <p:val>
+                                            <p:strVal val="#ppt_y"/>
+                                          </p:val>
+                                        </p:tav>
+                                      </p:tavLst>
+                                    </p:anim>
+                                  </p:childTnLst>
+                                </p:cTn>
+                              </p:par>
+                              <p:par>
+                                <p:cTn id="20" fill="hold">
+                                  <p:stCondLst>
+                                    <p:cond delay="260"/>
+                                  </p:stCondLst>
+                                  <p:childTnLst>
+                                    <p:set>
+                                      <p:cBhvr>
+                                        <p:cTn id="21" dur="1" fill="hold"/>
+                                        <p:tgtEl>
+                                          <p:spTgt spid="10"/>
+                                        </p:tgtEl>
+                                        <p:attrNameLst>
+                                          <p:attrName>style.visibility</p:attrName>
+                                        </p:attrNameLst>
+                                      </p:cBhvr>
+                                      <p:to>
+                                        <p:strVal val="visible"/>
+                                      </p:to>
+                                    </p:set>
+                                    <p:animEffect transition="in" filter="fade">
+                                      <p:cBhvr>
+                                        <p:cTn id="22" dur="420"/>
+                                        <p:tgtEl>
+                                          <p:spTgt spid="10"/>
+                                        </p:tgtEl>
+                                      </p:cBhvr>
+                                    </p:animEffect>
+                                    <p:anim calcmode="lin" valueType="num">
+                                      <p:cBhvr additive="base">
+                                        <p:cTn id="23" dur="420" fill="hold"/>
+                                        <p:tgtEl>
+                                          <p:spTgt spid="10"/>
+                                        </p:tgtEl>
+                                        <p:attrNameLst>
+                                          <p:attrName>ppt_y</p:attrName>
+                                        </p:attrNameLst>
+                                      </p:cBhvr>
+                                      <p:tavLst>
+                                        <p:tav tm="0">
+                                          <p:val>
+                                            <p:strVal val="#ppt_y+0.035"/>
+                                          </p:val>
+                                        </p:tav>
+                                        <p:tav tm="100000">
+                                          <p:val>
+                                            <p:strVal val="#ppt_y"/>
+                                          </p:val>
+                                        </p:tav>
+                                      </p:tavLst>
+                                    </p:anim>
+                                  </p:childTnLst>
+                                </p:cTn>
+                              </p:par>
+                              <p:par>
+                                <p:cTn id="30" fill="hold">
+                                  <p:stCondLst>
+                                    <p:cond delay="520"/>
+                                  </p:stCondLst>
+                                  <p:childTnLst>
+                                    <p:set>
+                                      <p:cBhvr>
+                                        <p:cTn id="31" dur="1" fill="hold"/>
+                                        <p:tgtEl>
+                                          <p:spTgt spid="15"/>
+                                        </p:tgtEl>
+                                        <p:attrNameLst>
+                                          <p:attrName>style.visibility</p:attrName>
+                                        </p:attrNameLst>
+                                      </p:cBhvr>
+                                      <p:to>
+                                        <p:strVal val="visible"/>
+                                      </p:to>
+                                    </p:set>
+                                    <p:animEffect transition="in" filter="fade">
+                                      <p:cBhvr>
+                                        <p:cTn id="32" dur="420"/>
+                                        <p:tgtEl>
+                                          <p:spTgt spid="15"/>
+                                        </p:tgtEl>
+                                      </p:cBhvr>
+                                    </p:animEffect>
+                                    <p:anim calcmode="lin" valueType="num">
+                                      <p:cBhvr additive="base">
+                                        <p:cTn id="33" dur="420" fill="hold"/>
+                                        <p:tgtEl>
+                                          <p:spTgt spid="15"/>
+                                        </p:tgtEl>
+                                        <p:attrNameLst>
+                                          <p:attrName>ppt_y</p:attrName>
+                                        </p:attrNameLst>
+                                      </p:cBhvr>
+                                      <p:tavLst>
+                                        <p:tav tm="0">
+                                          <p:val>
+                                            <p:strVal val="#ppt_y+0.035"/>
+                                          </p:val>
+                                        </p:tav>
+                                        <p:tav tm="100000">
+                                          <p:val>
+                                            <p:strVal val="#ppt_y"/>
+                                          </p:val>
+                                        </p:tav>
+                                      </p:tavLst>
+                                    </p:anim>
+                                  </p:childTnLst>
+                                </p:cTn>
+                              </p:par>
+                              <p:par>
+                                <p:cTn id="40" fill="hold">
+                                  <p:stCondLst>
+                                    <p:cond delay="780"/>
+                                  </p:stCondLst>
+                                  <p:childTnLst>
+                                    <p:set>
+                                      <p:cBhvr>
+                                        <p:cTn id="41" dur="1" fill="hold"/>
+                                        <p:tgtEl>
+                                          <p:spTgt spid="20"/>
+                                        </p:tgtEl>
+                                        <p:attrNameLst>
+                                          <p:attrName>style.visibility</p:attrName>
+                                        </p:attrNameLst>
+                                      </p:cBhvr>
+                                      <p:to>
+                                        <p:strVal val="visible"/>
+                                      </p:to>
+                                    </p:set>
+                                    <p:animEffect transition="in" filter="fade">
+                                      <p:cBhvr>
+                                        <p:cTn id="42" dur="420"/>
+                                        <p:tgtEl>
+                                          <p:spTgt spid="20"/>
+                                        </p:tgtEl>
+                                      </p:cBhvr>
+                                    </p:animEffect>
+                                    <p:anim calcmode="lin" valueType="num">
+                                      <p:cBhvr additive="base">
+                                        <p:cTn id="43" dur="420" fill="hold"/>
+                                        <p:tgtEl>
+                                          <p:spTgt spid="20"/>
+                                        </p:tgtEl>
+                                        <p:attrNameLst>
+                                          <p:attrName>ppt_y</p:attrName>
+                                        </p:attrNameLst>
+                                      </p:cBhvr>
+                                      <p:tavLst>
+                                        <p:tav tm="0">
+                                          <p:val>
+                                            <p:strVal val="#ppt_y+0.035"/>
+                                          </p:val>
+                                        </p:tav>
+                                        <p:tav tm="100000">
+                                          <p:val>
+                                            <p:strVal val="#ppt_y"/>
+                                          </p:val>
+                                        </p:tav>
+                                      </p:tavLst>
+                                    </p:anim>
+                                  </p:childTnLst>
+                                </p:cTn>
+                              </p:par>
+                            </p:childTnLst>
+                          </p:cTn>
+                        </p:par>
+                      </p:childTnLst>
+                    </p:cTn>
+                  </p:par>
+                </p:childTnLst>
+              </p:cTn>
+              <p:prevCondLst>
+                <p:cond evt="onPrev" delay="0">
+                  <p:tgtEl>
+                    <p:sldTgt/>
+                  </p:tgtEl>
+                </p:cond>
+              </p:prevCondLst>
+              <p:nextCondLst>
+                <p:cond evt="onNext" delay="0">
+                  <p:tgtEl>
+                    <p:sldTgt/>
+                  </p:tgtEl>
+                </p:cond>
+              </p:nextCondLst>
+            </p:seq>
+          </p:childTnLst>
+        </p:cTn>
+      </p:par>
+    </p:tnLst>
+  </p:timing>
 </p:sld>
 </file>
 
@@ -9186,7 +12022,13 @@
           <a:ln>
             <a:noFill/>
           </a:ln>
-          <a:effectLst/>
+          <a:effectLst>
+            <a:glow rad="127000">
+              <a:srgbClr val="4C9AFF">
+                <a:alpha val="55000"/>
+              </a:srgbClr>
+            </a:glow>
+          </a:effectLst>
         </p:spPr>
         <p:style>
           <a:lnRef idx="1">
@@ -9264,13 +12106,27 @@
               <a:gd name="adj" fmla="val 6000"/>
             </a:avLst>
           </a:prstGeom>
-          <a:solidFill>
-            <a:srgbClr val="1E2430"/>
-          </a:solidFill>
+          <a:gradFill rotWithShape="1">
+            <a:gsLst>
+              <a:gs pos="0">
+                <a:srgbClr val="1E2430"/>
+              </a:gs>
+              <a:gs pos="100000">
+                <a:srgbClr val="2C3442"/>
+              </a:gs>
+            </a:gsLst>
+            <a:lin scaled="0" ang="18900000"/>
+          </a:gradFill>
           <a:ln>
             <a:noFill/>
           </a:ln>
-          <a:effectLst/>
+          <a:effectLst>
+            <a:outerShdw blurRad="228600" dist="76200" dir="5400000" rotWithShape="0">
+              <a:srgbClr val="000000">
+                <a:alpha val="42000"/>
+              </a:srgbClr>
+            </a:outerShdw>
+          </a:effectLst>
         </p:spPr>
         <p:style>
           <a:lnRef idx="1">
@@ -9296,7 +12152,61 @@
       </p:sp>
       <p:sp>
         <p:nvSpPr>
-          <p:cNvPr id="6" name="Oval 5"/>
+          <p:cNvPr id="6" name="Rounded Rectangle 5"/>
+          <p:cNvSpPr/>
+          <p:nvPr/>
+        </p:nvSpPr>
+        <p:spPr>
+          <a:xfrm>
+            <a:off x="877824" y="2148840"/>
+            <a:ext cx="50800" cy="475488"/>
+          </a:xfrm>
+          <a:prstGeom prst="roundRect">
+            <a:avLst>
+              <a:gd name="adj" fmla="val 50000"/>
+            </a:avLst>
+          </a:prstGeom>
+          <a:gradFill rotWithShape="1">
+            <a:gsLst>
+              <a:gs pos="0">
+                <a:srgbClr val="4C9AFF"/>
+              </a:gs>
+              <a:gs pos="100000">
+                <a:srgbClr val="7B61FF"/>
+              </a:gs>
+            </a:gsLst>
+            <a:lin scaled="0" ang="18900000"/>
+          </a:gradFill>
+          <a:ln>
+            <a:noFill/>
+          </a:ln>
+          <a:effectLst/>
+        </p:spPr>
+        <p:style>
+          <a:lnRef idx="1">
+            <a:schemeClr val="accent1"/>
+          </a:lnRef>
+          <a:fillRef idx="3">
+            <a:schemeClr val="accent1"/>
+          </a:fillRef>
+          <a:effectRef idx="2">
+            <a:schemeClr val="accent1"/>
+          </a:effectRef>
+          <a:fontRef idx="minor">
+            <a:schemeClr val="lt1"/>
+          </a:fontRef>
+        </p:style>
+        <p:txBody>
+          <a:bodyPr rtlCol="0" anchor="ctr"/>
+          <a:lstStyle/>
+          <a:p>
+            <a:pPr algn="ctr"/>
+          </a:p>
+        </p:txBody>
+      </p:sp>
+      <p:sp>
+        <p:nvSpPr>
+          <p:cNvPr id="7" name="Oval 6"/>
           <p:cNvSpPr/>
           <p:nvPr/>
         </p:nvSpPr>
@@ -9322,7 +12232,13 @@
           <a:ln>
             <a:noFill/>
           </a:ln>
-          <a:effectLst/>
+          <a:effectLst>
+            <a:glow rad="88900">
+              <a:srgbClr val="4C9AFF">
+                <a:alpha val="38000"/>
+              </a:srgbClr>
+            </a:glow>
+          </a:effectLst>
         </p:spPr>
         <p:style>
           <a:lnRef idx="1">
@@ -9348,14 +12264,14 @@
       </p:sp>
       <p:sp>
         <p:nvSpPr>
-          <p:cNvPr id="7" name="TextBox 6"/>
+          <p:cNvPr id="8" name="TextBox 7"/>
           <p:cNvSpPr txBox="1"/>
           <p:nvPr/>
         </p:nvSpPr>
         <p:spPr>
           <a:xfrm>
-            <a:off x="1051560" y="2240280"/>
-            <a:ext cx="402336" cy="365760"/>
+            <a:off x="1051560" y="2203704"/>
+            <a:ext cx="402336" cy="402336"/>
           </a:xfrm>
           <a:prstGeom prst="rect">
             <a:avLst/>
@@ -9363,14 +12279,14 @@
           <a:noFill/>
         </p:spPr>
         <p:txBody>
-          <a:bodyPr wrap="square">
+          <a:bodyPr wrap="square" lIns="0" rIns="0" tIns="0" bIns="0" anchor="ctr">
             <a:spAutoFit/>
           </a:bodyPr>
           <a:lstStyle/>
           <a:p>
-            <a:pPr>
+            <a:pPr algn="ctr">
               <a:lnSpc>
-                <a:spcPct val="120000"/>
+                <a:spcPct val="100000"/>
               </a:lnSpc>
             </a:pPr>
             <a:r>
@@ -9386,7 +12302,7 @@
       </p:sp>
       <p:sp>
         <p:nvSpPr>
-          <p:cNvPr id="8" name="TextBox 7"/>
+          <p:cNvPr id="9" name="TextBox 8"/>
           <p:cNvSpPr txBox="1"/>
           <p:nvPr/>
         </p:nvSpPr>
@@ -9424,7 +12340,7 @@
       </p:sp>
       <p:sp>
         <p:nvSpPr>
-          <p:cNvPr id="9" name="Rounded Rectangle 8"/>
+          <p:cNvPr id="10" name="Rounded Rectangle 9"/>
           <p:cNvSpPr/>
           <p:nvPr/>
         </p:nvSpPr>
@@ -9438,13 +12354,27 @@
               <a:gd name="adj" fmla="val 6000"/>
             </a:avLst>
           </a:prstGeom>
-          <a:solidFill>
-            <a:srgbClr val="1E2430"/>
-          </a:solidFill>
+          <a:gradFill rotWithShape="1">
+            <a:gsLst>
+              <a:gs pos="0">
+                <a:srgbClr val="1E2430"/>
+              </a:gs>
+              <a:gs pos="100000">
+                <a:srgbClr val="2C3442"/>
+              </a:gs>
+            </a:gsLst>
+            <a:lin scaled="0" ang="18900000"/>
+          </a:gradFill>
           <a:ln>
             <a:noFill/>
           </a:ln>
-          <a:effectLst/>
+          <a:effectLst>
+            <a:outerShdw blurRad="228600" dist="76200" dir="5400000" rotWithShape="0">
+              <a:srgbClr val="000000">
+                <a:alpha val="42000"/>
+              </a:srgbClr>
+            </a:outerShdw>
+          </a:effectLst>
         </p:spPr>
         <p:style>
           <a:lnRef idx="1">
@@ -9470,7 +12400,61 @@
       </p:sp>
       <p:sp>
         <p:nvSpPr>
-          <p:cNvPr id="10" name="Oval 9"/>
+          <p:cNvPr id="11" name="Rounded Rectangle 10"/>
+          <p:cNvSpPr/>
+          <p:nvPr/>
+        </p:nvSpPr>
+        <p:spPr>
+          <a:xfrm>
+            <a:off x="877824" y="3191256"/>
+            <a:ext cx="50800" cy="475488"/>
+          </a:xfrm>
+          <a:prstGeom prst="roundRect">
+            <a:avLst>
+              <a:gd name="adj" fmla="val 50000"/>
+            </a:avLst>
+          </a:prstGeom>
+          <a:gradFill rotWithShape="1">
+            <a:gsLst>
+              <a:gs pos="0">
+                <a:srgbClr val="4C9AFF"/>
+              </a:gs>
+              <a:gs pos="100000">
+                <a:srgbClr val="7B61FF"/>
+              </a:gs>
+            </a:gsLst>
+            <a:lin scaled="0" ang="18900000"/>
+          </a:gradFill>
+          <a:ln>
+            <a:noFill/>
+          </a:ln>
+          <a:effectLst/>
+        </p:spPr>
+        <p:style>
+          <a:lnRef idx="1">
+            <a:schemeClr val="accent1"/>
+          </a:lnRef>
+          <a:fillRef idx="3">
+            <a:schemeClr val="accent1"/>
+          </a:fillRef>
+          <a:effectRef idx="2">
+            <a:schemeClr val="accent1"/>
+          </a:effectRef>
+          <a:fontRef idx="minor">
+            <a:schemeClr val="lt1"/>
+          </a:fontRef>
+        </p:style>
+        <p:txBody>
+          <a:bodyPr rtlCol="0" anchor="ctr"/>
+          <a:lstStyle/>
+          <a:p>
+            <a:pPr algn="ctr"/>
+          </a:p>
+        </p:txBody>
+      </p:sp>
+      <p:sp>
+        <p:nvSpPr>
+          <p:cNvPr id="12" name="Oval 11"/>
           <p:cNvSpPr/>
           <p:nvPr/>
         </p:nvSpPr>
@@ -9496,7 +12480,13 @@
           <a:ln>
             <a:noFill/>
           </a:ln>
-          <a:effectLst/>
+          <a:effectLst>
+            <a:glow rad="88900">
+              <a:srgbClr val="4C9AFF">
+                <a:alpha val="38000"/>
+              </a:srgbClr>
+            </a:glow>
+          </a:effectLst>
         </p:spPr>
         <p:style>
           <a:lnRef idx="1">
@@ -9522,14 +12512,14 @@
       </p:sp>
       <p:sp>
         <p:nvSpPr>
-          <p:cNvPr id="11" name="TextBox 10"/>
+          <p:cNvPr id="13" name="TextBox 12"/>
           <p:cNvSpPr txBox="1"/>
           <p:nvPr/>
         </p:nvSpPr>
         <p:spPr>
           <a:xfrm>
-            <a:off x="1051560" y="3282696"/>
-            <a:ext cx="402336" cy="365760"/>
+            <a:off x="1051560" y="3246120"/>
+            <a:ext cx="402336" cy="402336"/>
           </a:xfrm>
           <a:prstGeom prst="rect">
             <a:avLst/>
@@ -9537,14 +12527,14 @@
           <a:noFill/>
         </p:spPr>
         <p:txBody>
-          <a:bodyPr wrap="square">
+          <a:bodyPr wrap="square" lIns="0" rIns="0" tIns="0" bIns="0" anchor="ctr">
             <a:spAutoFit/>
           </a:bodyPr>
           <a:lstStyle/>
           <a:p>
-            <a:pPr>
+            <a:pPr algn="ctr">
               <a:lnSpc>
-                <a:spcPct val="120000"/>
+                <a:spcPct val="100000"/>
               </a:lnSpc>
             </a:pPr>
             <a:r>
@@ -9560,7 +12550,7 @@
       </p:sp>
       <p:sp>
         <p:nvSpPr>
-          <p:cNvPr id="12" name="TextBox 11"/>
+          <p:cNvPr id="14" name="TextBox 13"/>
           <p:cNvSpPr txBox="1"/>
           <p:nvPr/>
         </p:nvSpPr>
@@ -9598,7 +12588,7 @@
       </p:sp>
       <p:sp>
         <p:nvSpPr>
-          <p:cNvPr id="13" name="Rounded Rectangle 12"/>
+          <p:cNvPr id="15" name="Rounded Rectangle 14"/>
           <p:cNvSpPr/>
           <p:nvPr/>
         </p:nvSpPr>
@@ -9612,13 +12602,27 @@
               <a:gd name="adj" fmla="val 6000"/>
             </a:avLst>
           </a:prstGeom>
-          <a:solidFill>
-            <a:srgbClr val="1E2430"/>
-          </a:solidFill>
+          <a:gradFill rotWithShape="1">
+            <a:gsLst>
+              <a:gs pos="0">
+                <a:srgbClr val="1E2430"/>
+              </a:gs>
+              <a:gs pos="100000">
+                <a:srgbClr val="2C3442"/>
+              </a:gs>
+            </a:gsLst>
+            <a:lin scaled="0" ang="18900000"/>
+          </a:gradFill>
           <a:ln>
             <a:noFill/>
           </a:ln>
-          <a:effectLst/>
+          <a:effectLst>
+            <a:outerShdw blurRad="228600" dist="76200" dir="5400000" rotWithShape="0">
+              <a:srgbClr val="000000">
+                <a:alpha val="42000"/>
+              </a:srgbClr>
+            </a:outerShdw>
+          </a:effectLst>
         </p:spPr>
         <p:style>
           <a:lnRef idx="1">
@@ -9644,7 +12648,61 @@
       </p:sp>
       <p:sp>
         <p:nvSpPr>
-          <p:cNvPr id="14" name="Oval 13"/>
+          <p:cNvPr id="16" name="Rounded Rectangle 15"/>
+          <p:cNvSpPr/>
+          <p:nvPr/>
+        </p:nvSpPr>
+        <p:spPr>
+          <a:xfrm>
+            <a:off x="877824" y="4233672"/>
+            <a:ext cx="50800" cy="475488"/>
+          </a:xfrm>
+          <a:prstGeom prst="roundRect">
+            <a:avLst>
+              <a:gd name="adj" fmla="val 50000"/>
+            </a:avLst>
+          </a:prstGeom>
+          <a:gradFill rotWithShape="1">
+            <a:gsLst>
+              <a:gs pos="0">
+                <a:srgbClr val="4C9AFF"/>
+              </a:gs>
+              <a:gs pos="100000">
+                <a:srgbClr val="7B61FF"/>
+              </a:gs>
+            </a:gsLst>
+            <a:lin scaled="0" ang="18900000"/>
+          </a:gradFill>
+          <a:ln>
+            <a:noFill/>
+          </a:ln>
+          <a:effectLst/>
+        </p:spPr>
+        <p:style>
+          <a:lnRef idx="1">
+            <a:schemeClr val="accent1"/>
+          </a:lnRef>
+          <a:fillRef idx="3">
+            <a:schemeClr val="accent1"/>
+          </a:fillRef>
+          <a:effectRef idx="2">
+            <a:schemeClr val="accent1"/>
+          </a:effectRef>
+          <a:fontRef idx="minor">
+            <a:schemeClr val="lt1"/>
+          </a:fontRef>
+        </p:style>
+        <p:txBody>
+          <a:bodyPr rtlCol="0" anchor="ctr"/>
+          <a:lstStyle/>
+          <a:p>
+            <a:pPr algn="ctr"/>
+          </a:p>
+        </p:txBody>
+      </p:sp>
+      <p:sp>
+        <p:nvSpPr>
+          <p:cNvPr id="17" name="Oval 16"/>
           <p:cNvSpPr/>
           <p:nvPr/>
         </p:nvSpPr>
@@ -9670,7 +12728,13 @@
           <a:ln>
             <a:noFill/>
           </a:ln>
-          <a:effectLst/>
+          <a:effectLst>
+            <a:glow rad="88900">
+              <a:srgbClr val="4C9AFF">
+                <a:alpha val="38000"/>
+              </a:srgbClr>
+            </a:glow>
+          </a:effectLst>
         </p:spPr>
         <p:style>
           <a:lnRef idx="1">
@@ -9696,14 +12760,14 @@
       </p:sp>
       <p:sp>
         <p:nvSpPr>
-          <p:cNvPr id="15" name="TextBox 14"/>
+          <p:cNvPr id="18" name="TextBox 17"/>
           <p:cNvSpPr txBox="1"/>
           <p:nvPr/>
         </p:nvSpPr>
         <p:spPr>
           <a:xfrm>
-            <a:off x="1051560" y="4325112"/>
-            <a:ext cx="402336" cy="365760"/>
+            <a:off x="1051560" y="4288536"/>
+            <a:ext cx="402336" cy="402336"/>
           </a:xfrm>
           <a:prstGeom prst="rect">
             <a:avLst/>
@@ -9711,14 +12775,14 @@
           <a:noFill/>
         </p:spPr>
         <p:txBody>
-          <a:bodyPr wrap="square">
+          <a:bodyPr wrap="square" lIns="0" rIns="0" tIns="0" bIns="0" anchor="ctr">
             <a:spAutoFit/>
           </a:bodyPr>
           <a:lstStyle/>
           <a:p>
-            <a:pPr>
+            <a:pPr algn="ctr">
               <a:lnSpc>
-                <a:spcPct val="120000"/>
+                <a:spcPct val="100000"/>
               </a:lnSpc>
             </a:pPr>
             <a:r>
@@ -9734,7 +12798,7 @@
       </p:sp>
       <p:sp>
         <p:nvSpPr>
-          <p:cNvPr id="16" name="TextBox 15"/>
+          <p:cNvPr id="19" name="TextBox 18"/>
           <p:cNvSpPr txBox="1"/>
           <p:nvPr/>
         </p:nvSpPr>
@@ -9772,7 +12836,7 @@
       </p:sp>
       <p:sp>
         <p:nvSpPr>
-          <p:cNvPr id="17" name="Rounded Rectangle 16"/>
+          <p:cNvPr id="20" name="Rounded Rectangle 19"/>
           <p:cNvSpPr/>
           <p:nvPr/>
         </p:nvSpPr>
@@ -9786,13 +12850,27 @@
               <a:gd name="adj" fmla="val 6000"/>
             </a:avLst>
           </a:prstGeom>
-          <a:solidFill>
-            <a:srgbClr val="1E2430"/>
-          </a:solidFill>
+          <a:gradFill rotWithShape="1">
+            <a:gsLst>
+              <a:gs pos="0">
+                <a:srgbClr val="1E2430"/>
+              </a:gs>
+              <a:gs pos="100000">
+                <a:srgbClr val="2C3442"/>
+              </a:gs>
+            </a:gsLst>
+            <a:lin scaled="0" ang="18900000"/>
+          </a:gradFill>
           <a:ln>
             <a:noFill/>
           </a:ln>
-          <a:effectLst/>
+          <a:effectLst>
+            <a:outerShdw blurRad="228600" dist="76200" dir="5400000" rotWithShape="0">
+              <a:srgbClr val="000000">
+                <a:alpha val="42000"/>
+              </a:srgbClr>
+            </a:outerShdw>
+          </a:effectLst>
         </p:spPr>
         <p:style>
           <a:lnRef idx="1">
@@ -9818,7 +12896,61 @@
       </p:sp>
       <p:sp>
         <p:nvSpPr>
-          <p:cNvPr id="18" name="Oval 17"/>
+          <p:cNvPr id="21" name="Rounded Rectangle 20"/>
+          <p:cNvSpPr/>
+          <p:nvPr/>
+        </p:nvSpPr>
+        <p:spPr>
+          <a:xfrm>
+            <a:off x="877824" y="5276088"/>
+            <a:ext cx="50800" cy="475488"/>
+          </a:xfrm>
+          <a:prstGeom prst="roundRect">
+            <a:avLst>
+              <a:gd name="adj" fmla="val 50000"/>
+            </a:avLst>
+          </a:prstGeom>
+          <a:gradFill rotWithShape="1">
+            <a:gsLst>
+              <a:gs pos="0">
+                <a:srgbClr val="4C9AFF"/>
+              </a:gs>
+              <a:gs pos="100000">
+                <a:srgbClr val="7B61FF"/>
+              </a:gs>
+            </a:gsLst>
+            <a:lin scaled="0" ang="18900000"/>
+          </a:gradFill>
+          <a:ln>
+            <a:noFill/>
+          </a:ln>
+          <a:effectLst/>
+        </p:spPr>
+        <p:style>
+          <a:lnRef idx="1">
+            <a:schemeClr val="accent1"/>
+          </a:lnRef>
+          <a:fillRef idx="3">
+            <a:schemeClr val="accent1"/>
+          </a:fillRef>
+          <a:effectRef idx="2">
+            <a:schemeClr val="accent1"/>
+          </a:effectRef>
+          <a:fontRef idx="minor">
+            <a:schemeClr val="lt1"/>
+          </a:fontRef>
+        </p:style>
+        <p:txBody>
+          <a:bodyPr rtlCol="0" anchor="ctr"/>
+          <a:lstStyle/>
+          <a:p>
+            <a:pPr algn="ctr"/>
+          </a:p>
+        </p:txBody>
+      </p:sp>
+      <p:sp>
+        <p:nvSpPr>
+          <p:cNvPr id="22" name="Oval 21"/>
           <p:cNvSpPr/>
           <p:nvPr/>
         </p:nvSpPr>
@@ -9844,7 +12976,13 @@
           <a:ln>
             <a:noFill/>
           </a:ln>
-          <a:effectLst/>
+          <a:effectLst>
+            <a:glow rad="88900">
+              <a:srgbClr val="4C9AFF">
+                <a:alpha val="38000"/>
+              </a:srgbClr>
+            </a:glow>
+          </a:effectLst>
         </p:spPr>
         <p:style>
           <a:lnRef idx="1">
@@ -9870,14 +13008,14 @@
       </p:sp>
       <p:sp>
         <p:nvSpPr>
-          <p:cNvPr id="19" name="TextBox 18"/>
+          <p:cNvPr id="23" name="TextBox 22"/>
           <p:cNvSpPr txBox="1"/>
           <p:nvPr/>
         </p:nvSpPr>
         <p:spPr>
           <a:xfrm>
-            <a:off x="1051560" y="5367528"/>
-            <a:ext cx="402336" cy="365760"/>
+            <a:off x="1051560" y="5330952"/>
+            <a:ext cx="402336" cy="402336"/>
           </a:xfrm>
           <a:prstGeom prst="rect">
             <a:avLst/>
@@ -9885,14 +13023,14 @@
           <a:noFill/>
         </p:spPr>
         <p:txBody>
-          <a:bodyPr wrap="square">
+          <a:bodyPr wrap="square" lIns="0" rIns="0" tIns="0" bIns="0" anchor="ctr">
             <a:spAutoFit/>
           </a:bodyPr>
           <a:lstStyle/>
           <a:p>
-            <a:pPr>
+            <a:pPr algn="ctr">
               <a:lnSpc>
-                <a:spcPct val="120000"/>
+                <a:spcPct val="100000"/>
               </a:lnSpc>
             </a:pPr>
             <a:r>
@@ -9908,7 +13046,7 @@
       </p:sp>
       <p:sp>
         <p:nvSpPr>
-          <p:cNvPr id="20" name="TextBox 19"/>
+          <p:cNvPr id="24" name="TextBox 23"/>
           <p:cNvSpPr txBox="1"/>
           <p:nvPr/>
         </p:nvSpPr>
@@ -9946,7 +13084,7 @@
       </p:sp>
       <p:sp>
         <p:nvSpPr>
-          <p:cNvPr id="21" name="TextBox 20"/>
+          <p:cNvPr id="25" name="TextBox 24"/>
           <p:cNvSpPr txBox="1"/>
           <p:nvPr/>
         </p:nvSpPr>
@@ -9984,7 +13122,7 @@
       </p:sp>
       <p:sp>
         <p:nvSpPr>
-          <p:cNvPr id="22" name="TextBox 21"/>
+          <p:cNvPr id="26" name="TextBox 25"/>
           <p:cNvSpPr txBox="1"/>
           <p:nvPr/>
         </p:nvSpPr>
@@ -10037,6 +13175,270 @@
       </p:transition>
     </mc:Fallback>
   </mc:AlternateContent>
+  <p:timing>
+    <p:tnLst>
+      <p:par>
+        <p:cTn id="1" dur="indefinite" restart="never" nodeType="tmRoot">
+          <p:childTnLst>
+            <p:seq concurrent="1" nextAc="seek">
+              <p:cTn id="2" dur="indefinite" nodeType="mainSeq">
+                <p:childTnLst>
+                  <p:par>
+                    <p:cTn id="3" fill="hold">
+                      <p:stCondLst>
+                        <p:cond delay="indefinite"/>
+                      </p:stCondLst>
+                      <p:childTnLst>
+                        <p:par>
+                          <p:cTn id="4" fill="hold">
+                            <p:stCondLst>
+                              <p:cond delay="0"/>
+                            </p:stCondLst>
+                            <p:childTnLst>
+                              <p:par>
+                                <p:cTn id="10" fill="hold">
+                                  <p:stCondLst>
+                                    <p:cond delay="0"/>
+                                  </p:stCondLst>
+                                  <p:childTnLst>
+                                    <p:set>
+                                      <p:cBhvr>
+                                        <p:cTn id="11" dur="1" fill="hold"/>
+                                        <p:tgtEl>
+                                          <p:spTgt spid="5"/>
+                                        </p:tgtEl>
+                                        <p:attrNameLst>
+                                          <p:attrName>style.visibility</p:attrName>
+                                        </p:attrNameLst>
+                                      </p:cBhvr>
+                                      <p:to>
+                                        <p:strVal val="visible"/>
+                                      </p:to>
+                                    </p:set>
+                                    <p:animEffect transition="in" filter="fade">
+                                      <p:cBhvr>
+                                        <p:cTn id="12" dur="420"/>
+                                        <p:tgtEl>
+                                          <p:spTgt spid="5"/>
+                                        </p:tgtEl>
+                                      </p:cBhvr>
+                                    </p:animEffect>
+                                    <p:anim calcmode="lin" valueType="num">
+                                      <p:cBhvr additive="base">
+                                        <p:cTn id="13" dur="420" fill="hold"/>
+                                        <p:tgtEl>
+                                          <p:spTgt spid="5"/>
+                                        </p:tgtEl>
+                                        <p:attrNameLst>
+                                          <p:attrName>ppt_y</p:attrName>
+                                        </p:attrNameLst>
+                                      </p:cBhvr>
+                                      <p:tavLst>
+                                        <p:tav tm="0">
+                                          <p:val>
+                                            <p:strVal val="#ppt_y+0.035"/>
+                                          </p:val>
+                                        </p:tav>
+                                        <p:tav tm="100000">
+                                          <p:val>
+                                            <p:strVal val="#ppt_y"/>
+                                          </p:val>
+                                        </p:tav>
+                                      </p:tavLst>
+                                    </p:anim>
+                                  </p:childTnLst>
+                                </p:cTn>
+                              </p:par>
+                              <p:par>
+                                <p:cTn id="20" fill="hold">
+                                  <p:stCondLst>
+                                    <p:cond delay="260"/>
+                                  </p:stCondLst>
+                                  <p:childTnLst>
+                                    <p:set>
+                                      <p:cBhvr>
+                                        <p:cTn id="21" dur="1" fill="hold"/>
+                                        <p:tgtEl>
+                                          <p:spTgt spid="10"/>
+                                        </p:tgtEl>
+                                        <p:attrNameLst>
+                                          <p:attrName>style.visibility</p:attrName>
+                                        </p:attrNameLst>
+                                      </p:cBhvr>
+                                      <p:to>
+                                        <p:strVal val="visible"/>
+                                      </p:to>
+                                    </p:set>
+                                    <p:animEffect transition="in" filter="fade">
+                                      <p:cBhvr>
+                                        <p:cTn id="22" dur="420"/>
+                                        <p:tgtEl>
+                                          <p:spTgt spid="10"/>
+                                        </p:tgtEl>
+                                      </p:cBhvr>
+                                    </p:animEffect>
+                                    <p:anim calcmode="lin" valueType="num">
+                                      <p:cBhvr additive="base">
+                                        <p:cTn id="23" dur="420" fill="hold"/>
+                                        <p:tgtEl>
+                                          <p:spTgt spid="10"/>
+                                        </p:tgtEl>
+                                        <p:attrNameLst>
+                                          <p:attrName>ppt_y</p:attrName>
+                                        </p:attrNameLst>
+                                      </p:cBhvr>
+                                      <p:tavLst>
+                                        <p:tav tm="0">
+                                          <p:val>
+                                            <p:strVal val="#ppt_y+0.035"/>
+                                          </p:val>
+                                        </p:tav>
+                                        <p:tav tm="100000">
+                                          <p:val>
+                                            <p:strVal val="#ppt_y"/>
+                                          </p:val>
+                                        </p:tav>
+                                      </p:tavLst>
+                                    </p:anim>
+                                  </p:childTnLst>
+                                </p:cTn>
+                              </p:par>
+                              <p:par>
+                                <p:cTn id="30" fill="hold">
+                                  <p:stCondLst>
+                                    <p:cond delay="520"/>
+                                  </p:stCondLst>
+                                  <p:childTnLst>
+                                    <p:set>
+                                      <p:cBhvr>
+                                        <p:cTn id="31" dur="1" fill="hold"/>
+                                        <p:tgtEl>
+                                          <p:spTgt spid="15"/>
+                                        </p:tgtEl>
+                                        <p:attrNameLst>
+                                          <p:attrName>style.visibility</p:attrName>
+                                        </p:attrNameLst>
+                                      </p:cBhvr>
+                                      <p:to>
+                                        <p:strVal val="visible"/>
+                                      </p:to>
+                                    </p:set>
+                                    <p:animEffect transition="in" filter="fade">
+                                      <p:cBhvr>
+                                        <p:cTn id="32" dur="420"/>
+                                        <p:tgtEl>
+                                          <p:spTgt spid="15"/>
+                                        </p:tgtEl>
+                                      </p:cBhvr>
+                                    </p:animEffect>
+                                    <p:anim calcmode="lin" valueType="num">
+                                      <p:cBhvr additive="base">
+                                        <p:cTn id="33" dur="420" fill="hold"/>
+                                        <p:tgtEl>
+                                          <p:spTgt spid="15"/>
+                                        </p:tgtEl>
+                                        <p:attrNameLst>
+                                          <p:attrName>ppt_y</p:attrName>
+                                        </p:attrNameLst>
+                                      </p:cBhvr>
+                                      <p:tavLst>
+                                        <p:tav tm="0">
+                                          <p:val>
+                                            <p:strVal val="#ppt_y+0.035"/>
+                                          </p:val>
+                                        </p:tav>
+                                        <p:tav tm="100000">
+                                          <p:val>
+                                            <p:strVal val="#ppt_y"/>
+                                          </p:val>
+                                        </p:tav>
+                                      </p:tavLst>
+                                    </p:anim>
+                                  </p:childTnLst>
+                                </p:cTn>
+                              </p:par>
+                              <p:par>
+                                <p:cTn id="40" fill="hold">
+                                  <p:stCondLst>
+                                    <p:cond delay="780"/>
+                                  </p:stCondLst>
+                                  <p:childTnLst>
+                                    <p:set>
+                                      <p:cBhvr>
+                                        <p:cTn id="41" dur="1" fill="hold"/>
+                                        <p:tgtEl>
+                                          <p:spTgt spid="20"/>
+                                        </p:tgtEl>
+                                        <p:attrNameLst>
+                                          <p:attrName>style.visibility</p:attrName>
+                                        </p:attrNameLst>
+                                      </p:cBhvr>
+                                      <p:to>
+                                        <p:strVal val="visible"/>
+                                      </p:to>
+                                    </p:set>
+                                    <p:animEffect transition="in" filter="fade">
+                                      <p:cBhvr>
+                                        <p:cTn id="42" dur="420"/>
+                                        <p:tgtEl>
+                                          <p:spTgt spid="20"/>
+                                        </p:tgtEl>
+                                      </p:cBhvr>
+                                    </p:animEffect>
+                                    <p:anim calcmode="lin" valueType="num">
+                                      <p:cBhvr additive="base">
+                                        <p:cTn id="43" dur="420" fill="hold"/>
+                                        <p:tgtEl>
+                                          <p:spTgt spid="20"/>
+                                        </p:tgtEl>
+                                        <p:attrNameLst>
+                                          <p:attrName>ppt_y</p:attrName>
+                                        </p:attrNameLst>
+                                      </p:cBhvr>
+                                      <p:tavLst>
+                                        <p:tav tm="0">
+                                          <p:val>
+                                            <p:strVal val="#ppt_y+0.035"/>
+                                          </p:val>
+                                        </p:tav>
+                                        <p:tav tm="100000">
+                                          <p:val>
+                                            <p:strVal val="#ppt_y"/>
+                                          </p:val>
+                                        </p:tav>
+                                      </p:tavLst>
+                                    </p:anim>
+                                  </p:childTnLst>
+                                </p:cTn>
+                              </p:par>
+                            </p:childTnLst>
+                          </p:cTn>
+                        </p:par>
+                      </p:childTnLst>
+                    </p:cTn>
+                  </p:par>
+                </p:childTnLst>
+              </p:cTn>
+              <p:prevCondLst>
+                <p:cond evt="onPrev" delay="0">
+                  <p:tgtEl>
+                    <p:sldTgt/>
+                  </p:tgtEl>
+                </p:cond>
+              </p:prevCondLst>
+              <p:nextCondLst>
+                <p:cond evt="onNext" delay="0">
+                  <p:tgtEl>
+                    <p:sldTgt/>
+                  </p:tgtEl>
+                </p:cond>
+              </p:nextCondLst>
+            </p:seq>
+          </p:childTnLst>
+        </p:cTn>
+      </p:par>
+    </p:tnLst>
+  </p:timing>
 </p:sld>
 </file>
 
@@ -10114,7 +13516,13 @@
           <a:ln>
             <a:noFill/>
           </a:ln>
-          <a:effectLst/>
+          <a:effectLst>
+            <a:glow rad="127000">
+              <a:srgbClr val="4C9AFF">
+                <a:alpha val="55000"/>
+              </a:srgbClr>
+            </a:glow>
+          </a:effectLst>
         </p:spPr>
         <p:style>
           <a:lnRef idx="1">
@@ -10192,13 +13600,27 @@
               <a:gd name="adj" fmla="val 6000"/>
             </a:avLst>
           </a:prstGeom>
-          <a:solidFill>
-            <a:srgbClr val="1E2430"/>
-          </a:solidFill>
+          <a:gradFill rotWithShape="1">
+            <a:gsLst>
+              <a:gs pos="0">
+                <a:srgbClr val="1E2430"/>
+              </a:gs>
+              <a:gs pos="100000">
+                <a:srgbClr val="2C3442"/>
+              </a:gs>
+            </a:gsLst>
+            <a:lin scaled="0" ang="18900000"/>
+          </a:gradFill>
           <a:ln>
             <a:noFill/>
           </a:ln>
-          <a:effectLst/>
+          <a:effectLst>
+            <a:outerShdw blurRad="228600" dist="76200" dir="5400000" rotWithShape="0">
+              <a:srgbClr val="000000">
+                <a:alpha val="42000"/>
+              </a:srgbClr>
+            </a:outerShdw>
+          </a:effectLst>
         </p:spPr>
         <p:style>
           <a:lnRef idx="1">
@@ -10224,7 +13646,61 @@
       </p:sp>
       <p:sp>
         <p:nvSpPr>
-          <p:cNvPr id="6" name="Oval 5"/>
+          <p:cNvPr id="6" name="Rounded Rectangle 5"/>
+          <p:cNvSpPr/>
+          <p:nvPr/>
+        </p:nvSpPr>
+        <p:spPr>
+          <a:xfrm>
+            <a:off x="877824" y="2148840"/>
+            <a:ext cx="50800" cy="475488"/>
+          </a:xfrm>
+          <a:prstGeom prst="roundRect">
+            <a:avLst>
+              <a:gd name="adj" fmla="val 50000"/>
+            </a:avLst>
+          </a:prstGeom>
+          <a:gradFill rotWithShape="1">
+            <a:gsLst>
+              <a:gs pos="0">
+                <a:srgbClr val="4C9AFF"/>
+              </a:gs>
+              <a:gs pos="100000">
+                <a:srgbClr val="7B61FF"/>
+              </a:gs>
+            </a:gsLst>
+            <a:lin scaled="0" ang="18900000"/>
+          </a:gradFill>
+          <a:ln>
+            <a:noFill/>
+          </a:ln>
+          <a:effectLst/>
+        </p:spPr>
+        <p:style>
+          <a:lnRef idx="1">
+            <a:schemeClr val="accent1"/>
+          </a:lnRef>
+          <a:fillRef idx="3">
+            <a:schemeClr val="accent1"/>
+          </a:fillRef>
+          <a:effectRef idx="2">
+            <a:schemeClr val="accent1"/>
+          </a:effectRef>
+          <a:fontRef idx="minor">
+            <a:schemeClr val="lt1"/>
+          </a:fontRef>
+        </p:style>
+        <p:txBody>
+          <a:bodyPr rtlCol="0" anchor="ctr"/>
+          <a:lstStyle/>
+          <a:p>
+            <a:pPr algn="ctr"/>
+          </a:p>
+        </p:txBody>
+      </p:sp>
+      <p:sp>
+        <p:nvSpPr>
+          <p:cNvPr id="7" name="Oval 6"/>
           <p:cNvSpPr/>
           <p:nvPr/>
         </p:nvSpPr>
@@ -10250,7 +13726,13 @@
           <a:ln>
             <a:noFill/>
           </a:ln>
-          <a:effectLst/>
+          <a:effectLst>
+            <a:glow rad="88900">
+              <a:srgbClr val="4C9AFF">
+                <a:alpha val="38000"/>
+              </a:srgbClr>
+            </a:glow>
+          </a:effectLst>
         </p:spPr>
         <p:style>
           <a:lnRef idx="1">
@@ -10276,14 +13758,14 @@
       </p:sp>
       <p:sp>
         <p:nvSpPr>
-          <p:cNvPr id="7" name="TextBox 6"/>
+          <p:cNvPr id="8" name="TextBox 7"/>
           <p:cNvSpPr txBox="1"/>
           <p:nvPr/>
         </p:nvSpPr>
         <p:spPr>
           <a:xfrm>
-            <a:off x="1051560" y="2240280"/>
-            <a:ext cx="402336" cy="365760"/>
+            <a:off x="1051560" y="2203704"/>
+            <a:ext cx="402336" cy="402336"/>
           </a:xfrm>
           <a:prstGeom prst="rect">
             <a:avLst/>
@@ -10291,14 +13773,14 @@
           <a:noFill/>
         </p:spPr>
         <p:txBody>
-          <a:bodyPr wrap="square">
+          <a:bodyPr wrap="square" lIns="0" rIns="0" tIns="0" bIns="0" anchor="ctr">
             <a:spAutoFit/>
           </a:bodyPr>
           <a:lstStyle/>
           <a:p>
-            <a:pPr>
+            <a:pPr algn="ctr">
               <a:lnSpc>
-                <a:spcPct val="120000"/>
+                <a:spcPct val="100000"/>
               </a:lnSpc>
             </a:pPr>
             <a:r>
@@ -10314,7 +13796,7 @@
       </p:sp>
       <p:sp>
         <p:nvSpPr>
-          <p:cNvPr id="8" name="TextBox 7"/>
+          <p:cNvPr id="9" name="TextBox 8"/>
           <p:cNvSpPr txBox="1"/>
           <p:nvPr/>
         </p:nvSpPr>
@@ -10352,7 +13834,7 @@
       </p:sp>
       <p:sp>
         <p:nvSpPr>
-          <p:cNvPr id="9" name="Rounded Rectangle 8"/>
+          <p:cNvPr id="10" name="Rounded Rectangle 9"/>
           <p:cNvSpPr/>
           <p:nvPr/>
         </p:nvSpPr>
@@ -10366,13 +13848,27 @@
               <a:gd name="adj" fmla="val 6000"/>
             </a:avLst>
           </a:prstGeom>
-          <a:solidFill>
-            <a:srgbClr val="1E2430"/>
-          </a:solidFill>
+          <a:gradFill rotWithShape="1">
+            <a:gsLst>
+              <a:gs pos="0">
+                <a:srgbClr val="1E2430"/>
+              </a:gs>
+              <a:gs pos="100000">
+                <a:srgbClr val="2C3442"/>
+              </a:gs>
+            </a:gsLst>
+            <a:lin scaled="0" ang="18900000"/>
+          </a:gradFill>
           <a:ln>
             <a:noFill/>
           </a:ln>
-          <a:effectLst/>
+          <a:effectLst>
+            <a:outerShdw blurRad="228600" dist="76200" dir="5400000" rotWithShape="0">
+              <a:srgbClr val="000000">
+                <a:alpha val="42000"/>
+              </a:srgbClr>
+            </a:outerShdw>
+          </a:effectLst>
         </p:spPr>
         <p:style>
           <a:lnRef idx="1">
@@ -10398,7 +13894,61 @@
       </p:sp>
       <p:sp>
         <p:nvSpPr>
-          <p:cNvPr id="10" name="Oval 9"/>
+          <p:cNvPr id="11" name="Rounded Rectangle 10"/>
+          <p:cNvSpPr/>
+          <p:nvPr/>
+        </p:nvSpPr>
+        <p:spPr>
+          <a:xfrm>
+            <a:off x="877824" y="3191256"/>
+            <a:ext cx="50800" cy="475488"/>
+          </a:xfrm>
+          <a:prstGeom prst="roundRect">
+            <a:avLst>
+              <a:gd name="adj" fmla="val 50000"/>
+            </a:avLst>
+          </a:prstGeom>
+          <a:gradFill rotWithShape="1">
+            <a:gsLst>
+              <a:gs pos="0">
+                <a:srgbClr val="4C9AFF"/>
+              </a:gs>
+              <a:gs pos="100000">
+                <a:srgbClr val="7B61FF"/>
+              </a:gs>
+            </a:gsLst>
+            <a:lin scaled="0" ang="18900000"/>
+          </a:gradFill>
+          <a:ln>
+            <a:noFill/>
+          </a:ln>
+          <a:effectLst/>
+        </p:spPr>
+        <p:style>
+          <a:lnRef idx="1">
+            <a:schemeClr val="accent1"/>
+          </a:lnRef>
+          <a:fillRef idx="3">
+            <a:schemeClr val="accent1"/>
+          </a:fillRef>
+          <a:effectRef idx="2">
+            <a:schemeClr val="accent1"/>
+          </a:effectRef>
+          <a:fontRef idx="minor">
+            <a:schemeClr val="lt1"/>
+          </a:fontRef>
+        </p:style>
+        <p:txBody>
+          <a:bodyPr rtlCol="0" anchor="ctr"/>
+          <a:lstStyle/>
+          <a:p>
+            <a:pPr algn="ctr"/>
+          </a:p>
+        </p:txBody>
+      </p:sp>
+      <p:sp>
+        <p:nvSpPr>
+          <p:cNvPr id="12" name="Oval 11"/>
           <p:cNvSpPr/>
           <p:nvPr/>
         </p:nvSpPr>
@@ -10424,7 +13974,13 @@
           <a:ln>
             <a:noFill/>
           </a:ln>
-          <a:effectLst/>
+          <a:effectLst>
+            <a:glow rad="88900">
+              <a:srgbClr val="4C9AFF">
+                <a:alpha val="38000"/>
+              </a:srgbClr>
+            </a:glow>
+          </a:effectLst>
         </p:spPr>
         <p:style>
           <a:lnRef idx="1">
@@ -10450,14 +14006,14 @@
       </p:sp>
       <p:sp>
         <p:nvSpPr>
-          <p:cNvPr id="11" name="TextBox 10"/>
+          <p:cNvPr id="13" name="TextBox 12"/>
           <p:cNvSpPr txBox="1"/>
           <p:nvPr/>
         </p:nvSpPr>
         <p:spPr>
           <a:xfrm>
-            <a:off x="1051560" y="3282696"/>
-            <a:ext cx="402336" cy="365760"/>
+            <a:off x="1051560" y="3246120"/>
+            <a:ext cx="402336" cy="402336"/>
           </a:xfrm>
           <a:prstGeom prst="rect">
             <a:avLst/>
@@ -10465,14 +14021,14 @@
           <a:noFill/>
         </p:spPr>
         <p:txBody>
-          <a:bodyPr wrap="square">
+          <a:bodyPr wrap="square" lIns="0" rIns="0" tIns="0" bIns="0" anchor="ctr">
             <a:spAutoFit/>
           </a:bodyPr>
           <a:lstStyle/>
           <a:p>
-            <a:pPr>
+            <a:pPr algn="ctr">
               <a:lnSpc>
-                <a:spcPct val="120000"/>
+                <a:spcPct val="100000"/>
               </a:lnSpc>
             </a:pPr>
             <a:r>
@@ -10488,7 +14044,7 @@
       </p:sp>
       <p:sp>
         <p:nvSpPr>
-          <p:cNvPr id="12" name="TextBox 11"/>
+          <p:cNvPr id="14" name="TextBox 13"/>
           <p:cNvSpPr txBox="1"/>
           <p:nvPr/>
         </p:nvSpPr>
@@ -10526,7 +14082,7 @@
       </p:sp>
       <p:sp>
         <p:nvSpPr>
-          <p:cNvPr id="13" name="Rounded Rectangle 12"/>
+          <p:cNvPr id="15" name="Rounded Rectangle 14"/>
           <p:cNvSpPr/>
           <p:nvPr/>
         </p:nvSpPr>
@@ -10540,13 +14096,27 @@
               <a:gd name="adj" fmla="val 6000"/>
             </a:avLst>
           </a:prstGeom>
-          <a:solidFill>
-            <a:srgbClr val="1E2430"/>
-          </a:solidFill>
+          <a:gradFill rotWithShape="1">
+            <a:gsLst>
+              <a:gs pos="0">
+                <a:srgbClr val="1E2430"/>
+              </a:gs>
+              <a:gs pos="100000">
+                <a:srgbClr val="2C3442"/>
+              </a:gs>
+            </a:gsLst>
+            <a:lin scaled="0" ang="18900000"/>
+          </a:gradFill>
           <a:ln>
             <a:noFill/>
           </a:ln>
-          <a:effectLst/>
+          <a:effectLst>
+            <a:outerShdw blurRad="228600" dist="76200" dir="5400000" rotWithShape="0">
+              <a:srgbClr val="000000">
+                <a:alpha val="42000"/>
+              </a:srgbClr>
+            </a:outerShdw>
+          </a:effectLst>
         </p:spPr>
         <p:style>
           <a:lnRef idx="1">
@@ -10572,7 +14142,61 @@
       </p:sp>
       <p:sp>
         <p:nvSpPr>
-          <p:cNvPr id="14" name="Oval 13"/>
+          <p:cNvPr id="16" name="Rounded Rectangle 15"/>
+          <p:cNvSpPr/>
+          <p:nvPr/>
+        </p:nvSpPr>
+        <p:spPr>
+          <a:xfrm>
+            <a:off x="877824" y="4233672"/>
+            <a:ext cx="50800" cy="475488"/>
+          </a:xfrm>
+          <a:prstGeom prst="roundRect">
+            <a:avLst>
+              <a:gd name="adj" fmla="val 50000"/>
+            </a:avLst>
+          </a:prstGeom>
+          <a:gradFill rotWithShape="1">
+            <a:gsLst>
+              <a:gs pos="0">
+                <a:srgbClr val="4C9AFF"/>
+              </a:gs>
+              <a:gs pos="100000">
+                <a:srgbClr val="7B61FF"/>
+              </a:gs>
+            </a:gsLst>
+            <a:lin scaled="0" ang="18900000"/>
+          </a:gradFill>
+          <a:ln>
+            <a:noFill/>
+          </a:ln>
+          <a:effectLst/>
+        </p:spPr>
+        <p:style>
+          <a:lnRef idx="1">
+            <a:schemeClr val="accent1"/>
+          </a:lnRef>
+          <a:fillRef idx="3">
+            <a:schemeClr val="accent1"/>
+          </a:fillRef>
+          <a:effectRef idx="2">
+            <a:schemeClr val="accent1"/>
+          </a:effectRef>
+          <a:fontRef idx="minor">
+            <a:schemeClr val="lt1"/>
+          </a:fontRef>
+        </p:style>
+        <p:txBody>
+          <a:bodyPr rtlCol="0" anchor="ctr"/>
+          <a:lstStyle/>
+          <a:p>
+            <a:pPr algn="ctr"/>
+          </a:p>
+        </p:txBody>
+      </p:sp>
+      <p:sp>
+        <p:nvSpPr>
+          <p:cNvPr id="17" name="Oval 16"/>
           <p:cNvSpPr/>
           <p:nvPr/>
         </p:nvSpPr>
@@ -10598,7 +14222,13 @@
           <a:ln>
             <a:noFill/>
           </a:ln>
-          <a:effectLst/>
+          <a:effectLst>
+            <a:glow rad="88900">
+              <a:srgbClr val="4C9AFF">
+                <a:alpha val="38000"/>
+              </a:srgbClr>
+            </a:glow>
+          </a:effectLst>
         </p:spPr>
         <p:style>
           <a:lnRef idx="1">
@@ -10624,14 +14254,14 @@
       </p:sp>
       <p:sp>
         <p:nvSpPr>
-          <p:cNvPr id="15" name="TextBox 14"/>
+          <p:cNvPr id="18" name="TextBox 17"/>
           <p:cNvSpPr txBox="1"/>
           <p:nvPr/>
         </p:nvSpPr>
         <p:spPr>
           <a:xfrm>
-            <a:off x="1051560" y="4325112"/>
-            <a:ext cx="402336" cy="365760"/>
+            <a:off x="1051560" y="4288536"/>
+            <a:ext cx="402336" cy="402336"/>
           </a:xfrm>
           <a:prstGeom prst="rect">
             <a:avLst/>
@@ -10639,14 +14269,14 @@
           <a:noFill/>
         </p:spPr>
         <p:txBody>
-          <a:bodyPr wrap="square">
+          <a:bodyPr wrap="square" lIns="0" rIns="0" tIns="0" bIns="0" anchor="ctr">
             <a:spAutoFit/>
           </a:bodyPr>
           <a:lstStyle/>
           <a:p>
-            <a:pPr>
+            <a:pPr algn="ctr">
               <a:lnSpc>
-                <a:spcPct val="120000"/>
+                <a:spcPct val="100000"/>
               </a:lnSpc>
             </a:pPr>
             <a:r>
@@ -10662,7 +14292,7 @@
       </p:sp>
       <p:sp>
         <p:nvSpPr>
-          <p:cNvPr id="16" name="TextBox 15"/>
+          <p:cNvPr id="19" name="TextBox 18"/>
           <p:cNvSpPr txBox="1"/>
           <p:nvPr/>
         </p:nvSpPr>
@@ -10700,7 +14330,7 @@
       </p:sp>
       <p:sp>
         <p:nvSpPr>
-          <p:cNvPr id="17" name="Rounded Rectangle 16"/>
+          <p:cNvPr id="20" name="Rounded Rectangle 19"/>
           <p:cNvSpPr/>
           <p:nvPr/>
         </p:nvSpPr>
@@ -10714,13 +14344,27 @@
               <a:gd name="adj" fmla="val 6000"/>
             </a:avLst>
           </a:prstGeom>
-          <a:solidFill>
-            <a:srgbClr val="1E2430"/>
-          </a:solidFill>
+          <a:gradFill rotWithShape="1">
+            <a:gsLst>
+              <a:gs pos="0">
+                <a:srgbClr val="1E2430"/>
+              </a:gs>
+              <a:gs pos="100000">
+                <a:srgbClr val="2C3442"/>
+              </a:gs>
+            </a:gsLst>
+            <a:lin scaled="0" ang="18900000"/>
+          </a:gradFill>
           <a:ln>
             <a:noFill/>
           </a:ln>
-          <a:effectLst/>
+          <a:effectLst>
+            <a:outerShdw blurRad="228600" dist="76200" dir="5400000" rotWithShape="0">
+              <a:srgbClr val="000000">
+                <a:alpha val="42000"/>
+              </a:srgbClr>
+            </a:outerShdw>
+          </a:effectLst>
         </p:spPr>
         <p:style>
           <a:lnRef idx="1">
@@ -10746,7 +14390,61 @@
       </p:sp>
       <p:sp>
         <p:nvSpPr>
-          <p:cNvPr id="18" name="Oval 17"/>
+          <p:cNvPr id="21" name="Rounded Rectangle 20"/>
+          <p:cNvSpPr/>
+          <p:nvPr/>
+        </p:nvSpPr>
+        <p:spPr>
+          <a:xfrm>
+            <a:off x="877824" y="5276088"/>
+            <a:ext cx="50800" cy="475488"/>
+          </a:xfrm>
+          <a:prstGeom prst="roundRect">
+            <a:avLst>
+              <a:gd name="adj" fmla="val 50000"/>
+            </a:avLst>
+          </a:prstGeom>
+          <a:gradFill rotWithShape="1">
+            <a:gsLst>
+              <a:gs pos="0">
+                <a:srgbClr val="4C9AFF"/>
+              </a:gs>
+              <a:gs pos="100000">
+                <a:srgbClr val="7B61FF"/>
+              </a:gs>
+            </a:gsLst>
+            <a:lin scaled="0" ang="18900000"/>
+          </a:gradFill>
+          <a:ln>
+            <a:noFill/>
+          </a:ln>
+          <a:effectLst/>
+        </p:spPr>
+        <p:style>
+          <a:lnRef idx="1">
+            <a:schemeClr val="accent1"/>
+          </a:lnRef>
+          <a:fillRef idx="3">
+            <a:schemeClr val="accent1"/>
+          </a:fillRef>
+          <a:effectRef idx="2">
+            <a:schemeClr val="accent1"/>
+          </a:effectRef>
+          <a:fontRef idx="minor">
+            <a:schemeClr val="lt1"/>
+          </a:fontRef>
+        </p:style>
+        <p:txBody>
+          <a:bodyPr rtlCol="0" anchor="ctr"/>
+          <a:lstStyle/>
+          <a:p>
+            <a:pPr algn="ctr"/>
+          </a:p>
+        </p:txBody>
+      </p:sp>
+      <p:sp>
+        <p:nvSpPr>
+          <p:cNvPr id="22" name="Oval 21"/>
           <p:cNvSpPr/>
           <p:nvPr/>
         </p:nvSpPr>
@@ -10772,7 +14470,13 @@
           <a:ln>
             <a:noFill/>
           </a:ln>
-          <a:effectLst/>
+          <a:effectLst>
+            <a:glow rad="88900">
+              <a:srgbClr val="4C9AFF">
+                <a:alpha val="38000"/>
+              </a:srgbClr>
+            </a:glow>
+          </a:effectLst>
         </p:spPr>
         <p:style>
           <a:lnRef idx="1">
@@ -10798,14 +14502,14 @@
       </p:sp>
       <p:sp>
         <p:nvSpPr>
-          <p:cNvPr id="19" name="TextBox 18"/>
+          <p:cNvPr id="23" name="TextBox 22"/>
           <p:cNvSpPr txBox="1"/>
           <p:nvPr/>
         </p:nvSpPr>
         <p:spPr>
           <a:xfrm>
-            <a:off x="1051560" y="5367528"/>
-            <a:ext cx="402336" cy="365760"/>
+            <a:off x="1051560" y="5330952"/>
+            <a:ext cx="402336" cy="402336"/>
           </a:xfrm>
           <a:prstGeom prst="rect">
             <a:avLst/>
@@ -10813,14 +14517,14 @@
           <a:noFill/>
         </p:spPr>
         <p:txBody>
-          <a:bodyPr wrap="square">
+          <a:bodyPr wrap="square" lIns="0" rIns="0" tIns="0" bIns="0" anchor="ctr">
             <a:spAutoFit/>
           </a:bodyPr>
           <a:lstStyle/>
           <a:p>
-            <a:pPr>
+            <a:pPr algn="ctr">
               <a:lnSpc>
-                <a:spcPct val="120000"/>
+                <a:spcPct val="100000"/>
               </a:lnSpc>
             </a:pPr>
             <a:r>
@@ -10836,7 +14540,7 @@
       </p:sp>
       <p:sp>
         <p:nvSpPr>
-          <p:cNvPr id="20" name="TextBox 19"/>
+          <p:cNvPr id="24" name="TextBox 23"/>
           <p:cNvSpPr txBox="1"/>
           <p:nvPr/>
         </p:nvSpPr>
@@ -10874,7 +14578,7 @@
       </p:sp>
       <p:sp>
         <p:nvSpPr>
-          <p:cNvPr id="21" name="TextBox 20"/>
+          <p:cNvPr id="25" name="TextBox 24"/>
           <p:cNvSpPr txBox="1"/>
           <p:nvPr/>
         </p:nvSpPr>
@@ -10912,7 +14616,7 @@
       </p:sp>
       <p:sp>
         <p:nvSpPr>
-          <p:cNvPr id="22" name="TextBox 21"/>
+          <p:cNvPr id="26" name="TextBox 25"/>
           <p:cNvSpPr txBox="1"/>
           <p:nvPr/>
         </p:nvSpPr>
@@ -10965,6 +14669,270 @@
       </p:transition>
     </mc:Fallback>
   </mc:AlternateContent>
+  <p:timing>
+    <p:tnLst>
+      <p:par>
+        <p:cTn id="1" dur="indefinite" restart="never" nodeType="tmRoot">
+          <p:childTnLst>
+            <p:seq concurrent="1" nextAc="seek">
+              <p:cTn id="2" dur="indefinite" nodeType="mainSeq">
+                <p:childTnLst>
+                  <p:par>
+                    <p:cTn id="3" fill="hold">
+                      <p:stCondLst>
+                        <p:cond delay="indefinite"/>
+                      </p:stCondLst>
+                      <p:childTnLst>
+                        <p:par>
+                          <p:cTn id="4" fill="hold">
+                            <p:stCondLst>
+                              <p:cond delay="0"/>
+                            </p:stCondLst>
+                            <p:childTnLst>
+                              <p:par>
+                                <p:cTn id="10" fill="hold">
+                                  <p:stCondLst>
+                                    <p:cond delay="0"/>
+                                  </p:stCondLst>
+                                  <p:childTnLst>
+                                    <p:set>
+                                      <p:cBhvr>
+                                        <p:cTn id="11" dur="1" fill="hold"/>
+                                        <p:tgtEl>
+                                          <p:spTgt spid="5"/>
+                                        </p:tgtEl>
+                                        <p:attrNameLst>
+                                          <p:attrName>style.visibility</p:attrName>
+                                        </p:attrNameLst>
+                                      </p:cBhvr>
+                                      <p:to>
+                                        <p:strVal val="visible"/>
+                                      </p:to>
+                                    </p:set>
+                                    <p:animEffect transition="in" filter="fade">
+                                      <p:cBhvr>
+                                        <p:cTn id="12" dur="420"/>
+                                        <p:tgtEl>
+                                          <p:spTgt spid="5"/>
+                                        </p:tgtEl>
+                                      </p:cBhvr>
+                                    </p:animEffect>
+                                    <p:anim calcmode="lin" valueType="num">
+                                      <p:cBhvr additive="base">
+                                        <p:cTn id="13" dur="420" fill="hold"/>
+                                        <p:tgtEl>
+                                          <p:spTgt spid="5"/>
+                                        </p:tgtEl>
+                                        <p:attrNameLst>
+                                          <p:attrName>ppt_y</p:attrName>
+                                        </p:attrNameLst>
+                                      </p:cBhvr>
+                                      <p:tavLst>
+                                        <p:tav tm="0">
+                                          <p:val>
+                                            <p:strVal val="#ppt_y+0.035"/>
+                                          </p:val>
+                                        </p:tav>
+                                        <p:tav tm="100000">
+                                          <p:val>
+                                            <p:strVal val="#ppt_y"/>
+                                          </p:val>
+                                        </p:tav>
+                                      </p:tavLst>
+                                    </p:anim>
+                                  </p:childTnLst>
+                                </p:cTn>
+                              </p:par>
+                              <p:par>
+                                <p:cTn id="20" fill="hold">
+                                  <p:stCondLst>
+                                    <p:cond delay="260"/>
+                                  </p:stCondLst>
+                                  <p:childTnLst>
+                                    <p:set>
+                                      <p:cBhvr>
+                                        <p:cTn id="21" dur="1" fill="hold"/>
+                                        <p:tgtEl>
+                                          <p:spTgt spid="10"/>
+                                        </p:tgtEl>
+                                        <p:attrNameLst>
+                                          <p:attrName>style.visibility</p:attrName>
+                                        </p:attrNameLst>
+                                      </p:cBhvr>
+                                      <p:to>
+                                        <p:strVal val="visible"/>
+                                      </p:to>
+                                    </p:set>
+                                    <p:animEffect transition="in" filter="fade">
+                                      <p:cBhvr>
+                                        <p:cTn id="22" dur="420"/>
+                                        <p:tgtEl>
+                                          <p:spTgt spid="10"/>
+                                        </p:tgtEl>
+                                      </p:cBhvr>
+                                    </p:animEffect>
+                                    <p:anim calcmode="lin" valueType="num">
+                                      <p:cBhvr additive="base">
+                                        <p:cTn id="23" dur="420" fill="hold"/>
+                                        <p:tgtEl>
+                                          <p:spTgt spid="10"/>
+                                        </p:tgtEl>
+                                        <p:attrNameLst>
+                                          <p:attrName>ppt_y</p:attrName>
+                                        </p:attrNameLst>
+                                      </p:cBhvr>
+                                      <p:tavLst>
+                                        <p:tav tm="0">
+                                          <p:val>
+                                            <p:strVal val="#ppt_y+0.035"/>
+                                          </p:val>
+                                        </p:tav>
+                                        <p:tav tm="100000">
+                                          <p:val>
+                                            <p:strVal val="#ppt_y"/>
+                                          </p:val>
+                                        </p:tav>
+                                      </p:tavLst>
+                                    </p:anim>
+                                  </p:childTnLst>
+                                </p:cTn>
+                              </p:par>
+                              <p:par>
+                                <p:cTn id="30" fill="hold">
+                                  <p:stCondLst>
+                                    <p:cond delay="520"/>
+                                  </p:stCondLst>
+                                  <p:childTnLst>
+                                    <p:set>
+                                      <p:cBhvr>
+                                        <p:cTn id="31" dur="1" fill="hold"/>
+                                        <p:tgtEl>
+                                          <p:spTgt spid="15"/>
+                                        </p:tgtEl>
+                                        <p:attrNameLst>
+                                          <p:attrName>style.visibility</p:attrName>
+                                        </p:attrNameLst>
+                                      </p:cBhvr>
+                                      <p:to>
+                                        <p:strVal val="visible"/>
+                                      </p:to>
+                                    </p:set>
+                                    <p:animEffect transition="in" filter="fade">
+                                      <p:cBhvr>
+                                        <p:cTn id="32" dur="420"/>
+                                        <p:tgtEl>
+                                          <p:spTgt spid="15"/>
+                                        </p:tgtEl>
+                                      </p:cBhvr>
+                                    </p:animEffect>
+                                    <p:anim calcmode="lin" valueType="num">
+                                      <p:cBhvr additive="base">
+                                        <p:cTn id="33" dur="420" fill="hold"/>
+                                        <p:tgtEl>
+                                          <p:spTgt spid="15"/>
+                                        </p:tgtEl>
+                                        <p:attrNameLst>
+                                          <p:attrName>ppt_y</p:attrName>
+                                        </p:attrNameLst>
+                                      </p:cBhvr>
+                                      <p:tavLst>
+                                        <p:tav tm="0">
+                                          <p:val>
+                                            <p:strVal val="#ppt_y+0.035"/>
+                                          </p:val>
+                                        </p:tav>
+                                        <p:tav tm="100000">
+                                          <p:val>
+                                            <p:strVal val="#ppt_y"/>
+                                          </p:val>
+                                        </p:tav>
+                                      </p:tavLst>
+                                    </p:anim>
+                                  </p:childTnLst>
+                                </p:cTn>
+                              </p:par>
+                              <p:par>
+                                <p:cTn id="40" fill="hold">
+                                  <p:stCondLst>
+                                    <p:cond delay="780"/>
+                                  </p:stCondLst>
+                                  <p:childTnLst>
+                                    <p:set>
+                                      <p:cBhvr>
+                                        <p:cTn id="41" dur="1" fill="hold"/>
+                                        <p:tgtEl>
+                                          <p:spTgt spid="20"/>
+                                        </p:tgtEl>
+                                        <p:attrNameLst>
+                                          <p:attrName>style.visibility</p:attrName>
+                                        </p:attrNameLst>
+                                      </p:cBhvr>
+                                      <p:to>
+                                        <p:strVal val="visible"/>
+                                      </p:to>
+                                    </p:set>
+                                    <p:animEffect transition="in" filter="fade">
+                                      <p:cBhvr>
+                                        <p:cTn id="42" dur="420"/>
+                                        <p:tgtEl>
+                                          <p:spTgt spid="20"/>
+                                        </p:tgtEl>
+                                      </p:cBhvr>
+                                    </p:animEffect>
+                                    <p:anim calcmode="lin" valueType="num">
+                                      <p:cBhvr additive="base">
+                                        <p:cTn id="43" dur="420" fill="hold"/>
+                                        <p:tgtEl>
+                                          <p:spTgt spid="20"/>
+                                        </p:tgtEl>
+                                        <p:attrNameLst>
+                                          <p:attrName>ppt_y</p:attrName>
+                                        </p:attrNameLst>
+                                      </p:cBhvr>
+                                      <p:tavLst>
+                                        <p:tav tm="0">
+                                          <p:val>
+                                            <p:strVal val="#ppt_y+0.035"/>
+                                          </p:val>
+                                        </p:tav>
+                                        <p:tav tm="100000">
+                                          <p:val>
+                                            <p:strVal val="#ppt_y"/>
+                                          </p:val>
+                                        </p:tav>
+                                      </p:tavLst>
+                                    </p:anim>
+                                  </p:childTnLst>
+                                </p:cTn>
+                              </p:par>
+                            </p:childTnLst>
+                          </p:cTn>
+                        </p:par>
+                      </p:childTnLst>
+                    </p:cTn>
+                  </p:par>
+                </p:childTnLst>
+              </p:cTn>
+              <p:prevCondLst>
+                <p:cond evt="onPrev" delay="0">
+                  <p:tgtEl>
+                    <p:sldTgt/>
+                  </p:tgtEl>
+                </p:cond>
+              </p:prevCondLst>
+              <p:nextCondLst>
+                <p:cond evt="onNext" delay="0">
+                  <p:tgtEl>
+                    <p:sldTgt/>
+                  </p:tgtEl>
+                </p:cond>
+              </p:nextCondLst>
+            </p:seq>
+          </p:childTnLst>
+        </p:cTn>
+      </p:par>
+    </p:tnLst>
+  </p:timing>
 </p:sld>
 </file>
 
@@ -11042,7 +15010,13 @@
           <a:ln>
             <a:noFill/>
           </a:ln>
-          <a:effectLst/>
+          <a:effectLst>
+            <a:glow rad="127000">
+              <a:srgbClr val="4C9AFF">
+                <a:alpha val="55000"/>
+              </a:srgbClr>
+            </a:glow>
+          </a:effectLst>
         </p:spPr>
         <p:style>
           <a:lnRef idx="1">
@@ -11120,13 +15094,27 @@
               <a:gd name="adj" fmla="val 6000"/>
             </a:avLst>
           </a:prstGeom>
-          <a:solidFill>
-            <a:srgbClr val="1E2430"/>
-          </a:solidFill>
+          <a:gradFill rotWithShape="1">
+            <a:gsLst>
+              <a:gs pos="0">
+                <a:srgbClr val="1E2430"/>
+              </a:gs>
+              <a:gs pos="100000">
+                <a:srgbClr val="2C3442"/>
+              </a:gs>
+            </a:gsLst>
+            <a:lin scaled="0" ang="18900000"/>
+          </a:gradFill>
           <a:ln>
             <a:noFill/>
           </a:ln>
-          <a:effectLst/>
+          <a:effectLst>
+            <a:outerShdw blurRad="228600" dist="76200" dir="5400000" rotWithShape="0">
+              <a:srgbClr val="000000">
+                <a:alpha val="42000"/>
+              </a:srgbClr>
+            </a:outerShdw>
+          </a:effectLst>
         </p:spPr>
         <p:style>
           <a:lnRef idx="1">
@@ -11152,7 +15140,61 @@
       </p:sp>
       <p:sp>
         <p:nvSpPr>
-          <p:cNvPr id="6" name="Oval 5"/>
+          <p:cNvPr id="6" name="Rounded Rectangle 5"/>
+          <p:cNvSpPr/>
+          <p:nvPr/>
+        </p:nvSpPr>
+        <p:spPr>
+          <a:xfrm>
+            <a:off x="877824" y="2148840"/>
+            <a:ext cx="50800" cy="475488"/>
+          </a:xfrm>
+          <a:prstGeom prst="roundRect">
+            <a:avLst>
+              <a:gd name="adj" fmla="val 50000"/>
+            </a:avLst>
+          </a:prstGeom>
+          <a:gradFill rotWithShape="1">
+            <a:gsLst>
+              <a:gs pos="0">
+                <a:srgbClr val="4C9AFF"/>
+              </a:gs>
+              <a:gs pos="100000">
+                <a:srgbClr val="7B61FF"/>
+              </a:gs>
+            </a:gsLst>
+            <a:lin scaled="0" ang="18900000"/>
+          </a:gradFill>
+          <a:ln>
+            <a:noFill/>
+          </a:ln>
+          <a:effectLst/>
+        </p:spPr>
+        <p:style>
+          <a:lnRef idx="1">
+            <a:schemeClr val="accent1"/>
+          </a:lnRef>
+          <a:fillRef idx="3">
+            <a:schemeClr val="accent1"/>
+          </a:fillRef>
+          <a:effectRef idx="2">
+            <a:schemeClr val="accent1"/>
+          </a:effectRef>
+          <a:fontRef idx="minor">
+            <a:schemeClr val="lt1"/>
+          </a:fontRef>
+        </p:style>
+        <p:txBody>
+          <a:bodyPr rtlCol="0" anchor="ctr"/>
+          <a:lstStyle/>
+          <a:p>
+            <a:pPr algn="ctr"/>
+          </a:p>
+        </p:txBody>
+      </p:sp>
+      <p:sp>
+        <p:nvSpPr>
+          <p:cNvPr id="7" name="Oval 6"/>
           <p:cNvSpPr/>
           <p:nvPr/>
         </p:nvSpPr>
@@ -11178,7 +15220,13 @@
           <a:ln>
             <a:noFill/>
           </a:ln>
-          <a:effectLst/>
+          <a:effectLst>
+            <a:glow rad="88900">
+              <a:srgbClr val="4C9AFF">
+                <a:alpha val="38000"/>
+              </a:srgbClr>
+            </a:glow>
+          </a:effectLst>
         </p:spPr>
         <p:style>
           <a:lnRef idx="1">
@@ -11204,14 +15252,14 @@
       </p:sp>
       <p:sp>
         <p:nvSpPr>
-          <p:cNvPr id="7" name="TextBox 6"/>
+          <p:cNvPr id="8" name="TextBox 7"/>
           <p:cNvSpPr txBox="1"/>
           <p:nvPr/>
         </p:nvSpPr>
         <p:spPr>
           <a:xfrm>
-            <a:off x="1051560" y="2240280"/>
-            <a:ext cx="402336" cy="365760"/>
+            <a:off x="1051560" y="2203704"/>
+            <a:ext cx="402336" cy="402336"/>
           </a:xfrm>
           <a:prstGeom prst="rect">
             <a:avLst/>
@@ -11219,14 +15267,14 @@
           <a:noFill/>
         </p:spPr>
         <p:txBody>
-          <a:bodyPr wrap="square">
+          <a:bodyPr wrap="square" lIns="0" rIns="0" tIns="0" bIns="0" anchor="ctr">
             <a:spAutoFit/>
           </a:bodyPr>
           <a:lstStyle/>
           <a:p>
-            <a:pPr>
+            <a:pPr algn="ctr">
               <a:lnSpc>
-                <a:spcPct val="120000"/>
+                <a:spcPct val="100000"/>
               </a:lnSpc>
             </a:pPr>
             <a:r>
@@ -11242,7 +15290,7 @@
       </p:sp>
       <p:sp>
         <p:nvSpPr>
-          <p:cNvPr id="8" name="TextBox 7"/>
+          <p:cNvPr id="9" name="TextBox 8"/>
           <p:cNvSpPr txBox="1"/>
           <p:nvPr/>
         </p:nvSpPr>
@@ -11280,7 +15328,7 @@
       </p:sp>
       <p:sp>
         <p:nvSpPr>
-          <p:cNvPr id="9" name="Rounded Rectangle 8"/>
+          <p:cNvPr id="10" name="Rounded Rectangle 9"/>
           <p:cNvSpPr/>
           <p:nvPr/>
         </p:nvSpPr>
@@ -11294,13 +15342,27 @@
               <a:gd name="adj" fmla="val 6000"/>
             </a:avLst>
           </a:prstGeom>
-          <a:solidFill>
-            <a:srgbClr val="1E2430"/>
-          </a:solidFill>
+          <a:gradFill rotWithShape="1">
+            <a:gsLst>
+              <a:gs pos="0">
+                <a:srgbClr val="1E2430"/>
+              </a:gs>
+              <a:gs pos="100000">
+                <a:srgbClr val="2C3442"/>
+              </a:gs>
+            </a:gsLst>
+            <a:lin scaled="0" ang="18900000"/>
+          </a:gradFill>
           <a:ln>
             <a:noFill/>
           </a:ln>
-          <a:effectLst/>
+          <a:effectLst>
+            <a:outerShdw blurRad="228600" dist="76200" dir="5400000" rotWithShape="0">
+              <a:srgbClr val="000000">
+                <a:alpha val="42000"/>
+              </a:srgbClr>
+            </a:outerShdw>
+          </a:effectLst>
         </p:spPr>
         <p:style>
           <a:lnRef idx="1">
@@ -11326,7 +15388,61 @@
       </p:sp>
       <p:sp>
         <p:nvSpPr>
-          <p:cNvPr id="10" name="Oval 9"/>
+          <p:cNvPr id="11" name="Rounded Rectangle 10"/>
+          <p:cNvSpPr/>
+          <p:nvPr/>
+        </p:nvSpPr>
+        <p:spPr>
+          <a:xfrm>
+            <a:off x="877824" y="3191256"/>
+            <a:ext cx="50800" cy="475488"/>
+          </a:xfrm>
+          <a:prstGeom prst="roundRect">
+            <a:avLst>
+              <a:gd name="adj" fmla="val 50000"/>
+            </a:avLst>
+          </a:prstGeom>
+          <a:gradFill rotWithShape="1">
+            <a:gsLst>
+              <a:gs pos="0">
+                <a:srgbClr val="4C9AFF"/>
+              </a:gs>
+              <a:gs pos="100000">
+                <a:srgbClr val="7B61FF"/>
+              </a:gs>
+            </a:gsLst>
+            <a:lin scaled="0" ang="18900000"/>
+          </a:gradFill>
+          <a:ln>
+            <a:noFill/>
+          </a:ln>
+          <a:effectLst/>
+        </p:spPr>
+        <p:style>
+          <a:lnRef idx="1">
+            <a:schemeClr val="accent1"/>
+          </a:lnRef>
+          <a:fillRef idx="3">
+            <a:schemeClr val="accent1"/>
+          </a:fillRef>
+          <a:effectRef idx="2">
+            <a:schemeClr val="accent1"/>
+          </a:effectRef>
+          <a:fontRef idx="minor">
+            <a:schemeClr val="lt1"/>
+          </a:fontRef>
+        </p:style>
+        <p:txBody>
+          <a:bodyPr rtlCol="0" anchor="ctr"/>
+          <a:lstStyle/>
+          <a:p>
+            <a:pPr algn="ctr"/>
+          </a:p>
+        </p:txBody>
+      </p:sp>
+      <p:sp>
+        <p:nvSpPr>
+          <p:cNvPr id="12" name="Oval 11"/>
           <p:cNvSpPr/>
           <p:nvPr/>
         </p:nvSpPr>
@@ -11352,7 +15468,13 @@
           <a:ln>
             <a:noFill/>
           </a:ln>
-          <a:effectLst/>
+          <a:effectLst>
+            <a:glow rad="88900">
+              <a:srgbClr val="4C9AFF">
+                <a:alpha val="38000"/>
+              </a:srgbClr>
+            </a:glow>
+          </a:effectLst>
         </p:spPr>
         <p:style>
           <a:lnRef idx="1">
@@ -11378,14 +15500,14 @@
       </p:sp>
       <p:sp>
         <p:nvSpPr>
-          <p:cNvPr id="11" name="TextBox 10"/>
+          <p:cNvPr id="13" name="TextBox 12"/>
           <p:cNvSpPr txBox="1"/>
           <p:nvPr/>
         </p:nvSpPr>
         <p:spPr>
           <a:xfrm>
-            <a:off x="1051560" y="3282696"/>
-            <a:ext cx="402336" cy="365760"/>
+            <a:off x="1051560" y="3246120"/>
+            <a:ext cx="402336" cy="402336"/>
           </a:xfrm>
           <a:prstGeom prst="rect">
             <a:avLst/>
@@ -11393,14 +15515,14 @@
           <a:noFill/>
         </p:spPr>
         <p:txBody>
-          <a:bodyPr wrap="square">
+          <a:bodyPr wrap="square" lIns="0" rIns="0" tIns="0" bIns="0" anchor="ctr">
             <a:spAutoFit/>
           </a:bodyPr>
           <a:lstStyle/>
           <a:p>
-            <a:pPr>
+            <a:pPr algn="ctr">
               <a:lnSpc>
-                <a:spcPct val="120000"/>
+                <a:spcPct val="100000"/>
               </a:lnSpc>
             </a:pPr>
             <a:r>
@@ -11416,7 +15538,7 @@
       </p:sp>
       <p:sp>
         <p:nvSpPr>
-          <p:cNvPr id="12" name="TextBox 11"/>
+          <p:cNvPr id="14" name="TextBox 13"/>
           <p:cNvSpPr txBox="1"/>
           <p:nvPr/>
         </p:nvSpPr>
@@ -11454,7 +15576,7 @@
       </p:sp>
       <p:sp>
         <p:nvSpPr>
-          <p:cNvPr id="13" name="Rounded Rectangle 12"/>
+          <p:cNvPr id="15" name="Rounded Rectangle 14"/>
           <p:cNvSpPr/>
           <p:nvPr/>
         </p:nvSpPr>
@@ -11468,13 +15590,27 @@
               <a:gd name="adj" fmla="val 6000"/>
             </a:avLst>
           </a:prstGeom>
-          <a:solidFill>
-            <a:srgbClr val="1E2430"/>
-          </a:solidFill>
+          <a:gradFill rotWithShape="1">
+            <a:gsLst>
+              <a:gs pos="0">
+                <a:srgbClr val="1E2430"/>
+              </a:gs>
+              <a:gs pos="100000">
+                <a:srgbClr val="2C3442"/>
+              </a:gs>
+            </a:gsLst>
+            <a:lin scaled="0" ang="18900000"/>
+          </a:gradFill>
           <a:ln>
             <a:noFill/>
           </a:ln>
-          <a:effectLst/>
+          <a:effectLst>
+            <a:outerShdw blurRad="228600" dist="76200" dir="5400000" rotWithShape="0">
+              <a:srgbClr val="000000">
+                <a:alpha val="42000"/>
+              </a:srgbClr>
+            </a:outerShdw>
+          </a:effectLst>
         </p:spPr>
         <p:style>
           <a:lnRef idx="1">
@@ -11500,7 +15636,61 @@
       </p:sp>
       <p:sp>
         <p:nvSpPr>
-          <p:cNvPr id="14" name="Oval 13"/>
+          <p:cNvPr id="16" name="Rounded Rectangle 15"/>
+          <p:cNvSpPr/>
+          <p:nvPr/>
+        </p:nvSpPr>
+        <p:spPr>
+          <a:xfrm>
+            <a:off x="877824" y="4233672"/>
+            <a:ext cx="50800" cy="475488"/>
+          </a:xfrm>
+          <a:prstGeom prst="roundRect">
+            <a:avLst>
+              <a:gd name="adj" fmla="val 50000"/>
+            </a:avLst>
+          </a:prstGeom>
+          <a:gradFill rotWithShape="1">
+            <a:gsLst>
+              <a:gs pos="0">
+                <a:srgbClr val="4C9AFF"/>
+              </a:gs>
+              <a:gs pos="100000">
+                <a:srgbClr val="7B61FF"/>
+              </a:gs>
+            </a:gsLst>
+            <a:lin scaled="0" ang="18900000"/>
+          </a:gradFill>
+          <a:ln>
+            <a:noFill/>
+          </a:ln>
+          <a:effectLst/>
+        </p:spPr>
+        <p:style>
+          <a:lnRef idx="1">
+            <a:schemeClr val="accent1"/>
+          </a:lnRef>
+          <a:fillRef idx="3">
+            <a:schemeClr val="accent1"/>
+          </a:fillRef>
+          <a:effectRef idx="2">
+            <a:schemeClr val="accent1"/>
+          </a:effectRef>
+          <a:fontRef idx="minor">
+            <a:schemeClr val="lt1"/>
+          </a:fontRef>
+        </p:style>
+        <p:txBody>
+          <a:bodyPr rtlCol="0" anchor="ctr"/>
+          <a:lstStyle/>
+          <a:p>
+            <a:pPr algn="ctr"/>
+          </a:p>
+        </p:txBody>
+      </p:sp>
+      <p:sp>
+        <p:nvSpPr>
+          <p:cNvPr id="17" name="Oval 16"/>
           <p:cNvSpPr/>
           <p:nvPr/>
         </p:nvSpPr>
@@ -11526,7 +15716,13 @@
           <a:ln>
             <a:noFill/>
           </a:ln>
-          <a:effectLst/>
+          <a:effectLst>
+            <a:glow rad="88900">
+              <a:srgbClr val="4C9AFF">
+                <a:alpha val="38000"/>
+              </a:srgbClr>
+            </a:glow>
+          </a:effectLst>
         </p:spPr>
         <p:style>
           <a:lnRef idx="1">
@@ -11552,14 +15748,14 @@
       </p:sp>
       <p:sp>
         <p:nvSpPr>
-          <p:cNvPr id="15" name="TextBox 14"/>
+          <p:cNvPr id="18" name="TextBox 17"/>
           <p:cNvSpPr txBox="1"/>
           <p:nvPr/>
         </p:nvSpPr>
         <p:spPr>
           <a:xfrm>
-            <a:off x="1051560" y="4325112"/>
-            <a:ext cx="402336" cy="365760"/>
+            <a:off x="1051560" y="4288536"/>
+            <a:ext cx="402336" cy="402336"/>
           </a:xfrm>
           <a:prstGeom prst="rect">
             <a:avLst/>
@@ -11567,14 +15763,14 @@
           <a:noFill/>
         </p:spPr>
         <p:txBody>
-          <a:bodyPr wrap="square">
+          <a:bodyPr wrap="square" lIns="0" rIns="0" tIns="0" bIns="0" anchor="ctr">
             <a:spAutoFit/>
           </a:bodyPr>
           <a:lstStyle/>
           <a:p>
-            <a:pPr>
+            <a:pPr algn="ctr">
               <a:lnSpc>
-                <a:spcPct val="120000"/>
+                <a:spcPct val="100000"/>
               </a:lnSpc>
             </a:pPr>
             <a:r>
@@ -11590,7 +15786,7 @@
       </p:sp>
       <p:sp>
         <p:nvSpPr>
-          <p:cNvPr id="16" name="TextBox 15"/>
+          <p:cNvPr id="19" name="TextBox 18"/>
           <p:cNvSpPr txBox="1"/>
           <p:nvPr/>
         </p:nvSpPr>
@@ -11628,7 +15824,7 @@
       </p:sp>
       <p:sp>
         <p:nvSpPr>
-          <p:cNvPr id="17" name="Rounded Rectangle 16"/>
+          <p:cNvPr id="20" name="Rounded Rectangle 19"/>
           <p:cNvSpPr/>
           <p:nvPr/>
         </p:nvSpPr>
@@ -11642,13 +15838,27 @@
               <a:gd name="adj" fmla="val 6000"/>
             </a:avLst>
           </a:prstGeom>
-          <a:solidFill>
-            <a:srgbClr val="1E2430"/>
-          </a:solidFill>
+          <a:gradFill rotWithShape="1">
+            <a:gsLst>
+              <a:gs pos="0">
+                <a:srgbClr val="1E2430"/>
+              </a:gs>
+              <a:gs pos="100000">
+                <a:srgbClr val="2C3442"/>
+              </a:gs>
+            </a:gsLst>
+            <a:lin scaled="0" ang="18900000"/>
+          </a:gradFill>
           <a:ln>
             <a:noFill/>
           </a:ln>
-          <a:effectLst/>
+          <a:effectLst>
+            <a:outerShdw blurRad="228600" dist="76200" dir="5400000" rotWithShape="0">
+              <a:srgbClr val="000000">
+                <a:alpha val="42000"/>
+              </a:srgbClr>
+            </a:outerShdw>
+          </a:effectLst>
         </p:spPr>
         <p:style>
           <a:lnRef idx="1">
@@ -11674,7 +15884,61 @@
       </p:sp>
       <p:sp>
         <p:nvSpPr>
-          <p:cNvPr id="18" name="Oval 17"/>
+          <p:cNvPr id="21" name="Rounded Rectangle 20"/>
+          <p:cNvSpPr/>
+          <p:nvPr/>
+        </p:nvSpPr>
+        <p:spPr>
+          <a:xfrm>
+            <a:off x="877824" y="5276088"/>
+            <a:ext cx="50800" cy="475488"/>
+          </a:xfrm>
+          <a:prstGeom prst="roundRect">
+            <a:avLst>
+              <a:gd name="adj" fmla="val 50000"/>
+            </a:avLst>
+          </a:prstGeom>
+          <a:gradFill rotWithShape="1">
+            <a:gsLst>
+              <a:gs pos="0">
+                <a:srgbClr val="4C9AFF"/>
+              </a:gs>
+              <a:gs pos="100000">
+                <a:srgbClr val="7B61FF"/>
+              </a:gs>
+            </a:gsLst>
+            <a:lin scaled="0" ang="18900000"/>
+          </a:gradFill>
+          <a:ln>
+            <a:noFill/>
+          </a:ln>
+          <a:effectLst/>
+        </p:spPr>
+        <p:style>
+          <a:lnRef idx="1">
+            <a:schemeClr val="accent1"/>
+          </a:lnRef>
+          <a:fillRef idx="3">
+            <a:schemeClr val="accent1"/>
+          </a:fillRef>
+          <a:effectRef idx="2">
+            <a:schemeClr val="accent1"/>
+          </a:effectRef>
+          <a:fontRef idx="minor">
+            <a:schemeClr val="lt1"/>
+          </a:fontRef>
+        </p:style>
+        <p:txBody>
+          <a:bodyPr rtlCol="0" anchor="ctr"/>
+          <a:lstStyle/>
+          <a:p>
+            <a:pPr algn="ctr"/>
+          </a:p>
+        </p:txBody>
+      </p:sp>
+      <p:sp>
+        <p:nvSpPr>
+          <p:cNvPr id="22" name="Oval 21"/>
           <p:cNvSpPr/>
           <p:nvPr/>
         </p:nvSpPr>
@@ -11700,7 +15964,13 @@
           <a:ln>
             <a:noFill/>
           </a:ln>
-          <a:effectLst/>
+          <a:effectLst>
+            <a:glow rad="88900">
+              <a:srgbClr val="4C9AFF">
+                <a:alpha val="38000"/>
+              </a:srgbClr>
+            </a:glow>
+          </a:effectLst>
         </p:spPr>
         <p:style>
           <a:lnRef idx="1">
@@ -11726,14 +15996,14 @@
       </p:sp>
       <p:sp>
         <p:nvSpPr>
-          <p:cNvPr id="19" name="TextBox 18"/>
+          <p:cNvPr id="23" name="TextBox 22"/>
           <p:cNvSpPr txBox="1"/>
           <p:nvPr/>
         </p:nvSpPr>
         <p:spPr>
           <a:xfrm>
-            <a:off x="1051560" y="5367528"/>
-            <a:ext cx="402336" cy="365760"/>
+            <a:off x="1051560" y="5330952"/>
+            <a:ext cx="402336" cy="402336"/>
           </a:xfrm>
           <a:prstGeom prst="rect">
             <a:avLst/>
@@ -11741,14 +16011,14 @@
           <a:noFill/>
         </p:spPr>
         <p:txBody>
-          <a:bodyPr wrap="square">
+          <a:bodyPr wrap="square" lIns="0" rIns="0" tIns="0" bIns="0" anchor="ctr">
             <a:spAutoFit/>
           </a:bodyPr>
           <a:lstStyle/>
           <a:p>
-            <a:pPr>
+            <a:pPr algn="ctr">
               <a:lnSpc>
-                <a:spcPct val="120000"/>
+                <a:spcPct val="100000"/>
               </a:lnSpc>
             </a:pPr>
             <a:r>
@@ -11764,7 +16034,7 @@
       </p:sp>
       <p:sp>
         <p:nvSpPr>
-          <p:cNvPr id="20" name="TextBox 19"/>
+          <p:cNvPr id="24" name="TextBox 23"/>
           <p:cNvSpPr txBox="1"/>
           <p:nvPr/>
         </p:nvSpPr>
@@ -11802,7 +16072,7 @@
       </p:sp>
       <p:sp>
         <p:nvSpPr>
-          <p:cNvPr id="21" name="TextBox 20"/>
+          <p:cNvPr id="25" name="TextBox 24"/>
           <p:cNvSpPr txBox="1"/>
           <p:nvPr/>
         </p:nvSpPr>
@@ -11840,7 +16110,7 @@
       </p:sp>
       <p:sp>
         <p:nvSpPr>
-          <p:cNvPr id="22" name="TextBox 21"/>
+          <p:cNvPr id="26" name="TextBox 25"/>
           <p:cNvSpPr txBox="1"/>
           <p:nvPr/>
         </p:nvSpPr>
@@ -11893,6 +16163,270 @@
       </p:transition>
     </mc:Fallback>
   </mc:AlternateContent>
+  <p:timing>
+    <p:tnLst>
+      <p:par>
+        <p:cTn id="1" dur="indefinite" restart="never" nodeType="tmRoot">
+          <p:childTnLst>
+            <p:seq concurrent="1" nextAc="seek">
+              <p:cTn id="2" dur="indefinite" nodeType="mainSeq">
+                <p:childTnLst>
+                  <p:par>
+                    <p:cTn id="3" fill="hold">
+                      <p:stCondLst>
+                        <p:cond delay="indefinite"/>
+                      </p:stCondLst>
+                      <p:childTnLst>
+                        <p:par>
+                          <p:cTn id="4" fill="hold">
+                            <p:stCondLst>
+                              <p:cond delay="0"/>
+                            </p:stCondLst>
+                            <p:childTnLst>
+                              <p:par>
+                                <p:cTn id="10" fill="hold">
+                                  <p:stCondLst>
+                                    <p:cond delay="0"/>
+                                  </p:stCondLst>
+                                  <p:childTnLst>
+                                    <p:set>
+                                      <p:cBhvr>
+                                        <p:cTn id="11" dur="1" fill="hold"/>
+                                        <p:tgtEl>
+                                          <p:spTgt spid="5"/>
+                                        </p:tgtEl>
+                                        <p:attrNameLst>
+                                          <p:attrName>style.visibility</p:attrName>
+                                        </p:attrNameLst>
+                                      </p:cBhvr>
+                                      <p:to>
+                                        <p:strVal val="visible"/>
+                                      </p:to>
+                                    </p:set>
+                                    <p:animEffect transition="in" filter="fade">
+                                      <p:cBhvr>
+                                        <p:cTn id="12" dur="420"/>
+                                        <p:tgtEl>
+                                          <p:spTgt spid="5"/>
+                                        </p:tgtEl>
+                                      </p:cBhvr>
+                                    </p:animEffect>
+                                    <p:anim calcmode="lin" valueType="num">
+                                      <p:cBhvr additive="base">
+                                        <p:cTn id="13" dur="420" fill="hold"/>
+                                        <p:tgtEl>
+                                          <p:spTgt spid="5"/>
+                                        </p:tgtEl>
+                                        <p:attrNameLst>
+                                          <p:attrName>ppt_y</p:attrName>
+                                        </p:attrNameLst>
+                                      </p:cBhvr>
+                                      <p:tavLst>
+                                        <p:tav tm="0">
+                                          <p:val>
+                                            <p:strVal val="#ppt_y+0.035"/>
+                                          </p:val>
+                                        </p:tav>
+                                        <p:tav tm="100000">
+                                          <p:val>
+                                            <p:strVal val="#ppt_y"/>
+                                          </p:val>
+                                        </p:tav>
+                                      </p:tavLst>
+                                    </p:anim>
+                                  </p:childTnLst>
+                                </p:cTn>
+                              </p:par>
+                              <p:par>
+                                <p:cTn id="20" fill="hold">
+                                  <p:stCondLst>
+                                    <p:cond delay="260"/>
+                                  </p:stCondLst>
+                                  <p:childTnLst>
+                                    <p:set>
+                                      <p:cBhvr>
+                                        <p:cTn id="21" dur="1" fill="hold"/>
+                                        <p:tgtEl>
+                                          <p:spTgt spid="10"/>
+                                        </p:tgtEl>
+                                        <p:attrNameLst>
+                                          <p:attrName>style.visibility</p:attrName>
+                                        </p:attrNameLst>
+                                      </p:cBhvr>
+                                      <p:to>
+                                        <p:strVal val="visible"/>
+                                      </p:to>
+                                    </p:set>
+                                    <p:animEffect transition="in" filter="fade">
+                                      <p:cBhvr>
+                                        <p:cTn id="22" dur="420"/>
+                                        <p:tgtEl>
+                                          <p:spTgt spid="10"/>
+                                        </p:tgtEl>
+                                      </p:cBhvr>
+                                    </p:animEffect>
+                                    <p:anim calcmode="lin" valueType="num">
+                                      <p:cBhvr additive="base">
+                                        <p:cTn id="23" dur="420" fill="hold"/>
+                                        <p:tgtEl>
+                                          <p:spTgt spid="10"/>
+                                        </p:tgtEl>
+                                        <p:attrNameLst>
+                                          <p:attrName>ppt_y</p:attrName>
+                                        </p:attrNameLst>
+                                      </p:cBhvr>
+                                      <p:tavLst>
+                                        <p:tav tm="0">
+                                          <p:val>
+                                            <p:strVal val="#ppt_y+0.035"/>
+                                          </p:val>
+                                        </p:tav>
+                                        <p:tav tm="100000">
+                                          <p:val>
+                                            <p:strVal val="#ppt_y"/>
+                                          </p:val>
+                                        </p:tav>
+                                      </p:tavLst>
+                                    </p:anim>
+                                  </p:childTnLst>
+                                </p:cTn>
+                              </p:par>
+                              <p:par>
+                                <p:cTn id="30" fill="hold">
+                                  <p:stCondLst>
+                                    <p:cond delay="520"/>
+                                  </p:stCondLst>
+                                  <p:childTnLst>
+                                    <p:set>
+                                      <p:cBhvr>
+                                        <p:cTn id="31" dur="1" fill="hold"/>
+                                        <p:tgtEl>
+                                          <p:spTgt spid="15"/>
+                                        </p:tgtEl>
+                                        <p:attrNameLst>
+                                          <p:attrName>style.visibility</p:attrName>
+                                        </p:attrNameLst>
+                                      </p:cBhvr>
+                                      <p:to>
+                                        <p:strVal val="visible"/>
+                                      </p:to>
+                                    </p:set>
+                                    <p:animEffect transition="in" filter="fade">
+                                      <p:cBhvr>
+                                        <p:cTn id="32" dur="420"/>
+                                        <p:tgtEl>
+                                          <p:spTgt spid="15"/>
+                                        </p:tgtEl>
+                                      </p:cBhvr>
+                                    </p:animEffect>
+                                    <p:anim calcmode="lin" valueType="num">
+                                      <p:cBhvr additive="base">
+                                        <p:cTn id="33" dur="420" fill="hold"/>
+                                        <p:tgtEl>
+                                          <p:spTgt spid="15"/>
+                                        </p:tgtEl>
+                                        <p:attrNameLst>
+                                          <p:attrName>ppt_y</p:attrName>
+                                        </p:attrNameLst>
+                                      </p:cBhvr>
+                                      <p:tavLst>
+                                        <p:tav tm="0">
+                                          <p:val>
+                                            <p:strVal val="#ppt_y+0.035"/>
+                                          </p:val>
+                                        </p:tav>
+                                        <p:tav tm="100000">
+                                          <p:val>
+                                            <p:strVal val="#ppt_y"/>
+                                          </p:val>
+                                        </p:tav>
+                                      </p:tavLst>
+                                    </p:anim>
+                                  </p:childTnLst>
+                                </p:cTn>
+                              </p:par>
+                              <p:par>
+                                <p:cTn id="40" fill="hold">
+                                  <p:stCondLst>
+                                    <p:cond delay="780"/>
+                                  </p:stCondLst>
+                                  <p:childTnLst>
+                                    <p:set>
+                                      <p:cBhvr>
+                                        <p:cTn id="41" dur="1" fill="hold"/>
+                                        <p:tgtEl>
+                                          <p:spTgt spid="20"/>
+                                        </p:tgtEl>
+                                        <p:attrNameLst>
+                                          <p:attrName>style.visibility</p:attrName>
+                                        </p:attrNameLst>
+                                      </p:cBhvr>
+                                      <p:to>
+                                        <p:strVal val="visible"/>
+                                      </p:to>
+                                    </p:set>
+                                    <p:animEffect transition="in" filter="fade">
+                                      <p:cBhvr>
+                                        <p:cTn id="42" dur="420"/>
+                                        <p:tgtEl>
+                                          <p:spTgt spid="20"/>
+                                        </p:tgtEl>
+                                      </p:cBhvr>
+                                    </p:animEffect>
+                                    <p:anim calcmode="lin" valueType="num">
+                                      <p:cBhvr additive="base">
+                                        <p:cTn id="43" dur="420" fill="hold"/>
+                                        <p:tgtEl>
+                                          <p:spTgt spid="20"/>
+                                        </p:tgtEl>
+                                        <p:attrNameLst>
+                                          <p:attrName>ppt_y</p:attrName>
+                                        </p:attrNameLst>
+                                      </p:cBhvr>
+                                      <p:tavLst>
+                                        <p:tav tm="0">
+                                          <p:val>
+                                            <p:strVal val="#ppt_y+0.035"/>
+                                          </p:val>
+                                        </p:tav>
+                                        <p:tav tm="100000">
+                                          <p:val>
+                                            <p:strVal val="#ppt_y"/>
+                                          </p:val>
+                                        </p:tav>
+                                      </p:tavLst>
+                                    </p:anim>
+                                  </p:childTnLst>
+                                </p:cTn>
+                              </p:par>
+                            </p:childTnLst>
+                          </p:cTn>
+                        </p:par>
+                      </p:childTnLst>
+                    </p:cTn>
+                  </p:par>
+                </p:childTnLst>
+              </p:cTn>
+              <p:prevCondLst>
+                <p:cond evt="onPrev" delay="0">
+                  <p:tgtEl>
+                    <p:sldTgt/>
+                  </p:tgtEl>
+                </p:cond>
+              </p:prevCondLst>
+              <p:nextCondLst>
+                <p:cond evt="onNext" delay="0">
+                  <p:tgtEl>
+                    <p:sldTgt/>
+                  </p:tgtEl>
+                </p:cond>
+              </p:nextCondLst>
+            </p:seq>
+          </p:childTnLst>
+        </p:cTn>
+      </p:par>
+    </p:tnLst>
+  </p:timing>
 </p:sld>
 </file>
 
@@ -11970,7 +16504,13 @@
           <a:ln>
             <a:noFill/>
           </a:ln>
-          <a:effectLst/>
+          <a:effectLst>
+            <a:glow rad="127000">
+              <a:srgbClr val="4C9AFF">
+                <a:alpha val="55000"/>
+              </a:srgbClr>
+            </a:glow>
+          </a:effectLst>
         </p:spPr>
         <p:style>
           <a:lnRef idx="1">
@@ -12048,13 +16588,27 @@
               <a:gd name="adj" fmla="val 6000"/>
             </a:avLst>
           </a:prstGeom>
-          <a:solidFill>
-            <a:srgbClr val="1E2430"/>
-          </a:solidFill>
+          <a:gradFill rotWithShape="1">
+            <a:gsLst>
+              <a:gs pos="0">
+                <a:srgbClr val="1E2430"/>
+              </a:gs>
+              <a:gs pos="100000">
+                <a:srgbClr val="2C3442"/>
+              </a:gs>
+            </a:gsLst>
+            <a:lin scaled="0" ang="18900000"/>
+          </a:gradFill>
           <a:ln>
             <a:noFill/>
           </a:ln>
-          <a:effectLst/>
+          <a:effectLst>
+            <a:outerShdw blurRad="304800" dist="101600" dir="5400000" rotWithShape="0">
+              <a:srgbClr val="000000">
+                <a:alpha val="42000"/>
+              </a:srgbClr>
+            </a:outerShdw>
+          </a:effectLst>
         </p:spPr>
         <p:style>
           <a:lnRef idx="1">
@@ -12132,13 +16686,27 @@
               <a:gd name="adj" fmla="val 6000"/>
             </a:avLst>
           </a:prstGeom>
-          <a:solidFill>
-            <a:srgbClr val="1E2430"/>
-          </a:solidFill>
+          <a:gradFill rotWithShape="1">
+            <a:gsLst>
+              <a:gs pos="0">
+                <a:srgbClr val="1E2430"/>
+              </a:gs>
+              <a:gs pos="100000">
+                <a:srgbClr val="2C3442"/>
+              </a:gs>
+            </a:gsLst>
+            <a:lin scaled="0" ang="18900000"/>
+          </a:gradFill>
           <a:ln>
             <a:noFill/>
           </a:ln>
-          <a:effectLst/>
+          <a:effectLst>
+            <a:outerShdw blurRad="304800" dist="101600" dir="5400000" rotWithShape="0">
+              <a:srgbClr val="000000">
+                <a:alpha val="42000"/>
+              </a:srgbClr>
+            </a:outerShdw>
+          </a:effectLst>
         </p:spPr>
         <p:style>
           <a:lnRef idx="1">
@@ -12254,13 +16822,27 @@
               <a:gd name="adj" fmla="val 6000"/>
             </a:avLst>
           </a:prstGeom>
-          <a:solidFill>
-            <a:srgbClr val="1E2430"/>
-          </a:solidFill>
+          <a:gradFill rotWithShape="1">
+            <a:gsLst>
+              <a:gs pos="0">
+                <a:srgbClr val="1E2430"/>
+              </a:gs>
+              <a:gs pos="100000">
+                <a:srgbClr val="2C3442"/>
+              </a:gs>
+            </a:gsLst>
+            <a:lin scaled="0" ang="18900000"/>
+          </a:gradFill>
           <a:ln>
             <a:noFill/>
           </a:ln>
-          <a:effectLst/>
+          <a:effectLst>
+            <a:outerShdw blurRad="304800" dist="101600" dir="5400000" rotWithShape="0">
+              <a:srgbClr val="000000">
+                <a:alpha val="42000"/>
+              </a:srgbClr>
+            </a:outerShdw>
+          </a:effectLst>
         </p:spPr>
         <p:style>
           <a:lnRef idx="1">
@@ -12338,13 +16920,27 @@
               <a:gd name="adj" fmla="val 6000"/>
             </a:avLst>
           </a:prstGeom>
-          <a:solidFill>
-            <a:srgbClr val="1E2430"/>
-          </a:solidFill>
+          <a:gradFill rotWithShape="1">
+            <a:gsLst>
+              <a:gs pos="0">
+                <a:srgbClr val="1E2430"/>
+              </a:gs>
+              <a:gs pos="100000">
+                <a:srgbClr val="2C3442"/>
+              </a:gs>
+            </a:gsLst>
+            <a:lin scaled="0" ang="18900000"/>
+          </a:gradFill>
           <a:ln>
             <a:noFill/>
           </a:ln>
-          <a:effectLst/>
+          <a:effectLst>
+            <a:outerShdw blurRad="304800" dist="101600" dir="5400000" rotWithShape="0">
+              <a:srgbClr val="000000">
+                <a:alpha val="42000"/>
+              </a:srgbClr>
+            </a:outerShdw>
+          </a:effectLst>
         </p:spPr>
         <p:style>
           <a:lnRef idx="1">
@@ -12537,6 +17133,270 @@
       </p:transition>
     </mc:Fallback>
   </mc:AlternateContent>
+  <p:timing>
+    <p:tnLst>
+      <p:par>
+        <p:cTn id="1" dur="indefinite" restart="never" nodeType="tmRoot">
+          <p:childTnLst>
+            <p:seq concurrent="1" nextAc="seek">
+              <p:cTn id="2" dur="indefinite" nodeType="mainSeq">
+                <p:childTnLst>
+                  <p:par>
+                    <p:cTn id="3" fill="hold">
+                      <p:stCondLst>
+                        <p:cond delay="indefinite"/>
+                      </p:stCondLst>
+                      <p:childTnLst>
+                        <p:par>
+                          <p:cTn id="4" fill="hold">
+                            <p:stCondLst>
+                              <p:cond delay="0"/>
+                            </p:stCondLst>
+                            <p:childTnLst>
+                              <p:par>
+                                <p:cTn id="10" fill="hold">
+                                  <p:stCondLst>
+                                    <p:cond delay="0"/>
+                                  </p:stCondLst>
+                                  <p:childTnLst>
+                                    <p:set>
+                                      <p:cBhvr>
+                                        <p:cTn id="11" dur="1" fill="hold"/>
+                                        <p:tgtEl>
+                                          <p:spTgt spid="5"/>
+                                        </p:tgtEl>
+                                        <p:attrNameLst>
+                                          <p:attrName>style.visibility</p:attrName>
+                                        </p:attrNameLst>
+                                      </p:cBhvr>
+                                      <p:to>
+                                        <p:strVal val="visible"/>
+                                      </p:to>
+                                    </p:set>
+                                    <p:animEffect transition="in" filter="fade">
+                                      <p:cBhvr>
+                                        <p:cTn id="12" dur="420"/>
+                                        <p:tgtEl>
+                                          <p:spTgt spid="5"/>
+                                        </p:tgtEl>
+                                      </p:cBhvr>
+                                    </p:animEffect>
+                                    <p:anim calcmode="lin" valueType="num">
+                                      <p:cBhvr additive="base">
+                                        <p:cTn id="13" dur="420" fill="hold"/>
+                                        <p:tgtEl>
+                                          <p:spTgt spid="5"/>
+                                        </p:tgtEl>
+                                        <p:attrNameLst>
+                                          <p:attrName>ppt_y</p:attrName>
+                                        </p:attrNameLst>
+                                      </p:cBhvr>
+                                      <p:tavLst>
+                                        <p:tav tm="0">
+                                          <p:val>
+                                            <p:strVal val="#ppt_y+0.035"/>
+                                          </p:val>
+                                        </p:tav>
+                                        <p:tav tm="100000">
+                                          <p:val>
+                                            <p:strVal val="#ppt_y"/>
+                                          </p:val>
+                                        </p:tav>
+                                      </p:tavLst>
+                                    </p:anim>
+                                  </p:childTnLst>
+                                </p:cTn>
+                              </p:par>
+                              <p:par>
+                                <p:cTn id="20" fill="hold">
+                                  <p:stCondLst>
+                                    <p:cond delay="260"/>
+                                  </p:stCondLst>
+                                  <p:childTnLst>
+                                    <p:set>
+                                      <p:cBhvr>
+                                        <p:cTn id="21" dur="1" fill="hold"/>
+                                        <p:tgtEl>
+                                          <p:spTgt spid="7"/>
+                                        </p:tgtEl>
+                                        <p:attrNameLst>
+                                          <p:attrName>style.visibility</p:attrName>
+                                        </p:attrNameLst>
+                                      </p:cBhvr>
+                                      <p:to>
+                                        <p:strVal val="visible"/>
+                                      </p:to>
+                                    </p:set>
+                                    <p:animEffect transition="in" filter="fade">
+                                      <p:cBhvr>
+                                        <p:cTn id="22" dur="420"/>
+                                        <p:tgtEl>
+                                          <p:spTgt spid="7"/>
+                                        </p:tgtEl>
+                                      </p:cBhvr>
+                                    </p:animEffect>
+                                    <p:anim calcmode="lin" valueType="num">
+                                      <p:cBhvr additive="base">
+                                        <p:cTn id="23" dur="420" fill="hold"/>
+                                        <p:tgtEl>
+                                          <p:spTgt spid="7"/>
+                                        </p:tgtEl>
+                                        <p:attrNameLst>
+                                          <p:attrName>ppt_y</p:attrName>
+                                        </p:attrNameLst>
+                                      </p:cBhvr>
+                                      <p:tavLst>
+                                        <p:tav tm="0">
+                                          <p:val>
+                                            <p:strVal val="#ppt_y+0.035"/>
+                                          </p:val>
+                                        </p:tav>
+                                        <p:tav tm="100000">
+                                          <p:val>
+                                            <p:strVal val="#ppt_y"/>
+                                          </p:val>
+                                        </p:tav>
+                                      </p:tavLst>
+                                    </p:anim>
+                                  </p:childTnLst>
+                                </p:cTn>
+                              </p:par>
+                              <p:par>
+                                <p:cTn id="30" fill="hold">
+                                  <p:stCondLst>
+                                    <p:cond delay="520"/>
+                                  </p:stCondLst>
+                                  <p:childTnLst>
+                                    <p:set>
+                                      <p:cBhvr>
+                                        <p:cTn id="31" dur="1" fill="hold"/>
+                                        <p:tgtEl>
+                                          <p:spTgt spid="10"/>
+                                        </p:tgtEl>
+                                        <p:attrNameLst>
+                                          <p:attrName>style.visibility</p:attrName>
+                                        </p:attrNameLst>
+                                      </p:cBhvr>
+                                      <p:to>
+                                        <p:strVal val="visible"/>
+                                      </p:to>
+                                    </p:set>
+                                    <p:animEffect transition="in" filter="fade">
+                                      <p:cBhvr>
+                                        <p:cTn id="32" dur="420"/>
+                                        <p:tgtEl>
+                                          <p:spTgt spid="10"/>
+                                        </p:tgtEl>
+                                      </p:cBhvr>
+                                    </p:animEffect>
+                                    <p:anim calcmode="lin" valueType="num">
+                                      <p:cBhvr additive="base">
+                                        <p:cTn id="33" dur="420" fill="hold"/>
+                                        <p:tgtEl>
+                                          <p:spTgt spid="10"/>
+                                        </p:tgtEl>
+                                        <p:attrNameLst>
+                                          <p:attrName>ppt_y</p:attrName>
+                                        </p:attrNameLst>
+                                      </p:cBhvr>
+                                      <p:tavLst>
+                                        <p:tav tm="0">
+                                          <p:val>
+                                            <p:strVal val="#ppt_y+0.035"/>
+                                          </p:val>
+                                        </p:tav>
+                                        <p:tav tm="100000">
+                                          <p:val>
+                                            <p:strVal val="#ppt_y"/>
+                                          </p:val>
+                                        </p:tav>
+                                      </p:tavLst>
+                                    </p:anim>
+                                  </p:childTnLst>
+                                </p:cTn>
+                              </p:par>
+                              <p:par>
+                                <p:cTn id="40" fill="hold">
+                                  <p:stCondLst>
+                                    <p:cond delay="780"/>
+                                  </p:stCondLst>
+                                  <p:childTnLst>
+                                    <p:set>
+                                      <p:cBhvr>
+                                        <p:cTn id="41" dur="1" fill="hold"/>
+                                        <p:tgtEl>
+                                          <p:spTgt spid="12"/>
+                                        </p:tgtEl>
+                                        <p:attrNameLst>
+                                          <p:attrName>style.visibility</p:attrName>
+                                        </p:attrNameLst>
+                                      </p:cBhvr>
+                                      <p:to>
+                                        <p:strVal val="visible"/>
+                                      </p:to>
+                                    </p:set>
+                                    <p:animEffect transition="in" filter="fade">
+                                      <p:cBhvr>
+                                        <p:cTn id="42" dur="420"/>
+                                        <p:tgtEl>
+                                          <p:spTgt spid="12"/>
+                                        </p:tgtEl>
+                                      </p:cBhvr>
+                                    </p:animEffect>
+                                    <p:anim calcmode="lin" valueType="num">
+                                      <p:cBhvr additive="base">
+                                        <p:cTn id="43" dur="420" fill="hold"/>
+                                        <p:tgtEl>
+                                          <p:spTgt spid="12"/>
+                                        </p:tgtEl>
+                                        <p:attrNameLst>
+                                          <p:attrName>ppt_y</p:attrName>
+                                        </p:attrNameLst>
+                                      </p:cBhvr>
+                                      <p:tavLst>
+                                        <p:tav tm="0">
+                                          <p:val>
+                                            <p:strVal val="#ppt_y+0.035"/>
+                                          </p:val>
+                                        </p:tav>
+                                        <p:tav tm="100000">
+                                          <p:val>
+                                            <p:strVal val="#ppt_y"/>
+                                          </p:val>
+                                        </p:tav>
+                                      </p:tavLst>
+                                    </p:anim>
+                                  </p:childTnLst>
+                                </p:cTn>
+                              </p:par>
+                            </p:childTnLst>
+                          </p:cTn>
+                        </p:par>
+                      </p:childTnLst>
+                    </p:cTn>
+                  </p:par>
+                </p:childTnLst>
+              </p:cTn>
+              <p:prevCondLst>
+                <p:cond evt="onPrev" delay="0">
+                  <p:tgtEl>
+                    <p:sldTgt/>
+                  </p:tgtEl>
+                </p:cond>
+              </p:prevCondLst>
+              <p:nextCondLst>
+                <p:cond evt="onNext" delay="0">
+                  <p:tgtEl>
+                    <p:sldTgt/>
+                  </p:tgtEl>
+                </p:cond>
+              </p:nextCondLst>
+            </p:seq>
+          </p:childTnLst>
+        </p:cTn>
+      </p:par>
+    </p:tnLst>
+  </p:timing>
 </p:sld>
 </file>
 
@@ -12614,7 +17474,13 @@
           <a:ln>
             <a:noFill/>
           </a:ln>
-          <a:effectLst/>
+          <a:effectLst>
+            <a:glow rad="127000">
+              <a:srgbClr val="4C9AFF">
+                <a:alpha val="55000"/>
+              </a:srgbClr>
+            </a:glow>
+          </a:effectLst>
         </p:spPr>
         <p:style>
           <a:lnRef idx="1">
@@ -12692,13 +17558,27 @@
               <a:gd name="adj" fmla="val 6000"/>
             </a:avLst>
           </a:prstGeom>
-          <a:solidFill>
-            <a:srgbClr val="1E2430"/>
-          </a:solidFill>
+          <a:gradFill rotWithShape="1">
+            <a:gsLst>
+              <a:gs pos="0">
+                <a:srgbClr val="1E2430"/>
+              </a:gs>
+              <a:gs pos="100000">
+                <a:srgbClr val="2C3442"/>
+              </a:gs>
+            </a:gsLst>
+            <a:lin scaled="0" ang="18900000"/>
+          </a:gradFill>
           <a:ln>
             <a:noFill/>
           </a:ln>
-          <a:effectLst/>
+          <a:effectLst>
+            <a:outerShdw blurRad="304800" dist="101600" dir="5400000" rotWithShape="0">
+              <a:srgbClr val="000000">
+                <a:alpha val="42000"/>
+              </a:srgbClr>
+            </a:outerShdw>
+          </a:effectLst>
         </p:spPr>
         <p:style>
           <a:lnRef idx="1">
@@ -12814,13 +17694,27 @@
               <a:gd name="adj" fmla="val 6000"/>
             </a:avLst>
           </a:prstGeom>
-          <a:solidFill>
-            <a:srgbClr val="1E2430"/>
-          </a:solidFill>
+          <a:gradFill rotWithShape="1">
+            <a:gsLst>
+              <a:gs pos="0">
+                <a:srgbClr val="1E2430"/>
+              </a:gs>
+              <a:gs pos="100000">
+                <a:srgbClr val="2C3442"/>
+              </a:gs>
+            </a:gsLst>
+            <a:lin scaled="0" ang="18900000"/>
+          </a:gradFill>
           <a:ln>
             <a:noFill/>
           </a:ln>
-          <a:effectLst/>
+          <a:effectLst>
+            <a:outerShdw blurRad="304800" dist="101600" dir="5400000" rotWithShape="0">
+              <a:srgbClr val="000000">
+                <a:alpha val="42000"/>
+              </a:srgbClr>
+            </a:outerShdw>
+          </a:effectLst>
         </p:spPr>
         <p:style>
           <a:lnRef idx="1">
@@ -12936,13 +17830,27 @@
               <a:gd name="adj" fmla="val 6000"/>
             </a:avLst>
           </a:prstGeom>
-          <a:solidFill>
-            <a:srgbClr val="1E2430"/>
-          </a:solidFill>
+          <a:gradFill rotWithShape="1">
+            <a:gsLst>
+              <a:gs pos="0">
+                <a:srgbClr val="1E2430"/>
+              </a:gs>
+              <a:gs pos="100000">
+                <a:srgbClr val="2C3442"/>
+              </a:gs>
+            </a:gsLst>
+            <a:lin scaled="0" ang="18900000"/>
+          </a:gradFill>
           <a:ln>
             <a:noFill/>
           </a:ln>
-          <a:effectLst/>
+          <a:effectLst>
+            <a:outerShdw blurRad="304800" dist="101600" dir="5400000" rotWithShape="0">
+              <a:srgbClr val="000000">
+                <a:alpha val="42000"/>
+              </a:srgbClr>
+            </a:outerShdw>
+          </a:effectLst>
         </p:spPr>
         <p:style>
           <a:lnRef idx="1">
@@ -13058,13 +17966,27 @@
               <a:gd name="adj" fmla="val 6000"/>
             </a:avLst>
           </a:prstGeom>
-          <a:solidFill>
-            <a:srgbClr val="1E2430"/>
-          </a:solidFill>
+          <a:gradFill rotWithShape="1">
+            <a:gsLst>
+              <a:gs pos="0">
+                <a:srgbClr val="1E2430"/>
+              </a:gs>
+              <a:gs pos="100000">
+                <a:srgbClr val="2C3442"/>
+              </a:gs>
+            </a:gsLst>
+            <a:lin scaled="0" ang="18900000"/>
+          </a:gradFill>
           <a:ln>
             <a:noFill/>
           </a:ln>
-          <a:effectLst/>
+          <a:effectLst>
+            <a:outerShdw blurRad="304800" dist="101600" dir="5400000" rotWithShape="0">
+              <a:srgbClr val="000000">
+                <a:alpha val="42000"/>
+              </a:srgbClr>
+            </a:outerShdw>
+          </a:effectLst>
         </p:spPr>
         <p:style>
           <a:lnRef idx="1">
@@ -13257,6 +18179,270 @@
       </p:transition>
     </mc:Fallback>
   </mc:AlternateContent>
+  <p:timing>
+    <p:tnLst>
+      <p:par>
+        <p:cTn id="1" dur="indefinite" restart="never" nodeType="tmRoot">
+          <p:childTnLst>
+            <p:seq concurrent="1" nextAc="seek">
+              <p:cTn id="2" dur="indefinite" nodeType="mainSeq">
+                <p:childTnLst>
+                  <p:par>
+                    <p:cTn id="3" fill="hold">
+                      <p:stCondLst>
+                        <p:cond delay="indefinite"/>
+                      </p:stCondLst>
+                      <p:childTnLst>
+                        <p:par>
+                          <p:cTn id="4" fill="hold">
+                            <p:stCondLst>
+                              <p:cond delay="0"/>
+                            </p:stCondLst>
+                            <p:childTnLst>
+                              <p:par>
+                                <p:cTn id="10" fill="hold">
+                                  <p:stCondLst>
+                                    <p:cond delay="0"/>
+                                  </p:stCondLst>
+                                  <p:childTnLst>
+                                    <p:set>
+                                      <p:cBhvr>
+                                        <p:cTn id="11" dur="1" fill="hold"/>
+                                        <p:tgtEl>
+                                          <p:spTgt spid="5"/>
+                                        </p:tgtEl>
+                                        <p:attrNameLst>
+                                          <p:attrName>style.visibility</p:attrName>
+                                        </p:attrNameLst>
+                                      </p:cBhvr>
+                                      <p:to>
+                                        <p:strVal val="visible"/>
+                                      </p:to>
+                                    </p:set>
+                                    <p:animEffect transition="in" filter="fade">
+                                      <p:cBhvr>
+                                        <p:cTn id="12" dur="420"/>
+                                        <p:tgtEl>
+                                          <p:spTgt spid="5"/>
+                                        </p:tgtEl>
+                                      </p:cBhvr>
+                                    </p:animEffect>
+                                    <p:anim calcmode="lin" valueType="num">
+                                      <p:cBhvr additive="base">
+                                        <p:cTn id="13" dur="420" fill="hold"/>
+                                        <p:tgtEl>
+                                          <p:spTgt spid="5"/>
+                                        </p:tgtEl>
+                                        <p:attrNameLst>
+                                          <p:attrName>ppt_y</p:attrName>
+                                        </p:attrNameLst>
+                                      </p:cBhvr>
+                                      <p:tavLst>
+                                        <p:tav tm="0">
+                                          <p:val>
+                                            <p:strVal val="#ppt_y+0.035"/>
+                                          </p:val>
+                                        </p:tav>
+                                        <p:tav tm="100000">
+                                          <p:val>
+                                            <p:strVal val="#ppt_y"/>
+                                          </p:val>
+                                        </p:tav>
+                                      </p:tavLst>
+                                    </p:anim>
+                                  </p:childTnLst>
+                                </p:cTn>
+                              </p:par>
+                              <p:par>
+                                <p:cTn id="20" fill="hold">
+                                  <p:stCondLst>
+                                    <p:cond delay="260"/>
+                                  </p:stCondLst>
+                                  <p:childTnLst>
+                                    <p:set>
+                                      <p:cBhvr>
+                                        <p:cTn id="21" dur="1" fill="hold"/>
+                                        <p:tgtEl>
+                                          <p:spTgt spid="8"/>
+                                        </p:tgtEl>
+                                        <p:attrNameLst>
+                                          <p:attrName>style.visibility</p:attrName>
+                                        </p:attrNameLst>
+                                      </p:cBhvr>
+                                      <p:to>
+                                        <p:strVal val="visible"/>
+                                      </p:to>
+                                    </p:set>
+                                    <p:animEffect transition="in" filter="fade">
+                                      <p:cBhvr>
+                                        <p:cTn id="22" dur="420"/>
+                                        <p:tgtEl>
+                                          <p:spTgt spid="8"/>
+                                        </p:tgtEl>
+                                      </p:cBhvr>
+                                    </p:animEffect>
+                                    <p:anim calcmode="lin" valueType="num">
+                                      <p:cBhvr additive="base">
+                                        <p:cTn id="23" dur="420" fill="hold"/>
+                                        <p:tgtEl>
+                                          <p:spTgt spid="8"/>
+                                        </p:tgtEl>
+                                        <p:attrNameLst>
+                                          <p:attrName>ppt_y</p:attrName>
+                                        </p:attrNameLst>
+                                      </p:cBhvr>
+                                      <p:tavLst>
+                                        <p:tav tm="0">
+                                          <p:val>
+                                            <p:strVal val="#ppt_y+0.035"/>
+                                          </p:val>
+                                        </p:tav>
+                                        <p:tav tm="100000">
+                                          <p:val>
+                                            <p:strVal val="#ppt_y"/>
+                                          </p:val>
+                                        </p:tav>
+                                      </p:tavLst>
+                                    </p:anim>
+                                  </p:childTnLst>
+                                </p:cTn>
+                              </p:par>
+                              <p:par>
+                                <p:cTn id="30" fill="hold">
+                                  <p:stCondLst>
+                                    <p:cond delay="520"/>
+                                  </p:stCondLst>
+                                  <p:childTnLst>
+                                    <p:set>
+                                      <p:cBhvr>
+                                        <p:cTn id="31" dur="1" fill="hold"/>
+                                        <p:tgtEl>
+                                          <p:spTgt spid="11"/>
+                                        </p:tgtEl>
+                                        <p:attrNameLst>
+                                          <p:attrName>style.visibility</p:attrName>
+                                        </p:attrNameLst>
+                                      </p:cBhvr>
+                                      <p:to>
+                                        <p:strVal val="visible"/>
+                                      </p:to>
+                                    </p:set>
+                                    <p:animEffect transition="in" filter="fade">
+                                      <p:cBhvr>
+                                        <p:cTn id="32" dur="420"/>
+                                        <p:tgtEl>
+                                          <p:spTgt spid="11"/>
+                                        </p:tgtEl>
+                                      </p:cBhvr>
+                                    </p:animEffect>
+                                    <p:anim calcmode="lin" valueType="num">
+                                      <p:cBhvr additive="base">
+                                        <p:cTn id="33" dur="420" fill="hold"/>
+                                        <p:tgtEl>
+                                          <p:spTgt spid="11"/>
+                                        </p:tgtEl>
+                                        <p:attrNameLst>
+                                          <p:attrName>ppt_y</p:attrName>
+                                        </p:attrNameLst>
+                                      </p:cBhvr>
+                                      <p:tavLst>
+                                        <p:tav tm="0">
+                                          <p:val>
+                                            <p:strVal val="#ppt_y+0.035"/>
+                                          </p:val>
+                                        </p:tav>
+                                        <p:tav tm="100000">
+                                          <p:val>
+                                            <p:strVal val="#ppt_y"/>
+                                          </p:val>
+                                        </p:tav>
+                                      </p:tavLst>
+                                    </p:anim>
+                                  </p:childTnLst>
+                                </p:cTn>
+                              </p:par>
+                              <p:par>
+                                <p:cTn id="40" fill="hold">
+                                  <p:stCondLst>
+                                    <p:cond delay="780"/>
+                                  </p:stCondLst>
+                                  <p:childTnLst>
+                                    <p:set>
+                                      <p:cBhvr>
+                                        <p:cTn id="41" dur="1" fill="hold"/>
+                                        <p:tgtEl>
+                                          <p:spTgt spid="14"/>
+                                        </p:tgtEl>
+                                        <p:attrNameLst>
+                                          <p:attrName>style.visibility</p:attrName>
+                                        </p:attrNameLst>
+                                      </p:cBhvr>
+                                      <p:to>
+                                        <p:strVal val="visible"/>
+                                      </p:to>
+                                    </p:set>
+                                    <p:animEffect transition="in" filter="fade">
+                                      <p:cBhvr>
+                                        <p:cTn id="42" dur="420"/>
+                                        <p:tgtEl>
+                                          <p:spTgt spid="14"/>
+                                        </p:tgtEl>
+                                      </p:cBhvr>
+                                    </p:animEffect>
+                                    <p:anim calcmode="lin" valueType="num">
+                                      <p:cBhvr additive="base">
+                                        <p:cTn id="43" dur="420" fill="hold"/>
+                                        <p:tgtEl>
+                                          <p:spTgt spid="14"/>
+                                        </p:tgtEl>
+                                        <p:attrNameLst>
+                                          <p:attrName>ppt_y</p:attrName>
+                                        </p:attrNameLst>
+                                      </p:cBhvr>
+                                      <p:tavLst>
+                                        <p:tav tm="0">
+                                          <p:val>
+                                            <p:strVal val="#ppt_y+0.035"/>
+                                          </p:val>
+                                        </p:tav>
+                                        <p:tav tm="100000">
+                                          <p:val>
+                                            <p:strVal val="#ppt_y"/>
+                                          </p:val>
+                                        </p:tav>
+                                      </p:tavLst>
+                                    </p:anim>
+                                  </p:childTnLst>
+                                </p:cTn>
+                              </p:par>
+                            </p:childTnLst>
+                          </p:cTn>
+                        </p:par>
+                      </p:childTnLst>
+                    </p:cTn>
+                  </p:par>
+                </p:childTnLst>
+              </p:cTn>
+              <p:prevCondLst>
+                <p:cond evt="onPrev" delay="0">
+                  <p:tgtEl>
+                    <p:sldTgt/>
+                  </p:tgtEl>
+                </p:cond>
+              </p:prevCondLst>
+              <p:nextCondLst>
+                <p:cond evt="onNext" delay="0">
+                  <p:tgtEl>
+                    <p:sldTgt/>
+                  </p:tgtEl>
+                </p:cond>
+              </p:nextCondLst>
+            </p:seq>
+          </p:childTnLst>
+        </p:cTn>
+      </p:par>
+    </p:tnLst>
+  </p:timing>
 </p:sld>
 </file>
 
@@ -13334,7 +18520,13 @@
           <a:ln>
             <a:noFill/>
           </a:ln>
-          <a:effectLst/>
+          <a:effectLst>
+            <a:glow rad="127000">
+              <a:srgbClr val="4C9AFF">
+                <a:alpha val="55000"/>
+              </a:srgbClr>
+            </a:glow>
+          </a:effectLst>
         </p:spPr>
         <p:style>
           <a:lnRef idx="1">
@@ -13412,13 +18604,27 @@
               <a:gd name="adj" fmla="val 6000"/>
             </a:avLst>
           </a:prstGeom>
-          <a:solidFill>
-            <a:srgbClr val="1E2430"/>
-          </a:solidFill>
+          <a:gradFill rotWithShape="1">
+            <a:gsLst>
+              <a:gs pos="0">
+                <a:srgbClr val="1E2430"/>
+              </a:gs>
+              <a:gs pos="100000">
+                <a:srgbClr val="2C3442"/>
+              </a:gs>
+            </a:gsLst>
+            <a:lin scaled="0" ang="18900000"/>
+          </a:gradFill>
           <a:ln>
             <a:noFill/>
           </a:ln>
-          <a:effectLst/>
+          <a:effectLst>
+            <a:outerShdw blurRad="304800" dist="101600" dir="5400000" rotWithShape="0">
+              <a:srgbClr val="000000">
+                <a:alpha val="42000"/>
+              </a:srgbClr>
+            </a:outerShdw>
+          </a:effectLst>
         </p:spPr>
         <p:style>
           <a:lnRef idx="1">
@@ -13534,13 +18740,27 @@
               <a:gd name="adj" fmla="val 6000"/>
             </a:avLst>
           </a:prstGeom>
-          <a:solidFill>
-            <a:srgbClr val="1E2430"/>
-          </a:solidFill>
+          <a:gradFill rotWithShape="1">
+            <a:gsLst>
+              <a:gs pos="0">
+                <a:srgbClr val="1E2430"/>
+              </a:gs>
+              <a:gs pos="100000">
+                <a:srgbClr val="2C3442"/>
+              </a:gs>
+            </a:gsLst>
+            <a:lin scaled="0" ang="18900000"/>
+          </a:gradFill>
           <a:ln>
             <a:noFill/>
           </a:ln>
-          <a:effectLst/>
+          <a:effectLst>
+            <a:outerShdw blurRad="304800" dist="101600" dir="5400000" rotWithShape="0">
+              <a:srgbClr val="000000">
+                <a:alpha val="42000"/>
+              </a:srgbClr>
+            </a:outerShdw>
+          </a:effectLst>
         </p:spPr>
         <p:style>
           <a:lnRef idx="1">
@@ -13656,13 +18876,27 @@
               <a:gd name="adj" fmla="val 6000"/>
             </a:avLst>
           </a:prstGeom>
-          <a:solidFill>
-            <a:srgbClr val="1E2430"/>
-          </a:solidFill>
+          <a:gradFill rotWithShape="1">
+            <a:gsLst>
+              <a:gs pos="0">
+                <a:srgbClr val="1E2430"/>
+              </a:gs>
+              <a:gs pos="100000">
+                <a:srgbClr val="2C3442"/>
+              </a:gs>
+            </a:gsLst>
+            <a:lin scaled="0" ang="18900000"/>
+          </a:gradFill>
           <a:ln>
             <a:noFill/>
           </a:ln>
-          <a:effectLst/>
+          <a:effectLst>
+            <a:outerShdw blurRad="304800" dist="101600" dir="5400000" rotWithShape="0">
+              <a:srgbClr val="000000">
+                <a:alpha val="42000"/>
+              </a:srgbClr>
+            </a:outerShdw>
+          </a:effectLst>
         </p:spPr>
         <p:style>
           <a:lnRef idx="1">
@@ -13778,13 +19012,27 @@
               <a:gd name="adj" fmla="val 6000"/>
             </a:avLst>
           </a:prstGeom>
-          <a:solidFill>
-            <a:srgbClr val="1E2430"/>
-          </a:solidFill>
+          <a:gradFill rotWithShape="1">
+            <a:gsLst>
+              <a:gs pos="0">
+                <a:srgbClr val="1E2430"/>
+              </a:gs>
+              <a:gs pos="100000">
+                <a:srgbClr val="2C3442"/>
+              </a:gs>
+            </a:gsLst>
+            <a:lin scaled="0" ang="18900000"/>
+          </a:gradFill>
           <a:ln>
             <a:noFill/>
           </a:ln>
-          <a:effectLst/>
+          <a:effectLst>
+            <a:outerShdw blurRad="304800" dist="101600" dir="5400000" rotWithShape="0">
+              <a:srgbClr val="000000">
+                <a:alpha val="42000"/>
+              </a:srgbClr>
+            </a:outerShdw>
+          </a:effectLst>
         </p:spPr>
         <p:style>
           <a:lnRef idx="1">
@@ -13977,6 +19225,270 @@
       </p:transition>
     </mc:Fallback>
   </mc:AlternateContent>
+  <p:timing>
+    <p:tnLst>
+      <p:par>
+        <p:cTn id="1" dur="indefinite" restart="never" nodeType="tmRoot">
+          <p:childTnLst>
+            <p:seq concurrent="1" nextAc="seek">
+              <p:cTn id="2" dur="indefinite" nodeType="mainSeq">
+                <p:childTnLst>
+                  <p:par>
+                    <p:cTn id="3" fill="hold">
+                      <p:stCondLst>
+                        <p:cond delay="indefinite"/>
+                      </p:stCondLst>
+                      <p:childTnLst>
+                        <p:par>
+                          <p:cTn id="4" fill="hold">
+                            <p:stCondLst>
+                              <p:cond delay="0"/>
+                            </p:stCondLst>
+                            <p:childTnLst>
+                              <p:par>
+                                <p:cTn id="10" fill="hold">
+                                  <p:stCondLst>
+                                    <p:cond delay="0"/>
+                                  </p:stCondLst>
+                                  <p:childTnLst>
+                                    <p:set>
+                                      <p:cBhvr>
+                                        <p:cTn id="11" dur="1" fill="hold"/>
+                                        <p:tgtEl>
+                                          <p:spTgt spid="5"/>
+                                        </p:tgtEl>
+                                        <p:attrNameLst>
+                                          <p:attrName>style.visibility</p:attrName>
+                                        </p:attrNameLst>
+                                      </p:cBhvr>
+                                      <p:to>
+                                        <p:strVal val="visible"/>
+                                      </p:to>
+                                    </p:set>
+                                    <p:animEffect transition="in" filter="fade">
+                                      <p:cBhvr>
+                                        <p:cTn id="12" dur="420"/>
+                                        <p:tgtEl>
+                                          <p:spTgt spid="5"/>
+                                        </p:tgtEl>
+                                      </p:cBhvr>
+                                    </p:animEffect>
+                                    <p:anim calcmode="lin" valueType="num">
+                                      <p:cBhvr additive="base">
+                                        <p:cTn id="13" dur="420" fill="hold"/>
+                                        <p:tgtEl>
+                                          <p:spTgt spid="5"/>
+                                        </p:tgtEl>
+                                        <p:attrNameLst>
+                                          <p:attrName>ppt_y</p:attrName>
+                                        </p:attrNameLst>
+                                      </p:cBhvr>
+                                      <p:tavLst>
+                                        <p:tav tm="0">
+                                          <p:val>
+                                            <p:strVal val="#ppt_y+0.035"/>
+                                          </p:val>
+                                        </p:tav>
+                                        <p:tav tm="100000">
+                                          <p:val>
+                                            <p:strVal val="#ppt_y"/>
+                                          </p:val>
+                                        </p:tav>
+                                      </p:tavLst>
+                                    </p:anim>
+                                  </p:childTnLst>
+                                </p:cTn>
+                              </p:par>
+                              <p:par>
+                                <p:cTn id="20" fill="hold">
+                                  <p:stCondLst>
+                                    <p:cond delay="260"/>
+                                  </p:stCondLst>
+                                  <p:childTnLst>
+                                    <p:set>
+                                      <p:cBhvr>
+                                        <p:cTn id="21" dur="1" fill="hold"/>
+                                        <p:tgtEl>
+                                          <p:spTgt spid="8"/>
+                                        </p:tgtEl>
+                                        <p:attrNameLst>
+                                          <p:attrName>style.visibility</p:attrName>
+                                        </p:attrNameLst>
+                                      </p:cBhvr>
+                                      <p:to>
+                                        <p:strVal val="visible"/>
+                                      </p:to>
+                                    </p:set>
+                                    <p:animEffect transition="in" filter="fade">
+                                      <p:cBhvr>
+                                        <p:cTn id="22" dur="420"/>
+                                        <p:tgtEl>
+                                          <p:spTgt spid="8"/>
+                                        </p:tgtEl>
+                                      </p:cBhvr>
+                                    </p:animEffect>
+                                    <p:anim calcmode="lin" valueType="num">
+                                      <p:cBhvr additive="base">
+                                        <p:cTn id="23" dur="420" fill="hold"/>
+                                        <p:tgtEl>
+                                          <p:spTgt spid="8"/>
+                                        </p:tgtEl>
+                                        <p:attrNameLst>
+                                          <p:attrName>ppt_y</p:attrName>
+                                        </p:attrNameLst>
+                                      </p:cBhvr>
+                                      <p:tavLst>
+                                        <p:tav tm="0">
+                                          <p:val>
+                                            <p:strVal val="#ppt_y+0.035"/>
+                                          </p:val>
+                                        </p:tav>
+                                        <p:tav tm="100000">
+                                          <p:val>
+                                            <p:strVal val="#ppt_y"/>
+                                          </p:val>
+                                        </p:tav>
+                                      </p:tavLst>
+                                    </p:anim>
+                                  </p:childTnLst>
+                                </p:cTn>
+                              </p:par>
+                              <p:par>
+                                <p:cTn id="30" fill="hold">
+                                  <p:stCondLst>
+                                    <p:cond delay="520"/>
+                                  </p:stCondLst>
+                                  <p:childTnLst>
+                                    <p:set>
+                                      <p:cBhvr>
+                                        <p:cTn id="31" dur="1" fill="hold"/>
+                                        <p:tgtEl>
+                                          <p:spTgt spid="11"/>
+                                        </p:tgtEl>
+                                        <p:attrNameLst>
+                                          <p:attrName>style.visibility</p:attrName>
+                                        </p:attrNameLst>
+                                      </p:cBhvr>
+                                      <p:to>
+                                        <p:strVal val="visible"/>
+                                      </p:to>
+                                    </p:set>
+                                    <p:animEffect transition="in" filter="fade">
+                                      <p:cBhvr>
+                                        <p:cTn id="32" dur="420"/>
+                                        <p:tgtEl>
+                                          <p:spTgt spid="11"/>
+                                        </p:tgtEl>
+                                      </p:cBhvr>
+                                    </p:animEffect>
+                                    <p:anim calcmode="lin" valueType="num">
+                                      <p:cBhvr additive="base">
+                                        <p:cTn id="33" dur="420" fill="hold"/>
+                                        <p:tgtEl>
+                                          <p:spTgt spid="11"/>
+                                        </p:tgtEl>
+                                        <p:attrNameLst>
+                                          <p:attrName>ppt_y</p:attrName>
+                                        </p:attrNameLst>
+                                      </p:cBhvr>
+                                      <p:tavLst>
+                                        <p:tav tm="0">
+                                          <p:val>
+                                            <p:strVal val="#ppt_y+0.035"/>
+                                          </p:val>
+                                        </p:tav>
+                                        <p:tav tm="100000">
+                                          <p:val>
+                                            <p:strVal val="#ppt_y"/>
+                                          </p:val>
+                                        </p:tav>
+                                      </p:tavLst>
+                                    </p:anim>
+                                  </p:childTnLst>
+                                </p:cTn>
+                              </p:par>
+                              <p:par>
+                                <p:cTn id="40" fill="hold">
+                                  <p:stCondLst>
+                                    <p:cond delay="780"/>
+                                  </p:stCondLst>
+                                  <p:childTnLst>
+                                    <p:set>
+                                      <p:cBhvr>
+                                        <p:cTn id="41" dur="1" fill="hold"/>
+                                        <p:tgtEl>
+                                          <p:spTgt spid="14"/>
+                                        </p:tgtEl>
+                                        <p:attrNameLst>
+                                          <p:attrName>style.visibility</p:attrName>
+                                        </p:attrNameLst>
+                                      </p:cBhvr>
+                                      <p:to>
+                                        <p:strVal val="visible"/>
+                                      </p:to>
+                                    </p:set>
+                                    <p:animEffect transition="in" filter="fade">
+                                      <p:cBhvr>
+                                        <p:cTn id="42" dur="420"/>
+                                        <p:tgtEl>
+                                          <p:spTgt spid="14"/>
+                                        </p:tgtEl>
+                                      </p:cBhvr>
+                                    </p:animEffect>
+                                    <p:anim calcmode="lin" valueType="num">
+                                      <p:cBhvr additive="base">
+                                        <p:cTn id="43" dur="420" fill="hold"/>
+                                        <p:tgtEl>
+                                          <p:spTgt spid="14"/>
+                                        </p:tgtEl>
+                                        <p:attrNameLst>
+                                          <p:attrName>ppt_y</p:attrName>
+                                        </p:attrNameLst>
+                                      </p:cBhvr>
+                                      <p:tavLst>
+                                        <p:tav tm="0">
+                                          <p:val>
+                                            <p:strVal val="#ppt_y+0.035"/>
+                                          </p:val>
+                                        </p:tav>
+                                        <p:tav tm="100000">
+                                          <p:val>
+                                            <p:strVal val="#ppt_y"/>
+                                          </p:val>
+                                        </p:tav>
+                                      </p:tavLst>
+                                    </p:anim>
+                                  </p:childTnLst>
+                                </p:cTn>
+                              </p:par>
+                            </p:childTnLst>
+                          </p:cTn>
+                        </p:par>
+                      </p:childTnLst>
+                    </p:cTn>
+                  </p:par>
+                </p:childTnLst>
+              </p:cTn>
+              <p:prevCondLst>
+                <p:cond evt="onPrev" delay="0">
+                  <p:tgtEl>
+                    <p:sldTgt/>
+                  </p:tgtEl>
+                </p:cond>
+              </p:prevCondLst>
+              <p:nextCondLst>
+                <p:cond evt="onNext" delay="0">
+                  <p:tgtEl>
+                    <p:sldTgt/>
+                  </p:tgtEl>
+                </p:cond>
+              </p:nextCondLst>
+            </p:seq>
+          </p:childTnLst>
+        </p:cTn>
+      </p:par>
+    </p:tnLst>
+  </p:timing>
 </p:sld>
 </file>
 
@@ -14054,7 +19566,13 @@
           <a:ln>
             <a:noFill/>
           </a:ln>
-          <a:effectLst/>
+          <a:effectLst>
+            <a:glow rad="127000">
+              <a:srgbClr val="4C9AFF">
+                <a:alpha val="55000"/>
+              </a:srgbClr>
+            </a:glow>
+          </a:effectLst>
         </p:spPr>
         <p:style>
           <a:lnRef idx="1">
@@ -14132,13 +19650,27 @@
               <a:gd name="adj" fmla="val 6000"/>
             </a:avLst>
           </a:prstGeom>
-          <a:solidFill>
-            <a:srgbClr val="1E2430"/>
-          </a:solidFill>
+          <a:gradFill rotWithShape="1">
+            <a:gsLst>
+              <a:gs pos="0">
+                <a:srgbClr val="1E2430"/>
+              </a:gs>
+              <a:gs pos="100000">
+                <a:srgbClr val="2C3442"/>
+              </a:gs>
+            </a:gsLst>
+            <a:lin scaled="0" ang="18900000"/>
+          </a:gradFill>
           <a:ln>
             <a:noFill/>
           </a:ln>
-          <a:effectLst/>
+          <a:effectLst>
+            <a:outerShdw blurRad="228600" dist="76200" dir="5400000" rotWithShape="0">
+              <a:srgbClr val="000000">
+                <a:alpha val="42000"/>
+              </a:srgbClr>
+            </a:outerShdw>
+          </a:effectLst>
         </p:spPr>
         <p:style>
           <a:lnRef idx="1">
@@ -14164,7 +19696,61 @@
       </p:sp>
       <p:sp>
         <p:nvSpPr>
-          <p:cNvPr id="6" name="Oval 5"/>
+          <p:cNvPr id="6" name="Rounded Rectangle 5"/>
+          <p:cNvSpPr/>
+          <p:nvPr/>
+        </p:nvSpPr>
+        <p:spPr>
+          <a:xfrm>
+            <a:off x="877824" y="2148840"/>
+            <a:ext cx="50800" cy="475488"/>
+          </a:xfrm>
+          <a:prstGeom prst="roundRect">
+            <a:avLst>
+              <a:gd name="adj" fmla="val 50000"/>
+            </a:avLst>
+          </a:prstGeom>
+          <a:gradFill rotWithShape="1">
+            <a:gsLst>
+              <a:gs pos="0">
+                <a:srgbClr val="4C9AFF"/>
+              </a:gs>
+              <a:gs pos="100000">
+                <a:srgbClr val="7B61FF"/>
+              </a:gs>
+            </a:gsLst>
+            <a:lin scaled="0" ang="18900000"/>
+          </a:gradFill>
+          <a:ln>
+            <a:noFill/>
+          </a:ln>
+          <a:effectLst/>
+        </p:spPr>
+        <p:style>
+          <a:lnRef idx="1">
+            <a:schemeClr val="accent1"/>
+          </a:lnRef>
+          <a:fillRef idx="3">
+            <a:schemeClr val="accent1"/>
+          </a:fillRef>
+          <a:effectRef idx="2">
+            <a:schemeClr val="accent1"/>
+          </a:effectRef>
+          <a:fontRef idx="minor">
+            <a:schemeClr val="lt1"/>
+          </a:fontRef>
+        </p:style>
+        <p:txBody>
+          <a:bodyPr rtlCol="0" anchor="ctr"/>
+          <a:lstStyle/>
+          <a:p>
+            <a:pPr algn="ctr"/>
+          </a:p>
+        </p:txBody>
+      </p:sp>
+      <p:sp>
+        <p:nvSpPr>
+          <p:cNvPr id="7" name="Oval 6"/>
           <p:cNvSpPr/>
           <p:nvPr/>
         </p:nvSpPr>
@@ -14190,7 +19776,13 @@
           <a:ln>
             <a:noFill/>
           </a:ln>
-          <a:effectLst/>
+          <a:effectLst>
+            <a:glow rad="88900">
+              <a:srgbClr val="4C9AFF">
+                <a:alpha val="38000"/>
+              </a:srgbClr>
+            </a:glow>
+          </a:effectLst>
         </p:spPr>
         <p:style>
           <a:lnRef idx="1">
@@ -14216,14 +19808,14 @@
       </p:sp>
       <p:sp>
         <p:nvSpPr>
-          <p:cNvPr id="7" name="TextBox 6"/>
+          <p:cNvPr id="8" name="TextBox 7"/>
           <p:cNvSpPr txBox="1"/>
           <p:nvPr/>
         </p:nvSpPr>
         <p:spPr>
           <a:xfrm>
-            <a:off x="1051560" y="2240280"/>
-            <a:ext cx="402336" cy="365760"/>
+            <a:off x="1051560" y="2203704"/>
+            <a:ext cx="402336" cy="402336"/>
           </a:xfrm>
           <a:prstGeom prst="rect">
             <a:avLst/>
@@ -14231,14 +19823,14 @@
           <a:noFill/>
         </p:spPr>
         <p:txBody>
-          <a:bodyPr wrap="square">
+          <a:bodyPr wrap="square" lIns="0" rIns="0" tIns="0" bIns="0" anchor="ctr">
             <a:spAutoFit/>
           </a:bodyPr>
           <a:lstStyle/>
           <a:p>
-            <a:pPr>
+            <a:pPr algn="ctr">
               <a:lnSpc>
-                <a:spcPct val="120000"/>
+                <a:spcPct val="100000"/>
               </a:lnSpc>
             </a:pPr>
             <a:r>
@@ -14254,7 +19846,7 @@
       </p:sp>
       <p:sp>
         <p:nvSpPr>
-          <p:cNvPr id="8" name="TextBox 7"/>
+          <p:cNvPr id="9" name="TextBox 8"/>
           <p:cNvSpPr txBox="1"/>
           <p:nvPr/>
         </p:nvSpPr>
@@ -14292,7 +19884,7 @@
       </p:sp>
       <p:sp>
         <p:nvSpPr>
-          <p:cNvPr id="9" name="Rounded Rectangle 8"/>
+          <p:cNvPr id="10" name="Rounded Rectangle 9"/>
           <p:cNvSpPr/>
           <p:nvPr/>
         </p:nvSpPr>
@@ -14306,13 +19898,27 @@
               <a:gd name="adj" fmla="val 6000"/>
             </a:avLst>
           </a:prstGeom>
-          <a:solidFill>
-            <a:srgbClr val="1E2430"/>
-          </a:solidFill>
+          <a:gradFill rotWithShape="1">
+            <a:gsLst>
+              <a:gs pos="0">
+                <a:srgbClr val="1E2430"/>
+              </a:gs>
+              <a:gs pos="100000">
+                <a:srgbClr val="2C3442"/>
+              </a:gs>
+            </a:gsLst>
+            <a:lin scaled="0" ang="18900000"/>
+          </a:gradFill>
           <a:ln>
             <a:noFill/>
           </a:ln>
-          <a:effectLst/>
+          <a:effectLst>
+            <a:outerShdw blurRad="228600" dist="76200" dir="5400000" rotWithShape="0">
+              <a:srgbClr val="000000">
+                <a:alpha val="42000"/>
+              </a:srgbClr>
+            </a:outerShdw>
+          </a:effectLst>
         </p:spPr>
         <p:style>
           <a:lnRef idx="1">
@@ -14338,7 +19944,61 @@
       </p:sp>
       <p:sp>
         <p:nvSpPr>
-          <p:cNvPr id="10" name="Oval 9"/>
+          <p:cNvPr id="11" name="Rounded Rectangle 10"/>
+          <p:cNvSpPr/>
+          <p:nvPr/>
+        </p:nvSpPr>
+        <p:spPr>
+          <a:xfrm>
+            <a:off x="877824" y="3191256"/>
+            <a:ext cx="50800" cy="475488"/>
+          </a:xfrm>
+          <a:prstGeom prst="roundRect">
+            <a:avLst>
+              <a:gd name="adj" fmla="val 50000"/>
+            </a:avLst>
+          </a:prstGeom>
+          <a:gradFill rotWithShape="1">
+            <a:gsLst>
+              <a:gs pos="0">
+                <a:srgbClr val="4C9AFF"/>
+              </a:gs>
+              <a:gs pos="100000">
+                <a:srgbClr val="7B61FF"/>
+              </a:gs>
+            </a:gsLst>
+            <a:lin scaled="0" ang="18900000"/>
+          </a:gradFill>
+          <a:ln>
+            <a:noFill/>
+          </a:ln>
+          <a:effectLst/>
+        </p:spPr>
+        <p:style>
+          <a:lnRef idx="1">
+            <a:schemeClr val="accent1"/>
+          </a:lnRef>
+          <a:fillRef idx="3">
+            <a:schemeClr val="accent1"/>
+          </a:fillRef>
+          <a:effectRef idx="2">
+            <a:schemeClr val="accent1"/>
+          </a:effectRef>
+          <a:fontRef idx="minor">
+            <a:schemeClr val="lt1"/>
+          </a:fontRef>
+        </p:style>
+        <p:txBody>
+          <a:bodyPr rtlCol="0" anchor="ctr"/>
+          <a:lstStyle/>
+          <a:p>
+            <a:pPr algn="ctr"/>
+          </a:p>
+        </p:txBody>
+      </p:sp>
+      <p:sp>
+        <p:nvSpPr>
+          <p:cNvPr id="12" name="Oval 11"/>
           <p:cNvSpPr/>
           <p:nvPr/>
         </p:nvSpPr>
@@ -14364,7 +20024,13 @@
           <a:ln>
             <a:noFill/>
           </a:ln>
-          <a:effectLst/>
+          <a:effectLst>
+            <a:glow rad="88900">
+              <a:srgbClr val="4C9AFF">
+                <a:alpha val="38000"/>
+              </a:srgbClr>
+            </a:glow>
+          </a:effectLst>
         </p:spPr>
         <p:style>
           <a:lnRef idx="1">
@@ -14390,14 +20056,14 @@
       </p:sp>
       <p:sp>
         <p:nvSpPr>
-          <p:cNvPr id="11" name="TextBox 10"/>
+          <p:cNvPr id="13" name="TextBox 12"/>
           <p:cNvSpPr txBox="1"/>
           <p:nvPr/>
         </p:nvSpPr>
         <p:spPr>
           <a:xfrm>
-            <a:off x="1051560" y="3282696"/>
-            <a:ext cx="402336" cy="365760"/>
+            <a:off x="1051560" y="3246120"/>
+            <a:ext cx="402336" cy="402336"/>
           </a:xfrm>
           <a:prstGeom prst="rect">
             <a:avLst/>
@@ -14405,14 +20071,14 @@
           <a:noFill/>
         </p:spPr>
         <p:txBody>
-          <a:bodyPr wrap="square">
+          <a:bodyPr wrap="square" lIns="0" rIns="0" tIns="0" bIns="0" anchor="ctr">
             <a:spAutoFit/>
           </a:bodyPr>
           <a:lstStyle/>
           <a:p>
-            <a:pPr>
+            <a:pPr algn="ctr">
               <a:lnSpc>
-                <a:spcPct val="120000"/>
+                <a:spcPct val="100000"/>
               </a:lnSpc>
             </a:pPr>
             <a:r>
@@ -14428,7 +20094,7 @@
       </p:sp>
       <p:sp>
         <p:nvSpPr>
-          <p:cNvPr id="12" name="TextBox 11"/>
+          <p:cNvPr id="14" name="TextBox 13"/>
           <p:cNvSpPr txBox="1"/>
           <p:nvPr/>
         </p:nvSpPr>
@@ -14466,7 +20132,7 @@
       </p:sp>
       <p:sp>
         <p:nvSpPr>
-          <p:cNvPr id="13" name="Rounded Rectangle 12"/>
+          <p:cNvPr id="15" name="Rounded Rectangle 14"/>
           <p:cNvSpPr/>
           <p:nvPr/>
         </p:nvSpPr>
@@ -14480,13 +20146,27 @@
               <a:gd name="adj" fmla="val 6000"/>
             </a:avLst>
           </a:prstGeom>
-          <a:solidFill>
-            <a:srgbClr val="1E2430"/>
-          </a:solidFill>
+          <a:gradFill rotWithShape="1">
+            <a:gsLst>
+              <a:gs pos="0">
+                <a:srgbClr val="1E2430"/>
+              </a:gs>
+              <a:gs pos="100000">
+                <a:srgbClr val="2C3442"/>
+              </a:gs>
+            </a:gsLst>
+            <a:lin scaled="0" ang="18900000"/>
+          </a:gradFill>
           <a:ln>
             <a:noFill/>
           </a:ln>
-          <a:effectLst/>
+          <a:effectLst>
+            <a:outerShdw blurRad="228600" dist="76200" dir="5400000" rotWithShape="0">
+              <a:srgbClr val="000000">
+                <a:alpha val="42000"/>
+              </a:srgbClr>
+            </a:outerShdw>
+          </a:effectLst>
         </p:spPr>
         <p:style>
           <a:lnRef idx="1">
@@ -14512,7 +20192,61 @@
       </p:sp>
       <p:sp>
         <p:nvSpPr>
-          <p:cNvPr id="14" name="Oval 13"/>
+          <p:cNvPr id="16" name="Rounded Rectangle 15"/>
+          <p:cNvSpPr/>
+          <p:nvPr/>
+        </p:nvSpPr>
+        <p:spPr>
+          <a:xfrm>
+            <a:off x="877824" y="4233672"/>
+            <a:ext cx="50800" cy="475488"/>
+          </a:xfrm>
+          <a:prstGeom prst="roundRect">
+            <a:avLst>
+              <a:gd name="adj" fmla="val 50000"/>
+            </a:avLst>
+          </a:prstGeom>
+          <a:gradFill rotWithShape="1">
+            <a:gsLst>
+              <a:gs pos="0">
+                <a:srgbClr val="4C9AFF"/>
+              </a:gs>
+              <a:gs pos="100000">
+                <a:srgbClr val="7B61FF"/>
+              </a:gs>
+            </a:gsLst>
+            <a:lin scaled="0" ang="18900000"/>
+          </a:gradFill>
+          <a:ln>
+            <a:noFill/>
+          </a:ln>
+          <a:effectLst/>
+        </p:spPr>
+        <p:style>
+          <a:lnRef idx="1">
+            <a:schemeClr val="accent1"/>
+          </a:lnRef>
+          <a:fillRef idx="3">
+            <a:schemeClr val="accent1"/>
+          </a:fillRef>
+          <a:effectRef idx="2">
+            <a:schemeClr val="accent1"/>
+          </a:effectRef>
+          <a:fontRef idx="minor">
+            <a:schemeClr val="lt1"/>
+          </a:fontRef>
+        </p:style>
+        <p:txBody>
+          <a:bodyPr rtlCol="0" anchor="ctr"/>
+          <a:lstStyle/>
+          <a:p>
+            <a:pPr algn="ctr"/>
+          </a:p>
+        </p:txBody>
+      </p:sp>
+      <p:sp>
+        <p:nvSpPr>
+          <p:cNvPr id="17" name="Oval 16"/>
           <p:cNvSpPr/>
           <p:nvPr/>
         </p:nvSpPr>
@@ -14538,7 +20272,13 @@
           <a:ln>
             <a:noFill/>
           </a:ln>
-          <a:effectLst/>
+          <a:effectLst>
+            <a:glow rad="88900">
+              <a:srgbClr val="4C9AFF">
+                <a:alpha val="38000"/>
+              </a:srgbClr>
+            </a:glow>
+          </a:effectLst>
         </p:spPr>
         <p:style>
           <a:lnRef idx="1">
@@ -14564,14 +20304,14 @@
       </p:sp>
       <p:sp>
         <p:nvSpPr>
-          <p:cNvPr id="15" name="TextBox 14"/>
+          <p:cNvPr id="18" name="TextBox 17"/>
           <p:cNvSpPr txBox="1"/>
           <p:nvPr/>
         </p:nvSpPr>
         <p:spPr>
           <a:xfrm>
-            <a:off x="1051560" y="4325112"/>
-            <a:ext cx="402336" cy="365760"/>
+            <a:off x="1051560" y="4288536"/>
+            <a:ext cx="402336" cy="402336"/>
           </a:xfrm>
           <a:prstGeom prst="rect">
             <a:avLst/>
@@ -14579,14 +20319,14 @@
           <a:noFill/>
         </p:spPr>
         <p:txBody>
-          <a:bodyPr wrap="square">
+          <a:bodyPr wrap="square" lIns="0" rIns="0" tIns="0" bIns="0" anchor="ctr">
             <a:spAutoFit/>
           </a:bodyPr>
           <a:lstStyle/>
           <a:p>
-            <a:pPr>
+            <a:pPr algn="ctr">
               <a:lnSpc>
-                <a:spcPct val="120000"/>
+                <a:spcPct val="100000"/>
               </a:lnSpc>
             </a:pPr>
             <a:r>
@@ -14602,7 +20342,7 @@
       </p:sp>
       <p:sp>
         <p:nvSpPr>
-          <p:cNvPr id="16" name="TextBox 15"/>
+          <p:cNvPr id="19" name="TextBox 18"/>
           <p:cNvSpPr txBox="1"/>
           <p:nvPr/>
         </p:nvSpPr>
@@ -14640,7 +20380,7 @@
       </p:sp>
       <p:sp>
         <p:nvSpPr>
-          <p:cNvPr id="17" name="Rounded Rectangle 16"/>
+          <p:cNvPr id="20" name="Rounded Rectangle 19"/>
           <p:cNvSpPr/>
           <p:nvPr/>
         </p:nvSpPr>
@@ -14654,13 +20394,27 @@
               <a:gd name="adj" fmla="val 6000"/>
             </a:avLst>
           </a:prstGeom>
-          <a:solidFill>
-            <a:srgbClr val="1E2430"/>
-          </a:solidFill>
+          <a:gradFill rotWithShape="1">
+            <a:gsLst>
+              <a:gs pos="0">
+                <a:srgbClr val="1E2430"/>
+              </a:gs>
+              <a:gs pos="100000">
+                <a:srgbClr val="2C3442"/>
+              </a:gs>
+            </a:gsLst>
+            <a:lin scaled="0" ang="18900000"/>
+          </a:gradFill>
           <a:ln>
             <a:noFill/>
           </a:ln>
-          <a:effectLst/>
+          <a:effectLst>
+            <a:outerShdw blurRad="228600" dist="76200" dir="5400000" rotWithShape="0">
+              <a:srgbClr val="000000">
+                <a:alpha val="42000"/>
+              </a:srgbClr>
+            </a:outerShdw>
+          </a:effectLst>
         </p:spPr>
         <p:style>
           <a:lnRef idx="1">
@@ -14686,7 +20440,61 @@
       </p:sp>
       <p:sp>
         <p:nvSpPr>
-          <p:cNvPr id="18" name="Oval 17"/>
+          <p:cNvPr id="21" name="Rounded Rectangle 20"/>
+          <p:cNvSpPr/>
+          <p:nvPr/>
+        </p:nvSpPr>
+        <p:spPr>
+          <a:xfrm>
+            <a:off x="877824" y="5276088"/>
+            <a:ext cx="50800" cy="475488"/>
+          </a:xfrm>
+          <a:prstGeom prst="roundRect">
+            <a:avLst>
+              <a:gd name="adj" fmla="val 50000"/>
+            </a:avLst>
+          </a:prstGeom>
+          <a:gradFill rotWithShape="1">
+            <a:gsLst>
+              <a:gs pos="0">
+                <a:srgbClr val="4C9AFF"/>
+              </a:gs>
+              <a:gs pos="100000">
+                <a:srgbClr val="7B61FF"/>
+              </a:gs>
+            </a:gsLst>
+            <a:lin scaled="0" ang="18900000"/>
+          </a:gradFill>
+          <a:ln>
+            <a:noFill/>
+          </a:ln>
+          <a:effectLst/>
+        </p:spPr>
+        <p:style>
+          <a:lnRef idx="1">
+            <a:schemeClr val="accent1"/>
+          </a:lnRef>
+          <a:fillRef idx="3">
+            <a:schemeClr val="accent1"/>
+          </a:fillRef>
+          <a:effectRef idx="2">
+            <a:schemeClr val="accent1"/>
+          </a:effectRef>
+          <a:fontRef idx="minor">
+            <a:schemeClr val="lt1"/>
+          </a:fontRef>
+        </p:style>
+        <p:txBody>
+          <a:bodyPr rtlCol="0" anchor="ctr"/>
+          <a:lstStyle/>
+          <a:p>
+            <a:pPr algn="ctr"/>
+          </a:p>
+        </p:txBody>
+      </p:sp>
+      <p:sp>
+        <p:nvSpPr>
+          <p:cNvPr id="22" name="Oval 21"/>
           <p:cNvSpPr/>
           <p:nvPr/>
         </p:nvSpPr>
@@ -14712,7 +20520,13 @@
           <a:ln>
             <a:noFill/>
           </a:ln>
-          <a:effectLst/>
+          <a:effectLst>
+            <a:glow rad="88900">
+              <a:srgbClr val="4C9AFF">
+                <a:alpha val="38000"/>
+              </a:srgbClr>
+            </a:glow>
+          </a:effectLst>
         </p:spPr>
         <p:style>
           <a:lnRef idx="1">
@@ -14738,14 +20552,14 @@
       </p:sp>
       <p:sp>
         <p:nvSpPr>
-          <p:cNvPr id="19" name="TextBox 18"/>
+          <p:cNvPr id="23" name="TextBox 22"/>
           <p:cNvSpPr txBox="1"/>
           <p:nvPr/>
         </p:nvSpPr>
         <p:spPr>
           <a:xfrm>
-            <a:off x="1051560" y="5367528"/>
-            <a:ext cx="402336" cy="365760"/>
+            <a:off x="1051560" y="5330952"/>
+            <a:ext cx="402336" cy="402336"/>
           </a:xfrm>
           <a:prstGeom prst="rect">
             <a:avLst/>
@@ -14753,14 +20567,14 @@
           <a:noFill/>
         </p:spPr>
         <p:txBody>
-          <a:bodyPr wrap="square">
+          <a:bodyPr wrap="square" lIns="0" rIns="0" tIns="0" bIns="0" anchor="ctr">
             <a:spAutoFit/>
           </a:bodyPr>
           <a:lstStyle/>
           <a:p>
-            <a:pPr>
+            <a:pPr algn="ctr">
               <a:lnSpc>
-                <a:spcPct val="120000"/>
+                <a:spcPct val="100000"/>
               </a:lnSpc>
             </a:pPr>
             <a:r>
@@ -14776,7 +20590,7 @@
       </p:sp>
       <p:sp>
         <p:nvSpPr>
-          <p:cNvPr id="20" name="TextBox 19"/>
+          <p:cNvPr id="24" name="TextBox 23"/>
           <p:cNvSpPr txBox="1"/>
           <p:nvPr/>
         </p:nvSpPr>
@@ -14814,7 +20628,7 @@
       </p:sp>
       <p:sp>
         <p:nvSpPr>
-          <p:cNvPr id="21" name="TextBox 20"/>
+          <p:cNvPr id="25" name="TextBox 24"/>
           <p:cNvSpPr txBox="1"/>
           <p:nvPr/>
         </p:nvSpPr>
@@ -14852,7 +20666,7 @@
       </p:sp>
       <p:sp>
         <p:nvSpPr>
-          <p:cNvPr id="22" name="TextBox 21"/>
+          <p:cNvPr id="26" name="TextBox 25"/>
           <p:cNvSpPr txBox="1"/>
           <p:nvPr/>
         </p:nvSpPr>
@@ -14905,6 +20719,270 @@
       </p:transition>
     </mc:Fallback>
   </mc:AlternateContent>
+  <p:timing>
+    <p:tnLst>
+      <p:par>
+        <p:cTn id="1" dur="indefinite" restart="never" nodeType="tmRoot">
+          <p:childTnLst>
+            <p:seq concurrent="1" nextAc="seek">
+              <p:cTn id="2" dur="indefinite" nodeType="mainSeq">
+                <p:childTnLst>
+                  <p:par>
+                    <p:cTn id="3" fill="hold">
+                      <p:stCondLst>
+                        <p:cond delay="indefinite"/>
+                      </p:stCondLst>
+                      <p:childTnLst>
+                        <p:par>
+                          <p:cTn id="4" fill="hold">
+                            <p:stCondLst>
+                              <p:cond delay="0"/>
+                            </p:stCondLst>
+                            <p:childTnLst>
+                              <p:par>
+                                <p:cTn id="10" fill="hold">
+                                  <p:stCondLst>
+                                    <p:cond delay="0"/>
+                                  </p:stCondLst>
+                                  <p:childTnLst>
+                                    <p:set>
+                                      <p:cBhvr>
+                                        <p:cTn id="11" dur="1" fill="hold"/>
+                                        <p:tgtEl>
+                                          <p:spTgt spid="5"/>
+                                        </p:tgtEl>
+                                        <p:attrNameLst>
+                                          <p:attrName>style.visibility</p:attrName>
+                                        </p:attrNameLst>
+                                      </p:cBhvr>
+                                      <p:to>
+                                        <p:strVal val="visible"/>
+                                      </p:to>
+                                    </p:set>
+                                    <p:animEffect transition="in" filter="fade">
+                                      <p:cBhvr>
+                                        <p:cTn id="12" dur="420"/>
+                                        <p:tgtEl>
+                                          <p:spTgt spid="5"/>
+                                        </p:tgtEl>
+                                      </p:cBhvr>
+                                    </p:animEffect>
+                                    <p:anim calcmode="lin" valueType="num">
+                                      <p:cBhvr additive="base">
+                                        <p:cTn id="13" dur="420" fill="hold"/>
+                                        <p:tgtEl>
+                                          <p:spTgt spid="5"/>
+                                        </p:tgtEl>
+                                        <p:attrNameLst>
+                                          <p:attrName>ppt_y</p:attrName>
+                                        </p:attrNameLst>
+                                      </p:cBhvr>
+                                      <p:tavLst>
+                                        <p:tav tm="0">
+                                          <p:val>
+                                            <p:strVal val="#ppt_y+0.035"/>
+                                          </p:val>
+                                        </p:tav>
+                                        <p:tav tm="100000">
+                                          <p:val>
+                                            <p:strVal val="#ppt_y"/>
+                                          </p:val>
+                                        </p:tav>
+                                      </p:tavLst>
+                                    </p:anim>
+                                  </p:childTnLst>
+                                </p:cTn>
+                              </p:par>
+                              <p:par>
+                                <p:cTn id="20" fill="hold">
+                                  <p:stCondLst>
+                                    <p:cond delay="260"/>
+                                  </p:stCondLst>
+                                  <p:childTnLst>
+                                    <p:set>
+                                      <p:cBhvr>
+                                        <p:cTn id="21" dur="1" fill="hold"/>
+                                        <p:tgtEl>
+                                          <p:spTgt spid="10"/>
+                                        </p:tgtEl>
+                                        <p:attrNameLst>
+                                          <p:attrName>style.visibility</p:attrName>
+                                        </p:attrNameLst>
+                                      </p:cBhvr>
+                                      <p:to>
+                                        <p:strVal val="visible"/>
+                                      </p:to>
+                                    </p:set>
+                                    <p:animEffect transition="in" filter="fade">
+                                      <p:cBhvr>
+                                        <p:cTn id="22" dur="420"/>
+                                        <p:tgtEl>
+                                          <p:spTgt spid="10"/>
+                                        </p:tgtEl>
+                                      </p:cBhvr>
+                                    </p:animEffect>
+                                    <p:anim calcmode="lin" valueType="num">
+                                      <p:cBhvr additive="base">
+                                        <p:cTn id="23" dur="420" fill="hold"/>
+                                        <p:tgtEl>
+                                          <p:spTgt spid="10"/>
+                                        </p:tgtEl>
+                                        <p:attrNameLst>
+                                          <p:attrName>ppt_y</p:attrName>
+                                        </p:attrNameLst>
+                                      </p:cBhvr>
+                                      <p:tavLst>
+                                        <p:tav tm="0">
+                                          <p:val>
+                                            <p:strVal val="#ppt_y+0.035"/>
+                                          </p:val>
+                                        </p:tav>
+                                        <p:tav tm="100000">
+                                          <p:val>
+                                            <p:strVal val="#ppt_y"/>
+                                          </p:val>
+                                        </p:tav>
+                                      </p:tavLst>
+                                    </p:anim>
+                                  </p:childTnLst>
+                                </p:cTn>
+                              </p:par>
+                              <p:par>
+                                <p:cTn id="30" fill="hold">
+                                  <p:stCondLst>
+                                    <p:cond delay="520"/>
+                                  </p:stCondLst>
+                                  <p:childTnLst>
+                                    <p:set>
+                                      <p:cBhvr>
+                                        <p:cTn id="31" dur="1" fill="hold"/>
+                                        <p:tgtEl>
+                                          <p:spTgt spid="15"/>
+                                        </p:tgtEl>
+                                        <p:attrNameLst>
+                                          <p:attrName>style.visibility</p:attrName>
+                                        </p:attrNameLst>
+                                      </p:cBhvr>
+                                      <p:to>
+                                        <p:strVal val="visible"/>
+                                      </p:to>
+                                    </p:set>
+                                    <p:animEffect transition="in" filter="fade">
+                                      <p:cBhvr>
+                                        <p:cTn id="32" dur="420"/>
+                                        <p:tgtEl>
+                                          <p:spTgt spid="15"/>
+                                        </p:tgtEl>
+                                      </p:cBhvr>
+                                    </p:animEffect>
+                                    <p:anim calcmode="lin" valueType="num">
+                                      <p:cBhvr additive="base">
+                                        <p:cTn id="33" dur="420" fill="hold"/>
+                                        <p:tgtEl>
+                                          <p:spTgt spid="15"/>
+                                        </p:tgtEl>
+                                        <p:attrNameLst>
+                                          <p:attrName>ppt_y</p:attrName>
+                                        </p:attrNameLst>
+                                      </p:cBhvr>
+                                      <p:tavLst>
+                                        <p:tav tm="0">
+                                          <p:val>
+                                            <p:strVal val="#ppt_y+0.035"/>
+                                          </p:val>
+                                        </p:tav>
+                                        <p:tav tm="100000">
+                                          <p:val>
+                                            <p:strVal val="#ppt_y"/>
+                                          </p:val>
+                                        </p:tav>
+                                      </p:tavLst>
+                                    </p:anim>
+                                  </p:childTnLst>
+                                </p:cTn>
+                              </p:par>
+                              <p:par>
+                                <p:cTn id="40" fill="hold">
+                                  <p:stCondLst>
+                                    <p:cond delay="780"/>
+                                  </p:stCondLst>
+                                  <p:childTnLst>
+                                    <p:set>
+                                      <p:cBhvr>
+                                        <p:cTn id="41" dur="1" fill="hold"/>
+                                        <p:tgtEl>
+                                          <p:spTgt spid="20"/>
+                                        </p:tgtEl>
+                                        <p:attrNameLst>
+                                          <p:attrName>style.visibility</p:attrName>
+                                        </p:attrNameLst>
+                                      </p:cBhvr>
+                                      <p:to>
+                                        <p:strVal val="visible"/>
+                                      </p:to>
+                                    </p:set>
+                                    <p:animEffect transition="in" filter="fade">
+                                      <p:cBhvr>
+                                        <p:cTn id="42" dur="420"/>
+                                        <p:tgtEl>
+                                          <p:spTgt spid="20"/>
+                                        </p:tgtEl>
+                                      </p:cBhvr>
+                                    </p:animEffect>
+                                    <p:anim calcmode="lin" valueType="num">
+                                      <p:cBhvr additive="base">
+                                        <p:cTn id="43" dur="420" fill="hold"/>
+                                        <p:tgtEl>
+                                          <p:spTgt spid="20"/>
+                                        </p:tgtEl>
+                                        <p:attrNameLst>
+                                          <p:attrName>ppt_y</p:attrName>
+                                        </p:attrNameLst>
+                                      </p:cBhvr>
+                                      <p:tavLst>
+                                        <p:tav tm="0">
+                                          <p:val>
+                                            <p:strVal val="#ppt_y+0.035"/>
+                                          </p:val>
+                                        </p:tav>
+                                        <p:tav tm="100000">
+                                          <p:val>
+                                            <p:strVal val="#ppt_y"/>
+                                          </p:val>
+                                        </p:tav>
+                                      </p:tavLst>
+                                    </p:anim>
+                                  </p:childTnLst>
+                                </p:cTn>
+                              </p:par>
+                            </p:childTnLst>
+                          </p:cTn>
+                        </p:par>
+                      </p:childTnLst>
+                    </p:cTn>
+                  </p:par>
+                </p:childTnLst>
+              </p:cTn>
+              <p:prevCondLst>
+                <p:cond evt="onPrev" delay="0">
+                  <p:tgtEl>
+                    <p:sldTgt/>
+                  </p:tgtEl>
+                </p:cond>
+              </p:prevCondLst>
+              <p:nextCondLst>
+                <p:cond evt="onNext" delay="0">
+                  <p:tgtEl>
+                    <p:sldTgt/>
+                  </p:tgtEl>
+                </p:cond>
+              </p:nextCondLst>
+            </p:seq>
+          </p:childTnLst>
+        </p:cTn>
+      </p:par>
+    </p:tnLst>
+  </p:timing>
 </p:sld>
 </file>
 

--- a/presentation-polka/presentation.pptx
+++ b/presentation-polka/presentation.pptx
@@ -4286,7 +4286,7 @@
     <p:bg>
       <p:bgPr>
         <a:solidFill>
-          <a:srgbClr val="141820"/>
+          <a:srgbClr val="1A1310"/>
         </a:solidFill>
         <a:effectLst/>
       </p:bgPr>
@@ -4300,7 +4300,7 @@
       <p:grpSpPr/>
       <p:pic>
         <p:nvPicPr>
-          <p:cNvPr id="2" name="Picture 1" descr="cover.png"/>
+          <p:cNvPr id="2" name="Picture 1" descr="cover-aurora-C98A4B.png"/>
           <p:cNvPicPr>
             <a:picLocks noChangeAspect="1"/>
           </p:cNvPicPr>
@@ -4341,10 +4341,10 @@
           <a:gradFill rotWithShape="1">
             <a:gsLst>
               <a:gs pos="0">
-                <a:srgbClr val="4C9AFF"/>
+                <a:srgbClr val="C98A4B"/>
               </a:gs>
               <a:gs pos="100000">
-                <a:srgbClr val="7B61FF"/>
+                <a:srgbClr val="8C5A2B"/>
               </a:gs>
             </a:gsLst>
             <a:lin scaled="0" ang="18900000"/>
@@ -4354,7 +4354,7 @@
           </a:ln>
           <a:effectLst>
             <a:glow rad="177800">
-              <a:srgbClr val="4C9AFF">
+              <a:srgbClr val="C98A4B">
                 <a:alpha val="55000"/>
               </a:srgbClr>
             </a:glow>
@@ -4412,7 +4412,7 @@
             <a:r>
               <a:rPr sz="4600" b="1">
                 <a:solidFill>
-                  <a:srgbClr val="F2F4F8"/>
+                  <a:srgbClr val="F6EFE7"/>
                 </a:solidFill>
               </a:rPr>
               <a:t>Полка: книжный магазин-кофейня</a:t>
@@ -4450,7 +4450,7 @@
             <a:r>
               <a:rPr sz="2000" b="0">
                 <a:solidFill>
-                  <a:srgbClr val="9AA4B2"/>
+                  <a:srgbClr val="B7A493"/>
                 </a:solidFill>
               </a:rPr>
               <a:t>Концепция и экономика точки в торговом центре</a:t>
@@ -4484,7 +4484,7 @@
     <p:bg>
       <p:bgPr>
         <a:solidFill>
-          <a:srgbClr val="141820"/>
+          <a:srgbClr val="1A1310"/>
         </a:solidFill>
         <a:effectLst/>
       </p:bgPr>
@@ -4498,7 +4498,7 @@
       <p:grpSpPr/>
       <p:pic>
         <p:nvPicPr>
-          <p:cNvPr id="2" name="Picture 1" descr="grid.png"/>
+          <p:cNvPr id="2" name="Picture 1" descr="bars-C98A4B.png"/>
           <p:cNvPicPr>
             <a:picLocks noChangeAspect="1"/>
           </p:cNvPicPr>
@@ -4541,10 +4541,10 @@
           <a:gradFill rotWithShape="1">
             <a:gsLst>
               <a:gs pos="0">
-                <a:srgbClr val="4C9AFF"/>
+                <a:srgbClr val="C98A4B"/>
               </a:gs>
               <a:gs pos="100000">
-                <a:srgbClr val="7B61FF"/>
+                <a:srgbClr val="8C5A2B"/>
               </a:gs>
             </a:gsLst>
             <a:lin scaled="0" ang="18900000"/>
@@ -4554,7 +4554,7 @@
           </a:ln>
           <a:effectLst>
             <a:glow rad="127000">
-              <a:srgbClr val="4C9AFF">
+              <a:srgbClr val="C98A4B">
                 <a:alpha val="55000"/>
               </a:srgbClr>
             </a:glow>
@@ -4612,7 +4612,7 @@
             <a:r>
               <a:rPr sz="3200" b="1">
                 <a:solidFill>
-                  <a:srgbClr val="F2F4F8"/>
+                  <a:srgbClr val="F6EFE7"/>
                 </a:solidFill>
               </a:rPr>
               <a:t>Мы удерживаем посетителя на этаже</a:t>
@@ -4639,10 +4639,10 @@
           <a:gradFill rotWithShape="1">
             <a:gsLst>
               <a:gs pos="0">
-                <a:srgbClr val="1E2430"/>
+                <a:srgbClr val="241A15"/>
               </a:gs>
               <a:gs pos="100000">
-                <a:srgbClr val="2C3442"/>
+                <a:srgbClr val="31241C"/>
               </a:gs>
             </a:gsLst>
             <a:lin scaled="0" ang="18900000"/>
@@ -4699,10 +4699,10 @@
           <a:gradFill rotWithShape="1">
             <a:gsLst>
               <a:gs pos="0">
-                <a:srgbClr val="4C9AFF"/>
+                <a:srgbClr val="C98A4B"/>
               </a:gs>
               <a:gs pos="100000">
-                <a:srgbClr val="7B61FF"/>
+                <a:srgbClr val="8C5A2B"/>
               </a:gs>
             </a:gsLst>
             <a:lin scaled="0" ang="18900000"/>
@@ -4751,10 +4751,10 @@
           <a:gradFill rotWithShape="1">
             <a:gsLst>
               <a:gs pos="0">
-                <a:srgbClr val="4C9AFF"/>
+                <a:srgbClr val="C98A4B"/>
               </a:gs>
               <a:gs pos="100000">
-                <a:srgbClr val="7B61FF"/>
+                <a:srgbClr val="8C5A2B"/>
               </a:gs>
             </a:gsLst>
             <a:lin scaled="0" ang="19800000"/>
@@ -4764,7 +4764,7 @@
           </a:ln>
           <a:effectLst>
             <a:glow rad="88900">
-              <a:srgbClr val="4C9AFF">
+              <a:srgbClr val="C98A4B">
                 <a:alpha val="38000"/>
               </a:srgbClr>
             </a:glow>
@@ -4822,7 +4822,7 @@
             <a:r>
               <a:rPr sz="1400" b="1">
                 <a:solidFill>
-                  <a:srgbClr val="141820"/>
+                  <a:srgbClr val="1A1310"/>
                 </a:solidFill>
               </a:rPr>
               <a:t>1</a:t>
@@ -4860,7 +4860,7 @@
             <a:r>
               <a:rPr sz="1800" b="0">
                 <a:solidFill>
-                  <a:srgbClr val="F2F4F8"/>
+                  <a:srgbClr val="F6EFE7"/>
                 </a:solidFill>
               </a:rPr>
               <a:t>Средний визит 45 минут против 6 у книжного</a:t>
@@ -4887,10 +4887,10 @@
           <a:gradFill rotWithShape="1">
             <a:gsLst>
               <a:gs pos="0">
-                <a:srgbClr val="1E2430"/>
+                <a:srgbClr val="241A15"/>
               </a:gs>
               <a:gs pos="100000">
-                <a:srgbClr val="2C3442"/>
+                <a:srgbClr val="31241C"/>
               </a:gs>
             </a:gsLst>
             <a:lin scaled="0" ang="18900000"/>
@@ -4947,10 +4947,10 @@
           <a:gradFill rotWithShape="1">
             <a:gsLst>
               <a:gs pos="0">
-                <a:srgbClr val="4C9AFF"/>
+                <a:srgbClr val="C98A4B"/>
               </a:gs>
               <a:gs pos="100000">
-                <a:srgbClr val="7B61FF"/>
+                <a:srgbClr val="8C5A2B"/>
               </a:gs>
             </a:gsLst>
             <a:lin scaled="0" ang="18900000"/>
@@ -4999,10 +4999,10 @@
           <a:gradFill rotWithShape="1">
             <a:gsLst>
               <a:gs pos="0">
-                <a:srgbClr val="4C9AFF"/>
+                <a:srgbClr val="C98A4B"/>
               </a:gs>
               <a:gs pos="100000">
-                <a:srgbClr val="7B61FF"/>
+                <a:srgbClr val="8C5A2B"/>
               </a:gs>
             </a:gsLst>
             <a:lin scaled="0" ang="19800000"/>
@@ -5012,7 +5012,7 @@
           </a:ln>
           <a:effectLst>
             <a:glow rad="88900">
-              <a:srgbClr val="4C9AFF">
+              <a:srgbClr val="C98A4B">
                 <a:alpha val="38000"/>
               </a:srgbClr>
             </a:glow>
@@ -5070,7 +5070,7 @@
             <a:r>
               <a:rPr sz="1400" b="1">
                 <a:solidFill>
-                  <a:srgbClr val="141820"/>
+                  <a:srgbClr val="1A1310"/>
                 </a:solidFill>
               </a:rPr>
               <a:t>2</a:t>
@@ -5108,7 +5108,7 @@
             <a:r>
               <a:rPr sz="1800" b="0">
                 <a:solidFill>
-                  <a:srgbClr val="F2F4F8"/>
+                  <a:srgbClr val="F6EFE7"/>
                 </a:solidFill>
               </a:rPr>
               <a:t>Гость возвращается 2,4 раза в месяц</a:t>
@@ -5135,10 +5135,10 @@
           <a:gradFill rotWithShape="1">
             <a:gsLst>
               <a:gs pos="0">
-                <a:srgbClr val="1E2430"/>
+                <a:srgbClr val="241A15"/>
               </a:gs>
               <a:gs pos="100000">
-                <a:srgbClr val="2C3442"/>
+                <a:srgbClr val="31241C"/>
               </a:gs>
             </a:gsLst>
             <a:lin scaled="0" ang="18900000"/>
@@ -5195,10 +5195,10 @@
           <a:gradFill rotWithShape="1">
             <a:gsLst>
               <a:gs pos="0">
-                <a:srgbClr val="4C9AFF"/>
+                <a:srgbClr val="C98A4B"/>
               </a:gs>
               <a:gs pos="100000">
-                <a:srgbClr val="7B61FF"/>
+                <a:srgbClr val="8C5A2B"/>
               </a:gs>
             </a:gsLst>
             <a:lin scaled="0" ang="18900000"/>
@@ -5247,10 +5247,10 @@
           <a:gradFill rotWithShape="1">
             <a:gsLst>
               <a:gs pos="0">
-                <a:srgbClr val="4C9AFF"/>
+                <a:srgbClr val="C98A4B"/>
               </a:gs>
               <a:gs pos="100000">
-                <a:srgbClr val="7B61FF"/>
+                <a:srgbClr val="8C5A2B"/>
               </a:gs>
             </a:gsLst>
             <a:lin scaled="0" ang="19800000"/>
@@ -5260,7 +5260,7 @@
           </a:ln>
           <a:effectLst>
             <a:glow rad="88900">
-              <a:srgbClr val="4C9AFF">
+              <a:srgbClr val="C98A4B">
                 <a:alpha val="38000"/>
               </a:srgbClr>
             </a:glow>
@@ -5318,7 +5318,7 @@
             <a:r>
               <a:rPr sz="1400" b="1">
                 <a:solidFill>
-                  <a:srgbClr val="141820"/>
+                  <a:srgbClr val="1A1310"/>
                 </a:solidFill>
               </a:rPr>
               <a:t>3</a:t>
@@ -5356,7 +5356,7 @@
             <a:r>
               <a:rPr sz="1800" b="0">
                 <a:solidFill>
-                  <a:srgbClr val="F2F4F8"/>
+                  <a:srgbClr val="F6EFE7"/>
                 </a:solidFill>
               </a:rPr>
               <a:t>Мероприятия приводят 150-200 человек за вечер</a:t>
@@ -5383,10 +5383,10 @@
           <a:gradFill rotWithShape="1">
             <a:gsLst>
               <a:gs pos="0">
-                <a:srgbClr val="1E2430"/>
+                <a:srgbClr val="241A15"/>
               </a:gs>
               <a:gs pos="100000">
-                <a:srgbClr val="2C3442"/>
+                <a:srgbClr val="31241C"/>
               </a:gs>
             </a:gsLst>
             <a:lin scaled="0" ang="18900000"/>
@@ -5443,10 +5443,10 @@
           <a:gradFill rotWithShape="1">
             <a:gsLst>
               <a:gs pos="0">
-                <a:srgbClr val="4C9AFF"/>
+                <a:srgbClr val="C98A4B"/>
               </a:gs>
               <a:gs pos="100000">
-                <a:srgbClr val="7B61FF"/>
+                <a:srgbClr val="8C5A2B"/>
               </a:gs>
             </a:gsLst>
             <a:lin scaled="0" ang="18900000"/>
@@ -5495,10 +5495,10 @@
           <a:gradFill rotWithShape="1">
             <a:gsLst>
               <a:gs pos="0">
-                <a:srgbClr val="4C9AFF"/>
+                <a:srgbClr val="C98A4B"/>
               </a:gs>
               <a:gs pos="100000">
-                <a:srgbClr val="7B61FF"/>
+                <a:srgbClr val="8C5A2B"/>
               </a:gs>
             </a:gsLst>
             <a:lin scaled="0" ang="19800000"/>
@@ -5508,7 +5508,7 @@
           </a:ln>
           <a:effectLst>
             <a:glow rad="88900">
-              <a:srgbClr val="4C9AFF">
+              <a:srgbClr val="C98A4B">
                 <a:alpha val="38000"/>
               </a:srgbClr>
             </a:glow>
@@ -5566,7 +5566,7 @@
             <a:r>
               <a:rPr sz="1400" b="1">
                 <a:solidFill>
-                  <a:srgbClr val="141820"/>
+                  <a:srgbClr val="1A1310"/>
                 </a:solidFill>
               </a:rPr>
               <a:t>4</a:t>
@@ -5604,7 +5604,7 @@
             <a:r>
               <a:rPr sz="1800" b="0">
                 <a:solidFill>
-                  <a:srgbClr val="F2F4F8"/>
+                  <a:srgbClr val="F6EFE7"/>
                 </a:solidFill>
               </a:rPr>
               <a:t>Работаем в дневные часы, когда ТЦ пустой</a:t>
@@ -5978,7 +5978,7 @@
     <p:bg>
       <p:bgPr>
         <a:solidFill>
-          <a:srgbClr val="141820"/>
+          <a:srgbClr val="1A1310"/>
         </a:solidFill>
         <a:effectLst/>
       </p:bgPr>
@@ -5992,7 +5992,7 @@
       <p:grpSpPr/>
       <p:pic>
         <p:nvPicPr>
-          <p:cNvPr id="2" name="Picture 1" descr="mesh.png"/>
+          <p:cNvPr id="2" name="Picture 1" descr="mesh-C98A4B.png"/>
           <p:cNvPicPr>
             <a:picLocks noChangeAspect="1"/>
           </p:cNvPicPr>
@@ -6035,10 +6035,10 @@
           <a:gradFill rotWithShape="1">
             <a:gsLst>
               <a:gs pos="0">
-                <a:srgbClr val="4C9AFF"/>
+                <a:srgbClr val="C98A4B"/>
               </a:gs>
               <a:gs pos="100000">
-                <a:srgbClr val="7B61FF"/>
+                <a:srgbClr val="8C5A2B"/>
               </a:gs>
             </a:gsLst>
             <a:lin scaled="0" ang="18900000"/>
@@ -6048,7 +6048,7 @@
           </a:ln>
           <a:effectLst>
             <a:glow rad="127000">
-              <a:srgbClr val="4C9AFF">
+              <a:srgbClr val="C98A4B">
                 <a:alpha val="55000"/>
               </a:srgbClr>
             </a:glow>
@@ -6106,7 +6106,7 @@
             <a:r>
               <a:rPr sz="3200" b="1">
                 <a:solidFill>
-                  <a:srgbClr val="F2F4F8"/>
+                  <a:srgbClr val="F6EFE7"/>
                 </a:solidFill>
               </a:rPr>
               <a:t>Партнёрам: издательства, обжарщики, бренды</a:t>
@@ -6133,10 +6133,10 @@
           <a:gradFill rotWithShape="1">
             <a:gsLst>
               <a:gs pos="0">
-                <a:srgbClr val="1E2430"/>
+                <a:srgbClr val="241A15"/>
               </a:gs>
               <a:gs pos="100000">
-                <a:srgbClr val="2C3442"/>
+                <a:srgbClr val="31241C"/>
               </a:gs>
             </a:gsLst>
             <a:lin scaled="0" ang="18900000"/>
@@ -6193,10 +6193,10 @@
           <a:gradFill rotWithShape="1">
             <a:gsLst>
               <a:gs pos="0">
-                <a:srgbClr val="4C9AFF"/>
+                <a:srgbClr val="C98A4B"/>
               </a:gs>
               <a:gs pos="100000">
-                <a:srgbClr val="7B61FF"/>
+                <a:srgbClr val="8C5A2B"/>
               </a:gs>
             </a:gsLst>
             <a:lin scaled="0" ang="18900000"/>
@@ -6245,10 +6245,10 @@
           <a:gradFill rotWithShape="1">
             <a:gsLst>
               <a:gs pos="0">
-                <a:srgbClr val="4C9AFF"/>
+                <a:srgbClr val="C98A4B"/>
               </a:gs>
               <a:gs pos="100000">
-                <a:srgbClr val="7B61FF"/>
+                <a:srgbClr val="8C5A2B"/>
               </a:gs>
             </a:gsLst>
             <a:lin scaled="0" ang="19800000"/>
@@ -6258,7 +6258,7 @@
           </a:ln>
           <a:effectLst>
             <a:glow rad="88900">
-              <a:srgbClr val="4C9AFF">
+              <a:srgbClr val="C98A4B">
                 <a:alpha val="38000"/>
               </a:srgbClr>
             </a:glow>
@@ -6316,7 +6316,7 @@
             <a:r>
               <a:rPr sz="1400" b="1">
                 <a:solidFill>
-                  <a:srgbClr val="141820"/>
+                  <a:srgbClr val="1A1310"/>
                 </a:solidFill>
               </a:rPr>
               <a:t>1</a:t>
@@ -6354,7 +6354,7 @@
             <a:r>
               <a:rPr sz="1800" b="0">
                 <a:solidFill>
-                  <a:srgbClr val="F2F4F8"/>
+                  <a:srgbClr val="F6EFE7"/>
                 </a:solidFill>
               </a:rPr>
               <a:t>Издательствам - площадка для презентаций и продаж</a:t>
@@ -6381,10 +6381,10 @@
           <a:gradFill rotWithShape="1">
             <a:gsLst>
               <a:gs pos="0">
-                <a:srgbClr val="1E2430"/>
+                <a:srgbClr val="241A15"/>
               </a:gs>
               <a:gs pos="100000">
-                <a:srgbClr val="2C3442"/>
+                <a:srgbClr val="31241C"/>
               </a:gs>
             </a:gsLst>
             <a:lin scaled="0" ang="18900000"/>
@@ -6441,10 +6441,10 @@
           <a:gradFill rotWithShape="1">
             <a:gsLst>
               <a:gs pos="0">
-                <a:srgbClr val="4C9AFF"/>
+                <a:srgbClr val="C98A4B"/>
               </a:gs>
               <a:gs pos="100000">
-                <a:srgbClr val="7B61FF"/>
+                <a:srgbClr val="8C5A2B"/>
               </a:gs>
             </a:gsLst>
             <a:lin scaled="0" ang="18900000"/>
@@ -6493,10 +6493,10 @@
           <a:gradFill rotWithShape="1">
             <a:gsLst>
               <a:gs pos="0">
-                <a:srgbClr val="4C9AFF"/>
+                <a:srgbClr val="C98A4B"/>
               </a:gs>
               <a:gs pos="100000">
-                <a:srgbClr val="7B61FF"/>
+                <a:srgbClr val="8C5A2B"/>
               </a:gs>
             </a:gsLst>
             <a:lin scaled="0" ang="19800000"/>
@@ -6506,7 +6506,7 @@
           </a:ln>
           <a:effectLst>
             <a:glow rad="88900">
-              <a:srgbClr val="4C9AFF">
+              <a:srgbClr val="C98A4B">
                 <a:alpha val="38000"/>
               </a:srgbClr>
             </a:glow>
@@ -6564,7 +6564,7 @@
             <a:r>
               <a:rPr sz="1400" b="1">
                 <a:solidFill>
-                  <a:srgbClr val="141820"/>
+                  <a:srgbClr val="1A1310"/>
                 </a:solidFill>
               </a:rPr>
               <a:t>2</a:t>
@@ -6602,7 +6602,7 @@
             <a:r>
               <a:rPr sz="1800" b="0">
                 <a:solidFill>
-                  <a:srgbClr val="F2F4F8"/>
+                  <a:srgbClr val="F6EFE7"/>
                 </a:solidFill>
               </a:rPr>
               <a:t>Обжарщикам - витрина и стабильный объём закупки</a:t>
@@ -6629,10 +6629,10 @@
           <a:gradFill rotWithShape="1">
             <a:gsLst>
               <a:gs pos="0">
-                <a:srgbClr val="1E2430"/>
+                <a:srgbClr val="241A15"/>
               </a:gs>
               <a:gs pos="100000">
-                <a:srgbClr val="2C3442"/>
+                <a:srgbClr val="31241C"/>
               </a:gs>
             </a:gsLst>
             <a:lin scaled="0" ang="18900000"/>
@@ -6689,10 +6689,10 @@
           <a:gradFill rotWithShape="1">
             <a:gsLst>
               <a:gs pos="0">
-                <a:srgbClr val="4C9AFF"/>
+                <a:srgbClr val="C98A4B"/>
               </a:gs>
               <a:gs pos="100000">
-                <a:srgbClr val="7B61FF"/>
+                <a:srgbClr val="8C5A2B"/>
               </a:gs>
             </a:gsLst>
             <a:lin scaled="0" ang="18900000"/>
@@ -6741,10 +6741,10 @@
           <a:gradFill rotWithShape="1">
             <a:gsLst>
               <a:gs pos="0">
-                <a:srgbClr val="4C9AFF"/>
+                <a:srgbClr val="C98A4B"/>
               </a:gs>
               <a:gs pos="100000">
-                <a:srgbClr val="7B61FF"/>
+                <a:srgbClr val="8C5A2B"/>
               </a:gs>
             </a:gsLst>
             <a:lin scaled="0" ang="19800000"/>
@@ -6754,7 +6754,7 @@
           </a:ln>
           <a:effectLst>
             <a:glow rad="88900">
-              <a:srgbClr val="4C9AFF">
+              <a:srgbClr val="C98A4B">
                 <a:alpha val="38000"/>
               </a:srgbClr>
             </a:glow>
@@ -6812,7 +6812,7 @@
             <a:r>
               <a:rPr sz="1400" b="1">
                 <a:solidFill>
-                  <a:srgbClr val="141820"/>
+                  <a:srgbClr val="1A1310"/>
                 </a:solidFill>
               </a:rPr>
               <a:t>3</a:t>
@@ -6850,7 +6850,7 @@
             <a:r>
               <a:rPr sz="1800" b="0">
                 <a:solidFill>
-                  <a:srgbClr val="F2F4F8"/>
+                  <a:srgbClr val="F6EFE7"/>
                 </a:solidFill>
               </a:rPr>
               <a:t>Брендам - тематические полки и коллаборации</a:t>
@@ -6877,10 +6877,10 @@
           <a:gradFill rotWithShape="1">
             <a:gsLst>
               <a:gs pos="0">
-                <a:srgbClr val="1E2430"/>
+                <a:srgbClr val="241A15"/>
               </a:gs>
               <a:gs pos="100000">
-                <a:srgbClr val="2C3442"/>
+                <a:srgbClr val="31241C"/>
               </a:gs>
             </a:gsLst>
             <a:lin scaled="0" ang="18900000"/>
@@ -6937,10 +6937,10 @@
           <a:gradFill rotWithShape="1">
             <a:gsLst>
               <a:gs pos="0">
-                <a:srgbClr val="4C9AFF"/>
+                <a:srgbClr val="C98A4B"/>
               </a:gs>
               <a:gs pos="100000">
-                <a:srgbClr val="7B61FF"/>
+                <a:srgbClr val="8C5A2B"/>
               </a:gs>
             </a:gsLst>
             <a:lin scaled="0" ang="18900000"/>
@@ -6989,10 +6989,10 @@
           <a:gradFill rotWithShape="1">
             <a:gsLst>
               <a:gs pos="0">
-                <a:srgbClr val="4C9AFF"/>
+                <a:srgbClr val="C98A4B"/>
               </a:gs>
               <a:gs pos="100000">
-                <a:srgbClr val="7B61FF"/>
+                <a:srgbClr val="8C5A2B"/>
               </a:gs>
             </a:gsLst>
             <a:lin scaled="0" ang="19800000"/>
@@ -7002,7 +7002,7 @@
           </a:ln>
           <a:effectLst>
             <a:glow rad="88900">
-              <a:srgbClr val="4C9AFF">
+              <a:srgbClr val="C98A4B">
                 <a:alpha val="38000"/>
               </a:srgbClr>
             </a:glow>
@@ -7060,7 +7060,7 @@
             <a:r>
               <a:rPr sz="1400" b="1">
                 <a:solidFill>
-                  <a:srgbClr val="141820"/>
+                  <a:srgbClr val="1A1310"/>
                 </a:solidFill>
               </a:rPr>
               <a:t>4</a:t>
@@ -7098,7 +7098,7 @@
             <a:r>
               <a:rPr sz="1800" b="0">
                 <a:solidFill>
-                  <a:srgbClr val="F2F4F8"/>
+                  <a:srgbClr val="F6EFE7"/>
                 </a:solidFill>
               </a:rPr>
               <a:t>Прозрачная отчётность по продажам каждый месяц</a:t>
@@ -7472,7 +7472,7 @@
     <p:bg>
       <p:bgPr>
         <a:solidFill>
-          <a:srgbClr val="141820"/>
+          <a:srgbClr val="1A1310"/>
         </a:solidFill>
         <a:effectLst/>
       </p:bgPr>
@@ -7486,7 +7486,7 @@
       <p:grpSpPr/>
       <p:pic>
         <p:nvPicPr>
-          <p:cNvPr id="2" name="Picture 1" descr="waves.png"/>
+          <p:cNvPr id="2" name="Picture 1" descr="aurora-C98A4B.png"/>
           <p:cNvPicPr>
             <a:picLocks noChangeAspect="1"/>
           </p:cNvPicPr>
@@ -7529,10 +7529,10 @@
           <a:gradFill rotWithShape="1">
             <a:gsLst>
               <a:gs pos="0">
-                <a:srgbClr val="4C9AFF"/>
+                <a:srgbClr val="C98A4B"/>
               </a:gs>
               <a:gs pos="100000">
-                <a:srgbClr val="7B61FF"/>
+                <a:srgbClr val="8C5A2B"/>
               </a:gs>
             </a:gsLst>
             <a:lin scaled="0" ang="18900000"/>
@@ -7542,7 +7542,7 @@
           </a:ln>
           <a:effectLst>
             <a:glow rad="127000">
-              <a:srgbClr val="4C9AFF">
+              <a:srgbClr val="C98A4B">
                 <a:alpha val="55000"/>
               </a:srgbClr>
             </a:glow>
@@ -7600,7 +7600,7 @@
             <a:r>
               <a:rPr sz="3200" b="1">
                 <a:solidFill>
-                  <a:srgbClr val="F2F4F8"/>
+                  <a:srgbClr val="F6EFE7"/>
                 </a:solidFill>
               </a:rPr>
               <a:t>Первая точка - осень, вторая - через год</a:t>
@@ -7627,10 +7627,10 @@
           <a:gradFill rotWithShape="1">
             <a:gsLst>
               <a:gs pos="0">
-                <a:srgbClr val="1E2430"/>
+                <a:srgbClr val="241A15"/>
               </a:gs>
               <a:gs pos="100000">
-                <a:srgbClr val="2C3442"/>
+                <a:srgbClr val="31241C"/>
               </a:gs>
             </a:gsLst>
             <a:lin scaled="0" ang="18900000"/>
@@ -7687,10 +7687,10 @@
           <a:gradFill rotWithShape="1">
             <a:gsLst>
               <a:gs pos="0">
-                <a:srgbClr val="4C9AFF"/>
+                <a:srgbClr val="C98A4B"/>
               </a:gs>
               <a:gs pos="100000">
-                <a:srgbClr val="7B61FF"/>
+                <a:srgbClr val="8C5A2B"/>
               </a:gs>
             </a:gsLst>
             <a:lin scaled="0" ang="18900000"/>
@@ -7739,10 +7739,10 @@
           <a:gradFill rotWithShape="1">
             <a:gsLst>
               <a:gs pos="0">
-                <a:srgbClr val="4C9AFF"/>
+                <a:srgbClr val="C98A4B"/>
               </a:gs>
               <a:gs pos="100000">
-                <a:srgbClr val="7B61FF"/>
+                <a:srgbClr val="8C5A2B"/>
               </a:gs>
             </a:gsLst>
             <a:lin scaled="0" ang="19800000"/>
@@ -7752,7 +7752,7 @@
           </a:ln>
           <a:effectLst>
             <a:glow rad="88900">
-              <a:srgbClr val="4C9AFF">
+              <a:srgbClr val="C98A4B">
                 <a:alpha val="38000"/>
               </a:srgbClr>
             </a:glow>
@@ -7810,7 +7810,7 @@
             <a:r>
               <a:rPr sz="1400" b="1">
                 <a:solidFill>
-                  <a:srgbClr val="141820"/>
+                  <a:srgbClr val="1A1310"/>
                 </a:solidFill>
               </a:rPr>
               <a:t>1</a:t>
@@ -7848,7 +7848,7 @@
             <a:r>
               <a:rPr sz="1800" b="0">
                 <a:solidFill>
-                  <a:srgbClr val="F2F4F8"/>
+                  <a:srgbClr val="F6EFE7"/>
                 </a:solidFill>
               </a:rPr>
               <a:t>Сентябрь - подписание и начало ремонта</a:t>
@@ -7875,10 +7875,10 @@
           <a:gradFill rotWithShape="1">
             <a:gsLst>
               <a:gs pos="0">
-                <a:srgbClr val="1E2430"/>
+                <a:srgbClr val="241A15"/>
               </a:gs>
               <a:gs pos="100000">
-                <a:srgbClr val="2C3442"/>
+                <a:srgbClr val="31241C"/>
               </a:gs>
             </a:gsLst>
             <a:lin scaled="0" ang="18900000"/>
@@ -7935,10 +7935,10 @@
           <a:gradFill rotWithShape="1">
             <a:gsLst>
               <a:gs pos="0">
-                <a:srgbClr val="4C9AFF"/>
+                <a:srgbClr val="C98A4B"/>
               </a:gs>
               <a:gs pos="100000">
-                <a:srgbClr val="7B61FF"/>
+                <a:srgbClr val="8C5A2B"/>
               </a:gs>
             </a:gsLst>
             <a:lin scaled="0" ang="18900000"/>
@@ -7987,10 +7987,10 @@
           <a:gradFill rotWithShape="1">
             <a:gsLst>
               <a:gs pos="0">
-                <a:srgbClr val="4C9AFF"/>
+                <a:srgbClr val="C98A4B"/>
               </a:gs>
               <a:gs pos="100000">
-                <a:srgbClr val="7B61FF"/>
+                <a:srgbClr val="8C5A2B"/>
               </a:gs>
             </a:gsLst>
             <a:lin scaled="0" ang="19800000"/>
@@ -8000,7 +8000,7 @@
           </a:ln>
           <a:effectLst>
             <a:glow rad="88900">
-              <a:srgbClr val="4C9AFF">
+              <a:srgbClr val="C98A4B">
                 <a:alpha val="38000"/>
               </a:srgbClr>
             </a:glow>
@@ -8058,7 +8058,7 @@
             <a:r>
               <a:rPr sz="1400" b="1">
                 <a:solidFill>
-                  <a:srgbClr val="141820"/>
+                  <a:srgbClr val="1A1310"/>
                 </a:solidFill>
               </a:rPr>
               <a:t>2</a:t>
@@ -8096,7 +8096,7 @@
             <a:r>
               <a:rPr sz="1800" b="0">
                 <a:solidFill>
-                  <a:srgbClr val="F2F4F8"/>
+                  <a:srgbClr val="F6EFE7"/>
                 </a:solidFill>
               </a:rPr>
               <a:t>Декабрь - открытие к высокому сезону</a:t>
@@ -8123,10 +8123,10 @@
           <a:gradFill rotWithShape="1">
             <a:gsLst>
               <a:gs pos="0">
-                <a:srgbClr val="1E2430"/>
+                <a:srgbClr val="241A15"/>
               </a:gs>
               <a:gs pos="100000">
-                <a:srgbClr val="2C3442"/>
+                <a:srgbClr val="31241C"/>
               </a:gs>
             </a:gsLst>
             <a:lin scaled="0" ang="18900000"/>
@@ -8183,10 +8183,10 @@
           <a:gradFill rotWithShape="1">
             <a:gsLst>
               <a:gs pos="0">
-                <a:srgbClr val="4C9AFF"/>
+                <a:srgbClr val="C98A4B"/>
               </a:gs>
               <a:gs pos="100000">
-                <a:srgbClr val="7B61FF"/>
+                <a:srgbClr val="8C5A2B"/>
               </a:gs>
             </a:gsLst>
             <a:lin scaled="0" ang="18900000"/>
@@ -8235,10 +8235,10 @@
           <a:gradFill rotWithShape="1">
             <a:gsLst>
               <a:gs pos="0">
-                <a:srgbClr val="4C9AFF"/>
+                <a:srgbClr val="C98A4B"/>
               </a:gs>
               <a:gs pos="100000">
-                <a:srgbClr val="7B61FF"/>
+                <a:srgbClr val="8C5A2B"/>
               </a:gs>
             </a:gsLst>
             <a:lin scaled="0" ang="19800000"/>
@@ -8248,7 +8248,7 @@
           </a:ln>
           <a:effectLst>
             <a:glow rad="88900">
-              <a:srgbClr val="4C9AFF">
+              <a:srgbClr val="C98A4B">
                 <a:alpha val="38000"/>
               </a:srgbClr>
             </a:glow>
@@ -8306,7 +8306,7 @@
             <a:r>
               <a:rPr sz="1400" b="1">
                 <a:solidFill>
-                  <a:srgbClr val="141820"/>
+                  <a:srgbClr val="1A1310"/>
                 </a:solidFill>
               </a:rPr>
               <a:t>3</a:t>
@@ -8344,7 +8344,7 @@
             <a:r>
               <a:rPr sz="1800" b="0">
                 <a:solidFill>
-                  <a:srgbClr val="F2F4F8"/>
+                  <a:srgbClr val="F6EFE7"/>
                 </a:solidFill>
               </a:rPr>
               <a:t>Полгода - выход на плановые показатели</a:t>
@@ -8371,10 +8371,10 @@
           <a:gradFill rotWithShape="1">
             <a:gsLst>
               <a:gs pos="0">
-                <a:srgbClr val="1E2430"/>
+                <a:srgbClr val="241A15"/>
               </a:gs>
               <a:gs pos="100000">
-                <a:srgbClr val="2C3442"/>
+                <a:srgbClr val="31241C"/>
               </a:gs>
             </a:gsLst>
             <a:lin scaled="0" ang="18900000"/>
@@ -8431,10 +8431,10 @@
           <a:gradFill rotWithShape="1">
             <a:gsLst>
               <a:gs pos="0">
-                <a:srgbClr val="4C9AFF"/>
+                <a:srgbClr val="C98A4B"/>
               </a:gs>
               <a:gs pos="100000">
-                <a:srgbClr val="7B61FF"/>
+                <a:srgbClr val="8C5A2B"/>
               </a:gs>
             </a:gsLst>
             <a:lin scaled="0" ang="18900000"/>
@@ -8483,10 +8483,10 @@
           <a:gradFill rotWithShape="1">
             <a:gsLst>
               <a:gs pos="0">
-                <a:srgbClr val="4C9AFF"/>
+                <a:srgbClr val="C98A4B"/>
               </a:gs>
               <a:gs pos="100000">
-                <a:srgbClr val="7B61FF"/>
+                <a:srgbClr val="8C5A2B"/>
               </a:gs>
             </a:gsLst>
             <a:lin scaled="0" ang="19800000"/>
@@ -8496,7 +8496,7 @@
           </a:ln>
           <a:effectLst>
             <a:glow rad="88900">
-              <a:srgbClr val="4C9AFF">
+              <a:srgbClr val="C98A4B">
                 <a:alpha val="38000"/>
               </a:srgbClr>
             </a:glow>
@@ -8554,7 +8554,7 @@
             <a:r>
               <a:rPr sz="1400" b="1">
                 <a:solidFill>
-                  <a:srgbClr val="141820"/>
+                  <a:srgbClr val="1A1310"/>
                 </a:solidFill>
               </a:rPr>
               <a:t>4</a:t>
@@ -8592,7 +8592,7 @@
             <a:r>
               <a:rPr sz="1800" b="0">
                 <a:solidFill>
-                  <a:srgbClr val="F2F4F8"/>
+                  <a:srgbClr val="F6EFE7"/>
                 </a:solidFill>
               </a:rPr>
               <a:t>Через год - вторая точка в сети ТЦ</a:t>
@@ -8966,7 +8966,7 @@
     <p:bg>
       <p:bgPr>
         <a:solidFill>
-          <a:srgbClr val="141820"/>
+          <a:srgbClr val="1A1310"/>
         </a:solidFill>
         <a:effectLst/>
       </p:bgPr>
@@ -8980,7 +8980,7 @@
       <p:grpSpPr/>
       <p:pic>
         <p:nvPicPr>
-          <p:cNvPr id="2" name="Picture 1" descr="rings.png"/>
+          <p:cNvPr id="2" name="Picture 1" descr="waves-C98A4B.png"/>
           <p:cNvPicPr>
             <a:picLocks noChangeAspect="1"/>
           </p:cNvPicPr>
@@ -9023,10 +9023,10 @@
           <a:gradFill rotWithShape="1">
             <a:gsLst>
               <a:gs pos="0">
-                <a:srgbClr val="4C9AFF"/>
+                <a:srgbClr val="C98A4B"/>
               </a:gs>
               <a:gs pos="100000">
-                <a:srgbClr val="7B61FF"/>
+                <a:srgbClr val="8C5A2B"/>
               </a:gs>
             </a:gsLst>
             <a:lin scaled="0" ang="18900000"/>
@@ -9036,7 +9036,7 @@
           </a:ln>
           <a:effectLst>
             <a:glow rad="127000">
-              <a:srgbClr val="4C9AFF">
+              <a:srgbClr val="C98A4B">
                 <a:alpha val="55000"/>
               </a:srgbClr>
             </a:glow>
@@ -9094,7 +9094,7 @@
             <a:r>
               <a:rPr sz="3200" b="1">
                 <a:solidFill>
-                  <a:srgbClr val="F2F4F8"/>
+                  <a:srgbClr val="F6EFE7"/>
                 </a:solidFill>
               </a:rPr>
               <a:t>О чём договариваемся сейчас</a:t>
@@ -9121,10 +9121,10 @@
           <a:gradFill rotWithShape="1">
             <a:gsLst>
               <a:gs pos="0">
-                <a:srgbClr val="1E2430"/>
+                <a:srgbClr val="241A15"/>
               </a:gs>
               <a:gs pos="100000">
-                <a:srgbClr val="2C3442"/>
+                <a:srgbClr val="31241C"/>
               </a:gs>
             </a:gsLst>
             <a:lin scaled="0" ang="18900000"/>
@@ -9181,10 +9181,10 @@
           <a:gradFill rotWithShape="1">
             <a:gsLst>
               <a:gs pos="0">
-                <a:srgbClr val="4C9AFF"/>
+                <a:srgbClr val="C98A4B"/>
               </a:gs>
               <a:gs pos="100000">
-                <a:srgbClr val="7B61FF"/>
+                <a:srgbClr val="8C5A2B"/>
               </a:gs>
             </a:gsLst>
             <a:lin scaled="0" ang="18900000"/>
@@ -9233,10 +9233,10 @@
           <a:gradFill rotWithShape="1">
             <a:gsLst>
               <a:gs pos="0">
-                <a:srgbClr val="4C9AFF"/>
+                <a:srgbClr val="C98A4B"/>
               </a:gs>
               <a:gs pos="100000">
-                <a:srgbClr val="7B61FF"/>
+                <a:srgbClr val="8C5A2B"/>
               </a:gs>
             </a:gsLst>
             <a:lin scaled="0" ang="19800000"/>
@@ -9246,7 +9246,7 @@
           </a:ln>
           <a:effectLst>
             <a:glow rad="88900">
-              <a:srgbClr val="4C9AFF">
+              <a:srgbClr val="C98A4B">
                 <a:alpha val="38000"/>
               </a:srgbClr>
             </a:glow>
@@ -9304,7 +9304,7 @@
             <a:r>
               <a:rPr sz="1400" b="1">
                 <a:solidFill>
-                  <a:srgbClr val="141820"/>
+                  <a:srgbClr val="1A1310"/>
                 </a:solidFill>
               </a:rPr>
               <a:t>1</a:t>
@@ -9342,7 +9342,7 @@
             <a:r>
               <a:rPr sz="1800" b="0">
                 <a:solidFill>
-                  <a:srgbClr val="F2F4F8"/>
+                  <a:srgbClr val="F6EFE7"/>
                 </a:solidFill>
               </a:rPr>
               <a:t>Просмотр помещения и замеры</a:t>
@@ -9369,10 +9369,10 @@
           <a:gradFill rotWithShape="1">
             <a:gsLst>
               <a:gs pos="0">
-                <a:srgbClr val="1E2430"/>
+                <a:srgbClr val="241A15"/>
               </a:gs>
               <a:gs pos="100000">
-                <a:srgbClr val="2C3442"/>
+                <a:srgbClr val="31241C"/>
               </a:gs>
             </a:gsLst>
             <a:lin scaled="0" ang="18900000"/>
@@ -9429,10 +9429,10 @@
           <a:gradFill rotWithShape="1">
             <a:gsLst>
               <a:gs pos="0">
-                <a:srgbClr val="4C9AFF"/>
+                <a:srgbClr val="C98A4B"/>
               </a:gs>
               <a:gs pos="100000">
-                <a:srgbClr val="7B61FF"/>
+                <a:srgbClr val="8C5A2B"/>
               </a:gs>
             </a:gsLst>
             <a:lin scaled="0" ang="18900000"/>
@@ -9481,10 +9481,10 @@
           <a:gradFill rotWithShape="1">
             <a:gsLst>
               <a:gs pos="0">
-                <a:srgbClr val="4C9AFF"/>
+                <a:srgbClr val="C98A4B"/>
               </a:gs>
               <a:gs pos="100000">
-                <a:srgbClr val="7B61FF"/>
+                <a:srgbClr val="8C5A2B"/>
               </a:gs>
             </a:gsLst>
             <a:lin scaled="0" ang="19800000"/>
@@ -9494,7 +9494,7 @@
           </a:ln>
           <a:effectLst>
             <a:glow rad="88900">
-              <a:srgbClr val="4C9AFF">
+              <a:srgbClr val="C98A4B">
                 <a:alpha val="38000"/>
               </a:srgbClr>
             </a:glow>
@@ -9552,7 +9552,7 @@
             <a:r>
               <a:rPr sz="1400" b="1">
                 <a:solidFill>
-                  <a:srgbClr val="141820"/>
+                  <a:srgbClr val="1A1310"/>
                 </a:solidFill>
               </a:rPr>
               <a:t>2</a:t>
@@ -9590,7 +9590,7 @@
             <a:r>
               <a:rPr sz="1800" b="0">
                 <a:solidFill>
-                  <a:srgbClr val="F2F4F8"/>
+                  <a:srgbClr val="F6EFE7"/>
                 </a:solidFill>
               </a:rPr>
               <a:t>Арендные каникулы на период ремонта - 3 месяца</a:t>
@@ -9617,10 +9617,10 @@
           <a:gradFill rotWithShape="1">
             <a:gsLst>
               <a:gs pos="0">
-                <a:srgbClr val="1E2430"/>
+                <a:srgbClr val="241A15"/>
               </a:gs>
               <a:gs pos="100000">
-                <a:srgbClr val="2C3442"/>
+                <a:srgbClr val="31241C"/>
               </a:gs>
             </a:gsLst>
             <a:lin scaled="0" ang="18900000"/>
@@ -9677,10 +9677,10 @@
           <a:gradFill rotWithShape="1">
             <a:gsLst>
               <a:gs pos="0">
-                <a:srgbClr val="4C9AFF"/>
+                <a:srgbClr val="C98A4B"/>
               </a:gs>
               <a:gs pos="100000">
-                <a:srgbClr val="7B61FF"/>
+                <a:srgbClr val="8C5A2B"/>
               </a:gs>
             </a:gsLst>
             <a:lin scaled="0" ang="18900000"/>
@@ -9729,10 +9729,10 @@
           <a:gradFill rotWithShape="1">
             <a:gsLst>
               <a:gs pos="0">
-                <a:srgbClr val="4C9AFF"/>
+                <a:srgbClr val="C98A4B"/>
               </a:gs>
               <a:gs pos="100000">
-                <a:srgbClr val="7B61FF"/>
+                <a:srgbClr val="8C5A2B"/>
               </a:gs>
             </a:gsLst>
             <a:lin scaled="0" ang="19800000"/>
@@ -9742,7 +9742,7 @@
           </a:ln>
           <a:effectLst>
             <a:glow rad="88900">
-              <a:srgbClr val="4C9AFF">
+              <a:srgbClr val="C98A4B">
                 <a:alpha val="38000"/>
               </a:srgbClr>
             </a:glow>
@@ -9800,7 +9800,7 @@
             <a:r>
               <a:rPr sz="1400" b="1">
                 <a:solidFill>
-                  <a:srgbClr val="141820"/>
+                  <a:srgbClr val="1A1310"/>
                 </a:solidFill>
               </a:rPr>
               <a:t>3</a:t>
@@ -9838,7 +9838,7 @@
             <a:r>
               <a:rPr sz="1800" b="0">
                 <a:solidFill>
-                  <a:srgbClr val="F2F4F8"/>
+                  <a:srgbClr val="F6EFE7"/>
                 </a:solidFill>
               </a:rPr>
               <a:t>Пилот на 12 месяцев с опцией продления</a:t>
@@ -9865,10 +9865,10 @@
           <a:gradFill rotWithShape="1">
             <a:gsLst>
               <a:gs pos="0">
-                <a:srgbClr val="1E2430"/>
+                <a:srgbClr val="241A15"/>
               </a:gs>
               <a:gs pos="100000">
-                <a:srgbClr val="2C3442"/>
+                <a:srgbClr val="31241C"/>
               </a:gs>
             </a:gsLst>
             <a:lin scaled="0" ang="18900000"/>
@@ -9925,10 +9925,10 @@
           <a:gradFill rotWithShape="1">
             <a:gsLst>
               <a:gs pos="0">
-                <a:srgbClr val="4C9AFF"/>
+                <a:srgbClr val="C98A4B"/>
               </a:gs>
               <a:gs pos="100000">
-                <a:srgbClr val="7B61FF"/>
+                <a:srgbClr val="8C5A2B"/>
               </a:gs>
             </a:gsLst>
             <a:lin scaled="0" ang="18900000"/>
@@ -9977,10 +9977,10 @@
           <a:gradFill rotWithShape="1">
             <a:gsLst>
               <a:gs pos="0">
-                <a:srgbClr val="4C9AFF"/>
+                <a:srgbClr val="C98A4B"/>
               </a:gs>
               <a:gs pos="100000">
-                <a:srgbClr val="7B61FF"/>
+                <a:srgbClr val="8C5A2B"/>
               </a:gs>
             </a:gsLst>
             <a:lin scaled="0" ang="19800000"/>
@@ -9990,7 +9990,7 @@
           </a:ln>
           <a:effectLst>
             <a:glow rad="88900">
-              <a:srgbClr val="4C9AFF">
+              <a:srgbClr val="C98A4B">
                 <a:alpha val="38000"/>
               </a:srgbClr>
             </a:glow>
@@ -10048,7 +10048,7 @@
             <a:r>
               <a:rPr sz="1400" b="1">
                 <a:solidFill>
-                  <a:srgbClr val="141820"/>
+                  <a:srgbClr val="1A1310"/>
                 </a:solidFill>
               </a:rPr>
               <a:t>4</a:t>
@@ -10086,7 +10086,7 @@
             <a:r>
               <a:rPr sz="1800" b="0">
                 <a:solidFill>
-                  <a:srgbClr val="F2F4F8"/>
+                  <a:srgbClr val="F6EFE7"/>
                 </a:solidFill>
               </a:rPr>
               <a:t>Встреча с партнёрами по ассортименту</a:t>
@@ -10460,7 +10460,7 @@
     <p:bg>
       <p:bgPr>
         <a:solidFill>
-          <a:srgbClr val="141820"/>
+          <a:srgbClr val="1A1310"/>
         </a:solidFill>
         <a:effectLst/>
       </p:bgPr>
@@ -10474,7 +10474,7 @@
       <p:grpSpPr/>
       <p:pic>
         <p:nvPicPr>
-          <p:cNvPr id="2" name="Picture 1" descr="rings.png"/>
+          <p:cNvPr id="2" name="Picture 1" descr="mesh-C98A4B.png"/>
           <p:cNvPicPr>
             <a:picLocks noChangeAspect="1"/>
           </p:cNvPicPr>
@@ -10517,10 +10517,10 @@
           <a:gradFill rotWithShape="1">
             <a:gsLst>
               <a:gs pos="0">
-                <a:srgbClr val="4C9AFF"/>
+                <a:srgbClr val="C98A4B"/>
               </a:gs>
               <a:gs pos="100000">
-                <a:srgbClr val="7B61FF"/>
+                <a:srgbClr val="8C5A2B"/>
               </a:gs>
             </a:gsLst>
             <a:lin scaled="0" ang="18900000"/>
@@ -10530,7 +10530,7 @@
           </a:ln>
           <a:effectLst>
             <a:glow rad="127000">
-              <a:srgbClr val="4C9AFF">
+              <a:srgbClr val="C98A4B">
                 <a:alpha val="55000"/>
               </a:srgbClr>
             </a:glow>
@@ -10588,7 +10588,7 @@
             <a:r>
               <a:rPr sz="3200" b="1">
                 <a:solidFill>
-                  <a:srgbClr val="F2F4F8"/>
+                  <a:srgbClr val="F6EFE7"/>
                 </a:solidFill>
               </a:rPr>
               <a:t>Книжный, в котором задерживаются на час</a:t>
@@ -10615,10 +10615,10 @@
           <a:gradFill rotWithShape="1">
             <a:gsLst>
               <a:gs pos="0">
-                <a:srgbClr val="1E2430"/>
+                <a:srgbClr val="241A15"/>
               </a:gs>
               <a:gs pos="100000">
-                <a:srgbClr val="2C3442"/>
+                <a:srgbClr val="31241C"/>
               </a:gs>
             </a:gsLst>
             <a:lin scaled="0" ang="18900000"/>
@@ -10675,10 +10675,10 @@
           <a:gradFill rotWithShape="1">
             <a:gsLst>
               <a:gs pos="0">
-                <a:srgbClr val="4C9AFF"/>
+                <a:srgbClr val="C98A4B"/>
               </a:gs>
               <a:gs pos="100000">
-                <a:srgbClr val="7B61FF"/>
+                <a:srgbClr val="8C5A2B"/>
               </a:gs>
             </a:gsLst>
             <a:lin scaled="0" ang="18900000"/>
@@ -10727,10 +10727,10 @@
           <a:gradFill rotWithShape="1">
             <a:gsLst>
               <a:gs pos="0">
-                <a:srgbClr val="4C9AFF"/>
+                <a:srgbClr val="C98A4B"/>
               </a:gs>
               <a:gs pos="100000">
-                <a:srgbClr val="7B61FF"/>
+                <a:srgbClr val="8C5A2B"/>
               </a:gs>
             </a:gsLst>
             <a:lin scaled="0" ang="19800000"/>
@@ -10740,7 +10740,7 @@
           </a:ln>
           <a:effectLst>
             <a:glow rad="88900">
-              <a:srgbClr val="4C9AFF">
+              <a:srgbClr val="C98A4B">
                 <a:alpha val="38000"/>
               </a:srgbClr>
             </a:glow>
@@ -10798,7 +10798,7 @@
             <a:r>
               <a:rPr sz="1400" b="1">
                 <a:solidFill>
-                  <a:srgbClr val="141820"/>
+                  <a:srgbClr val="1A1310"/>
                 </a:solidFill>
               </a:rPr>
               <a:t>1</a:t>
@@ -10836,7 +10836,7 @@
             <a:r>
               <a:rPr sz="1800" b="0">
                 <a:solidFill>
-                  <a:srgbClr val="F2F4F8"/>
+                  <a:srgbClr val="F6EFE7"/>
                 </a:solidFill>
               </a:rPr>
               <a:t>Магазин книг и кофейня в одном зале</a:t>
@@ -10863,10 +10863,10 @@
           <a:gradFill rotWithShape="1">
             <a:gsLst>
               <a:gs pos="0">
-                <a:srgbClr val="1E2430"/>
+                <a:srgbClr val="241A15"/>
               </a:gs>
               <a:gs pos="100000">
-                <a:srgbClr val="2C3442"/>
+                <a:srgbClr val="31241C"/>
               </a:gs>
             </a:gsLst>
             <a:lin scaled="0" ang="18900000"/>
@@ -10923,10 +10923,10 @@
           <a:gradFill rotWithShape="1">
             <a:gsLst>
               <a:gs pos="0">
-                <a:srgbClr val="4C9AFF"/>
+                <a:srgbClr val="C98A4B"/>
               </a:gs>
               <a:gs pos="100000">
-                <a:srgbClr val="7B61FF"/>
+                <a:srgbClr val="8C5A2B"/>
               </a:gs>
             </a:gsLst>
             <a:lin scaled="0" ang="18900000"/>
@@ -10975,10 +10975,10 @@
           <a:gradFill rotWithShape="1">
             <a:gsLst>
               <a:gs pos="0">
-                <a:srgbClr val="4C9AFF"/>
+                <a:srgbClr val="C98A4B"/>
               </a:gs>
               <a:gs pos="100000">
-                <a:srgbClr val="7B61FF"/>
+                <a:srgbClr val="8C5A2B"/>
               </a:gs>
             </a:gsLst>
             <a:lin scaled="0" ang="19800000"/>
@@ -10988,7 +10988,7 @@
           </a:ln>
           <a:effectLst>
             <a:glow rad="88900">
-              <a:srgbClr val="4C9AFF">
+              <a:srgbClr val="C98A4B">
                 <a:alpha val="38000"/>
               </a:srgbClr>
             </a:glow>
@@ -11046,7 +11046,7 @@
             <a:r>
               <a:rPr sz="1400" b="1">
                 <a:solidFill>
-                  <a:srgbClr val="141820"/>
+                  <a:srgbClr val="1A1310"/>
                 </a:solidFill>
               </a:rPr>
               <a:t>2</a:t>
@@ -11084,7 +11084,7 @@
             <a:r>
               <a:rPr sz="1800" b="0">
                 <a:solidFill>
-                  <a:srgbClr val="F2F4F8"/>
+                  <a:srgbClr val="F6EFE7"/>
                 </a:solidFill>
               </a:rPr>
               <a:t>Покупка книги не обязательна для входа</a:t>
@@ -11111,10 +11111,10 @@
           <a:gradFill rotWithShape="1">
             <a:gsLst>
               <a:gs pos="0">
-                <a:srgbClr val="1E2430"/>
+                <a:srgbClr val="241A15"/>
               </a:gs>
               <a:gs pos="100000">
-                <a:srgbClr val="2C3442"/>
+                <a:srgbClr val="31241C"/>
               </a:gs>
             </a:gsLst>
             <a:lin scaled="0" ang="18900000"/>
@@ -11171,10 +11171,10 @@
           <a:gradFill rotWithShape="1">
             <a:gsLst>
               <a:gs pos="0">
-                <a:srgbClr val="4C9AFF"/>
+                <a:srgbClr val="C98A4B"/>
               </a:gs>
               <a:gs pos="100000">
-                <a:srgbClr val="7B61FF"/>
+                <a:srgbClr val="8C5A2B"/>
               </a:gs>
             </a:gsLst>
             <a:lin scaled="0" ang="18900000"/>
@@ -11223,10 +11223,10 @@
           <a:gradFill rotWithShape="1">
             <a:gsLst>
               <a:gs pos="0">
-                <a:srgbClr val="4C9AFF"/>
+                <a:srgbClr val="C98A4B"/>
               </a:gs>
               <a:gs pos="100000">
-                <a:srgbClr val="7B61FF"/>
+                <a:srgbClr val="8C5A2B"/>
               </a:gs>
             </a:gsLst>
             <a:lin scaled="0" ang="19800000"/>
@@ -11236,7 +11236,7 @@
           </a:ln>
           <a:effectLst>
             <a:glow rad="88900">
-              <a:srgbClr val="4C9AFF">
+              <a:srgbClr val="C98A4B">
                 <a:alpha val="38000"/>
               </a:srgbClr>
             </a:glow>
@@ -11294,7 +11294,7 @@
             <a:r>
               <a:rPr sz="1400" b="1">
                 <a:solidFill>
-                  <a:srgbClr val="141820"/>
+                  <a:srgbClr val="1A1310"/>
                 </a:solidFill>
               </a:rPr>
               <a:t>3</a:t>
@@ -11332,7 +11332,7 @@
             <a:r>
               <a:rPr sz="1800" b="0">
                 <a:solidFill>
-                  <a:srgbClr val="F2F4F8"/>
+                  <a:srgbClr val="F6EFE7"/>
                 </a:solidFill>
               </a:rPr>
               <a:t>Посадка на 24 места, средний визит 45 минут</a:t>
@@ -11359,10 +11359,10 @@
           <a:gradFill rotWithShape="1">
             <a:gsLst>
               <a:gs pos="0">
-                <a:srgbClr val="1E2430"/>
+                <a:srgbClr val="241A15"/>
               </a:gs>
               <a:gs pos="100000">
-                <a:srgbClr val="2C3442"/>
+                <a:srgbClr val="31241C"/>
               </a:gs>
             </a:gsLst>
             <a:lin scaled="0" ang="18900000"/>
@@ -11419,10 +11419,10 @@
           <a:gradFill rotWithShape="1">
             <a:gsLst>
               <a:gs pos="0">
-                <a:srgbClr val="4C9AFF"/>
+                <a:srgbClr val="C98A4B"/>
               </a:gs>
               <a:gs pos="100000">
-                <a:srgbClr val="7B61FF"/>
+                <a:srgbClr val="8C5A2B"/>
               </a:gs>
             </a:gsLst>
             <a:lin scaled="0" ang="18900000"/>
@@ -11471,10 +11471,10 @@
           <a:gradFill rotWithShape="1">
             <a:gsLst>
               <a:gs pos="0">
-                <a:srgbClr val="4C9AFF"/>
+                <a:srgbClr val="C98A4B"/>
               </a:gs>
               <a:gs pos="100000">
-                <a:srgbClr val="7B61FF"/>
+                <a:srgbClr val="8C5A2B"/>
               </a:gs>
             </a:gsLst>
             <a:lin scaled="0" ang="19800000"/>
@@ -11484,7 +11484,7 @@
           </a:ln>
           <a:effectLst>
             <a:glow rad="88900">
-              <a:srgbClr val="4C9AFF">
+              <a:srgbClr val="C98A4B">
                 <a:alpha val="38000"/>
               </a:srgbClr>
             </a:glow>
@@ -11542,7 +11542,7 @@
             <a:r>
               <a:rPr sz="1400" b="1">
                 <a:solidFill>
-                  <a:srgbClr val="141820"/>
+                  <a:srgbClr val="1A1310"/>
                 </a:solidFill>
               </a:rPr>
               <a:t>4</a:t>
@@ -11580,7 +11580,7 @@
             <a:r>
               <a:rPr sz="1800" b="0">
                 <a:solidFill>
-                  <a:srgbClr val="F2F4F8"/>
+                  <a:srgbClr val="F6EFE7"/>
                 </a:solidFill>
               </a:rPr>
               <a:t>Формат работает на возврат, а не на проходимость</a:t>
@@ -11954,7 +11954,7 @@
     <p:bg>
       <p:bgPr>
         <a:solidFill>
-          <a:srgbClr val="141820"/>
+          <a:srgbClr val="1A1310"/>
         </a:solidFill>
         <a:effectLst/>
       </p:bgPr>
@@ -11968,7 +11968,7 @@
       <p:grpSpPr/>
       <p:pic>
         <p:nvPicPr>
-          <p:cNvPr id="2" name="Picture 1" descr="waves.png"/>
+          <p:cNvPr id="2" name="Picture 1" descr="grid-C98A4B.png"/>
           <p:cNvPicPr>
             <a:picLocks noChangeAspect="1"/>
           </p:cNvPicPr>
@@ -12011,10 +12011,10 @@
           <a:gradFill rotWithShape="1">
             <a:gsLst>
               <a:gs pos="0">
-                <a:srgbClr val="4C9AFF"/>
+                <a:srgbClr val="C98A4B"/>
               </a:gs>
               <a:gs pos="100000">
-                <a:srgbClr val="7B61FF"/>
+                <a:srgbClr val="8C5A2B"/>
               </a:gs>
             </a:gsLst>
             <a:lin scaled="0" ang="18900000"/>
@@ -12024,7 +12024,7 @@
           </a:ln>
           <a:effectLst>
             <a:glow rad="127000">
-              <a:srgbClr val="4C9AFF">
+              <a:srgbClr val="C98A4B">
                 <a:alpha val="55000"/>
               </a:srgbClr>
             </a:glow>
@@ -12082,7 +12082,7 @@
             <a:r>
               <a:rPr sz="3200" b="1">
                 <a:solidFill>
-                  <a:srgbClr val="F2F4F8"/>
+                  <a:srgbClr val="F6EFE7"/>
                 </a:solidFill>
               </a:rPr>
               <a:t>Обычный книжный теряет посетителя за 6 минут</a:t>
@@ -12109,10 +12109,10 @@
           <a:gradFill rotWithShape="1">
             <a:gsLst>
               <a:gs pos="0">
-                <a:srgbClr val="1E2430"/>
+                <a:srgbClr val="241A15"/>
               </a:gs>
               <a:gs pos="100000">
-                <a:srgbClr val="2C3442"/>
+                <a:srgbClr val="31241C"/>
               </a:gs>
             </a:gsLst>
             <a:lin scaled="0" ang="18900000"/>
@@ -12169,10 +12169,10 @@
           <a:gradFill rotWithShape="1">
             <a:gsLst>
               <a:gs pos="0">
-                <a:srgbClr val="4C9AFF"/>
+                <a:srgbClr val="C98A4B"/>
               </a:gs>
               <a:gs pos="100000">
-                <a:srgbClr val="7B61FF"/>
+                <a:srgbClr val="8C5A2B"/>
               </a:gs>
             </a:gsLst>
             <a:lin scaled="0" ang="18900000"/>
@@ -12221,10 +12221,10 @@
           <a:gradFill rotWithShape="1">
             <a:gsLst>
               <a:gs pos="0">
-                <a:srgbClr val="4C9AFF"/>
+                <a:srgbClr val="C98A4B"/>
               </a:gs>
               <a:gs pos="100000">
-                <a:srgbClr val="7B61FF"/>
+                <a:srgbClr val="8C5A2B"/>
               </a:gs>
             </a:gsLst>
             <a:lin scaled="0" ang="19800000"/>
@@ -12234,7 +12234,7 @@
           </a:ln>
           <a:effectLst>
             <a:glow rad="88900">
-              <a:srgbClr val="4C9AFF">
+              <a:srgbClr val="C98A4B">
                 <a:alpha val="38000"/>
               </a:srgbClr>
             </a:glow>
@@ -12292,7 +12292,7 @@
             <a:r>
               <a:rPr sz="1400" b="1">
                 <a:solidFill>
-                  <a:srgbClr val="141820"/>
+                  <a:srgbClr val="1A1310"/>
                 </a:solidFill>
               </a:rPr>
               <a:t>1</a:t>
@@ -12330,7 +12330,7 @@
             <a:r>
               <a:rPr sz="1800" b="0">
                 <a:solidFill>
-                  <a:srgbClr val="F2F4F8"/>
+                  <a:srgbClr val="F6EFE7"/>
                 </a:solidFill>
               </a:rPr>
               <a:t>Классический формат живёт с полки и кассы</a:t>
@@ -12357,10 +12357,10 @@
           <a:gradFill rotWithShape="1">
             <a:gsLst>
               <a:gs pos="0">
-                <a:srgbClr val="1E2430"/>
+                <a:srgbClr val="241A15"/>
               </a:gs>
               <a:gs pos="100000">
-                <a:srgbClr val="2C3442"/>
+                <a:srgbClr val="31241C"/>
               </a:gs>
             </a:gsLst>
             <a:lin scaled="0" ang="18900000"/>
@@ -12417,10 +12417,10 @@
           <a:gradFill rotWithShape="1">
             <a:gsLst>
               <a:gs pos="0">
-                <a:srgbClr val="4C9AFF"/>
+                <a:srgbClr val="C98A4B"/>
               </a:gs>
               <a:gs pos="100000">
-                <a:srgbClr val="7B61FF"/>
+                <a:srgbClr val="8C5A2B"/>
               </a:gs>
             </a:gsLst>
             <a:lin scaled="0" ang="18900000"/>
@@ -12469,10 +12469,10 @@
           <a:gradFill rotWithShape="1">
             <a:gsLst>
               <a:gs pos="0">
-                <a:srgbClr val="4C9AFF"/>
+                <a:srgbClr val="C98A4B"/>
               </a:gs>
               <a:gs pos="100000">
-                <a:srgbClr val="7B61FF"/>
+                <a:srgbClr val="8C5A2B"/>
               </a:gs>
             </a:gsLst>
             <a:lin scaled="0" ang="19800000"/>
@@ -12482,7 +12482,7 @@
           </a:ln>
           <a:effectLst>
             <a:glow rad="88900">
-              <a:srgbClr val="4C9AFF">
+              <a:srgbClr val="C98A4B">
                 <a:alpha val="38000"/>
               </a:srgbClr>
             </a:glow>
@@ -12540,7 +12540,7 @@
             <a:r>
               <a:rPr sz="1400" b="1">
                 <a:solidFill>
-                  <a:srgbClr val="141820"/>
+                  <a:srgbClr val="1A1310"/>
                 </a:solidFill>
               </a:rPr>
               <a:t>2</a:t>
@@ -12578,7 +12578,7 @@
             <a:r>
               <a:rPr sz="1800" b="0">
                 <a:solidFill>
-                  <a:srgbClr val="F2F4F8"/>
+                  <a:srgbClr val="F6EFE7"/>
                 </a:solidFill>
               </a:rPr>
               <a:t>Нет причины остаться и вернуться завтра</a:t>
@@ -12605,10 +12605,10 @@
           <a:gradFill rotWithShape="1">
             <a:gsLst>
               <a:gs pos="0">
-                <a:srgbClr val="1E2430"/>
+                <a:srgbClr val="241A15"/>
               </a:gs>
               <a:gs pos="100000">
-                <a:srgbClr val="2C3442"/>
+                <a:srgbClr val="31241C"/>
               </a:gs>
             </a:gsLst>
             <a:lin scaled="0" ang="18900000"/>
@@ -12665,10 +12665,10 @@
           <a:gradFill rotWithShape="1">
             <a:gsLst>
               <a:gs pos="0">
-                <a:srgbClr val="4C9AFF"/>
+                <a:srgbClr val="C98A4B"/>
               </a:gs>
               <a:gs pos="100000">
-                <a:srgbClr val="7B61FF"/>
+                <a:srgbClr val="8C5A2B"/>
               </a:gs>
             </a:gsLst>
             <a:lin scaled="0" ang="18900000"/>
@@ -12717,10 +12717,10 @@
           <a:gradFill rotWithShape="1">
             <a:gsLst>
               <a:gs pos="0">
-                <a:srgbClr val="4C9AFF"/>
+                <a:srgbClr val="C98A4B"/>
               </a:gs>
               <a:gs pos="100000">
-                <a:srgbClr val="7B61FF"/>
+                <a:srgbClr val="8C5A2B"/>
               </a:gs>
             </a:gsLst>
             <a:lin scaled="0" ang="19800000"/>
@@ -12730,7 +12730,7 @@
           </a:ln>
           <a:effectLst>
             <a:glow rad="88900">
-              <a:srgbClr val="4C9AFF">
+              <a:srgbClr val="C98A4B">
                 <a:alpha val="38000"/>
               </a:srgbClr>
             </a:glow>
@@ -12788,7 +12788,7 @@
             <a:r>
               <a:rPr sz="1400" b="1">
                 <a:solidFill>
-                  <a:srgbClr val="141820"/>
+                  <a:srgbClr val="1A1310"/>
                 </a:solidFill>
               </a:rPr>
               <a:t>3</a:t>
@@ -12826,7 +12826,7 @@
             <a:r>
               <a:rPr sz="1800" b="0">
                 <a:solidFill>
-                  <a:srgbClr val="F2F4F8"/>
+                  <a:srgbClr val="F6EFE7"/>
                 </a:solidFill>
               </a:rPr>
               <a:t>Онлайн выигрывает по цене и ассортименту</a:t>
@@ -12853,10 +12853,10 @@
           <a:gradFill rotWithShape="1">
             <a:gsLst>
               <a:gs pos="0">
-                <a:srgbClr val="1E2430"/>
+                <a:srgbClr val="241A15"/>
               </a:gs>
               <a:gs pos="100000">
-                <a:srgbClr val="2C3442"/>
+                <a:srgbClr val="31241C"/>
               </a:gs>
             </a:gsLst>
             <a:lin scaled="0" ang="18900000"/>
@@ -12913,10 +12913,10 @@
           <a:gradFill rotWithShape="1">
             <a:gsLst>
               <a:gs pos="0">
-                <a:srgbClr val="4C9AFF"/>
+                <a:srgbClr val="C98A4B"/>
               </a:gs>
               <a:gs pos="100000">
-                <a:srgbClr val="7B61FF"/>
+                <a:srgbClr val="8C5A2B"/>
               </a:gs>
             </a:gsLst>
             <a:lin scaled="0" ang="18900000"/>
@@ -12965,10 +12965,10 @@
           <a:gradFill rotWithShape="1">
             <a:gsLst>
               <a:gs pos="0">
-                <a:srgbClr val="4C9AFF"/>
+                <a:srgbClr val="C98A4B"/>
               </a:gs>
               <a:gs pos="100000">
-                <a:srgbClr val="7B61FF"/>
+                <a:srgbClr val="8C5A2B"/>
               </a:gs>
             </a:gsLst>
             <a:lin scaled="0" ang="19800000"/>
@@ -12978,7 +12978,7 @@
           </a:ln>
           <a:effectLst>
             <a:glow rad="88900">
-              <a:srgbClr val="4C9AFF">
+              <a:srgbClr val="C98A4B">
                 <a:alpha val="38000"/>
               </a:srgbClr>
             </a:glow>
@@ -13036,7 +13036,7 @@
             <a:r>
               <a:rPr sz="1400" b="1">
                 <a:solidFill>
-                  <a:srgbClr val="141820"/>
+                  <a:srgbClr val="1A1310"/>
                 </a:solidFill>
               </a:rPr>
               <a:t>4</a:t>
@@ -13074,7 +13074,7 @@
             <a:r>
               <a:rPr sz="1800" b="0">
                 <a:solidFill>
-                  <a:srgbClr val="F2F4F8"/>
+                  <a:srgbClr val="F6EFE7"/>
                 </a:solidFill>
               </a:rPr>
               <a:t>Мы конкурируем сценарием, а не скидкой</a:t>
@@ -13448,7 +13448,7 @@
     <p:bg>
       <p:bgPr>
         <a:solidFill>
-          <a:srgbClr val="141820"/>
+          <a:srgbClr val="1A1310"/>
         </a:solidFill>
         <a:effectLst/>
       </p:bgPr>
@@ -13462,7 +13462,7 @@
       <p:grpSpPr/>
       <p:pic>
         <p:nvPicPr>
-          <p:cNvPr id="2" name="Picture 1" descr="waves.png"/>
+          <p:cNvPr id="2" name="Picture 1" descr="mesh-C98A4B.png"/>
           <p:cNvPicPr>
             <a:picLocks noChangeAspect="1"/>
           </p:cNvPicPr>
@@ -13505,10 +13505,10 @@
           <a:gradFill rotWithShape="1">
             <a:gsLst>
               <a:gs pos="0">
-                <a:srgbClr val="4C9AFF"/>
+                <a:srgbClr val="C98A4B"/>
               </a:gs>
               <a:gs pos="100000">
-                <a:srgbClr val="7B61FF"/>
+                <a:srgbClr val="8C5A2B"/>
               </a:gs>
             </a:gsLst>
             <a:lin scaled="0" ang="18900000"/>
@@ -13518,7 +13518,7 @@
           </a:ln>
           <a:effectLst>
             <a:glow rad="127000">
-              <a:srgbClr val="4C9AFF">
+              <a:srgbClr val="C98A4B">
                 <a:alpha val="55000"/>
               </a:srgbClr>
             </a:glow>
@@ -13576,7 +13576,7 @@
             <a:r>
               <a:rPr sz="3200" b="1">
                 <a:solidFill>
-                  <a:srgbClr val="F2F4F8"/>
+                  <a:srgbClr val="F6EFE7"/>
                 </a:solidFill>
               </a:rPr>
               <a:t>Три причины прийти вместо одной</a:t>
@@ -13603,10 +13603,10 @@
           <a:gradFill rotWithShape="1">
             <a:gsLst>
               <a:gs pos="0">
-                <a:srgbClr val="1E2430"/>
+                <a:srgbClr val="241A15"/>
               </a:gs>
               <a:gs pos="100000">
-                <a:srgbClr val="2C3442"/>
+                <a:srgbClr val="31241C"/>
               </a:gs>
             </a:gsLst>
             <a:lin scaled="0" ang="18900000"/>
@@ -13663,10 +13663,10 @@
           <a:gradFill rotWithShape="1">
             <a:gsLst>
               <a:gs pos="0">
-                <a:srgbClr val="4C9AFF"/>
+                <a:srgbClr val="C98A4B"/>
               </a:gs>
               <a:gs pos="100000">
-                <a:srgbClr val="7B61FF"/>
+                <a:srgbClr val="8C5A2B"/>
               </a:gs>
             </a:gsLst>
             <a:lin scaled="0" ang="18900000"/>
@@ -13715,10 +13715,10 @@
           <a:gradFill rotWithShape="1">
             <a:gsLst>
               <a:gs pos="0">
-                <a:srgbClr val="4C9AFF"/>
+                <a:srgbClr val="C98A4B"/>
               </a:gs>
               <a:gs pos="100000">
-                <a:srgbClr val="7B61FF"/>
+                <a:srgbClr val="8C5A2B"/>
               </a:gs>
             </a:gsLst>
             <a:lin scaled="0" ang="19800000"/>
@@ -13728,7 +13728,7 @@
           </a:ln>
           <a:effectLst>
             <a:glow rad="88900">
-              <a:srgbClr val="4C9AFF">
+              <a:srgbClr val="C98A4B">
                 <a:alpha val="38000"/>
               </a:srgbClr>
             </a:glow>
@@ -13786,7 +13786,7 @@
             <a:r>
               <a:rPr sz="1400" b="1">
                 <a:solidFill>
-                  <a:srgbClr val="141820"/>
+                  <a:srgbClr val="1A1310"/>
                 </a:solidFill>
               </a:rPr>
               <a:t>1</a:t>
@@ -13824,7 +13824,7 @@
             <a:r>
               <a:rPr sz="1800" b="0">
                 <a:solidFill>
-                  <a:srgbClr val="F2F4F8"/>
+                  <a:srgbClr val="F6EFE7"/>
                 </a:solidFill>
               </a:rPr>
               <a:t>Кофе и завтрак - ежедневный повод</a:t>
@@ -13851,10 +13851,10 @@
           <a:gradFill rotWithShape="1">
             <a:gsLst>
               <a:gs pos="0">
-                <a:srgbClr val="1E2430"/>
+                <a:srgbClr val="241A15"/>
               </a:gs>
               <a:gs pos="100000">
-                <a:srgbClr val="2C3442"/>
+                <a:srgbClr val="31241C"/>
               </a:gs>
             </a:gsLst>
             <a:lin scaled="0" ang="18900000"/>
@@ -13911,10 +13911,10 @@
           <a:gradFill rotWithShape="1">
             <a:gsLst>
               <a:gs pos="0">
-                <a:srgbClr val="4C9AFF"/>
+                <a:srgbClr val="C98A4B"/>
               </a:gs>
               <a:gs pos="100000">
-                <a:srgbClr val="7B61FF"/>
+                <a:srgbClr val="8C5A2B"/>
               </a:gs>
             </a:gsLst>
             <a:lin scaled="0" ang="18900000"/>
@@ -13963,10 +13963,10 @@
           <a:gradFill rotWithShape="1">
             <a:gsLst>
               <a:gs pos="0">
-                <a:srgbClr val="4C9AFF"/>
+                <a:srgbClr val="C98A4B"/>
               </a:gs>
               <a:gs pos="100000">
-                <a:srgbClr val="7B61FF"/>
+                <a:srgbClr val="8C5A2B"/>
               </a:gs>
             </a:gsLst>
             <a:lin scaled="0" ang="19800000"/>
@@ -13976,7 +13976,7 @@
           </a:ln>
           <a:effectLst>
             <a:glow rad="88900">
-              <a:srgbClr val="4C9AFF">
+              <a:srgbClr val="C98A4B">
                 <a:alpha val="38000"/>
               </a:srgbClr>
             </a:glow>
@@ -14034,7 +14034,7 @@
             <a:r>
               <a:rPr sz="1400" b="1">
                 <a:solidFill>
-                  <a:srgbClr val="141820"/>
+                  <a:srgbClr val="1A1310"/>
                 </a:solidFill>
               </a:rPr>
               <a:t>2</a:t>
@@ -14072,7 +14072,7 @@
             <a:r>
               <a:rPr sz="1800" b="0">
                 <a:solidFill>
-                  <a:srgbClr val="F2F4F8"/>
+                  <a:srgbClr val="F6EFE7"/>
                 </a:solidFill>
               </a:rPr>
               <a:t>Книги и подарки - импульсная и плановая покупка</a:t>
@@ -14099,10 +14099,10 @@
           <a:gradFill rotWithShape="1">
             <a:gsLst>
               <a:gs pos="0">
-                <a:srgbClr val="1E2430"/>
+                <a:srgbClr val="241A15"/>
               </a:gs>
               <a:gs pos="100000">
-                <a:srgbClr val="2C3442"/>
+                <a:srgbClr val="31241C"/>
               </a:gs>
             </a:gsLst>
             <a:lin scaled="0" ang="18900000"/>
@@ -14159,10 +14159,10 @@
           <a:gradFill rotWithShape="1">
             <a:gsLst>
               <a:gs pos="0">
-                <a:srgbClr val="4C9AFF"/>
+                <a:srgbClr val="C98A4B"/>
               </a:gs>
               <a:gs pos="100000">
-                <a:srgbClr val="7B61FF"/>
+                <a:srgbClr val="8C5A2B"/>
               </a:gs>
             </a:gsLst>
             <a:lin scaled="0" ang="18900000"/>
@@ -14211,10 +14211,10 @@
           <a:gradFill rotWithShape="1">
             <a:gsLst>
               <a:gs pos="0">
-                <a:srgbClr val="4C9AFF"/>
+                <a:srgbClr val="C98A4B"/>
               </a:gs>
               <a:gs pos="100000">
-                <a:srgbClr val="7B61FF"/>
+                <a:srgbClr val="8C5A2B"/>
               </a:gs>
             </a:gsLst>
             <a:lin scaled="0" ang="19800000"/>
@@ -14224,7 +14224,7 @@
           </a:ln>
           <a:effectLst>
             <a:glow rad="88900">
-              <a:srgbClr val="4C9AFF">
+              <a:srgbClr val="C98A4B">
                 <a:alpha val="38000"/>
               </a:srgbClr>
             </a:glow>
@@ -14282,7 +14282,7 @@
             <a:r>
               <a:rPr sz="1400" b="1">
                 <a:solidFill>
-                  <a:srgbClr val="141820"/>
+                  <a:srgbClr val="1A1310"/>
                 </a:solidFill>
               </a:rPr>
               <a:t>3</a:t>
@@ -14320,7 +14320,7 @@
             <a:r>
               <a:rPr sz="1800" b="0">
                 <a:solidFill>
-                  <a:srgbClr val="F2F4F8"/>
+                  <a:srgbClr val="F6EFE7"/>
                 </a:solidFill>
               </a:rPr>
               <a:t>Встречи и работа с ноутбуком - будни днём</a:t>
@@ -14347,10 +14347,10 @@
           <a:gradFill rotWithShape="1">
             <a:gsLst>
               <a:gs pos="0">
-                <a:srgbClr val="1E2430"/>
+                <a:srgbClr val="241A15"/>
               </a:gs>
               <a:gs pos="100000">
-                <a:srgbClr val="2C3442"/>
+                <a:srgbClr val="31241C"/>
               </a:gs>
             </a:gsLst>
             <a:lin scaled="0" ang="18900000"/>
@@ -14407,10 +14407,10 @@
           <a:gradFill rotWithShape="1">
             <a:gsLst>
               <a:gs pos="0">
-                <a:srgbClr val="4C9AFF"/>
+                <a:srgbClr val="C98A4B"/>
               </a:gs>
               <a:gs pos="100000">
-                <a:srgbClr val="7B61FF"/>
+                <a:srgbClr val="8C5A2B"/>
               </a:gs>
             </a:gsLst>
             <a:lin scaled="0" ang="18900000"/>
@@ -14459,10 +14459,10 @@
           <a:gradFill rotWithShape="1">
             <a:gsLst>
               <a:gs pos="0">
-                <a:srgbClr val="4C9AFF"/>
+                <a:srgbClr val="C98A4B"/>
               </a:gs>
               <a:gs pos="100000">
-                <a:srgbClr val="7B61FF"/>
+                <a:srgbClr val="8C5A2B"/>
               </a:gs>
             </a:gsLst>
             <a:lin scaled="0" ang="19800000"/>
@@ -14472,7 +14472,7 @@
           </a:ln>
           <a:effectLst>
             <a:glow rad="88900">
-              <a:srgbClr val="4C9AFF">
+              <a:srgbClr val="C98A4B">
                 <a:alpha val="38000"/>
               </a:srgbClr>
             </a:glow>
@@ -14530,7 +14530,7 @@
             <a:r>
               <a:rPr sz="1400" b="1">
                 <a:solidFill>
-                  <a:srgbClr val="141820"/>
+                  <a:srgbClr val="1A1310"/>
                 </a:solidFill>
               </a:rPr>
               <a:t>4</a:t>
@@ -14568,7 +14568,7 @@
             <a:r>
               <a:rPr sz="1800" b="0">
                 <a:solidFill>
-                  <a:srgbClr val="F2F4F8"/>
+                  <a:srgbClr val="F6EFE7"/>
                 </a:solidFill>
               </a:rPr>
               <a:t>Клубы и встречи с авторами - вечера и выходные</a:t>
@@ -14942,7 +14942,7 @@
     <p:bg>
       <p:bgPr>
         <a:solidFill>
-          <a:srgbClr val="141820"/>
+          <a:srgbClr val="1A1310"/>
         </a:solidFill>
         <a:effectLst/>
       </p:bgPr>
@@ -14956,7 +14956,7 @@
       <p:grpSpPr/>
       <p:pic>
         <p:nvPicPr>
-          <p:cNvPr id="2" name="Picture 1" descr="grid.png"/>
+          <p:cNvPr id="2" name="Picture 1" descr="grid-C98A4B.png"/>
           <p:cNvPicPr>
             <a:picLocks noChangeAspect="1"/>
           </p:cNvPicPr>
@@ -14999,10 +14999,10 @@
           <a:gradFill rotWithShape="1">
             <a:gsLst>
               <a:gs pos="0">
-                <a:srgbClr val="4C9AFF"/>
+                <a:srgbClr val="C98A4B"/>
               </a:gs>
               <a:gs pos="100000">
-                <a:srgbClr val="7B61FF"/>
+                <a:srgbClr val="8C5A2B"/>
               </a:gs>
             </a:gsLst>
             <a:lin scaled="0" ang="18900000"/>
@@ -15012,7 +15012,7 @@
           </a:ln>
           <a:effectLst>
             <a:glow rad="127000">
-              <a:srgbClr val="4C9AFF">
+              <a:srgbClr val="C98A4B">
                 <a:alpha val="55000"/>
               </a:srgbClr>
             </a:glow>
@@ -15070,7 +15070,7 @@
             <a:r>
               <a:rPr sz="3200" b="1">
                 <a:solidFill>
-                  <a:srgbClr val="F2F4F8"/>
+                  <a:srgbClr val="F6EFE7"/>
                 </a:solidFill>
               </a:rPr>
               <a:t>Ядро аудитории: 25-40 лет, доход выше среднего</a:t>
@@ -15097,10 +15097,10 @@
           <a:gradFill rotWithShape="1">
             <a:gsLst>
               <a:gs pos="0">
-                <a:srgbClr val="1E2430"/>
+                <a:srgbClr val="241A15"/>
               </a:gs>
               <a:gs pos="100000">
-                <a:srgbClr val="2C3442"/>
+                <a:srgbClr val="31241C"/>
               </a:gs>
             </a:gsLst>
             <a:lin scaled="0" ang="18900000"/>
@@ -15157,10 +15157,10 @@
           <a:gradFill rotWithShape="1">
             <a:gsLst>
               <a:gs pos="0">
-                <a:srgbClr val="4C9AFF"/>
+                <a:srgbClr val="C98A4B"/>
               </a:gs>
               <a:gs pos="100000">
-                <a:srgbClr val="7B61FF"/>
+                <a:srgbClr val="8C5A2B"/>
               </a:gs>
             </a:gsLst>
             <a:lin scaled="0" ang="18900000"/>
@@ -15209,10 +15209,10 @@
           <a:gradFill rotWithShape="1">
             <a:gsLst>
               <a:gs pos="0">
-                <a:srgbClr val="4C9AFF"/>
+                <a:srgbClr val="C98A4B"/>
               </a:gs>
               <a:gs pos="100000">
-                <a:srgbClr val="7B61FF"/>
+                <a:srgbClr val="8C5A2B"/>
               </a:gs>
             </a:gsLst>
             <a:lin scaled="0" ang="19800000"/>
@@ -15222,7 +15222,7 @@
           </a:ln>
           <a:effectLst>
             <a:glow rad="88900">
-              <a:srgbClr val="4C9AFF">
+              <a:srgbClr val="C98A4B">
                 <a:alpha val="38000"/>
               </a:srgbClr>
             </a:glow>
@@ -15280,7 +15280,7 @@
             <a:r>
               <a:rPr sz="1400" b="1">
                 <a:solidFill>
-                  <a:srgbClr val="141820"/>
+                  <a:srgbClr val="1A1310"/>
                 </a:solidFill>
               </a:rPr>
               <a:t>1</a:t>
@@ -15318,7 +15318,7 @@
             <a:r>
               <a:rPr sz="1800" b="0">
                 <a:solidFill>
-                  <a:srgbClr val="F2F4F8"/>
+                  <a:srgbClr val="F6EFE7"/>
                 </a:solidFill>
               </a:rPr>
               <a:t>62 процента - женщины</a:t>
@@ -15345,10 +15345,10 @@
           <a:gradFill rotWithShape="1">
             <a:gsLst>
               <a:gs pos="0">
-                <a:srgbClr val="1E2430"/>
+                <a:srgbClr val="241A15"/>
               </a:gs>
               <a:gs pos="100000">
-                <a:srgbClr val="2C3442"/>
+                <a:srgbClr val="31241C"/>
               </a:gs>
             </a:gsLst>
             <a:lin scaled="0" ang="18900000"/>
@@ -15405,10 +15405,10 @@
           <a:gradFill rotWithShape="1">
             <a:gsLst>
               <a:gs pos="0">
-                <a:srgbClr val="4C9AFF"/>
+                <a:srgbClr val="C98A4B"/>
               </a:gs>
               <a:gs pos="100000">
-                <a:srgbClr val="7B61FF"/>
+                <a:srgbClr val="8C5A2B"/>
               </a:gs>
             </a:gsLst>
             <a:lin scaled="0" ang="18900000"/>
@@ -15457,10 +15457,10 @@
           <a:gradFill rotWithShape="1">
             <a:gsLst>
               <a:gs pos="0">
-                <a:srgbClr val="4C9AFF"/>
+                <a:srgbClr val="C98A4B"/>
               </a:gs>
               <a:gs pos="100000">
-                <a:srgbClr val="7B61FF"/>
+                <a:srgbClr val="8C5A2B"/>
               </a:gs>
             </a:gsLst>
             <a:lin scaled="0" ang="19800000"/>
@@ -15470,7 +15470,7 @@
           </a:ln>
           <a:effectLst>
             <a:glow rad="88900">
-              <a:srgbClr val="4C9AFF">
+              <a:srgbClr val="C98A4B">
                 <a:alpha val="38000"/>
               </a:srgbClr>
             </a:glow>
@@ -15528,7 +15528,7 @@
             <a:r>
               <a:rPr sz="1400" b="1">
                 <a:solidFill>
-                  <a:srgbClr val="141820"/>
+                  <a:srgbClr val="1A1310"/>
                 </a:solidFill>
               </a:rPr>
               <a:t>2</a:t>
@@ -15566,7 +15566,7 @@
             <a:r>
               <a:rPr sz="1800" b="0">
                 <a:solidFill>
-                  <a:srgbClr val="F2F4F8"/>
+                  <a:srgbClr val="F6EFE7"/>
                 </a:solidFill>
               </a:rPr>
               <a:t>Покупают книги 1-2 раза в месяц</a:t>
@@ -15593,10 +15593,10 @@
           <a:gradFill rotWithShape="1">
             <a:gsLst>
               <a:gs pos="0">
-                <a:srgbClr val="1E2430"/>
+                <a:srgbClr val="241A15"/>
               </a:gs>
               <a:gs pos="100000">
-                <a:srgbClr val="2C3442"/>
+                <a:srgbClr val="31241C"/>
               </a:gs>
             </a:gsLst>
             <a:lin scaled="0" ang="18900000"/>
@@ -15653,10 +15653,10 @@
           <a:gradFill rotWithShape="1">
             <a:gsLst>
               <a:gs pos="0">
-                <a:srgbClr val="4C9AFF"/>
+                <a:srgbClr val="C98A4B"/>
               </a:gs>
               <a:gs pos="100000">
-                <a:srgbClr val="7B61FF"/>
+                <a:srgbClr val="8C5A2B"/>
               </a:gs>
             </a:gsLst>
             <a:lin scaled="0" ang="18900000"/>
@@ -15705,10 +15705,10 @@
           <a:gradFill rotWithShape="1">
             <a:gsLst>
               <a:gs pos="0">
-                <a:srgbClr val="4C9AFF"/>
+                <a:srgbClr val="C98A4B"/>
               </a:gs>
               <a:gs pos="100000">
-                <a:srgbClr val="7B61FF"/>
+                <a:srgbClr val="8C5A2B"/>
               </a:gs>
             </a:gsLst>
             <a:lin scaled="0" ang="19800000"/>
@@ -15718,7 +15718,7 @@
           </a:ln>
           <a:effectLst>
             <a:glow rad="88900">
-              <a:srgbClr val="4C9AFF">
+              <a:srgbClr val="C98A4B">
                 <a:alpha val="38000"/>
               </a:srgbClr>
             </a:glow>
@@ -15776,7 +15776,7 @@
             <a:r>
               <a:rPr sz="1400" b="1">
                 <a:solidFill>
-                  <a:srgbClr val="141820"/>
+                  <a:srgbClr val="1A1310"/>
                 </a:solidFill>
               </a:rPr>
               <a:t>3</a:t>
@@ -15814,7 +15814,7 @@
             <a:r>
               <a:rPr sz="1800" b="0">
                 <a:solidFill>
-                  <a:srgbClr val="F2F4F8"/>
+                  <a:srgbClr val="F6EFE7"/>
                 </a:solidFill>
               </a:rPr>
               <a:t>Приходят в ТЦ по будням днём и в выходные</a:t>
@@ -15841,10 +15841,10 @@
           <a:gradFill rotWithShape="1">
             <a:gsLst>
               <a:gs pos="0">
-                <a:srgbClr val="1E2430"/>
+                <a:srgbClr val="241A15"/>
               </a:gs>
               <a:gs pos="100000">
-                <a:srgbClr val="2C3442"/>
+                <a:srgbClr val="31241C"/>
               </a:gs>
             </a:gsLst>
             <a:lin scaled="0" ang="18900000"/>
@@ -15901,10 +15901,10 @@
           <a:gradFill rotWithShape="1">
             <a:gsLst>
               <a:gs pos="0">
-                <a:srgbClr val="4C9AFF"/>
+                <a:srgbClr val="C98A4B"/>
               </a:gs>
               <a:gs pos="100000">
-                <a:srgbClr val="7B61FF"/>
+                <a:srgbClr val="8C5A2B"/>
               </a:gs>
             </a:gsLst>
             <a:lin scaled="0" ang="18900000"/>
@@ -15953,10 +15953,10 @@
           <a:gradFill rotWithShape="1">
             <a:gsLst>
               <a:gs pos="0">
-                <a:srgbClr val="4C9AFF"/>
+                <a:srgbClr val="C98A4B"/>
               </a:gs>
               <a:gs pos="100000">
-                <a:srgbClr val="7B61FF"/>
+                <a:srgbClr val="8C5A2B"/>
               </a:gs>
             </a:gsLst>
             <a:lin scaled="0" ang="19800000"/>
@@ -15966,7 +15966,7 @@
           </a:ln>
           <a:effectLst>
             <a:glow rad="88900">
-              <a:srgbClr val="4C9AFF">
+              <a:srgbClr val="C98A4B">
                 <a:alpha val="38000"/>
               </a:srgbClr>
             </a:glow>
@@ -16024,7 +16024,7 @@
             <a:r>
               <a:rPr sz="1400" b="1">
                 <a:solidFill>
-                  <a:srgbClr val="141820"/>
+                  <a:srgbClr val="1A1310"/>
                 </a:solidFill>
               </a:rPr>
               <a:t>4</a:t>
@@ -16062,7 +16062,7 @@
             <a:r>
               <a:rPr sz="1800" b="0">
                 <a:solidFill>
-                  <a:srgbClr val="F2F4F8"/>
+                  <a:srgbClr val="F6EFE7"/>
                 </a:solidFill>
               </a:rPr>
               <a:t>Живут или работают в радиусе 15 минут</a:t>
@@ -16436,7 +16436,7 @@
     <p:bg>
       <p:bgPr>
         <a:solidFill>
-          <a:srgbClr val="141820"/>
+          <a:srgbClr val="1A1310"/>
         </a:solidFill>
         <a:effectLst/>
       </p:bgPr>
@@ -16450,7 +16450,7 @@
       <p:grpSpPr/>
       <p:pic>
         <p:nvPicPr>
-          <p:cNvPr id="2" name="Picture 1" descr="aurora.png"/>
+          <p:cNvPr id="2" name="Picture 1" descr="waves-C98A4B.png"/>
           <p:cNvPicPr>
             <a:picLocks noChangeAspect="1"/>
           </p:cNvPicPr>
@@ -16493,10 +16493,10 @@
           <a:gradFill rotWithShape="1">
             <a:gsLst>
               <a:gs pos="0">
-                <a:srgbClr val="4C9AFF"/>
+                <a:srgbClr val="C98A4B"/>
               </a:gs>
               <a:gs pos="100000">
-                <a:srgbClr val="7B61FF"/>
+                <a:srgbClr val="8C5A2B"/>
               </a:gs>
             </a:gsLst>
             <a:lin scaled="0" ang="18900000"/>
@@ -16506,7 +16506,7 @@
           </a:ln>
           <a:effectLst>
             <a:glow rad="127000">
-              <a:srgbClr val="4C9AFF">
+              <a:srgbClr val="C98A4B">
                 <a:alpha val="55000"/>
               </a:srgbClr>
             </a:glow>
@@ -16564,7 +16564,7 @@
             <a:r>
               <a:rPr sz="3200" b="1">
                 <a:solidFill>
-                  <a:srgbClr val="F2F4F8"/>
+                  <a:srgbClr val="F6EFE7"/>
                 </a:solidFill>
               </a:rPr>
               <a:t>Трафик точки: 320 человек в день</a:t>
@@ -16591,10 +16591,10 @@
           <a:gradFill rotWithShape="1">
             <a:gsLst>
               <a:gs pos="0">
-                <a:srgbClr val="1E2430"/>
+                <a:srgbClr val="241A15"/>
               </a:gs>
               <a:gs pos="100000">
-                <a:srgbClr val="2C3442"/>
+                <a:srgbClr val="31241C"/>
               </a:gs>
             </a:gsLst>
             <a:lin scaled="0" ang="18900000"/>
@@ -16662,7 +16662,7 @@
             <a:r>
               <a:rPr sz="3400" b="1">
                 <a:solidFill>
-                  <a:srgbClr val="4C9AFF"/>
+                  <a:srgbClr val="C98A4B"/>
                 </a:solidFill>
               </a:rPr>
               <a:t>9600 посетителей в месяц</a:t>
@@ -16689,10 +16689,10 @@
           <a:gradFill rotWithShape="1">
             <a:gsLst>
               <a:gs pos="0">
-                <a:srgbClr val="1E2430"/>
+                <a:srgbClr val="241A15"/>
               </a:gs>
               <a:gs pos="100000">
-                <a:srgbClr val="2C3442"/>
+                <a:srgbClr val="31241C"/>
               </a:gs>
             </a:gsLst>
             <a:lin scaled="0" ang="18900000"/>
@@ -16760,7 +16760,7 @@
             <a:r>
               <a:rPr sz="3400" b="1">
                 <a:solidFill>
-                  <a:srgbClr val="4C9AFF"/>
+                  <a:srgbClr val="C98A4B"/>
                 </a:solidFill>
               </a:rPr>
               <a:t>Конверсия в чек</a:t>
@@ -16798,7 +16798,7 @@
             <a:r>
               <a:rPr sz="1500" b="0">
                 <a:solidFill>
-                  <a:srgbClr val="9AA4B2"/>
+                  <a:srgbClr val="B7A493"/>
                 </a:solidFill>
               </a:rPr>
               <a:t>38 процентов</a:t>
@@ -16825,10 +16825,10 @@
           <a:gradFill rotWithShape="1">
             <a:gsLst>
               <a:gs pos="0">
-                <a:srgbClr val="1E2430"/>
+                <a:srgbClr val="241A15"/>
               </a:gs>
               <a:gs pos="100000">
-                <a:srgbClr val="2C3442"/>
+                <a:srgbClr val="31241C"/>
               </a:gs>
             </a:gsLst>
             <a:lin scaled="0" ang="18900000"/>
@@ -16896,7 +16896,7 @@
             <a:r>
               <a:rPr sz="3400" b="1">
                 <a:solidFill>
-                  <a:srgbClr val="4C9AFF"/>
+                  <a:srgbClr val="C98A4B"/>
                 </a:solidFill>
               </a:rPr>
               <a:t>3650 чеков в месяц</a:t>
@@ -16923,10 +16923,10 @@
           <a:gradFill rotWithShape="1">
             <a:gsLst>
               <a:gs pos="0">
-                <a:srgbClr val="1E2430"/>
+                <a:srgbClr val="241A15"/>
               </a:gs>
               <a:gs pos="100000">
-                <a:srgbClr val="2C3442"/>
+                <a:srgbClr val="31241C"/>
               </a:gs>
             </a:gsLst>
             <a:lin scaled="0" ang="18900000"/>
@@ -16994,7 +16994,7 @@
             <a:r>
               <a:rPr sz="3400" b="1">
                 <a:solidFill>
-                  <a:srgbClr val="4C9AFF"/>
+                  <a:srgbClr val="C98A4B"/>
                 </a:solidFill>
               </a:rPr>
               <a:t>Доля повторных гостей</a:t>
@@ -17032,7 +17032,7 @@
             <a:r>
               <a:rPr sz="1500" b="0">
                 <a:solidFill>
-                  <a:srgbClr val="9AA4B2"/>
+                  <a:srgbClr val="B7A493"/>
                 </a:solidFill>
               </a:rPr>
               <a:t>41 процент</a:t>
@@ -17406,7 +17406,7 @@
     <p:bg>
       <p:bgPr>
         <a:solidFill>
-          <a:srgbClr val="141820"/>
+          <a:srgbClr val="1A1310"/>
         </a:solidFill>
         <a:effectLst/>
       </p:bgPr>
@@ -17420,7 +17420,7 @@
       <p:grpSpPr/>
       <p:pic>
         <p:nvPicPr>
-          <p:cNvPr id="2" name="Picture 1" descr="waves.png"/>
+          <p:cNvPr id="2" name="Picture 1" descr="rings-C98A4B.png"/>
           <p:cNvPicPr>
             <a:picLocks noChangeAspect="1"/>
           </p:cNvPicPr>
@@ -17463,10 +17463,10 @@
           <a:gradFill rotWithShape="1">
             <a:gsLst>
               <a:gs pos="0">
-                <a:srgbClr val="4C9AFF"/>
+                <a:srgbClr val="C98A4B"/>
               </a:gs>
               <a:gs pos="100000">
-                <a:srgbClr val="7B61FF"/>
+                <a:srgbClr val="8C5A2B"/>
               </a:gs>
             </a:gsLst>
             <a:lin scaled="0" ang="18900000"/>
@@ -17476,7 +17476,7 @@
           </a:ln>
           <a:effectLst>
             <a:glow rad="127000">
-              <a:srgbClr val="4C9AFF">
+              <a:srgbClr val="C98A4B">
                 <a:alpha val="55000"/>
               </a:srgbClr>
             </a:glow>
@@ -17534,7 +17534,7 @@
             <a:r>
               <a:rPr sz="3200" b="1">
                 <a:solidFill>
-                  <a:srgbClr val="F2F4F8"/>
+                  <a:srgbClr val="F6EFE7"/>
                 </a:solidFill>
               </a:rPr>
               <a:t>Средний чек 640 рублей</a:t>
@@ -17561,10 +17561,10 @@
           <a:gradFill rotWithShape="1">
             <a:gsLst>
               <a:gs pos="0">
-                <a:srgbClr val="1E2430"/>
+                <a:srgbClr val="241A15"/>
               </a:gs>
               <a:gs pos="100000">
-                <a:srgbClr val="2C3442"/>
+                <a:srgbClr val="31241C"/>
               </a:gs>
             </a:gsLst>
             <a:lin scaled="0" ang="18900000"/>
@@ -17632,7 +17632,7 @@
             <a:r>
               <a:rPr sz="3400" b="1">
                 <a:solidFill>
-                  <a:srgbClr val="4C9AFF"/>
+                  <a:srgbClr val="C98A4B"/>
                 </a:solidFill>
               </a:rPr>
               <a:t>Только кофе</a:t>
@@ -17670,7 +17670,7 @@
             <a:r>
               <a:rPr sz="1500" b="0">
                 <a:solidFill>
-                  <a:srgbClr val="9AA4B2"/>
+                  <a:srgbClr val="B7A493"/>
                 </a:solidFill>
               </a:rPr>
               <a:t>280 рублей</a:t>
@@ -17697,10 +17697,10 @@
           <a:gradFill rotWithShape="1">
             <a:gsLst>
               <a:gs pos="0">
-                <a:srgbClr val="1E2430"/>
+                <a:srgbClr val="241A15"/>
               </a:gs>
               <a:gs pos="100000">
-                <a:srgbClr val="2C3442"/>
+                <a:srgbClr val="31241C"/>
               </a:gs>
             </a:gsLst>
             <a:lin scaled="0" ang="18900000"/>
@@ -17768,7 +17768,7 @@
             <a:r>
               <a:rPr sz="3400" b="1">
                 <a:solidFill>
-                  <a:srgbClr val="4C9AFF"/>
+                  <a:srgbClr val="C98A4B"/>
                 </a:solidFill>
               </a:rPr>
               <a:t>Кофе плюс книга</a:t>
@@ -17806,7 +17806,7 @@
             <a:r>
               <a:rPr sz="1500" b="0">
                 <a:solidFill>
-                  <a:srgbClr val="9AA4B2"/>
+                  <a:srgbClr val="B7A493"/>
                 </a:solidFill>
               </a:rPr>
               <a:t>1150 рублей</a:t>
@@ -17833,10 +17833,10 @@
           <a:gradFill rotWithShape="1">
             <a:gsLst>
               <a:gs pos="0">
-                <a:srgbClr val="1E2430"/>
+                <a:srgbClr val="241A15"/>
               </a:gs>
               <a:gs pos="100000">
-                <a:srgbClr val="2C3442"/>
+                <a:srgbClr val="31241C"/>
               </a:gs>
             </a:gsLst>
             <a:lin scaled="0" ang="18900000"/>
@@ -17904,7 +17904,7 @@
             <a:r>
               <a:rPr sz="3400" b="1">
                 <a:solidFill>
-                  <a:srgbClr val="4C9AFF"/>
+                  <a:srgbClr val="C98A4B"/>
                 </a:solidFill>
               </a:rPr>
               <a:t>Смешанный чек</a:t>
@@ -17942,7 +17942,7 @@
             <a:r>
               <a:rPr sz="1500" b="0">
                 <a:solidFill>
-                  <a:srgbClr val="9AA4B2"/>
+                  <a:srgbClr val="B7A493"/>
                 </a:solidFill>
               </a:rPr>
               <a:t>47 процентов покупок</a:t>
@@ -17969,10 +17969,10 @@
           <a:gradFill rotWithShape="1">
             <a:gsLst>
               <a:gs pos="0">
-                <a:srgbClr val="1E2430"/>
+                <a:srgbClr val="241A15"/>
               </a:gs>
               <a:gs pos="100000">
-                <a:srgbClr val="2C3442"/>
+                <a:srgbClr val="31241C"/>
               </a:gs>
             </a:gsLst>
             <a:lin scaled="0" ang="18900000"/>
@@ -18040,7 +18040,7 @@
             <a:r>
               <a:rPr sz="3400" b="1">
                 <a:solidFill>
-                  <a:srgbClr val="4C9AFF"/>
+                  <a:srgbClr val="C98A4B"/>
                 </a:solidFill>
               </a:rPr>
               <a:t>Выручка</a:t>
@@ -18078,7 +18078,7 @@
             <a:r>
               <a:rPr sz="1500" b="0">
                 <a:solidFill>
-                  <a:srgbClr val="9AA4B2"/>
+                  <a:srgbClr val="B7A493"/>
                 </a:solidFill>
               </a:rPr>
               <a:t>2,3 млн рублей в месяц</a:t>
@@ -18452,7 +18452,7 @@
     <p:bg>
       <p:bgPr>
         <a:solidFill>
-          <a:srgbClr val="141820"/>
+          <a:srgbClr val="1A1310"/>
         </a:solidFill>
         <a:effectLst/>
       </p:bgPr>
@@ -18466,7 +18466,7 @@
       <p:grpSpPr/>
       <p:pic>
         <p:nvPicPr>
-          <p:cNvPr id="2" name="Picture 1" descr="grid.png"/>
+          <p:cNvPr id="2" name="Picture 1" descr="mesh-C98A4B.png"/>
           <p:cNvPicPr>
             <a:picLocks noChangeAspect="1"/>
           </p:cNvPicPr>
@@ -18509,10 +18509,10 @@
           <a:gradFill rotWithShape="1">
             <a:gsLst>
               <a:gs pos="0">
-                <a:srgbClr val="4C9AFF"/>
+                <a:srgbClr val="C98A4B"/>
               </a:gs>
               <a:gs pos="100000">
-                <a:srgbClr val="7B61FF"/>
+                <a:srgbClr val="8C5A2B"/>
               </a:gs>
             </a:gsLst>
             <a:lin scaled="0" ang="18900000"/>
@@ -18522,7 +18522,7 @@
           </a:ln>
           <a:effectLst>
             <a:glow rad="127000">
-              <a:srgbClr val="4C9AFF">
+              <a:srgbClr val="C98A4B">
                 <a:alpha val="55000"/>
               </a:srgbClr>
             </a:glow>
@@ -18580,7 +18580,7 @@
             <a:r>
               <a:rPr sz="3200" b="1">
                 <a:solidFill>
-                  <a:srgbClr val="F2F4F8"/>
+                  <a:srgbClr val="F6EFE7"/>
                 </a:solidFill>
               </a:rPr>
               <a:t>Экономика точки: выход в плюс на 8 месяце</a:t>
@@ -18607,10 +18607,10 @@
           <a:gradFill rotWithShape="1">
             <a:gsLst>
               <a:gs pos="0">
-                <a:srgbClr val="1E2430"/>
+                <a:srgbClr val="241A15"/>
               </a:gs>
               <a:gs pos="100000">
-                <a:srgbClr val="2C3442"/>
+                <a:srgbClr val="31241C"/>
               </a:gs>
             </a:gsLst>
             <a:lin scaled="0" ang="18900000"/>
@@ -18678,7 +18678,7 @@
             <a:r>
               <a:rPr sz="3400" b="1">
                 <a:solidFill>
-                  <a:srgbClr val="4C9AFF"/>
+                  <a:srgbClr val="C98A4B"/>
                 </a:solidFill>
               </a:rPr>
               <a:t>Инвестиции в открытие</a:t>
@@ -18716,7 +18716,7 @@
             <a:r>
               <a:rPr sz="1500" b="0">
                 <a:solidFill>
-                  <a:srgbClr val="9AA4B2"/>
+                  <a:srgbClr val="B7A493"/>
                 </a:solidFill>
               </a:rPr>
               <a:t>6,4 млн рублей</a:t>
@@ -18743,10 +18743,10 @@
           <a:gradFill rotWithShape="1">
             <a:gsLst>
               <a:gs pos="0">
-                <a:srgbClr val="1E2430"/>
+                <a:srgbClr val="241A15"/>
               </a:gs>
               <a:gs pos="100000">
-                <a:srgbClr val="2C3442"/>
+                <a:srgbClr val="31241C"/>
               </a:gs>
             </a:gsLst>
             <a:lin scaled="0" ang="18900000"/>
@@ -18814,7 +18814,7 @@
             <a:r>
               <a:rPr sz="3400" b="1">
                 <a:solidFill>
-                  <a:srgbClr val="4C9AFF"/>
+                  <a:srgbClr val="C98A4B"/>
                 </a:solidFill>
               </a:rPr>
               <a:t>Операционные расходы</a:t>
@@ -18852,7 +18852,7 @@
             <a:r>
               <a:rPr sz="1500" b="0">
                 <a:solidFill>
-                  <a:srgbClr val="9AA4B2"/>
+                  <a:srgbClr val="B7A493"/>
                 </a:solidFill>
               </a:rPr>
               <a:t>1,7 млн в месяц</a:t>
@@ -18879,10 +18879,10 @@
           <a:gradFill rotWithShape="1">
             <a:gsLst>
               <a:gs pos="0">
-                <a:srgbClr val="1E2430"/>
+                <a:srgbClr val="241A15"/>
               </a:gs>
               <a:gs pos="100000">
-                <a:srgbClr val="2C3442"/>
+                <a:srgbClr val="31241C"/>
               </a:gs>
             </a:gsLst>
             <a:lin scaled="0" ang="18900000"/>
@@ -18950,7 +18950,7 @@
             <a:r>
               <a:rPr sz="3400" b="1">
                 <a:solidFill>
-                  <a:srgbClr val="4C9AFF"/>
+                  <a:srgbClr val="C98A4B"/>
                 </a:solidFill>
               </a:rPr>
               <a:t>Маржинальность кофе</a:t>
@@ -18988,7 +18988,7 @@
             <a:r>
               <a:rPr sz="1500" b="0">
                 <a:solidFill>
-                  <a:srgbClr val="9AA4B2"/>
+                  <a:srgbClr val="B7A493"/>
                 </a:solidFill>
               </a:rPr>
               <a:t>72 процента, книг - 34</a:t>
@@ -19015,10 +19015,10 @@
           <a:gradFill rotWithShape="1">
             <a:gsLst>
               <a:gs pos="0">
-                <a:srgbClr val="1E2430"/>
+                <a:srgbClr val="241A15"/>
               </a:gs>
               <a:gs pos="100000">
-                <a:srgbClr val="2C3442"/>
+                <a:srgbClr val="31241C"/>
               </a:gs>
             </a:gsLst>
             <a:lin scaled="0" ang="18900000"/>
@@ -19086,7 +19086,7 @@
             <a:r>
               <a:rPr sz="3400" b="1">
                 <a:solidFill>
-                  <a:srgbClr val="4C9AFF"/>
+                  <a:srgbClr val="C98A4B"/>
                 </a:solidFill>
               </a:rPr>
               <a:t>Окупаемость</a:t>
@@ -19124,7 +19124,7 @@
             <a:r>
               <a:rPr sz="1500" b="0">
                 <a:solidFill>
-                  <a:srgbClr val="9AA4B2"/>
+                  <a:srgbClr val="B7A493"/>
                 </a:solidFill>
               </a:rPr>
               <a:t>22 месяца</a:t>
@@ -19498,7 +19498,7 @@
     <p:bg>
       <p:bgPr>
         <a:solidFill>
-          <a:srgbClr val="141820"/>
+          <a:srgbClr val="1A1310"/>
         </a:solidFill>
         <a:effectLst/>
       </p:bgPr>
@@ -19512,7 +19512,7 @@
       <p:grpSpPr/>
       <p:pic>
         <p:nvPicPr>
-          <p:cNvPr id="2" name="Picture 1" descr="aurora.png"/>
+          <p:cNvPr id="2" name="Picture 1" descr="rings-C98A4B.png"/>
           <p:cNvPicPr>
             <a:picLocks noChangeAspect="1"/>
           </p:cNvPicPr>
@@ -19555,10 +19555,10 @@
           <a:gradFill rotWithShape="1">
             <a:gsLst>
               <a:gs pos="0">
-                <a:srgbClr val="4C9AFF"/>
+                <a:srgbClr val="C98A4B"/>
               </a:gs>
               <a:gs pos="100000">
-                <a:srgbClr val="7B61FF"/>
+                <a:srgbClr val="8C5A2B"/>
               </a:gs>
             </a:gsLst>
             <a:lin scaled="0" ang="18900000"/>
@@ -19568,7 +19568,7 @@
           </a:ln>
           <a:effectLst>
             <a:glow rad="127000">
-              <a:srgbClr val="4C9AFF">
+              <a:srgbClr val="C98A4B">
                 <a:alpha val="55000"/>
               </a:srgbClr>
             </a:glow>
@@ -19626,7 +19626,7 @@
             <a:r>
               <a:rPr sz="3200" b="1">
                 <a:solidFill>
-                  <a:srgbClr val="F2F4F8"/>
+                  <a:srgbClr val="F6EFE7"/>
                 </a:solidFill>
               </a:rPr>
               <a:t>Что нужно от площадки</a:t>
@@ -19653,10 +19653,10 @@
           <a:gradFill rotWithShape="1">
             <a:gsLst>
               <a:gs pos="0">
-                <a:srgbClr val="1E2430"/>
+                <a:srgbClr val="241A15"/>
               </a:gs>
               <a:gs pos="100000">
-                <a:srgbClr val="2C3442"/>
+                <a:srgbClr val="31241C"/>
               </a:gs>
             </a:gsLst>
             <a:lin scaled="0" ang="18900000"/>
@@ -19713,10 +19713,10 @@
           <a:gradFill rotWithShape="1">
             <a:gsLst>
               <a:gs pos="0">
-                <a:srgbClr val="4C9AFF"/>
+                <a:srgbClr val="C98A4B"/>
               </a:gs>
               <a:gs pos="100000">
-                <a:srgbClr val="7B61FF"/>
+                <a:srgbClr val="8C5A2B"/>
               </a:gs>
             </a:gsLst>
             <a:lin scaled="0" ang="18900000"/>
@@ -19765,10 +19765,10 @@
           <a:gradFill rotWithShape="1">
             <a:gsLst>
               <a:gs pos="0">
-                <a:srgbClr val="4C9AFF"/>
+                <a:srgbClr val="C98A4B"/>
               </a:gs>
               <a:gs pos="100000">
-                <a:srgbClr val="7B61FF"/>
+                <a:srgbClr val="8C5A2B"/>
               </a:gs>
             </a:gsLst>
             <a:lin scaled="0" ang="19800000"/>
@@ -19778,7 +19778,7 @@
           </a:ln>
           <a:effectLst>
             <a:glow rad="88900">
-              <a:srgbClr val="4C9AFF">
+              <a:srgbClr val="C98A4B">
                 <a:alpha val="38000"/>
               </a:srgbClr>
             </a:glow>
@@ -19836,7 +19836,7 @@
             <a:r>
               <a:rPr sz="1400" b="1">
                 <a:solidFill>
-                  <a:srgbClr val="141820"/>
+                  <a:srgbClr val="1A1310"/>
                 </a:solidFill>
               </a:rPr>
               <a:t>1</a:t>
@@ -19874,7 +19874,7 @@
             <a:r>
               <a:rPr sz="1800" b="0">
                 <a:solidFill>
-                  <a:srgbClr val="F2F4F8"/>
+                  <a:srgbClr val="F6EFE7"/>
                 </a:solidFill>
               </a:rPr>
               <a:t>120-160 квадратных метров, второй или третий этаж</a:t>
@@ -19901,10 +19901,10 @@
           <a:gradFill rotWithShape="1">
             <a:gsLst>
               <a:gs pos="0">
-                <a:srgbClr val="1E2430"/>
+                <a:srgbClr val="241A15"/>
               </a:gs>
               <a:gs pos="100000">
-                <a:srgbClr val="2C3442"/>
+                <a:srgbClr val="31241C"/>
               </a:gs>
             </a:gsLst>
             <a:lin scaled="0" ang="18900000"/>
@@ -19961,10 +19961,10 @@
           <a:gradFill rotWithShape="1">
             <a:gsLst>
               <a:gs pos="0">
-                <a:srgbClr val="4C9AFF"/>
+                <a:srgbClr val="C98A4B"/>
               </a:gs>
               <a:gs pos="100000">
-                <a:srgbClr val="7B61FF"/>
+                <a:srgbClr val="8C5A2B"/>
               </a:gs>
             </a:gsLst>
             <a:lin scaled="0" ang="18900000"/>
@@ -20013,10 +20013,10 @@
           <a:gradFill rotWithShape="1">
             <a:gsLst>
               <a:gs pos="0">
-                <a:srgbClr val="4C9AFF"/>
+                <a:srgbClr val="C98A4B"/>
               </a:gs>
               <a:gs pos="100000">
-                <a:srgbClr val="7B61FF"/>
+                <a:srgbClr val="8C5A2B"/>
               </a:gs>
             </a:gsLst>
             <a:lin scaled="0" ang="19800000"/>
@@ -20026,7 +20026,7 @@
           </a:ln>
           <a:effectLst>
             <a:glow rad="88900">
-              <a:srgbClr val="4C9AFF">
+              <a:srgbClr val="C98A4B">
                 <a:alpha val="38000"/>
               </a:srgbClr>
             </a:glow>
@@ -20084,7 +20084,7 @@
             <a:r>
               <a:rPr sz="1400" b="1">
                 <a:solidFill>
-                  <a:srgbClr val="141820"/>
+                  <a:srgbClr val="1A1310"/>
                 </a:solidFill>
               </a:rPr>
               <a:t>2</a:t>
@@ -20122,7 +20122,7 @@
             <a:r>
               <a:rPr sz="1800" b="0">
                 <a:solidFill>
-                  <a:srgbClr val="F2F4F8"/>
+                  <a:srgbClr val="F6EFE7"/>
                 </a:solidFill>
               </a:rPr>
               <a:t>Витрина и подвод воды и канализации</a:t>
@@ -20149,10 +20149,10 @@
           <a:gradFill rotWithShape="1">
             <a:gsLst>
               <a:gs pos="0">
-                <a:srgbClr val="1E2430"/>
+                <a:srgbClr val="241A15"/>
               </a:gs>
               <a:gs pos="100000">
-                <a:srgbClr val="2C3442"/>
+                <a:srgbClr val="31241C"/>
               </a:gs>
             </a:gsLst>
             <a:lin scaled="0" ang="18900000"/>
@@ -20209,10 +20209,10 @@
           <a:gradFill rotWithShape="1">
             <a:gsLst>
               <a:gs pos="0">
-                <a:srgbClr val="4C9AFF"/>
+                <a:srgbClr val="C98A4B"/>
               </a:gs>
               <a:gs pos="100000">
-                <a:srgbClr val="7B61FF"/>
+                <a:srgbClr val="8C5A2B"/>
               </a:gs>
             </a:gsLst>
             <a:lin scaled="0" ang="18900000"/>
@@ -20261,10 +20261,10 @@
           <a:gradFill rotWithShape="1">
             <a:gsLst>
               <a:gs pos="0">
-                <a:srgbClr val="4C9AFF"/>
+                <a:srgbClr val="C98A4B"/>
               </a:gs>
               <a:gs pos="100000">
-                <a:srgbClr val="7B61FF"/>
+                <a:srgbClr val="8C5A2B"/>
               </a:gs>
             </a:gsLst>
             <a:lin scaled="0" ang="19800000"/>
@@ -20274,7 +20274,7 @@
           </a:ln>
           <a:effectLst>
             <a:glow rad="88900">
-              <a:srgbClr val="4C9AFF">
+              <a:srgbClr val="C98A4B">
                 <a:alpha val="38000"/>
               </a:srgbClr>
             </a:glow>
@@ -20332,7 +20332,7 @@
             <a:r>
               <a:rPr sz="1400" b="1">
                 <a:solidFill>
-                  <a:srgbClr val="141820"/>
+                  <a:srgbClr val="1A1310"/>
                 </a:solidFill>
               </a:rPr>
               <a:t>3</a:t>
@@ -20370,7 +20370,7 @@
             <a:r>
               <a:rPr sz="1800" b="0">
                 <a:solidFill>
-                  <a:srgbClr val="F2F4F8"/>
+                  <a:srgbClr val="F6EFE7"/>
                 </a:solidFill>
               </a:rPr>
               <a:t>Соседство с кинотеатром или фудкортом</a:t>
@@ -20397,10 +20397,10 @@
           <a:gradFill rotWithShape="1">
             <a:gsLst>
               <a:gs pos="0">
-                <a:srgbClr val="1E2430"/>
+                <a:srgbClr val="241A15"/>
               </a:gs>
               <a:gs pos="100000">
-                <a:srgbClr val="2C3442"/>
+                <a:srgbClr val="31241C"/>
               </a:gs>
             </a:gsLst>
             <a:lin scaled="0" ang="18900000"/>
@@ -20457,10 +20457,10 @@
           <a:gradFill rotWithShape="1">
             <a:gsLst>
               <a:gs pos="0">
-                <a:srgbClr val="4C9AFF"/>
+                <a:srgbClr val="C98A4B"/>
               </a:gs>
               <a:gs pos="100000">
-                <a:srgbClr val="7B61FF"/>
+                <a:srgbClr val="8C5A2B"/>
               </a:gs>
             </a:gsLst>
             <a:lin scaled="0" ang="18900000"/>
@@ -20509,10 +20509,10 @@
           <a:gradFill rotWithShape="1">
             <a:gsLst>
               <a:gs pos="0">
-                <a:srgbClr val="4C9AFF"/>
+                <a:srgbClr val="C98A4B"/>
               </a:gs>
               <a:gs pos="100000">
-                <a:srgbClr val="7B61FF"/>
+                <a:srgbClr val="8C5A2B"/>
               </a:gs>
             </a:gsLst>
             <a:lin scaled="0" ang="19800000"/>
@@ -20522,7 +20522,7 @@
           </a:ln>
           <a:effectLst>
             <a:glow rad="88900">
-              <a:srgbClr val="4C9AFF">
+              <a:srgbClr val="C98A4B">
                 <a:alpha val="38000"/>
               </a:srgbClr>
             </a:glow>
@@ -20580,7 +20580,7 @@
             <a:r>
               <a:rPr sz="1400" b="1">
                 <a:solidFill>
-                  <a:srgbClr val="141820"/>
+                  <a:srgbClr val="1A1310"/>
                 </a:solidFill>
               </a:rPr>
               <a:t>4</a:t>
@@ -20618,7 +20618,7 @@
             <a:r>
               <a:rPr sz="1800" b="0">
                 <a:solidFill>
-                  <a:srgbClr val="F2F4F8"/>
+                  <a:srgbClr val="F6EFE7"/>
                 </a:solidFill>
               </a:rPr>
               <a:t>Аренда - не выше 12 процентов выручки</a:t>
